--- a/Capstone_Presentation.pptx
+++ b/Capstone_Presentation.pptx
@@ -322,7 +322,7 @@
           <a:p>
             <a:fld id="{5BCAD085-E8A6-8845-BD4E-CB4CCA059FC4}" type="datetimeFigureOut">
               <a:rPr lang="en-US" smtClean="0"/>
-              <a:t>5/8/2026</a:t>
+              <a:t>5/17/2026</a:t>
             </a:fld>
             <a:endParaRPr lang="en-US"/>
           </a:p>
@@ -490,7 +490,7 @@
           <a:p>
             <a:fld id="{5BCAD085-E8A6-8845-BD4E-CB4CCA059FC4}" type="datetimeFigureOut">
               <a:rPr lang="en-US" smtClean="0"/>
-              <a:t>5/8/2026</a:t>
+              <a:t>5/17/2026</a:t>
             </a:fld>
             <a:endParaRPr lang="en-US"/>
           </a:p>
@@ -668,7 +668,7 @@
           <a:p>
             <a:fld id="{5BCAD085-E8A6-8845-BD4E-CB4CCA059FC4}" type="datetimeFigureOut">
               <a:rPr lang="en-US" smtClean="0"/>
-              <a:t>5/8/2026</a:t>
+              <a:t>5/17/2026</a:t>
             </a:fld>
             <a:endParaRPr lang="en-US"/>
           </a:p>
@@ -836,7 +836,7 @@
           <a:p>
             <a:fld id="{5BCAD085-E8A6-8845-BD4E-CB4CCA059FC4}" type="datetimeFigureOut">
               <a:rPr lang="en-US" smtClean="0"/>
-              <a:t>5/8/2026</a:t>
+              <a:t>5/17/2026</a:t>
             </a:fld>
             <a:endParaRPr lang="en-US"/>
           </a:p>
@@ -1081,7 +1081,7 @@
           <a:p>
             <a:fld id="{5BCAD085-E8A6-8845-BD4E-CB4CCA059FC4}" type="datetimeFigureOut">
               <a:rPr lang="en-US" smtClean="0"/>
-              <a:t>5/8/2026</a:t>
+              <a:t>5/17/2026</a:t>
             </a:fld>
             <a:endParaRPr lang="en-US"/>
           </a:p>
@@ -1366,7 +1366,7 @@
           <a:p>
             <a:fld id="{5BCAD085-E8A6-8845-BD4E-CB4CCA059FC4}" type="datetimeFigureOut">
               <a:rPr lang="en-US" smtClean="0"/>
-              <a:t>5/8/2026</a:t>
+              <a:t>5/17/2026</a:t>
             </a:fld>
             <a:endParaRPr lang="en-US"/>
           </a:p>
@@ -1785,7 +1785,7 @@
           <a:p>
             <a:fld id="{5BCAD085-E8A6-8845-BD4E-CB4CCA059FC4}" type="datetimeFigureOut">
               <a:rPr lang="en-US" smtClean="0"/>
-              <a:t>5/8/2026</a:t>
+              <a:t>5/17/2026</a:t>
             </a:fld>
             <a:endParaRPr lang="en-US"/>
           </a:p>
@@ -1902,7 +1902,7 @@
           <a:p>
             <a:fld id="{5BCAD085-E8A6-8845-BD4E-CB4CCA059FC4}" type="datetimeFigureOut">
               <a:rPr lang="en-US" smtClean="0"/>
-              <a:t>5/8/2026</a:t>
+              <a:t>5/17/2026</a:t>
             </a:fld>
             <a:endParaRPr lang="en-US"/>
           </a:p>
@@ -1997,7 +1997,7 @@
           <a:p>
             <a:fld id="{5BCAD085-E8A6-8845-BD4E-CB4CCA059FC4}" type="datetimeFigureOut">
               <a:rPr lang="en-US" smtClean="0"/>
-              <a:t>5/8/2026</a:t>
+              <a:t>5/17/2026</a:t>
             </a:fld>
             <a:endParaRPr lang="en-US"/>
           </a:p>
@@ -2272,7 +2272,7 @@
           <a:p>
             <a:fld id="{5BCAD085-E8A6-8845-BD4E-CB4CCA059FC4}" type="datetimeFigureOut">
               <a:rPr lang="en-US" smtClean="0"/>
-              <a:t>5/8/2026</a:t>
+              <a:t>5/17/2026</a:t>
             </a:fld>
             <a:endParaRPr lang="en-US"/>
           </a:p>
@@ -2524,7 +2524,7 @@
           <a:p>
             <a:fld id="{5BCAD085-E8A6-8845-BD4E-CB4CCA059FC4}" type="datetimeFigureOut">
               <a:rPr lang="en-US" smtClean="0"/>
-              <a:t>5/8/2026</a:t>
+              <a:t>5/17/2026</a:t>
             </a:fld>
             <a:endParaRPr lang="en-US"/>
           </a:p>
@@ -2735,7 +2735,7 @@
           <a:p>
             <a:fld id="{5BCAD085-E8A6-8845-BD4E-CB4CCA059FC4}" type="datetimeFigureOut">
               <a:rPr lang="en-US" smtClean="0"/>
-              <a:t>5/8/2026</a:t>
+              <a:t>5/17/2026</a:t>
             </a:fld>
             <a:endParaRPr lang="en-US"/>
           </a:p>
@@ -3289,8 +3289,8 @@
         </p:nvSpPr>
         <p:spPr>
           <a:xfrm>
-            <a:off x="457200" y="2926080"/>
-            <a:ext cx="11247120" cy="1097280"/>
+            <a:off x="457200" y="3243887"/>
+            <a:ext cx="11247120" cy="461665"/>
           </a:xfrm>
           <a:prstGeom prst="rect">
             <a:avLst/>
@@ -3305,13 +3305,13 @@
           <a:p>
             <a:pPr algn="ctr"/>
             <a:r>
-              <a:rPr sz="2400" b="1" i="0">
+              <a:rPr sz="2400" b="1" i="0" dirty="0">
                 <a:solidFill>
                   <a:srgbClr val="FFFFFF"/>
                 </a:solidFill>
                 <a:latin typeface="Calibri"/>
               </a:rPr>
-              <a:t>A k-Nearest Neighbors Classifier Built From Scratch</a:t>
+              <a:t>A k-Nearest Neighbors Classifier</a:t>
             </a:r>
           </a:p>
         </p:txBody>
@@ -3858,7 +3858,7 @@
           <a:p>
             <a:pPr algn="l"/>
             <a:r>
-              <a:rPr sz="1600" b="1" i="0">
+              <a:rPr sz="1600" b="1" i="0" dirty="0">
                 <a:solidFill>
                   <a:srgbClr val="DD8452"/>
                 </a:solidFill>
@@ -3877,7 +3877,7 @@
         </p:nvSpPr>
         <p:spPr>
           <a:xfrm>
-            <a:off x="7726679" y="5212080"/>
+            <a:off x="7772400" y="4983480"/>
             <a:ext cx="3931920" cy="1371600"/>
           </a:xfrm>
           <a:prstGeom prst="rect">
@@ -3900,7 +3900,7 @@
               </a:spcAft>
             </a:pPr>
             <a:r>
-              <a:rPr sz="1300">
+              <a:rPr sz="1300" dirty="0">
                 <a:solidFill>
                   <a:srgbClr val="1A1A1A"/>
                 </a:solidFill>
@@ -3919,7 +3919,7 @@
               </a:spcAft>
             </a:pPr>
             <a:r>
-              <a:rPr sz="1300">
+              <a:rPr sz="1300" dirty="0">
                 <a:solidFill>
                   <a:srgbClr val="1A1A1A"/>
                 </a:solidFill>
@@ -3939,7 +3939,7 @@
         <p:spPr>
           <a:xfrm>
             <a:off x="457200" y="6492240"/>
-            <a:ext cx="7315200" cy="274320"/>
+            <a:ext cx="7315200" cy="246221"/>
           </a:xfrm>
           <a:prstGeom prst="rect">
             <a:avLst/>
@@ -3954,14 +3954,29 @@
           <a:p>
             <a:pPr algn="l"/>
             <a:r>
-              <a:rPr sz="1000" b="0" i="0">
+              <a:rPr sz="1000" b="0" i="0" dirty="0">
                 <a:solidFill>
                   <a:srgbClr val="556070"/>
                 </a:solidFill>
                 <a:latin typeface="Calibri"/>
               </a:rPr>
-              <a:t>Online Shoppers Purchase-Intention Capstone  |  kNN from Scratch</a:t>
-            </a:r>
+              <a:t>Online Shoppers Purchase-Intention Capstone  |  </a:t>
+            </a:r>
+            <a:r>
+              <a:rPr sz="1000" b="0" i="0" dirty="0" err="1">
+                <a:solidFill>
+                  <a:srgbClr val="556070"/>
+                </a:solidFill>
+                <a:latin typeface="Calibri"/>
+              </a:rPr>
+              <a:t>kNN</a:t>
+            </a:r>
+            <a:endParaRPr sz="1000" b="0" i="0" dirty="0">
+              <a:solidFill>
+                <a:srgbClr val="556070"/>
+              </a:solidFill>
+              <a:latin typeface="Calibri"/>
+            </a:endParaRPr>
           </a:p>
         </p:txBody>
       </p:sp>
@@ -5051,7 +5066,7 @@
         <p:spPr>
           <a:xfrm>
             <a:off x="457200" y="6492240"/>
-            <a:ext cx="7315200" cy="274320"/>
+            <a:ext cx="7315200" cy="246221"/>
           </a:xfrm>
           <a:prstGeom prst="rect">
             <a:avLst/>
@@ -5066,14 +5081,29 @@
           <a:p>
             <a:pPr algn="l"/>
             <a:r>
-              <a:rPr sz="1000" b="0" i="0">
+              <a:rPr sz="1000" b="0" i="0" dirty="0">
                 <a:solidFill>
                   <a:srgbClr val="556070"/>
                 </a:solidFill>
                 <a:latin typeface="Calibri"/>
               </a:rPr>
-              <a:t>Online Shoppers Purchase-Intention Capstone  |  kNN from Scratch</a:t>
-            </a:r>
+              <a:t>Online Shoppers Purchase-Intention Capstone  |  </a:t>
+            </a:r>
+            <a:r>
+              <a:rPr sz="1000" b="0" i="0" dirty="0" err="1">
+                <a:solidFill>
+                  <a:srgbClr val="556070"/>
+                </a:solidFill>
+                <a:latin typeface="Calibri"/>
+              </a:rPr>
+              <a:t>kNN</a:t>
+            </a:r>
+            <a:endParaRPr sz="1000" b="0" i="0" dirty="0">
+              <a:solidFill>
+                <a:srgbClr val="556070"/>
+              </a:solidFill>
+              <a:latin typeface="Calibri"/>
+            </a:endParaRPr>
           </a:p>
         </p:txBody>
       </p:sp>
@@ -6615,7 +6645,7 @@
         <p:spPr>
           <a:xfrm>
             <a:off x="457200" y="6492240"/>
-            <a:ext cx="7315200" cy="274320"/>
+            <a:ext cx="7315200" cy="246221"/>
           </a:xfrm>
           <a:prstGeom prst="rect">
             <a:avLst/>
@@ -6630,14 +6660,29 @@
           <a:p>
             <a:pPr algn="l"/>
             <a:r>
-              <a:rPr sz="1000" b="0" i="0">
+              <a:rPr sz="1000" b="0" i="0" dirty="0">
                 <a:solidFill>
                   <a:srgbClr val="556070"/>
                 </a:solidFill>
                 <a:latin typeface="Calibri"/>
               </a:rPr>
-              <a:t>Online Shoppers Purchase-Intention Capstone  |  kNN from Scratch</a:t>
-            </a:r>
+              <a:t>Online Shoppers Purchase-Intention Capstone  |  </a:t>
+            </a:r>
+            <a:r>
+              <a:rPr sz="1000" b="0" i="0" dirty="0" err="1">
+                <a:solidFill>
+                  <a:srgbClr val="556070"/>
+                </a:solidFill>
+                <a:latin typeface="Calibri"/>
+              </a:rPr>
+              <a:t>kNN</a:t>
+            </a:r>
+            <a:endParaRPr sz="1000" b="0" i="0" dirty="0">
+              <a:solidFill>
+                <a:srgbClr val="556070"/>
+              </a:solidFill>
+              <a:latin typeface="Calibri"/>
+            </a:endParaRPr>
           </a:p>
         </p:txBody>
       </p:sp>
@@ -7248,7 +7293,7 @@
         <p:spPr>
           <a:xfrm>
             <a:off x="457200" y="6492240"/>
-            <a:ext cx="7315200" cy="274320"/>
+            <a:ext cx="7315200" cy="246221"/>
           </a:xfrm>
           <a:prstGeom prst="rect">
             <a:avLst/>
@@ -7263,14 +7308,38 @@
           <a:p>
             <a:pPr algn="l"/>
             <a:r>
-              <a:rPr sz="1000" b="0" i="0">
+              <a:rPr sz="1000" b="0" i="0" dirty="0">
                 <a:solidFill>
                   <a:srgbClr val="556070"/>
                 </a:solidFill>
                 <a:latin typeface="Calibri"/>
               </a:rPr>
-              <a:t>Online Shoppers Purchase-Intention Capstone  |  kNN from Scratch</a:t>
-            </a:r>
+              <a:t>Online Shoppers Purchase-Intention Capstone  |  </a:t>
+            </a:r>
+            <a:r>
+              <a:rPr sz="1000" b="0" i="0" dirty="0" err="1">
+                <a:solidFill>
+                  <a:srgbClr val="556070"/>
+                </a:solidFill>
+                <a:latin typeface="Calibri"/>
+              </a:rPr>
+              <a:t>kN</a:t>
+            </a:r>
+            <a:r>
+              <a:rPr lang="en-US" sz="1000" b="0" i="0" dirty="0" err="1">
+                <a:solidFill>
+                  <a:srgbClr val="556070"/>
+                </a:solidFill>
+                <a:latin typeface="Calibri"/>
+              </a:rPr>
+              <a:t>N</a:t>
+            </a:r>
+            <a:endParaRPr sz="1000" b="0" i="0" dirty="0">
+              <a:solidFill>
+                <a:srgbClr val="556070"/>
+              </a:solidFill>
+              <a:latin typeface="Calibri"/>
+            </a:endParaRPr>
           </a:p>
         </p:txBody>
       </p:sp>
@@ -8391,7 +8460,7 @@
         <p:spPr>
           <a:xfrm>
             <a:off x="457200" y="6492240"/>
-            <a:ext cx="7315200" cy="274320"/>
+            <a:ext cx="7315200" cy="246221"/>
           </a:xfrm>
           <a:prstGeom prst="rect">
             <a:avLst/>
@@ -8406,14 +8475,29 @@
           <a:p>
             <a:pPr algn="l"/>
             <a:r>
-              <a:rPr sz="1000" b="0" i="0">
+              <a:rPr sz="1000" b="0" i="0" dirty="0">
                 <a:solidFill>
                   <a:srgbClr val="556070"/>
                 </a:solidFill>
                 <a:latin typeface="Calibri"/>
               </a:rPr>
-              <a:t>Online Shoppers Purchase-Intention Capstone  |  kNN from Scratch</a:t>
-            </a:r>
+              <a:t>Online Shoppers Purchase-Intention Capstone  |  </a:t>
+            </a:r>
+            <a:r>
+              <a:rPr sz="1000" b="0" i="0" dirty="0" err="1">
+                <a:solidFill>
+                  <a:srgbClr val="556070"/>
+                </a:solidFill>
+                <a:latin typeface="Calibri"/>
+              </a:rPr>
+              <a:t>kNN</a:t>
+            </a:r>
+            <a:endParaRPr sz="1000" b="0" i="0" dirty="0">
+              <a:solidFill>
+                <a:srgbClr val="556070"/>
+              </a:solidFill>
+              <a:latin typeface="Calibri"/>
+            </a:endParaRPr>
           </a:p>
         </p:txBody>
       </p:sp>
@@ -8909,7 +8993,7 @@
         <p:spPr>
           <a:xfrm>
             <a:off x="457200" y="6492240"/>
-            <a:ext cx="7315200" cy="274320"/>
+            <a:ext cx="7315200" cy="246221"/>
           </a:xfrm>
           <a:prstGeom prst="rect">
             <a:avLst/>
@@ -8924,14 +9008,29 @@
           <a:p>
             <a:pPr algn="l"/>
             <a:r>
-              <a:rPr sz="1000" b="0" i="0">
+              <a:rPr sz="1000" b="0" i="0" dirty="0">
                 <a:solidFill>
                   <a:srgbClr val="556070"/>
                 </a:solidFill>
                 <a:latin typeface="Calibri"/>
               </a:rPr>
-              <a:t>Online Shoppers Purchase-Intention Capstone  |  kNN from Scratch</a:t>
-            </a:r>
+              <a:t>Online Shoppers Purchase-Intention Capstone  |  </a:t>
+            </a:r>
+            <a:r>
+              <a:rPr sz="1000" b="0" i="0" dirty="0" err="1">
+                <a:solidFill>
+                  <a:srgbClr val="556070"/>
+                </a:solidFill>
+                <a:latin typeface="Calibri"/>
+              </a:rPr>
+              <a:t>kNN</a:t>
+            </a:r>
+            <a:endParaRPr sz="1000" b="0" i="0" dirty="0">
+              <a:solidFill>
+                <a:srgbClr val="556070"/>
+              </a:solidFill>
+              <a:latin typeface="Calibri"/>
+            </a:endParaRPr>
           </a:p>
         </p:txBody>
       </p:sp>
@@ -10097,7 +10196,7 @@
         <p:spPr>
           <a:xfrm>
             <a:off x="457200" y="6492240"/>
-            <a:ext cx="7315200" cy="274320"/>
+            <a:ext cx="7315200" cy="246221"/>
           </a:xfrm>
           <a:prstGeom prst="rect">
             <a:avLst/>
@@ -10112,14 +10211,29 @@
           <a:p>
             <a:pPr algn="l"/>
             <a:r>
-              <a:rPr sz="1000" b="0" i="0">
+              <a:rPr sz="1000" b="0" i="0" dirty="0">
                 <a:solidFill>
                   <a:srgbClr val="556070"/>
                 </a:solidFill>
                 <a:latin typeface="Calibri"/>
               </a:rPr>
-              <a:t>Online Shoppers Purchase-Intention Capstone  |  kNN from Scratch</a:t>
-            </a:r>
+              <a:t>Online Shoppers Purchase-Intention Capstone  |  </a:t>
+            </a:r>
+            <a:r>
+              <a:rPr sz="1000" b="0" i="0" dirty="0" err="1">
+                <a:solidFill>
+                  <a:srgbClr val="556070"/>
+                </a:solidFill>
+                <a:latin typeface="Calibri"/>
+              </a:rPr>
+              <a:t>kNN</a:t>
+            </a:r>
+            <a:endParaRPr sz="1000" b="0" i="0" dirty="0">
+              <a:solidFill>
+                <a:srgbClr val="556070"/>
+              </a:solidFill>
+              <a:latin typeface="Calibri"/>
+            </a:endParaRPr>
           </a:p>
         </p:txBody>
       </p:sp>
@@ -10753,7 +10867,7 @@
         <p:spPr>
           <a:xfrm>
             <a:off x="457200" y="6492240"/>
-            <a:ext cx="7315200" cy="274320"/>
+            <a:ext cx="7315200" cy="246221"/>
           </a:xfrm>
           <a:prstGeom prst="rect">
             <a:avLst/>
@@ -10768,14 +10882,29 @@
           <a:p>
             <a:pPr algn="l"/>
             <a:r>
-              <a:rPr sz="1000" b="0" i="0">
+              <a:rPr sz="1000" b="0" i="0" dirty="0">
                 <a:solidFill>
                   <a:srgbClr val="556070"/>
                 </a:solidFill>
                 <a:latin typeface="Calibri"/>
               </a:rPr>
-              <a:t>Online Shoppers Purchase-Intention Capstone  |  kNN from Scratch</a:t>
-            </a:r>
+              <a:t>Online Shoppers Purchase-Intention Capstone  |  </a:t>
+            </a:r>
+            <a:r>
+              <a:rPr sz="1000" b="0" i="0" dirty="0" err="1">
+                <a:solidFill>
+                  <a:srgbClr val="556070"/>
+                </a:solidFill>
+                <a:latin typeface="Calibri"/>
+              </a:rPr>
+              <a:t>kNN</a:t>
+            </a:r>
+            <a:endParaRPr sz="1000" b="0" i="0" dirty="0">
+              <a:solidFill>
+                <a:srgbClr val="556070"/>
+              </a:solidFill>
+              <a:latin typeface="Calibri"/>
+            </a:endParaRPr>
           </a:p>
         </p:txBody>
       </p:sp>
@@ -11769,7 +11898,7 @@
         <p:spPr>
           <a:xfrm>
             <a:off x="457200" y="6492240"/>
-            <a:ext cx="7315200" cy="274320"/>
+            <a:ext cx="7315200" cy="246221"/>
           </a:xfrm>
           <a:prstGeom prst="rect">
             <a:avLst/>
@@ -11784,14 +11913,29 @@
           <a:p>
             <a:pPr algn="l"/>
             <a:r>
-              <a:rPr sz="1000" b="0" i="0">
+              <a:rPr sz="1000" b="0" i="0" dirty="0">
                 <a:solidFill>
                   <a:srgbClr val="556070"/>
                 </a:solidFill>
                 <a:latin typeface="Calibri"/>
               </a:rPr>
-              <a:t>Online Shoppers Purchase-Intention Capstone  |  kNN from Scratch</a:t>
-            </a:r>
+              <a:t>Online Shoppers Purchase-Intention Capstone  |  </a:t>
+            </a:r>
+            <a:r>
+              <a:rPr sz="1000" b="0" i="0" dirty="0" err="1">
+                <a:solidFill>
+                  <a:srgbClr val="556070"/>
+                </a:solidFill>
+                <a:latin typeface="Calibri"/>
+              </a:rPr>
+              <a:t>kNN</a:t>
+            </a:r>
+            <a:endParaRPr sz="1000" b="0" i="0" dirty="0">
+              <a:solidFill>
+                <a:srgbClr val="556070"/>
+              </a:solidFill>
+              <a:latin typeface="Calibri"/>
+            </a:endParaRPr>
           </a:p>
         </p:txBody>
       </p:sp>
@@ -12995,7 +13139,7 @@
         <p:spPr>
           <a:xfrm>
             <a:off x="457200" y="6492240"/>
-            <a:ext cx="7315200" cy="274320"/>
+            <a:ext cx="7315200" cy="246221"/>
           </a:xfrm>
           <a:prstGeom prst="rect">
             <a:avLst/>
@@ -13010,14 +13154,29 @@
           <a:p>
             <a:pPr algn="l"/>
             <a:r>
-              <a:rPr sz="1000" b="0" i="0">
+              <a:rPr sz="1000" b="0" i="0" dirty="0">
                 <a:solidFill>
                   <a:srgbClr val="556070"/>
                 </a:solidFill>
                 <a:latin typeface="Calibri"/>
               </a:rPr>
-              <a:t>Online Shoppers Purchase-Intention Capstone  |  kNN from Scratch</a:t>
-            </a:r>
+              <a:t>Online Shoppers Purchase-Intention Capstone  |  </a:t>
+            </a:r>
+            <a:r>
+              <a:rPr sz="1000" b="0" i="0" dirty="0" err="1">
+                <a:solidFill>
+                  <a:srgbClr val="556070"/>
+                </a:solidFill>
+                <a:latin typeface="Calibri"/>
+              </a:rPr>
+              <a:t>kNN</a:t>
+            </a:r>
+            <a:endParaRPr sz="1000" b="0" i="0" dirty="0">
+              <a:solidFill>
+                <a:srgbClr val="556070"/>
+              </a:solidFill>
+              <a:latin typeface="Calibri"/>
+            </a:endParaRPr>
           </a:p>
         </p:txBody>
       </p:sp>
@@ -14677,7 +14836,7 @@
         <p:spPr>
           <a:xfrm>
             <a:off x="457200" y="6492240"/>
-            <a:ext cx="7315200" cy="274320"/>
+            <a:ext cx="7315200" cy="246221"/>
           </a:xfrm>
           <a:prstGeom prst="rect">
             <a:avLst/>
@@ -14692,14 +14851,29 @@
           <a:p>
             <a:pPr algn="l"/>
             <a:r>
-              <a:rPr sz="1000" b="0" i="0">
+              <a:rPr sz="1000" b="0" i="0" dirty="0">
                 <a:solidFill>
                   <a:srgbClr val="556070"/>
                 </a:solidFill>
                 <a:latin typeface="Calibri"/>
               </a:rPr>
-              <a:t>Online Shoppers Purchase-Intention Capstone  |  kNN from Scratch</a:t>
-            </a:r>
+              <a:t>Online Shoppers Purchase-Intention Capstone  |  </a:t>
+            </a:r>
+            <a:r>
+              <a:rPr sz="1000" b="0" i="0" dirty="0" err="1">
+                <a:solidFill>
+                  <a:srgbClr val="556070"/>
+                </a:solidFill>
+                <a:latin typeface="Calibri"/>
+              </a:rPr>
+              <a:t>kNN</a:t>
+            </a:r>
+            <a:endParaRPr sz="1000" b="0" i="0" dirty="0">
+              <a:solidFill>
+                <a:srgbClr val="556070"/>
+              </a:solidFill>
+              <a:latin typeface="Calibri"/>
+            </a:endParaRPr>
           </a:p>
         </p:txBody>
       </p:sp>
@@ -15580,7 +15754,7 @@
         <p:spPr>
           <a:xfrm>
             <a:off x="457200" y="6492240"/>
-            <a:ext cx="7315200" cy="274320"/>
+            <a:ext cx="7315200" cy="246221"/>
           </a:xfrm>
           <a:prstGeom prst="rect">
             <a:avLst/>
@@ -15595,14 +15769,29 @@
           <a:p>
             <a:pPr algn="l"/>
             <a:r>
-              <a:rPr sz="1000" b="0" i="0">
+              <a:rPr sz="1000" b="0" i="0" dirty="0">
                 <a:solidFill>
                   <a:srgbClr val="556070"/>
                 </a:solidFill>
                 <a:latin typeface="Calibri"/>
               </a:rPr>
-              <a:t>Online Shoppers Purchase-Intention Capstone  |  kNN from Scratch</a:t>
-            </a:r>
+              <a:t>Online Shoppers Purchase-Intention Capstone  |  </a:t>
+            </a:r>
+            <a:r>
+              <a:rPr sz="1000" b="0" i="0" dirty="0" err="1">
+                <a:solidFill>
+                  <a:srgbClr val="556070"/>
+                </a:solidFill>
+                <a:latin typeface="Calibri"/>
+              </a:rPr>
+              <a:t>kNN</a:t>
+            </a:r>
+            <a:endParaRPr sz="1000" b="0" i="0" dirty="0">
+              <a:solidFill>
+                <a:srgbClr val="556070"/>
+              </a:solidFill>
+              <a:latin typeface="Calibri"/>
+            </a:endParaRPr>
           </a:p>
         </p:txBody>
       </p:sp>
@@ -15834,7 +16023,7 @@
         <p:spPr>
           <a:xfrm>
             <a:off x="457200" y="4754880"/>
-            <a:ext cx="11247120" cy="457200"/>
+            <a:ext cx="11247120" cy="369332"/>
           </a:xfrm>
           <a:prstGeom prst="rect">
             <a:avLst/>
@@ -15849,49 +16038,29 @@
           <a:p>
             <a:pPr algn="ctr"/>
             <a:r>
-              <a:rPr sz="1800" b="0" i="0">
+              <a:rPr sz="1800" b="0" i="0" dirty="0">
                 <a:solidFill>
                   <a:srgbClr val="FFFFFF"/>
                 </a:solidFill>
                 <a:latin typeface="Calibri"/>
               </a:rPr>
-              <a:t>Predicting Online Shoppers’ Purchase Intention  •  kNN from Scratch</a:t>
-            </a:r>
-          </a:p>
-        </p:txBody>
-      </p:sp>
-      <p:sp>
-        <p:nvSpPr>
-          <p:cNvPr id="7" name="TextBox 6"/>
-          <p:cNvSpPr txBox="1"/>
-          <p:nvPr/>
-        </p:nvSpPr>
-        <p:spPr>
-          <a:xfrm>
-            <a:off x="457200" y="5303520"/>
-            <a:ext cx="11247120" cy="457200"/>
-          </a:xfrm>
-          <a:prstGeom prst="rect">
-            <a:avLst/>
-          </a:prstGeom>
-          <a:noFill/>
-        </p:spPr>
-        <p:txBody>
-          <a:bodyPr wrap="square" anchor="t">
-            <a:spAutoFit/>
-          </a:bodyPr>
-          <a:lstStyle/>
-          <a:p>
-            <a:pPr algn="ctr"/>
-            <a:r>
-              <a:rPr sz="1400" b="0" i="1">
+              <a:t>Predicting Online Shoppers’ Purchase Intention  •  </a:t>
+            </a:r>
+            <a:r>
+              <a:rPr sz="1800" b="0" i="0" dirty="0" err="1">
                 <a:solidFill>
                   <a:srgbClr val="FFFFFF"/>
                 </a:solidFill>
                 <a:latin typeface="Calibri"/>
               </a:rPr>
-              <a:t>Code, figures, and report bundled in the project folder.</a:t>
-            </a:r>
+              <a:t>kNN</a:t>
+            </a:r>
+            <a:endParaRPr sz="1800" b="0" i="0" dirty="0">
+              <a:solidFill>
+                <a:srgbClr val="FFFFFF"/>
+              </a:solidFill>
+              <a:latin typeface="Calibri"/>
+            </a:endParaRPr>
           </a:p>
         </p:txBody>
       </p:sp>
@@ -16509,7 +16678,7 @@
         <p:spPr>
           <a:xfrm>
             <a:off x="457200" y="6492240"/>
-            <a:ext cx="7315200" cy="274320"/>
+            <a:ext cx="7315200" cy="246221"/>
           </a:xfrm>
           <a:prstGeom prst="rect">
             <a:avLst/>
@@ -16524,14 +16693,29 @@
           <a:p>
             <a:pPr algn="l"/>
             <a:r>
-              <a:rPr sz="1000" b="0" i="0">
+              <a:rPr sz="1000" b="0" i="0" dirty="0">
                 <a:solidFill>
                   <a:srgbClr val="556070"/>
                 </a:solidFill>
                 <a:latin typeface="Calibri"/>
               </a:rPr>
-              <a:t>Online Shoppers Purchase-Intention Capstone  |  kNN from Scratch</a:t>
-            </a:r>
+              <a:t>Online Shoppers Purchase-Intention Capstone  |  </a:t>
+            </a:r>
+            <a:r>
+              <a:rPr sz="1000" b="0" i="0" dirty="0" err="1">
+                <a:solidFill>
+                  <a:srgbClr val="556070"/>
+                </a:solidFill>
+                <a:latin typeface="Calibri"/>
+              </a:rPr>
+              <a:t>kNN</a:t>
+            </a:r>
+            <a:endParaRPr sz="1000" b="0" i="0" dirty="0">
+              <a:solidFill>
+                <a:srgbClr val="556070"/>
+              </a:solidFill>
+              <a:latin typeface="Calibri"/>
+            </a:endParaRPr>
           </a:p>
         </p:txBody>
       </p:sp>
@@ -17974,7 +18158,7 @@
         <p:spPr>
           <a:xfrm>
             <a:off x="457200" y="6492240"/>
-            <a:ext cx="7315200" cy="274320"/>
+            <a:ext cx="7315200" cy="246221"/>
           </a:xfrm>
           <a:prstGeom prst="rect">
             <a:avLst/>
@@ -17989,14 +18173,29 @@
           <a:p>
             <a:pPr algn="l"/>
             <a:r>
-              <a:rPr sz="1000" b="0" i="0">
+              <a:rPr sz="1000" b="0" i="0" dirty="0">
                 <a:solidFill>
                   <a:srgbClr val="556070"/>
                 </a:solidFill>
                 <a:latin typeface="Calibri"/>
               </a:rPr>
-              <a:t>Online Shoppers Purchase-Intention Capstone  |  kNN from Scratch</a:t>
-            </a:r>
+              <a:t>Online Shoppers Purchase-Intention Capstone  |  </a:t>
+            </a:r>
+            <a:r>
+              <a:rPr sz="1000" b="0" i="0" dirty="0" err="1">
+                <a:solidFill>
+                  <a:srgbClr val="556070"/>
+                </a:solidFill>
+                <a:latin typeface="Calibri"/>
+              </a:rPr>
+              <a:t>kNN</a:t>
+            </a:r>
+            <a:endParaRPr sz="1000" b="0" i="0" dirty="0">
+              <a:solidFill>
+                <a:srgbClr val="556070"/>
+              </a:solidFill>
+              <a:latin typeface="Calibri"/>
+            </a:endParaRPr>
           </a:p>
         </p:txBody>
       </p:sp>
@@ -18511,7 +18710,7 @@
         <p:spPr>
           <a:xfrm>
             <a:off x="457200" y="6492240"/>
-            <a:ext cx="7315200" cy="274320"/>
+            <a:ext cx="7315200" cy="246221"/>
           </a:xfrm>
           <a:prstGeom prst="rect">
             <a:avLst/>
@@ -18526,14 +18725,29 @@
           <a:p>
             <a:pPr algn="l"/>
             <a:r>
-              <a:rPr sz="1000" b="0" i="0">
+              <a:rPr sz="1000" b="0" i="0" dirty="0">
                 <a:solidFill>
                   <a:srgbClr val="556070"/>
                 </a:solidFill>
                 <a:latin typeface="Calibri"/>
               </a:rPr>
-              <a:t>Online Shoppers Purchase-Intention Capstone  |  kNN from Scratch</a:t>
-            </a:r>
+              <a:t>Online Shoppers Purchase-Intention Capstone  |  </a:t>
+            </a:r>
+            <a:r>
+              <a:rPr sz="1000" b="0" i="0" dirty="0" err="1">
+                <a:solidFill>
+                  <a:srgbClr val="556070"/>
+                </a:solidFill>
+                <a:latin typeface="Calibri"/>
+              </a:rPr>
+              <a:t>kNN</a:t>
+            </a:r>
+            <a:endParaRPr sz="1000" b="0" i="0" dirty="0">
+              <a:solidFill>
+                <a:srgbClr val="556070"/>
+              </a:solidFill>
+              <a:latin typeface="Calibri"/>
+            </a:endParaRPr>
           </a:p>
         </p:txBody>
       </p:sp>
@@ -19106,7 +19320,7 @@
         <p:spPr>
           <a:xfrm>
             <a:off x="457200" y="6492240"/>
-            <a:ext cx="7315200" cy="274320"/>
+            <a:ext cx="7315200" cy="246221"/>
           </a:xfrm>
           <a:prstGeom prst="rect">
             <a:avLst/>
@@ -19121,14 +19335,29 @@
           <a:p>
             <a:pPr algn="l"/>
             <a:r>
-              <a:rPr sz="1000" b="0" i="0">
+              <a:rPr sz="1000" b="0" i="0" dirty="0">
                 <a:solidFill>
                   <a:srgbClr val="556070"/>
                 </a:solidFill>
                 <a:latin typeface="Calibri"/>
               </a:rPr>
-              <a:t>Online Shoppers Purchase-Intention Capstone  |  kNN from Scratch</a:t>
-            </a:r>
+              <a:t>Online Shoppers Purchase-Intention Capstone  |  </a:t>
+            </a:r>
+            <a:r>
+              <a:rPr lang="en-US" sz="1000" b="0" i="0" dirty="0" err="1">
+                <a:solidFill>
+                  <a:srgbClr val="556070"/>
+                </a:solidFill>
+                <a:latin typeface="Calibri"/>
+              </a:rPr>
+              <a:t>kNN</a:t>
+            </a:r>
+            <a:endParaRPr sz="1000" b="0" i="0" dirty="0">
+              <a:solidFill>
+                <a:srgbClr val="556070"/>
+              </a:solidFill>
+              <a:latin typeface="Calibri"/>
+            </a:endParaRPr>
           </a:p>
         </p:txBody>
       </p:sp>
@@ -19720,7 +19949,7 @@
         <p:spPr>
           <a:xfrm>
             <a:off x="457200" y="6492240"/>
-            <a:ext cx="7315200" cy="274320"/>
+            <a:ext cx="7315200" cy="246221"/>
           </a:xfrm>
           <a:prstGeom prst="rect">
             <a:avLst/>
@@ -19735,14 +19964,29 @@
           <a:p>
             <a:pPr algn="l"/>
             <a:r>
-              <a:rPr sz="1000" b="0" i="0">
+              <a:rPr sz="1000" b="0" i="0" dirty="0">
                 <a:solidFill>
                   <a:srgbClr val="556070"/>
                 </a:solidFill>
                 <a:latin typeface="Calibri"/>
               </a:rPr>
-              <a:t>Online Shoppers Purchase-Intention Capstone  |  kNN from Scratch</a:t>
-            </a:r>
+              <a:t>Online Shoppers Purchase-Intention Capstone  |  </a:t>
+            </a:r>
+            <a:r>
+              <a:rPr sz="1000" b="0" i="0" dirty="0" err="1">
+                <a:solidFill>
+                  <a:srgbClr val="556070"/>
+                </a:solidFill>
+                <a:latin typeface="Calibri"/>
+              </a:rPr>
+              <a:t>kNN</a:t>
+            </a:r>
+            <a:endParaRPr sz="1000" b="0" i="0" dirty="0">
+              <a:solidFill>
+                <a:srgbClr val="556070"/>
+              </a:solidFill>
+              <a:latin typeface="Calibri"/>
+            </a:endParaRPr>
           </a:p>
         </p:txBody>
       </p:sp>
@@ -20334,7 +20578,7 @@
         <p:spPr>
           <a:xfrm>
             <a:off x="457200" y="6492240"/>
-            <a:ext cx="7315200" cy="274320"/>
+            <a:ext cx="7315200" cy="246221"/>
           </a:xfrm>
           <a:prstGeom prst="rect">
             <a:avLst/>
@@ -20349,14 +20593,29 @@
           <a:p>
             <a:pPr algn="l"/>
             <a:r>
-              <a:rPr sz="1000" b="0" i="0">
+              <a:rPr sz="1000" b="0" i="0" dirty="0">
                 <a:solidFill>
                   <a:srgbClr val="556070"/>
                 </a:solidFill>
                 <a:latin typeface="Calibri"/>
               </a:rPr>
-              <a:t>Online Shoppers Purchase-Intention Capstone  |  kNN from Scratch</a:t>
-            </a:r>
+              <a:t>Online Shoppers Purchase-Intention Capstone  |  </a:t>
+            </a:r>
+            <a:r>
+              <a:rPr sz="1000" b="0" i="0" dirty="0" err="1">
+                <a:solidFill>
+                  <a:srgbClr val="556070"/>
+                </a:solidFill>
+                <a:latin typeface="Calibri"/>
+              </a:rPr>
+              <a:t>kNN</a:t>
+            </a:r>
+            <a:endParaRPr sz="1000" b="0" i="0" dirty="0">
+              <a:solidFill>
+                <a:srgbClr val="556070"/>
+              </a:solidFill>
+              <a:latin typeface="Calibri"/>
+            </a:endParaRPr>
           </a:p>
         </p:txBody>
       </p:sp>
@@ -20986,7 +21245,7 @@
         <p:spPr>
           <a:xfrm>
             <a:off x="457200" y="6492240"/>
-            <a:ext cx="7315200" cy="274320"/>
+            <a:ext cx="7315200" cy="246221"/>
           </a:xfrm>
           <a:prstGeom prst="rect">
             <a:avLst/>
@@ -21001,14 +21260,29 @@
           <a:p>
             <a:pPr algn="l"/>
             <a:r>
-              <a:rPr sz="1000" b="0" i="0">
+              <a:rPr sz="1000" b="0" i="0" dirty="0">
                 <a:solidFill>
                   <a:srgbClr val="556070"/>
                 </a:solidFill>
                 <a:latin typeface="Calibri"/>
               </a:rPr>
-              <a:t>Online Shoppers Purchase-Intention Capstone  |  kNN from Scratch</a:t>
-            </a:r>
+              <a:t>Online Shoppers Purchase-Intention Capstone  |  </a:t>
+            </a:r>
+            <a:r>
+              <a:rPr sz="1000" b="0" i="0" dirty="0" err="1">
+                <a:solidFill>
+                  <a:srgbClr val="556070"/>
+                </a:solidFill>
+                <a:latin typeface="Calibri"/>
+              </a:rPr>
+              <a:t>kNN</a:t>
+            </a:r>
+            <a:endParaRPr sz="1000" b="0" i="0" dirty="0">
+              <a:solidFill>
+                <a:srgbClr val="556070"/>
+              </a:solidFill>
+              <a:latin typeface="Calibri"/>
+            </a:endParaRPr>
           </a:p>
         </p:txBody>
       </p:sp>

--- a/Capstone_Presentation.pptx
+++ b/Capstone_Presentation.pptx
@@ -322,7 +322,7 @@
           <a:p>
             <a:fld id="{5BCAD085-E8A6-8845-BD4E-CB4CCA059FC4}" type="datetimeFigureOut">
               <a:rPr lang="en-US" smtClean="0"/>
-              <a:t>5/17/2026</a:t>
+              <a:t>5/21/2026</a:t>
             </a:fld>
             <a:endParaRPr lang="en-US"/>
           </a:p>
@@ -490,7 +490,7 @@
           <a:p>
             <a:fld id="{5BCAD085-E8A6-8845-BD4E-CB4CCA059FC4}" type="datetimeFigureOut">
               <a:rPr lang="en-US" smtClean="0"/>
-              <a:t>5/17/2026</a:t>
+              <a:t>5/21/2026</a:t>
             </a:fld>
             <a:endParaRPr lang="en-US"/>
           </a:p>
@@ -668,7 +668,7 @@
           <a:p>
             <a:fld id="{5BCAD085-E8A6-8845-BD4E-CB4CCA059FC4}" type="datetimeFigureOut">
               <a:rPr lang="en-US" smtClean="0"/>
-              <a:t>5/17/2026</a:t>
+              <a:t>5/21/2026</a:t>
             </a:fld>
             <a:endParaRPr lang="en-US"/>
           </a:p>
@@ -836,7 +836,7 @@
           <a:p>
             <a:fld id="{5BCAD085-E8A6-8845-BD4E-CB4CCA059FC4}" type="datetimeFigureOut">
               <a:rPr lang="en-US" smtClean="0"/>
-              <a:t>5/17/2026</a:t>
+              <a:t>5/21/2026</a:t>
             </a:fld>
             <a:endParaRPr lang="en-US"/>
           </a:p>
@@ -1081,7 +1081,7 @@
           <a:p>
             <a:fld id="{5BCAD085-E8A6-8845-BD4E-CB4CCA059FC4}" type="datetimeFigureOut">
               <a:rPr lang="en-US" smtClean="0"/>
-              <a:t>5/17/2026</a:t>
+              <a:t>5/21/2026</a:t>
             </a:fld>
             <a:endParaRPr lang="en-US"/>
           </a:p>
@@ -1366,7 +1366,7 @@
           <a:p>
             <a:fld id="{5BCAD085-E8A6-8845-BD4E-CB4CCA059FC4}" type="datetimeFigureOut">
               <a:rPr lang="en-US" smtClean="0"/>
-              <a:t>5/17/2026</a:t>
+              <a:t>5/21/2026</a:t>
             </a:fld>
             <a:endParaRPr lang="en-US"/>
           </a:p>
@@ -1785,7 +1785,7 @@
           <a:p>
             <a:fld id="{5BCAD085-E8A6-8845-BD4E-CB4CCA059FC4}" type="datetimeFigureOut">
               <a:rPr lang="en-US" smtClean="0"/>
-              <a:t>5/17/2026</a:t>
+              <a:t>5/21/2026</a:t>
             </a:fld>
             <a:endParaRPr lang="en-US"/>
           </a:p>
@@ -1902,7 +1902,7 @@
           <a:p>
             <a:fld id="{5BCAD085-E8A6-8845-BD4E-CB4CCA059FC4}" type="datetimeFigureOut">
               <a:rPr lang="en-US" smtClean="0"/>
-              <a:t>5/17/2026</a:t>
+              <a:t>5/21/2026</a:t>
             </a:fld>
             <a:endParaRPr lang="en-US"/>
           </a:p>
@@ -1997,7 +1997,7 @@
           <a:p>
             <a:fld id="{5BCAD085-E8A6-8845-BD4E-CB4CCA059FC4}" type="datetimeFigureOut">
               <a:rPr lang="en-US" smtClean="0"/>
-              <a:t>5/17/2026</a:t>
+              <a:t>5/21/2026</a:t>
             </a:fld>
             <a:endParaRPr lang="en-US"/>
           </a:p>
@@ -2272,7 +2272,7 @@
           <a:p>
             <a:fld id="{5BCAD085-E8A6-8845-BD4E-CB4CCA059FC4}" type="datetimeFigureOut">
               <a:rPr lang="en-US" smtClean="0"/>
-              <a:t>5/17/2026</a:t>
+              <a:t>5/21/2026</a:t>
             </a:fld>
             <a:endParaRPr lang="en-US"/>
           </a:p>
@@ -2524,7 +2524,7 @@
           <a:p>
             <a:fld id="{5BCAD085-E8A6-8845-BD4E-CB4CCA059FC4}" type="datetimeFigureOut">
               <a:rPr lang="en-US" smtClean="0"/>
-              <a:t>5/17/2026</a:t>
+              <a:t>5/21/2026</a:t>
             </a:fld>
             <a:endParaRPr lang="en-US"/>
           </a:p>
@@ -2735,7 +2735,7 @@
           <a:p>
             <a:fld id="{5BCAD085-E8A6-8845-BD4E-CB4CCA059FC4}" type="datetimeFigureOut">
               <a:rPr lang="en-US" smtClean="0"/>
-              <a:t>5/17/2026</a:t>
+              <a:t>5/21/2026</a:t>
             </a:fld>
             <a:endParaRPr lang="en-US"/>
           </a:p>
@@ -6913,7 +6913,7 @@
         <p:spPr>
           <a:xfrm>
             <a:off x="457200" y="1280160"/>
-            <a:ext cx="11247120" cy="365760"/>
+            <a:ext cx="11247120" cy="323165"/>
           </a:xfrm>
           <a:prstGeom prst="rect">
             <a:avLst/>
@@ -6928,14 +6928,20 @@
           <a:p>
             <a:pPr algn="l"/>
             <a:r>
-              <a:rPr sz="1500" b="0" i="1">
+              <a:rPr lang="en-US" sz="1500" b="0" i="1" dirty="0">
                 <a:solidFill>
                   <a:srgbClr val="556070"/>
                 </a:solidFill>
                 <a:latin typeface="Calibri"/>
               </a:rPr>
-              <a:t>F1 peaks at k = 7. Recall and precision pull in opposite directions.</a:t>
-            </a:r>
+              <a:t>F1 peaks at k = 3; we chose k = 7 for its higher precision. Recall and precision pull in opposite directions.</a:t>
+            </a:r>
+            <a:endParaRPr sz="1500" b="0" i="1" dirty="0">
+              <a:solidFill>
+                <a:srgbClr val="556070"/>
+              </a:solidFill>
+              <a:latin typeface="Calibri"/>
+            </a:endParaRPr>
           </a:p>
         </p:txBody>
       </p:sp>
@@ -6983,30 +6989,6 @@
           </a:p>
         </p:txBody>
       </p:sp>
-      <p:pic>
-        <p:nvPicPr>
-          <p:cNvPr id="8" name="Picture 7" descr="fig7_k_tuning.png"/>
-          <p:cNvPicPr>
-            <a:picLocks noChangeAspect="1"/>
-          </p:cNvPicPr>
-          <p:nvPr/>
-        </p:nvPicPr>
-        <p:blipFill>
-          <a:blip r:embed="rId2"/>
-          <a:stretch>
-            <a:fillRect/>
-          </a:stretch>
-        </p:blipFill>
-        <p:spPr>
-          <a:xfrm>
-            <a:off x="365760" y="1920240"/>
-            <a:ext cx="7315200" cy="3948596"/>
-          </a:xfrm>
-          <a:prstGeom prst="rect">
-            <a:avLst/>
-          </a:prstGeom>
-        </p:spPr>
-      </p:pic>
       <p:sp>
         <p:nvSpPr>
           <p:cNvPr id="9" name="Rounded Rectangle 8"/>
@@ -7097,8 +7079,8 @@
         </p:nvSpPr>
         <p:spPr>
           <a:xfrm>
-            <a:off x="8092440" y="2606040"/>
-            <a:ext cx="3566160" cy="2377440"/>
+            <a:off x="8046720" y="2614832"/>
+            <a:ext cx="3566160" cy="1536896"/>
           </a:xfrm>
           <a:prstGeom prst="rect">
             <a:avLst/>
@@ -7120,7 +7102,7 @@
               </a:spcAft>
             </a:pPr>
             <a:r>
-              <a:rPr sz="1300">
+              <a:rPr sz="1300" dirty="0">
                 <a:solidFill>
                   <a:srgbClr val="1A1A1A"/>
                 </a:solidFill>
@@ -7139,7 +7121,7 @@
               </a:spcAft>
             </a:pPr>
             <a:r>
-              <a:rPr sz="1300">
+              <a:rPr sz="1300" dirty="0">
                 <a:solidFill>
                   <a:srgbClr val="1A1A1A"/>
                 </a:solidFill>
@@ -7158,7 +7140,7 @@
               </a:spcAft>
             </a:pPr>
             <a:r>
-              <a:rPr sz="1300">
+              <a:rPr sz="1300" dirty="0">
                 <a:solidFill>
                   <a:srgbClr val="1A1A1A"/>
                 </a:solidFill>
@@ -7177,73 +7159,30 @@
               </a:spcAft>
             </a:pPr>
             <a:r>
-              <a:rPr sz="1300">
+              <a:rPr sz="1300" dirty="0">
                 <a:solidFill>
                   <a:srgbClr val="1A1A1A"/>
                 </a:solidFill>
                 <a:latin typeface="Calibri"/>
               </a:rPr>
-              <a:t>•  Best F1:         k = 7  ← chosen</a:t>
-            </a:r>
-          </a:p>
-        </p:txBody>
-      </p:sp>
-      <p:sp>
-        <p:nvSpPr>
-          <p:cNvPr id="12" name="TextBox 11"/>
-          <p:cNvSpPr txBox="1"/>
-          <p:nvPr/>
-        </p:nvSpPr>
-        <p:spPr>
-          <a:xfrm>
-            <a:off x="8092440" y="4572000"/>
-            <a:ext cx="3566160" cy="457200"/>
-          </a:xfrm>
-          <a:prstGeom prst="rect">
-            <a:avLst/>
-          </a:prstGeom>
-          <a:noFill/>
-        </p:spPr>
-        <p:txBody>
-          <a:bodyPr wrap="square" anchor="t">
-            <a:spAutoFit/>
-          </a:bodyPr>
-          <a:lstStyle/>
-          <a:p>
-            <a:pPr algn="l"/>
-            <a:r>
-              <a:rPr sz="1600" b="1" i="0">
-                <a:solidFill>
-                  <a:srgbClr val="DD8452"/>
-                </a:solidFill>
-                <a:latin typeface="Calibri"/>
-              </a:rPr>
-              <a:t>Why F1?</a:t>
-            </a:r>
-          </a:p>
-        </p:txBody>
-      </p:sp>
-      <p:sp>
-        <p:nvSpPr>
-          <p:cNvPr id="13" name="TextBox 12"/>
-          <p:cNvSpPr txBox="1"/>
-          <p:nvPr/>
-        </p:nvSpPr>
-        <p:spPr>
-          <a:xfrm>
-            <a:off x="8092440" y="5029200"/>
-            <a:ext cx="3566160" cy="1371600"/>
-          </a:xfrm>
-          <a:prstGeom prst="rect">
-            <a:avLst/>
-          </a:prstGeom>
-          <a:noFill/>
-        </p:spPr>
-        <p:txBody>
-          <a:bodyPr wrap="square">
-            <a:spAutoFit/>
-          </a:bodyPr>
-          <a:lstStyle/>
+              <a:t>•  Best F1:         k = </a:t>
+            </a:r>
+            <a:r>
+              <a:rPr lang="en-PH" sz="1300" dirty="0">
+                <a:solidFill>
+                  <a:srgbClr val="1A1A1A"/>
+                </a:solidFill>
+                <a:latin typeface="Calibri"/>
+              </a:rPr>
+              <a:t>3</a:t>
+            </a:r>
+            <a:endParaRPr lang="en-US" sz="1300" dirty="0">
+              <a:solidFill>
+                <a:srgbClr val="1A1A1A"/>
+              </a:solidFill>
+              <a:latin typeface="Calibri"/>
+            </a:endParaRPr>
+          </a:p>
           <a:p>
             <a:pPr algn="l">
               <a:lnSpc>
@@ -7254,15 +7193,85 @@
               </a:spcAft>
             </a:pPr>
             <a:r>
-              <a:rPr sz="1200">
+              <a:rPr lang="en-US" sz="1300" dirty="0">
                 <a:solidFill>
                   <a:srgbClr val="1A1A1A"/>
                 </a:solidFill>
                 <a:latin typeface="Calibri"/>
               </a:rPr>
-              <a:t>•  Balances precision and recall.</a:t>
-            </a:r>
-          </a:p>
+              <a:t>Chosen:             k = 7 (higher precision)</a:t>
+            </a:r>
+            <a:endParaRPr sz="1300" dirty="0">
+              <a:solidFill>
+                <a:srgbClr val="1A1A1A"/>
+              </a:solidFill>
+              <a:latin typeface="Calibri"/>
+            </a:endParaRPr>
+          </a:p>
+        </p:txBody>
+      </p:sp>
+      <p:sp>
+        <p:nvSpPr>
+          <p:cNvPr id="12" name="TextBox 11"/>
+          <p:cNvSpPr txBox="1"/>
+          <p:nvPr/>
+        </p:nvSpPr>
+        <p:spPr>
+          <a:xfrm>
+            <a:off x="8092440" y="4572000"/>
+            <a:ext cx="3566160" cy="338554"/>
+          </a:xfrm>
+          <a:prstGeom prst="rect">
+            <a:avLst/>
+          </a:prstGeom>
+          <a:noFill/>
+        </p:spPr>
+        <p:txBody>
+          <a:bodyPr wrap="square" anchor="t">
+            <a:spAutoFit/>
+          </a:bodyPr>
+          <a:lstStyle/>
+          <a:p>
+            <a:pPr algn="l"/>
+            <a:r>
+              <a:rPr lang="en-PH" sz="1600" b="1" i="0" dirty="0">
+                <a:solidFill>
+                  <a:srgbClr val="DD8452"/>
+                </a:solidFill>
+                <a:latin typeface="Calibri"/>
+              </a:rPr>
+              <a:t>How we chose k</a:t>
+            </a:r>
+            <a:endParaRPr sz="1600" b="1" i="0" dirty="0">
+              <a:solidFill>
+                <a:srgbClr val="DD8452"/>
+              </a:solidFill>
+              <a:latin typeface="Calibri"/>
+            </a:endParaRPr>
+          </a:p>
+        </p:txBody>
+      </p:sp>
+      <p:sp>
+        <p:nvSpPr>
+          <p:cNvPr id="13" name="TextBox 12"/>
+          <p:cNvSpPr txBox="1"/>
+          <p:nvPr/>
+        </p:nvSpPr>
+        <p:spPr>
+          <a:xfrm>
+            <a:off x="8092440" y="5029200"/>
+            <a:ext cx="3566160" cy="1006301"/>
+          </a:xfrm>
+          <a:prstGeom prst="rect">
+            <a:avLst/>
+          </a:prstGeom>
+          <a:noFill/>
+        </p:spPr>
+        <p:txBody>
+          <a:bodyPr wrap="square">
+            <a:spAutoFit/>
+          </a:bodyPr>
+          <a:lstStyle/>
           <a:p>
             <a:pPr algn="l">
               <a:lnSpc>
@@ -7273,14 +7282,57 @@
               </a:spcAft>
             </a:pPr>
             <a:r>
-              <a:rPr sz="1200">
+              <a:rPr sz="1200" dirty="0">
                 <a:solidFill>
                   <a:srgbClr val="1A1A1A"/>
                 </a:solidFill>
                 <a:latin typeface="Calibri"/>
               </a:rPr>
-              <a:t>•  The right metric when both false positives and false negatives matter.</a:t>
-            </a:r>
+              <a:t>•  </a:t>
+            </a:r>
+            <a:r>
+              <a:rPr lang="en-US" sz="1200" dirty="0">
+                <a:solidFill>
+                  <a:srgbClr val="1A1A1A"/>
+                </a:solidFill>
+                <a:latin typeface="Calibri"/>
+              </a:rPr>
+              <a:t>F1 to find the peak region (k ≈ 3–9), avoiding both extremes.</a:t>
+            </a:r>
+          </a:p>
+          <a:p>
+            <a:pPr algn="l">
+              <a:lnSpc>
+                <a:spcPct val="115000"/>
+              </a:lnSpc>
+              <a:spcAft>
+                <a:spcPts val="600"/>
+              </a:spcAft>
+            </a:pPr>
+            <a:r>
+              <a:rPr sz="1200" dirty="0">
+                <a:solidFill>
+                  <a:srgbClr val="1A1A1A"/>
+                </a:solidFill>
+                <a:latin typeface="Calibri"/>
+              </a:rPr>
+              <a:t>•  </a:t>
+            </a:r>
+            <a:r>
+              <a:rPr lang="en-US" sz="1200" dirty="0">
+                <a:solidFill>
+                  <a:srgbClr val="1A1A1A"/>
+                </a:solidFill>
+                <a:latin typeface="Calibri"/>
+              </a:rPr>
+              <a:t>Precision to pick within it → k = 7 — a confident, conservative classifier.</a:t>
+            </a:r>
+            <a:endParaRPr sz="1200" dirty="0">
+              <a:solidFill>
+                <a:srgbClr val="1A1A1A"/>
+              </a:solidFill>
+              <a:latin typeface="Calibri"/>
+            </a:endParaRPr>
           </a:p>
         </p:txBody>
       </p:sp>
@@ -7378,6 +7430,36 @@
           </a:p>
         </p:txBody>
       </p:sp>
+      <p:pic>
+        <p:nvPicPr>
+          <p:cNvPr id="17" name="Picture 16">
+            <a:extLst>
+              <a:ext uri="{FF2B5EF4-FFF2-40B4-BE49-F238E27FC236}">
+                <a16:creationId xmlns:a16="http://schemas.microsoft.com/office/drawing/2014/main" id="{F1B267E2-0090-66C2-4F43-9A070DDC2241}"/>
+              </a:ext>
+            </a:extLst>
+          </p:cNvPr>
+          <p:cNvPicPr>
+            <a:picLocks noChangeAspect="1"/>
+          </p:cNvPicPr>
+          <p:nvPr/>
+        </p:nvPicPr>
+        <p:blipFill>
+          <a:blip r:embed="rId2"/>
+          <a:stretch>
+            <a:fillRect/>
+          </a:stretch>
+        </p:blipFill>
+        <p:spPr>
+          <a:xfrm>
+            <a:off x="457200" y="1904729"/>
+            <a:ext cx="7315200" cy="3948596"/>
+          </a:xfrm>
+          <a:prstGeom prst="rect">
+            <a:avLst/>
+          </a:prstGeom>
+        </p:spPr>
+      </p:pic>
     </p:spTree>
   </p:cSld>
   <p:clrMapOvr>
@@ -8800,7 +8882,7 @@
       </p:sp>
       <p:pic>
         <p:nvPicPr>
-          <p:cNvPr id="8" name="Picture 7" descr="fig8_final_confusion_matrix.png"/>
+          <p:cNvPr id="8" name="Picture 7"/>
           <p:cNvPicPr>
             <a:picLocks noChangeAspect="1"/>
           </p:cNvPicPr>
@@ -8808,14 +8890,13 @@
         </p:nvPicPr>
         <p:blipFill>
           <a:blip r:embed="rId2"/>
-          <a:stretch>
-            <a:fillRect/>
-          </a:stretch>
+          <a:srcRect/>
+          <a:stretch/>
         </p:blipFill>
         <p:spPr>
           <a:xfrm>
             <a:off x="365760" y="1920240"/>
-            <a:ext cx="8229600" cy="2886678"/>
+            <a:ext cx="8229599" cy="2886678"/>
           </a:xfrm>
           <a:prstGeom prst="rect">
             <a:avLst/>
@@ -9226,7 +9307,7 @@
         <p:spPr>
           <a:xfrm>
             <a:off x="457200" y="685800"/>
-            <a:ext cx="11247120" cy="640080"/>
+            <a:ext cx="11247120" cy="553998"/>
           </a:xfrm>
           <a:prstGeom prst="rect">
             <a:avLst/>
@@ -9241,14 +9322,20 @@
           <a:p>
             <a:pPr algn="l"/>
             <a:r>
-              <a:rPr sz="3000" b="1" i="0">
+              <a:rPr lang="en-US" sz="3000" b="1" i="0" dirty="0">
                 <a:solidFill>
                   <a:srgbClr val="1F3A5F"/>
                 </a:solidFill>
                 <a:latin typeface="Calibri"/>
               </a:rPr>
-              <a:t>Validation: Stable Across Folds, and Beats the Baselines</a:t>
-            </a:r>
+              <a:t>Validation: Stable Across Folds — but a Simple Rule Beats Us</a:t>
+            </a:r>
+            <a:endParaRPr sz="3000" b="1" i="0" dirty="0">
+              <a:solidFill>
+                <a:srgbClr val="1F3A5F"/>
+              </a:solidFill>
+              <a:latin typeface="Calibri"/>
+            </a:endParaRPr>
           </a:p>
         </p:txBody>
       </p:sp>
@@ -9261,7 +9348,7 @@
         <p:spPr>
           <a:xfrm>
             <a:off x="457200" y="1280160"/>
-            <a:ext cx="11247120" cy="365760"/>
+            <a:ext cx="11247120" cy="323165"/>
           </a:xfrm>
           <a:prstGeom prst="rect">
             <a:avLst/>
@@ -9276,14 +9363,56 @@
           <a:p>
             <a:pPr algn="l"/>
             <a:r>
-              <a:rPr sz="1500" b="0" i="1">
+              <a:rPr lang="en-US" sz="1500" b="0" i="1" dirty="0">
                 <a:solidFill>
                   <a:srgbClr val="556070"/>
                 </a:solidFill>
                 <a:latin typeface="Calibri"/>
               </a:rPr>
-              <a:t>5-fold stratified CV plus two principled baselines confirm the result is real.</a:t>
-            </a:r>
+              <a:t>5-fold stratified CV confirms stability; but a one-feature </a:t>
+            </a:r>
+            <a:r>
+              <a:rPr lang="en-US" sz="1500" b="0" i="1" dirty="0" err="1">
+                <a:solidFill>
+                  <a:srgbClr val="556070"/>
+                </a:solidFill>
+                <a:latin typeface="Calibri"/>
+              </a:rPr>
+              <a:t>PageValues</a:t>
+            </a:r>
+            <a:r>
+              <a:rPr lang="en-US" sz="1500" b="0" i="1" dirty="0">
+                <a:solidFill>
+                  <a:srgbClr val="556070"/>
+                </a:solidFill>
+                <a:latin typeface="Calibri"/>
+              </a:rPr>
+              <a:t> rule outperforms our </a:t>
+            </a:r>
+            <a:r>
+              <a:rPr lang="en-US" sz="1500" b="0" i="1" dirty="0" err="1">
+                <a:solidFill>
+                  <a:srgbClr val="556070"/>
+                </a:solidFill>
+                <a:latin typeface="Calibri"/>
+              </a:rPr>
+              <a:t>kNN</a:t>
+            </a:r>
+            <a:r>
+              <a:rPr lang="en-US" sz="1500" b="0" i="1" dirty="0">
+                <a:solidFill>
+                  <a:srgbClr val="556070"/>
+                </a:solidFill>
+                <a:latin typeface="Calibri"/>
+              </a:rPr>
+              <a:t>.</a:t>
+            </a:r>
+            <a:endParaRPr sz="1500" b="0" i="1" dirty="0">
+              <a:solidFill>
+                <a:srgbClr val="556070"/>
+              </a:solidFill>
+              <a:latin typeface="Calibri"/>
+            </a:endParaRPr>
           </a:p>
         </p:txBody>
       </p:sp>
@@ -9444,7 +9573,7 @@
               </a:spcAft>
             </a:pPr>
             <a:r>
-              <a:rPr sz="1300">
+              <a:rPr sz="1300" dirty="0">
                 <a:solidFill>
                   <a:srgbClr val="1A1A1A"/>
                 </a:solidFill>
@@ -9463,7 +9592,7 @@
               </a:spcAft>
             </a:pPr>
             <a:r>
-              <a:rPr sz="1300">
+              <a:rPr sz="1300" dirty="0">
                 <a:solidFill>
                   <a:srgbClr val="1A1A1A"/>
                 </a:solidFill>
@@ -9482,7 +9611,7 @@
               </a:spcAft>
             </a:pPr>
             <a:r>
-              <a:rPr sz="1300">
+              <a:rPr sz="1300" dirty="0">
                 <a:solidFill>
                   <a:srgbClr val="1A1A1A"/>
                 </a:solidFill>
@@ -9501,7 +9630,7 @@
               </a:spcAft>
             </a:pPr>
             <a:r>
-              <a:rPr sz="1300">
+              <a:rPr sz="1300" dirty="0">
                 <a:solidFill>
                   <a:srgbClr val="1A1A1A"/>
                 </a:solidFill>
@@ -10161,7 +10290,7 @@
         <p:spPr>
           <a:xfrm>
             <a:off x="6400800" y="4754880"/>
-            <a:ext cx="5212080" cy="1280160"/>
+            <a:ext cx="5212080" cy="646331"/>
           </a:xfrm>
           <a:prstGeom prst="rect">
             <a:avLst/>
@@ -10176,14 +10305,83 @@
           <a:p>
             <a:pPr algn="l"/>
             <a:r>
-              <a:rPr sz="1200" b="0" i="1">
+              <a:rPr lang="en-US" sz="1200" b="0" i="1" dirty="0" err="1">
                 <a:solidFill>
                   <a:srgbClr val="556070"/>
                 </a:solidFill>
                 <a:latin typeface="Calibri"/>
               </a:rPr>
-              <a:t>kNN beats both baselines on F1 — a real signal, not memorization of one dominant feature.</a:t>
-            </a:r>
+              <a:t>kNN</a:t>
+            </a:r>
+            <a:r>
+              <a:rPr lang="en-US" sz="1200" b="0" i="1" dirty="0">
+                <a:solidFill>
+                  <a:srgbClr val="556070"/>
+                </a:solidFill>
+                <a:latin typeface="Calibri"/>
+              </a:rPr>
+              <a:t> beats both baselines on F1 — a real signal… → The </a:t>
+            </a:r>
+            <a:r>
+              <a:rPr lang="en-US" sz="1200" b="0" i="1" dirty="0" err="1">
+                <a:solidFill>
+                  <a:srgbClr val="556070"/>
+                </a:solidFill>
+                <a:latin typeface="Calibri"/>
+              </a:rPr>
+              <a:t>PageValues</a:t>
+            </a:r>
+            <a:r>
+              <a:rPr lang="en-US" sz="1200" b="0" i="1" dirty="0">
+                <a:solidFill>
+                  <a:srgbClr val="556070"/>
+                </a:solidFill>
+                <a:latin typeface="Calibri"/>
+              </a:rPr>
+              <a:t> rule beats </a:t>
+            </a:r>
+            <a:r>
+              <a:rPr lang="en-US" sz="1200" b="0" i="1" dirty="0" err="1">
+                <a:solidFill>
+                  <a:srgbClr val="556070"/>
+                </a:solidFill>
+                <a:latin typeface="Calibri"/>
+              </a:rPr>
+              <a:t>kNN</a:t>
+            </a:r>
+            <a:r>
+              <a:rPr lang="en-US" sz="1200" b="0" i="1" dirty="0">
+                <a:solidFill>
+                  <a:srgbClr val="556070"/>
+                </a:solidFill>
+                <a:latin typeface="Calibri"/>
+              </a:rPr>
+              <a:t> on F1 — </a:t>
+            </a:r>
+            <a:r>
+              <a:rPr lang="en-US" sz="1200" b="0" i="1" dirty="0" err="1">
+                <a:solidFill>
+                  <a:srgbClr val="556070"/>
+                </a:solidFill>
+                <a:latin typeface="Calibri"/>
+              </a:rPr>
+              <a:t>kNN</a:t>
+            </a:r>
+            <a:r>
+              <a:rPr lang="en-US" sz="1200" b="0" i="1" dirty="0">
+                <a:solidFill>
+                  <a:srgbClr val="556070"/>
+                </a:solidFill>
+                <a:latin typeface="Calibri"/>
+              </a:rPr>
+              <a:t> dilutes the dominant signal across 28 features. A humbling, instructive result.</a:t>
+            </a:r>
+            <a:endParaRPr sz="1200" b="0" i="1" dirty="0">
+              <a:solidFill>
+                <a:srgbClr val="556070"/>
+              </a:solidFill>
+              <a:latin typeface="Calibri"/>
+            </a:endParaRPr>
           </a:p>
         </p:txBody>
       </p:sp>
@@ -11150,7 +11348,7 @@
           <a:p>
             <a:pPr algn="l"/>
             <a:r>
-              <a:rPr sz="1500" b="0" i="1">
+              <a:rPr sz="1500" b="0" i="1" dirty="0">
                 <a:solidFill>
                   <a:srgbClr val="556070"/>
                 </a:solidFill>
@@ -11308,7 +11506,7 @@
           <a:p>
             <a:pPr algn="l"/>
             <a:r>
-              <a:rPr sz="1200" b="0" i="0">
+              <a:rPr sz="1200" b="0" i="0" dirty="0">
                 <a:solidFill>
                   <a:srgbClr val="1A1A1A"/>
                 </a:solidFill>
@@ -11536,7 +11734,7 @@
           <a:p>
             <a:pPr algn="l"/>
             <a:r>
-              <a:rPr sz="1200" b="0" i="0">
+              <a:rPr sz="1200" b="0" i="0" dirty="0">
                 <a:solidFill>
                   <a:srgbClr val="1A1A1A"/>
                 </a:solidFill>
@@ -11599,8 +11797,8 @@
         </p:nvSpPr>
         <p:spPr>
           <a:xfrm>
-            <a:off x="731520" y="4105656"/>
-            <a:ext cx="3108960" cy="640080"/>
+            <a:off x="731520" y="4148697"/>
+            <a:ext cx="3108960" cy="553998"/>
           </a:xfrm>
           <a:prstGeom prst="rect">
             <a:avLst/>
@@ -11615,14 +11813,38 @@
           <a:p>
             <a:pPr algn="l"/>
             <a:r>
-              <a:rPr sz="1500" b="1" i="0">
+              <a:rPr lang="en-US" sz="1500" b="1" i="0" dirty="0">
                 <a:solidFill>
                   <a:srgbClr val="1F3A5F"/>
                 </a:solidFill>
                 <a:latin typeface="Calibri"/>
               </a:rPr>
-              <a:t>k tuned on the test set</a:t>
-            </a:r>
+              <a:t>A one-feature </a:t>
+            </a:r>
+            <a:r>
+              <a:rPr lang="en-US" sz="1500" b="1" i="0" dirty="0" err="1">
+                <a:solidFill>
+                  <a:srgbClr val="1F3A5F"/>
+                </a:solidFill>
+                <a:latin typeface="Calibri"/>
+              </a:rPr>
+              <a:t>PageValues</a:t>
+            </a:r>
+            <a:r>
+              <a:rPr lang="en-US" sz="1500" b="1" i="0" dirty="0">
+                <a:solidFill>
+                  <a:srgbClr val="1F3A5F"/>
+                </a:solidFill>
+                <a:latin typeface="Calibri"/>
+              </a:rPr>
+              <a:t> rule beats the full model </a:t>
+            </a:r>
+            <a:endParaRPr sz="1500" b="1" i="0" dirty="0">
+              <a:solidFill>
+                <a:srgbClr val="1F3A5F"/>
+              </a:solidFill>
+              <a:latin typeface="Calibri"/>
+            </a:endParaRPr>
           </a:p>
         </p:txBody>
       </p:sp>
@@ -11634,8 +11856,8 @@
         </p:nvSpPr>
         <p:spPr>
           <a:xfrm>
-            <a:off x="3931920" y="4105656"/>
-            <a:ext cx="7772400" cy="640080"/>
+            <a:off x="3931920" y="4287196"/>
+            <a:ext cx="7772400" cy="276999"/>
           </a:xfrm>
           <a:prstGeom prst="rect">
             <a:avLst/>
@@ -11650,14 +11872,29 @@
           <a:p>
             <a:pPr algn="l"/>
             <a:r>
-              <a:rPr sz="1200" b="0" i="0">
+              <a:rPr lang="en-US" sz="1200" b="0" i="0" dirty="0" err="1">
                 <a:solidFill>
                   <a:srgbClr val="1A1A1A"/>
                 </a:solidFill>
                 <a:latin typeface="Calibri"/>
               </a:rPr>
-              <a:t>Best F1 was selected directly on the test set. A clean protocol would use a separate validation split. CV partially mitigates this.</a:t>
-            </a:r>
+              <a:t>kNN</a:t>
+            </a:r>
+            <a:r>
+              <a:rPr lang="en-US" sz="1200" b="0" i="0" dirty="0">
+                <a:solidFill>
+                  <a:srgbClr val="1A1A1A"/>
+                </a:solidFill>
+                <a:latin typeface="Calibri"/>
+              </a:rPr>
+              <a:t> doesn't do feature selection.</a:t>
+            </a:r>
+            <a:endParaRPr sz="1200" b="0" i="0" dirty="0">
+              <a:solidFill>
+                <a:srgbClr val="1A1A1A"/>
+              </a:solidFill>
+              <a:latin typeface="Calibri"/>
+            </a:endParaRPr>
           </a:p>
         </p:txBody>
       </p:sp>

--- a/Capstone_Presentation.pptx
+++ b/Capstone_Presentation.pptx
@@ -15,17 +15,17 @@
     <p:sldId id="263" r:id="rId9"/>
     <p:sldId id="264" r:id="rId10"/>
     <p:sldId id="265" r:id="rId11"/>
-    <p:sldId id="266" r:id="rId12"/>
-    <p:sldId id="267" r:id="rId13"/>
-    <p:sldId id="268" r:id="rId14"/>
-    <p:sldId id="269" r:id="rId15"/>
-    <p:sldId id="270" r:id="rId16"/>
-    <p:sldId id="271" r:id="rId17"/>
-    <p:sldId id="272" r:id="rId18"/>
-    <p:sldId id="273" r:id="rId19"/>
-    <p:sldId id="274" r:id="rId20"/>
-    <p:sldId id="275" r:id="rId21"/>
-    <p:sldId id="276" r:id="rId22"/>
+    <p:sldId id="267" r:id="rId12"/>
+    <p:sldId id="268" r:id="rId13"/>
+    <p:sldId id="269" r:id="rId14"/>
+    <p:sldId id="270" r:id="rId15"/>
+    <p:sldId id="271" r:id="rId16"/>
+    <p:sldId id="272" r:id="rId17"/>
+    <p:sldId id="273" r:id="rId18"/>
+    <p:sldId id="274" r:id="rId19"/>
+    <p:sldId id="275" r:id="rId20"/>
+    <p:sldId id="276" r:id="rId21"/>
+    <p:sldId id="277" r:id="rId22"/>
   </p:sldIdLst>
   <p:sldSz cx="12192000" cy="6858000"/>
   <p:notesSz cx="6858000" cy="9144000"/>
@@ -322,7 +322,7 @@
           <a:p>
             <a:fld id="{5BCAD085-E8A6-8845-BD4E-CB4CCA059FC4}" type="datetimeFigureOut">
               <a:rPr lang="en-US" smtClean="0"/>
-              <a:t>5/21/2026</a:t>
+              <a:t>5/22/2026</a:t>
             </a:fld>
             <a:endParaRPr lang="en-US"/>
           </a:p>
@@ -490,7 +490,7 @@
           <a:p>
             <a:fld id="{5BCAD085-E8A6-8845-BD4E-CB4CCA059FC4}" type="datetimeFigureOut">
               <a:rPr lang="en-US" smtClean="0"/>
-              <a:t>5/21/2026</a:t>
+              <a:t>5/22/2026</a:t>
             </a:fld>
             <a:endParaRPr lang="en-US"/>
           </a:p>
@@ -668,7 +668,7 @@
           <a:p>
             <a:fld id="{5BCAD085-E8A6-8845-BD4E-CB4CCA059FC4}" type="datetimeFigureOut">
               <a:rPr lang="en-US" smtClean="0"/>
-              <a:t>5/21/2026</a:t>
+              <a:t>5/22/2026</a:t>
             </a:fld>
             <a:endParaRPr lang="en-US"/>
           </a:p>
@@ -836,7 +836,7 @@
           <a:p>
             <a:fld id="{5BCAD085-E8A6-8845-BD4E-CB4CCA059FC4}" type="datetimeFigureOut">
               <a:rPr lang="en-US" smtClean="0"/>
-              <a:t>5/21/2026</a:t>
+              <a:t>5/22/2026</a:t>
             </a:fld>
             <a:endParaRPr lang="en-US"/>
           </a:p>
@@ -1081,7 +1081,7 @@
           <a:p>
             <a:fld id="{5BCAD085-E8A6-8845-BD4E-CB4CCA059FC4}" type="datetimeFigureOut">
               <a:rPr lang="en-US" smtClean="0"/>
-              <a:t>5/21/2026</a:t>
+              <a:t>5/22/2026</a:t>
             </a:fld>
             <a:endParaRPr lang="en-US"/>
           </a:p>
@@ -1366,7 +1366,7 @@
           <a:p>
             <a:fld id="{5BCAD085-E8A6-8845-BD4E-CB4CCA059FC4}" type="datetimeFigureOut">
               <a:rPr lang="en-US" smtClean="0"/>
-              <a:t>5/21/2026</a:t>
+              <a:t>5/22/2026</a:t>
             </a:fld>
             <a:endParaRPr lang="en-US"/>
           </a:p>
@@ -1785,7 +1785,7 @@
           <a:p>
             <a:fld id="{5BCAD085-E8A6-8845-BD4E-CB4CCA059FC4}" type="datetimeFigureOut">
               <a:rPr lang="en-US" smtClean="0"/>
-              <a:t>5/21/2026</a:t>
+              <a:t>5/22/2026</a:t>
             </a:fld>
             <a:endParaRPr lang="en-US"/>
           </a:p>
@@ -1902,7 +1902,7 @@
           <a:p>
             <a:fld id="{5BCAD085-E8A6-8845-BD4E-CB4CCA059FC4}" type="datetimeFigureOut">
               <a:rPr lang="en-US" smtClean="0"/>
-              <a:t>5/21/2026</a:t>
+              <a:t>5/22/2026</a:t>
             </a:fld>
             <a:endParaRPr lang="en-US"/>
           </a:p>
@@ -1997,7 +1997,7 @@
           <a:p>
             <a:fld id="{5BCAD085-E8A6-8845-BD4E-CB4CCA059FC4}" type="datetimeFigureOut">
               <a:rPr lang="en-US" smtClean="0"/>
-              <a:t>5/21/2026</a:t>
+              <a:t>5/22/2026</a:t>
             </a:fld>
             <a:endParaRPr lang="en-US"/>
           </a:p>
@@ -2272,7 +2272,7 @@
           <a:p>
             <a:fld id="{5BCAD085-E8A6-8845-BD4E-CB4CCA059FC4}" type="datetimeFigureOut">
               <a:rPr lang="en-US" smtClean="0"/>
-              <a:t>5/21/2026</a:t>
+              <a:t>5/22/2026</a:t>
             </a:fld>
             <a:endParaRPr lang="en-US"/>
           </a:p>
@@ -2524,7 +2524,7 @@
           <a:p>
             <a:fld id="{5BCAD085-E8A6-8845-BD4E-CB4CCA059FC4}" type="datetimeFigureOut">
               <a:rPr lang="en-US" smtClean="0"/>
-              <a:t>5/21/2026</a:t>
+              <a:t>5/22/2026</a:t>
             </a:fld>
             <a:endParaRPr lang="en-US"/>
           </a:p>
@@ -2735,7 +2735,7 @@
           <a:p>
             <a:fld id="{5BCAD085-E8A6-8845-BD4E-CB4CCA059FC4}" type="datetimeFigureOut">
               <a:rPr lang="en-US" smtClean="0"/>
-              <a:t>5/21/2026</a:t>
+              <a:t>5/22/2026</a:t>
             </a:fld>
             <a:endParaRPr lang="en-US"/>
           </a:p>
@@ -3289,8 +3289,8 @@
         </p:nvSpPr>
         <p:spPr>
           <a:xfrm>
-            <a:off x="457200" y="3243887"/>
-            <a:ext cx="11247120" cy="461665"/>
+            <a:off x="457200" y="2926080"/>
+            <a:ext cx="11247120" cy="1097280"/>
           </a:xfrm>
           <a:prstGeom prst="rect">
             <a:avLst/>
@@ -3305,13 +3305,13 @@
           <a:p>
             <a:pPr algn="ctr"/>
             <a:r>
-              <a:rPr sz="2400" b="1" i="0" dirty="0">
+              <a:rPr sz="2400" b="1" i="0">
                 <a:solidFill>
                   <a:srgbClr val="FFFFFF"/>
                 </a:solidFill>
                 <a:latin typeface="Calibri"/>
               </a:rPr>
-              <a:t>A k-Nearest Neighbors Classifier</a:t>
+              <a:t>A k-Nearest Neighbors Classifier Built From Scratch</a:t>
             </a:r>
           </a:p>
         </p:txBody>
@@ -3858,7 +3858,7 @@
           <a:p>
             <a:pPr algn="l"/>
             <a:r>
-              <a:rPr sz="1600" b="1" i="0" dirty="0">
+              <a:rPr sz="1600" b="1" i="0">
                 <a:solidFill>
                   <a:srgbClr val="DD8452"/>
                 </a:solidFill>
@@ -3877,7 +3877,7 @@
         </p:nvSpPr>
         <p:spPr>
           <a:xfrm>
-            <a:off x="7772400" y="4983480"/>
+            <a:off x="7726679" y="5212080"/>
             <a:ext cx="3931920" cy="1371600"/>
           </a:xfrm>
           <a:prstGeom prst="rect">
@@ -3900,7 +3900,7 @@
               </a:spcAft>
             </a:pPr>
             <a:r>
-              <a:rPr sz="1300" dirty="0">
+              <a:rPr sz="1300">
                 <a:solidFill>
                   <a:srgbClr val="1A1A1A"/>
                 </a:solidFill>
@@ -3919,7 +3919,7 @@
               </a:spcAft>
             </a:pPr>
             <a:r>
-              <a:rPr sz="1300" dirty="0">
+              <a:rPr sz="1300">
                 <a:solidFill>
                   <a:srgbClr val="1A1A1A"/>
                 </a:solidFill>
@@ -3939,7 +3939,7 @@
         <p:spPr>
           <a:xfrm>
             <a:off x="457200" y="6492240"/>
-            <a:ext cx="7315200" cy="246221"/>
+            <a:ext cx="7315200" cy="274320"/>
           </a:xfrm>
           <a:prstGeom prst="rect">
             <a:avLst/>
@@ -3954,29 +3954,14 @@
           <a:p>
             <a:pPr algn="l"/>
             <a:r>
-              <a:rPr sz="1000" b="0" i="0" dirty="0">
+              <a:rPr sz="1000" b="0" i="0">
                 <a:solidFill>
                   <a:srgbClr val="556070"/>
                 </a:solidFill>
                 <a:latin typeface="Calibri"/>
               </a:rPr>
-              <a:t>Online Shoppers Purchase-Intention Capstone  |  </a:t>
-            </a:r>
-            <a:r>
-              <a:rPr sz="1000" b="0" i="0" dirty="0" err="1">
-                <a:solidFill>
-                  <a:srgbClr val="556070"/>
-                </a:solidFill>
-                <a:latin typeface="Calibri"/>
-              </a:rPr>
-              <a:t>kNN</a:t>
-            </a:r>
-            <a:endParaRPr sz="1000" b="0" i="0" dirty="0">
-              <a:solidFill>
-                <a:srgbClr val="556070"/>
-              </a:solidFill>
-              <a:latin typeface="Calibri"/>
-            </a:endParaRPr>
+              <a:t>Online Shoppers Purchase-Intention Capstone  |  kNN from Scratch</a:t>
+            </a:r>
           </a:p>
         </p:txBody>
       </p:sp>
@@ -4193,7 +4178,7 @@
                 </a:solidFill>
                 <a:latin typeface="Calibri"/>
               </a:rPr>
-              <a:t>k-Nearest Neighbors in One Picture</a:t>
+              <a:t>The Same Idea in Four Steps</a:t>
             </a:r>
           </a:p>
         </p:txBody>
@@ -4391,7 +4376,7 @@
           <a:p>
             <a:pPr algn="ctr"/>
             <a:r>
-              <a:rPr sz="2000" b="1" i="0" dirty="0">
+              <a:rPr sz="2000" b="1" i="0">
                 <a:solidFill>
                   <a:srgbClr val="FFFFFF"/>
                 </a:solidFill>
@@ -5066,7 +5051,7 @@
         <p:spPr>
           <a:xfrm>
             <a:off x="457200" y="6492240"/>
-            <a:ext cx="7315200" cy="246221"/>
+            <a:ext cx="7315200" cy="274320"/>
           </a:xfrm>
           <a:prstGeom prst="rect">
             <a:avLst/>
@@ -5081,29 +5066,14 @@
           <a:p>
             <a:pPr algn="l"/>
             <a:r>
-              <a:rPr sz="1000" b="0" i="0" dirty="0">
+              <a:rPr sz="1000" b="0" i="0">
                 <a:solidFill>
                   <a:srgbClr val="556070"/>
                 </a:solidFill>
                 <a:latin typeface="Calibri"/>
               </a:rPr>
-              <a:t>Online Shoppers Purchase-Intention Capstone  |  </a:t>
-            </a:r>
-            <a:r>
-              <a:rPr sz="1000" b="0" i="0" dirty="0" err="1">
-                <a:solidFill>
-                  <a:srgbClr val="556070"/>
-                </a:solidFill>
-                <a:latin typeface="Calibri"/>
-              </a:rPr>
-              <a:t>kNN</a:t>
-            </a:r>
-            <a:endParaRPr sz="1000" b="0" i="0" dirty="0">
-              <a:solidFill>
-                <a:srgbClr val="556070"/>
-              </a:solidFill>
-              <a:latin typeface="Calibri"/>
-            </a:endParaRPr>
+              <a:t>Online Shoppers Purchase-Intention Capstone  |  kNN from Scratch</a:t>
+            </a:r>
           </a:p>
         </p:txBody>
       </p:sp>
@@ -5137,7 +5107,7 @@
                 </a:solidFill>
                 <a:latin typeface="Calibri"/>
               </a:rPr>
-              <a:t>Slide 11</a:t>
+              <a:t>Slide 12</a:t>
             </a:r>
           </a:p>
         </p:txBody>
@@ -5299,7 +5269,7 @@
         <p:spPr>
           <a:xfrm>
             <a:off x="457200" y="685800"/>
-            <a:ext cx="11247120" cy="553998"/>
+            <a:ext cx="11247120" cy="640080"/>
           </a:xfrm>
           <a:prstGeom prst="rect">
             <a:avLst/>
@@ -5314,31 +5284,13 @@
           <a:p>
             <a:pPr algn="l"/>
             <a:r>
-              <a:rPr sz="3000" b="1" i="0" dirty="0">
+              <a:rPr sz="3000" b="1" i="0">
                 <a:solidFill>
                   <a:srgbClr val="1F3A5F"/>
                 </a:solidFill>
                 <a:latin typeface="Calibri"/>
               </a:rPr>
-              <a:t>The Pipeline We Built — Seven Scripts</a:t>
-            </a:r>
-            <a:r>
-              <a:rPr lang="en-US" sz="3000" b="1" dirty="0">
-                <a:solidFill>
-                  <a:srgbClr val="1F3A5F"/>
-                </a:solidFill>
-                <a:latin typeface="Calibri"/>
-              </a:rPr>
-              <a:t> </a:t>
-            </a:r>
-            <a:r>
-              <a:rPr sz="3000" b="1" i="0" dirty="0">
-                <a:solidFill>
-                  <a:srgbClr val="1F3A5F"/>
-                </a:solidFill>
-                <a:latin typeface="Calibri"/>
-              </a:rPr>
-              <a:t>Estimators</a:t>
+              <a:t>The Pipeline We Built — Seven Scripts, No scikit-learn Estimators</a:t>
             </a:r>
           </a:p>
         </p:txBody>
@@ -5352,7 +5304,7 @@
         <p:spPr>
           <a:xfrm>
             <a:off x="457200" y="1280160"/>
-            <a:ext cx="11247120" cy="323165"/>
+            <a:ext cx="11247120" cy="365760"/>
           </a:xfrm>
           <a:prstGeom prst="rect">
             <a:avLst/>
@@ -5367,31 +5319,13 @@
           <a:p>
             <a:pPr algn="l"/>
             <a:r>
-              <a:rPr sz="1500" b="0" i="1" dirty="0">
+              <a:rPr sz="1500" b="0" i="1">
                 <a:solidFill>
                   <a:srgbClr val="556070"/>
                 </a:solidFill>
                 <a:latin typeface="Calibri"/>
               </a:rPr>
-              <a:t>Every step was implemented from</a:t>
-            </a:r>
-            <a:r>
-              <a:rPr lang="en-US" sz="1500" i="1" dirty="0">
-                <a:solidFill>
-                  <a:srgbClr val="556070"/>
-                </a:solidFill>
-                <a:latin typeface="Calibri"/>
-              </a:rPr>
-              <a:t> </a:t>
-            </a:r>
-            <a:r>
-              <a:rPr sz="1500" b="0" i="1" dirty="0">
-                <a:solidFill>
-                  <a:srgbClr val="556070"/>
-                </a:solidFill>
-                <a:latin typeface="Calibri"/>
-              </a:rPr>
-              <a:t>NumPy to make the algorithm visible.</a:t>
+              <a:t>Every step was implemented from scratch in NumPy to make the algorithm visible.</a:t>
             </a:r>
           </a:p>
         </p:txBody>
@@ -6645,7 +6579,7 @@
         <p:spPr>
           <a:xfrm>
             <a:off x="457200" y="6492240"/>
-            <a:ext cx="7315200" cy="246221"/>
+            <a:ext cx="7315200" cy="274320"/>
           </a:xfrm>
           <a:prstGeom prst="rect">
             <a:avLst/>
@@ -6660,29 +6594,14 @@
           <a:p>
             <a:pPr algn="l"/>
             <a:r>
-              <a:rPr sz="1000" b="0" i="0" dirty="0">
+              <a:rPr sz="1000" b="0" i="0">
                 <a:solidFill>
                   <a:srgbClr val="556070"/>
                 </a:solidFill>
                 <a:latin typeface="Calibri"/>
               </a:rPr>
-              <a:t>Online Shoppers Purchase-Intention Capstone  |  </a:t>
-            </a:r>
-            <a:r>
-              <a:rPr sz="1000" b="0" i="0" dirty="0" err="1">
-                <a:solidFill>
-                  <a:srgbClr val="556070"/>
-                </a:solidFill>
-                <a:latin typeface="Calibri"/>
-              </a:rPr>
-              <a:t>kNN</a:t>
-            </a:r>
-            <a:endParaRPr sz="1000" b="0" i="0" dirty="0">
-              <a:solidFill>
-                <a:srgbClr val="556070"/>
-              </a:solidFill>
-              <a:latin typeface="Calibri"/>
-            </a:endParaRPr>
+              <a:t>Online Shoppers Purchase-Intention Capstone  |  kNN from Scratch</a:t>
+            </a:r>
           </a:p>
         </p:txBody>
       </p:sp>
@@ -6716,7 +6635,7 @@
                 </a:solidFill>
                 <a:latin typeface="Calibri"/>
               </a:rPr>
-              <a:t>Slide 12</a:t>
+              <a:t>Slide 13</a:t>
             </a:r>
           </a:p>
         </p:txBody>
@@ -6913,7 +6832,7 @@
         <p:spPr>
           <a:xfrm>
             <a:off x="457200" y="1280160"/>
-            <a:ext cx="11247120" cy="323165"/>
+            <a:ext cx="11247120" cy="365760"/>
           </a:xfrm>
           <a:prstGeom prst="rect">
             <a:avLst/>
@@ -6928,20 +6847,14 @@
           <a:p>
             <a:pPr algn="l"/>
             <a:r>
-              <a:rPr lang="en-US" sz="1500" b="0" i="1" dirty="0">
+              <a:rPr sz="1500" b="0" i="1">
                 <a:solidFill>
                   <a:srgbClr val="556070"/>
                 </a:solidFill>
                 <a:latin typeface="Calibri"/>
               </a:rPr>
-              <a:t>F1 peaks at k = 3; we chose k = 7 for its higher precision. Recall and precision pull in opposite directions.</a:t>
-            </a:r>
-            <a:endParaRPr sz="1500" b="0" i="1" dirty="0">
-              <a:solidFill>
-                <a:srgbClr val="556070"/>
-              </a:solidFill>
-              <a:latin typeface="Calibri"/>
-            </a:endParaRPr>
+              <a:t>F1 peaks at k = 7. Recall and precision pull in opposite directions.</a:t>
+            </a:r>
           </a:p>
         </p:txBody>
       </p:sp>
@@ -6989,6 +6902,30 @@
           </a:p>
         </p:txBody>
       </p:sp>
+      <p:pic>
+        <p:nvPicPr>
+          <p:cNvPr id="8" name="Picture 7" descr="fig7_k_tuning.png"/>
+          <p:cNvPicPr>
+            <a:picLocks noChangeAspect="1"/>
+          </p:cNvPicPr>
+          <p:nvPr/>
+        </p:nvPicPr>
+        <p:blipFill>
+          <a:blip r:embed="rId2"/>
+          <a:stretch>
+            <a:fillRect/>
+          </a:stretch>
+        </p:blipFill>
+        <p:spPr>
+          <a:xfrm>
+            <a:off x="365760" y="1920240"/>
+            <a:ext cx="7315200" cy="3948596"/>
+          </a:xfrm>
+          <a:prstGeom prst="rect">
+            <a:avLst/>
+          </a:prstGeom>
+        </p:spPr>
+      </p:pic>
       <p:sp>
         <p:nvSpPr>
           <p:cNvPr id="9" name="Rounded Rectangle 8"/>
@@ -7079,8 +7016,8 @@
         </p:nvSpPr>
         <p:spPr>
           <a:xfrm>
-            <a:off x="8046720" y="2614832"/>
-            <a:ext cx="3566160" cy="1536896"/>
+            <a:off x="8092440" y="2606040"/>
+            <a:ext cx="3566160" cy="2377440"/>
           </a:xfrm>
           <a:prstGeom prst="rect">
             <a:avLst/>
@@ -7102,7 +7039,7 @@
               </a:spcAft>
             </a:pPr>
             <a:r>
-              <a:rPr sz="1300" dirty="0">
+              <a:rPr sz="1300">
                 <a:solidFill>
                   <a:srgbClr val="1A1A1A"/>
                 </a:solidFill>
@@ -7121,7 +7058,7 @@
               </a:spcAft>
             </a:pPr>
             <a:r>
-              <a:rPr sz="1300" dirty="0">
+              <a:rPr sz="1300">
                 <a:solidFill>
                   <a:srgbClr val="1A1A1A"/>
                 </a:solidFill>
@@ -7140,7 +7077,7 @@
               </a:spcAft>
             </a:pPr>
             <a:r>
-              <a:rPr sz="1300" dirty="0">
+              <a:rPr sz="1300">
                 <a:solidFill>
                   <a:srgbClr val="1A1A1A"/>
                 </a:solidFill>
@@ -7159,30 +7096,73 @@
               </a:spcAft>
             </a:pPr>
             <a:r>
-              <a:rPr sz="1300" dirty="0">
+              <a:rPr sz="1300">
                 <a:solidFill>
                   <a:srgbClr val="1A1A1A"/>
                 </a:solidFill>
                 <a:latin typeface="Calibri"/>
               </a:rPr>
-              <a:t>•  Best F1:         k = </a:t>
-            </a:r>
-            <a:r>
-              <a:rPr lang="en-PH" sz="1300" dirty="0">
-                <a:solidFill>
-                  <a:srgbClr val="1A1A1A"/>
-                </a:solidFill>
-                <a:latin typeface="Calibri"/>
-              </a:rPr>
-              <a:t>3</a:t>
-            </a:r>
-            <a:endParaRPr lang="en-US" sz="1300" dirty="0">
-              <a:solidFill>
-                <a:srgbClr val="1A1A1A"/>
-              </a:solidFill>
-              <a:latin typeface="Calibri"/>
-            </a:endParaRPr>
-          </a:p>
+              <a:t>•  Best F1:         k = 7  ← chosen</a:t>
+            </a:r>
+          </a:p>
+        </p:txBody>
+      </p:sp>
+      <p:sp>
+        <p:nvSpPr>
+          <p:cNvPr id="12" name="TextBox 11"/>
+          <p:cNvSpPr txBox="1"/>
+          <p:nvPr/>
+        </p:nvSpPr>
+        <p:spPr>
+          <a:xfrm>
+            <a:off x="8092440" y="4572000"/>
+            <a:ext cx="3566160" cy="457200"/>
+          </a:xfrm>
+          <a:prstGeom prst="rect">
+            <a:avLst/>
+          </a:prstGeom>
+          <a:noFill/>
+        </p:spPr>
+        <p:txBody>
+          <a:bodyPr wrap="square" anchor="t">
+            <a:spAutoFit/>
+          </a:bodyPr>
+          <a:lstStyle/>
+          <a:p>
+            <a:pPr algn="l"/>
+            <a:r>
+              <a:rPr sz="1600" b="1" i="0">
+                <a:solidFill>
+                  <a:srgbClr val="DD8452"/>
+                </a:solidFill>
+                <a:latin typeface="Calibri"/>
+              </a:rPr>
+              <a:t>Why F1?</a:t>
+            </a:r>
+          </a:p>
+        </p:txBody>
+      </p:sp>
+      <p:sp>
+        <p:nvSpPr>
+          <p:cNvPr id="13" name="TextBox 12"/>
+          <p:cNvSpPr txBox="1"/>
+          <p:nvPr/>
+        </p:nvSpPr>
+        <p:spPr>
+          <a:xfrm>
+            <a:off x="8092440" y="5029200"/>
+            <a:ext cx="3566160" cy="1371600"/>
+          </a:xfrm>
+          <a:prstGeom prst="rect">
+            <a:avLst/>
+          </a:prstGeom>
+          <a:noFill/>
+        </p:spPr>
+        <p:txBody>
+          <a:bodyPr wrap="square">
+            <a:spAutoFit/>
+          </a:bodyPr>
+          <a:lstStyle/>
           <a:p>
             <a:pPr algn="l">
               <a:lnSpc>
@@ -7193,85 +7173,15 @@
               </a:spcAft>
             </a:pPr>
             <a:r>
-              <a:rPr lang="en-US" sz="1300" dirty="0">
+              <a:rPr sz="1200">
                 <a:solidFill>
                   <a:srgbClr val="1A1A1A"/>
                 </a:solidFill>
                 <a:latin typeface="Calibri"/>
               </a:rPr>
-              <a:t>Chosen:             k = 7 (higher precision)</a:t>
-            </a:r>
-            <a:endParaRPr sz="1300" dirty="0">
-              <a:solidFill>
-                <a:srgbClr val="1A1A1A"/>
-              </a:solidFill>
-              <a:latin typeface="Calibri"/>
-            </a:endParaRPr>
-          </a:p>
-        </p:txBody>
-      </p:sp>
-      <p:sp>
-        <p:nvSpPr>
-          <p:cNvPr id="12" name="TextBox 11"/>
-          <p:cNvSpPr txBox="1"/>
-          <p:nvPr/>
-        </p:nvSpPr>
-        <p:spPr>
-          <a:xfrm>
-            <a:off x="8092440" y="4572000"/>
-            <a:ext cx="3566160" cy="338554"/>
-          </a:xfrm>
-          <a:prstGeom prst="rect">
-            <a:avLst/>
-          </a:prstGeom>
-          <a:noFill/>
-        </p:spPr>
-        <p:txBody>
-          <a:bodyPr wrap="square" anchor="t">
-            <a:spAutoFit/>
-          </a:bodyPr>
-          <a:lstStyle/>
-          <a:p>
-            <a:pPr algn="l"/>
-            <a:r>
-              <a:rPr lang="en-PH" sz="1600" b="1" i="0" dirty="0">
-                <a:solidFill>
-                  <a:srgbClr val="DD8452"/>
-                </a:solidFill>
-                <a:latin typeface="Calibri"/>
-              </a:rPr>
-              <a:t>How we chose k</a:t>
-            </a:r>
-            <a:endParaRPr sz="1600" b="1" i="0" dirty="0">
-              <a:solidFill>
-                <a:srgbClr val="DD8452"/>
-              </a:solidFill>
-              <a:latin typeface="Calibri"/>
-            </a:endParaRPr>
-          </a:p>
-        </p:txBody>
-      </p:sp>
-      <p:sp>
-        <p:nvSpPr>
-          <p:cNvPr id="13" name="TextBox 12"/>
-          <p:cNvSpPr txBox="1"/>
-          <p:nvPr/>
-        </p:nvSpPr>
-        <p:spPr>
-          <a:xfrm>
-            <a:off x="8092440" y="5029200"/>
-            <a:ext cx="3566160" cy="1006301"/>
-          </a:xfrm>
-          <a:prstGeom prst="rect">
-            <a:avLst/>
-          </a:prstGeom>
-          <a:noFill/>
-        </p:spPr>
-        <p:txBody>
-          <a:bodyPr wrap="square">
-            <a:spAutoFit/>
-          </a:bodyPr>
-          <a:lstStyle/>
+              <a:t>•  Balances precision and recall.</a:t>
+            </a:r>
+          </a:p>
           <a:p>
             <a:pPr algn="l">
               <a:lnSpc>
@@ -7282,57 +7192,14 @@
               </a:spcAft>
             </a:pPr>
             <a:r>
-              <a:rPr sz="1200" dirty="0">
+              <a:rPr sz="1200">
                 <a:solidFill>
                   <a:srgbClr val="1A1A1A"/>
                 </a:solidFill>
                 <a:latin typeface="Calibri"/>
               </a:rPr>
-              <a:t>•  </a:t>
-            </a:r>
-            <a:r>
-              <a:rPr lang="en-US" sz="1200" dirty="0">
-                <a:solidFill>
-                  <a:srgbClr val="1A1A1A"/>
-                </a:solidFill>
-                <a:latin typeface="Calibri"/>
-              </a:rPr>
-              <a:t>F1 to find the peak region (k ≈ 3–9), avoiding both extremes.</a:t>
-            </a:r>
-          </a:p>
-          <a:p>
-            <a:pPr algn="l">
-              <a:lnSpc>
-                <a:spcPct val="115000"/>
-              </a:lnSpc>
-              <a:spcAft>
-                <a:spcPts val="600"/>
-              </a:spcAft>
-            </a:pPr>
-            <a:r>
-              <a:rPr sz="1200" dirty="0">
-                <a:solidFill>
-                  <a:srgbClr val="1A1A1A"/>
-                </a:solidFill>
-                <a:latin typeface="Calibri"/>
-              </a:rPr>
-              <a:t>•  </a:t>
-            </a:r>
-            <a:r>
-              <a:rPr lang="en-US" sz="1200" dirty="0">
-                <a:solidFill>
-                  <a:srgbClr val="1A1A1A"/>
-                </a:solidFill>
-                <a:latin typeface="Calibri"/>
-              </a:rPr>
-              <a:t>Precision to pick within it → k = 7 — a confident, conservative classifier.</a:t>
-            </a:r>
-            <a:endParaRPr sz="1200" dirty="0">
-              <a:solidFill>
-                <a:srgbClr val="1A1A1A"/>
-              </a:solidFill>
-              <a:latin typeface="Calibri"/>
-            </a:endParaRPr>
+              <a:t>•  The right metric when both false positives and false negatives matter.</a:t>
+            </a:r>
           </a:p>
         </p:txBody>
       </p:sp>
@@ -7345,7 +7212,7 @@
         <p:spPr>
           <a:xfrm>
             <a:off x="457200" y="6492240"/>
-            <a:ext cx="7315200" cy="246221"/>
+            <a:ext cx="7315200" cy="274320"/>
           </a:xfrm>
           <a:prstGeom prst="rect">
             <a:avLst/>
@@ -7360,38 +7227,14 @@
           <a:p>
             <a:pPr algn="l"/>
             <a:r>
-              <a:rPr sz="1000" b="0" i="0" dirty="0">
+              <a:rPr sz="1000" b="0" i="0">
                 <a:solidFill>
                   <a:srgbClr val="556070"/>
                 </a:solidFill>
                 <a:latin typeface="Calibri"/>
               </a:rPr>
-              <a:t>Online Shoppers Purchase-Intention Capstone  |  </a:t>
-            </a:r>
-            <a:r>
-              <a:rPr sz="1000" b="0" i="0" dirty="0" err="1">
-                <a:solidFill>
-                  <a:srgbClr val="556070"/>
-                </a:solidFill>
-                <a:latin typeface="Calibri"/>
-              </a:rPr>
-              <a:t>kN</a:t>
-            </a:r>
-            <a:r>
-              <a:rPr lang="en-US" sz="1000" b="0" i="0" dirty="0" err="1">
-                <a:solidFill>
-                  <a:srgbClr val="556070"/>
-                </a:solidFill>
-                <a:latin typeface="Calibri"/>
-              </a:rPr>
-              <a:t>N</a:t>
-            </a:r>
-            <a:endParaRPr sz="1000" b="0" i="0" dirty="0">
-              <a:solidFill>
-                <a:srgbClr val="556070"/>
-              </a:solidFill>
-              <a:latin typeface="Calibri"/>
-            </a:endParaRPr>
+              <a:t>Online Shoppers Purchase-Intention Capstone  |  kNN from Scratch</a:t>
+            </a:r>
           </a:p>
         </p:txBody>
       </p:sp>
@@ -7425,41 +7268,11 @@
                 </a:solidFill>
                 <a:latin typeface="Calibri"/>
               </a:rPr>
-              <a:t>Slide 13</a:t>
-            </a:r>
-          </a:p>
-        </p:txBody>
-      </p:sp>
-      <p:pic>
-        <p:nvPicPr>
-          <p:cNvPr id="17" name="Picture 16">
-            <a:extLst>
-              <a:ext uri="{FF2B5EF4-FFF2-40B4-BE49-F238E27FC236}">
-                <a16:creationId xmlns:a16="http://schemas.microsoft.com/office/drawing/2014/main" id="{F1B267E2-0090-66C2-4F43-9A070DDC2241}"/>
-              </a:ext>
-            </a:extLst>
-          </p:cNvPr>
-          <p:cNvPicPr>
-            <a:picLocks noChangeAspect="1"/>
-          </p:cNvPicPr>
-          <p:nvPr/>
-        </p:nvPicPr>
-        <p:blipFill>
-          <a:blip r:embed="rId2"/>
-          <a:stretch>
-            <a:fillRect/>
-          </a:stretch>
-        </p:blipFill>
-        <p:spPr>
-          <a:xfrm>
-            <a:off x="457200" y="1904729"/>
-            <a:ext cx="7315200" cy="3948596"/>
-          </a:xfrm>
-          <a:prstGeom prst="rect">
-            <a:avLst/>
-          </a:prstGeom>
-        </p:spPr>
-      </p:pic>
+              <a:t>Slide 14</a:t>
+            </a:r>
+          </a:p>
+        </p:txBody>
+      </p:sp>
     </p:spTree>
   </p:cSld>
   <p:clrMapOvr>
@@ -8542,7 +8355,7 @@
         <p:spPr>
           <a:xfrm>
             <a:off x="457200" y="6492240"/>
-            <a:ext cx="7315200" cy="246221"/>
+            <a:ext cx="7315200" cy="274320"/>
           </a:xfrm>
           <a:prstGeom prst="rect">
             <a:avLst/>
@@ -8557,29 +8370,14 @@
           <a:p>
             <a:pPr algn="l"/>
             <a:r>
-              <a:rPr sz="1000" b="0" i="0" dirty="0">
+              <a:rPr sz="1000" b="0" i="0">
                 <a:solidFill>
                   <a:srgbClr val="556070"/>
                 </a:solidFill>
                 <a:latin typeface="Calibri"/>
               </a:rPr>
-              <a:t>Online Shoppers Purchase-Intention Capstone  |  </a:t>
-            </a:r>
-            <a:r>
-              <a:rPr sz="1000" b="0" i="0" dirty="0" err="1">
-                <a:solidFill>
-                  <a:srgbClr val="556070"/>
-                </a:solidFill>
-                <a:latin typeface="Calibri"/>
-              </a:rPr>
-              <a:t>kNN</a:t>
-            </a:r>
-            <a:endParaRPr sz="1000" b="0" i="0" dirty="0">
-              <a:solidFill>
-                <a:srgbClr val="556070"/>
-              </a:solidFill>
-              <a:latin typeface="Calibri"/>
-            </a:endParaRPr>
+              <a:t>Online Shoppers Purchase-Intention Capstone  |  kNN from Scratch</a:t>
+            </a:r>
           </a:p>
         </p:txBody>
       </p:sp>
@@ -8613,7 +8411,7 @@
                 </a:solidFill>
                 <a:latin typeface="Calibri"/>
               </a:rPr>
-              <a:t>Slide 14</a:t>
+              <a:t>Slide 15</a:t>
             </a:r>
           </a:p>
         </p:txBody>
@@ -8882,7 +8680,7 @@
       </p:sp>
       <p:pic>
         <p:nvPicPr>
-          <p:cNvPr id="8" name="Picture 7"/>
+          <p:cNvPr id="8" name="Picture 7" descr="fig8_final_confusion_matrix.png"/>
           <p:cNvPicPr>
             <a:picLocks noChangeAspect="1"/>
           </p:cNvPicPr>
@@ -8890,13 +8688,14 @@
         </p:nvPicPr>
         <p:blipFill>
           <a:blip r:embed="rId2"/>
-          <a:srcRect/>
-          <a:stretch/>
+          <a:stretch>
+            <a:fillRect/>
+          </a:stretch>
         </p:blipFill>
         <p:spPr>
           <a:xfrm>
             <a:off x="365760" y="1920240"/>
-            <a:ext cx="8229599" cy="2886678"/>
+            <a:ext cx="8229600" cy="2886678"/>
           </a:xfrm>
           <a:prstGeom prst="rect">
             <a:avLst/>
@@ -9074,7 +8873,7 @@
         <p:spPr>
           <a:xfrm>
             <a:off x="457200" y="6492240"/>
-            <a:ext cx="7315200" cy="246221"/>
+            <a:ext cx="7315200" cy="274320"/>
           </a:xfrm>
           <a:prstGeom prst="rect">
             <a:avLst/>
@@ -9089,29 +8888,14 @@
           <a:p>
             <a:pPr algn="l"/>
             <a:r>
-              <a:rPr sz="1000" b="0" i="0" dirty="0">
+              <a:rPr sz="1000" b="0" i="0">
                 <a:solidFill>
                   <a:srgbClr val="556070"/>
                 </a:solidFill>
                 <a:latin typeface="Calibri"/>
               </a:rPr>
-              <a:t>Online Shoppers Purchase-Intention Capstone  |  </a:t>
-            </a:r>
-            <a:r>
-              <a:rPr sz="1000" b="0" i="0" dirty="0" err="1">
-                <a:solidFill>
-                  <a:srgbClr val="556070"/>
-                </a:solidFill>
-                <a:latin typeface="Calibri"/>
-              </a:rPr>
-              <a:t>kNN</a:t>
-            </a:r>
-            <a:endParaRPr sz="1000" b="0" i="0" dirty="0">
-              <a:solidFill>
-                <a:srgbClr val="556070"/>
-              </a:solidFill>
-              <a:latin typeface="Calibri"/>
-            </a:endParaRPr>
+              <a:t>Online Shoppers Purchase-Intention Capstone  |  kNN from Scratch</a:t>
+            </a:r>
           </a:p>
         </p:txBody>
       </p:sp>
@@ -9145,7 +8929,7 @@
                 </a:solidFill>
                 <a:latin typeface="Calibri"/>
               </a:rPr>
-              <a:t>Slide 15</a:t>
+              <a:t>Slide 16</a:t>
             </a:r>
           </a:p>
         </p:txBody>
@@ -9307,7 +9091,7 @@
         <p:spPr>
           <a:xfrm>
             <a:off x="457200" y="685800"/>
-            <a:ext cx="11247120" cy="553998"/>
+            <a:ext cx="11247120" cy="640080"/>
           </a:xfrm>
           <a:prstGeom prst="rect">
             <a:avLst/>
@@ -9322,20 +9106,14 @@
           <a:p>
             <a:pPr algn="l"/>
             <a:r>
-              <a:rPr lang="en-US" sz="3000" b="1" i="0" dirty="0">
+              <a:rPr sz="3000" b="1" i="0">
                 <a:solidFill>
                   <a:srgbClr val="1F3A5F"/>
                 </a:solidFill>
                 <a:latin typeface="Calibri"/>
               </a:rPr>
-              <a:t>Validation: Stable Across Folds — but a Simple Rule Beats Us</a:t>
-            </a:r>
-            <a:endParaRPr sz="3000" b="1" i="0" dirty="0">
-              <a:solidFill>
-                <a:srgbClr val="1F3A5F"/>
-              </a:solidFill>
-              <a:latin typeface="Calibri"/>
-            </a:endParaRPr>
+              <a:t>Validation: Stable Across Folds, and Beats the Baselines</a:t>
+            </a:r>
           </a:p>
         </p:txBody>
       </p:sp>
@@ -9348,7 +9126,7 @@
         <p:spPr>
           <a:xfrm>
             <a:off x="457200" y="1280160"/>
-            <a:ext cx="11247120" cy="323165"/>
+            <a:ext cx="11247120" cy="365760"/>
           </a:xfrm>
           <a:prstGeom prst="rect">
             <a:avLst/>
@@ -9363,56 +9141,14 @@
           <a:p>
             <a:pPr algn="l"/>
             <a:r>
-              <a:rPr lang="en-US" sz="1500" b="0" i="1" dirty="0">
+              <a:rPr sz="1500" b="0" i="1">
                 <a:solidFill>
                   <a:srgbClr val="556070"/>
                 </a:solidFill>
                 <a:latin typeface="Calibri"/>
               </a:rPr>
-              <a:t>5-fold stratified CV confirms stability; but a one-feature </a:t>
-            </a:r>
-            <a:r>
-              <a:rPr lang="en-US" sz="1500" b="0" i="1" dirty="0" err="1">
-                <a:solidFill>
-                  <a:srgbClr val="556070"/>
-                </a:solidFill>
-                <a:latin typeface="Calibri"/>
-              </a:rPr>
-              <a:t>PageValues</a:t>
-            </a:r>
-            <a:r>
-              <a:rPr lang="en-US" sz="1500" b="0" i="1" dirty="0">
-                <a:solidFill>
-                  <a:srgbClr val="556070"/>
-                </a:solidFill>
-                <a:latin typeface="Calibri"/>
-              </a:rPr>
-              <a:t> rule outperforms our </a:t>
-            </a:r>
-            <a:r>
-              <a:rPr lang="en-US" sz="1500" b="0" i="1" dirty="0" err="1">
-                <a:solidFill>
-                  <a:srgbClr val="556070"/>
-                </a:solidFill>
-                <a:latin typeface="Calibri"/>
-              </a:rPr>
-              <a:t>kNN</a:t>
-            </a:r>
-            <a:r>
-              <a:rPr lang="en-US" sz="1500" b="0" i="1" dirty="0">
-                <a:solidFill>
-                  <a:srgbClr val="556070"/>
-                </a:solidFill>
-                <a:latin typeface="Calibri"/>
-              </a:rPr>
-              <a:t>.</a:t>
-            </a:r>
-            <a:endParaRPr sz="1500" b="0" i="1" dirty="0">
-              <a:solidFill>
-                <a:srgbClr val="556070"/>
-              </a:solidFill>
-              <a:latin typeface="Calibri"/>
-            </a:endParaRPr>
+              <a:t>5-fold stratified CV plus two principled baselines confirm the result is real.</a:t>
+            </a:r>
           </a:p>
         </p:txBody>
       </p:sp>
@@ -9573,7 +9309,7 @@
               </a:spcAft>
             </a:pPr>
             <a:r>
-              <a:rPr sz="1300" dirty="0">
+              <a:rPr sz="1300">
                 <a:solidFill>
                   <a:srgbClr val="1A1A1A"/>
                 </a:solidFill>
@@ -9592,7 +9328,7 @@
               </a:spcAft>
             </a:pPr>
             <a:r>
-              <a:rPr sz="1300" dirty="0">
+              <a:rPr sz="1300">
                 <a:solidFill>
                   <a:srgbClr val="1A1A1A"/>
                 </a:solidFill>
@@ -9611,7 +9347,7 @@
               </a:spcAft>
             </a:pPr>
             <a:r>
-              <a:rPr sz="1300" dirty="0">
+              <a:rPr sz="1300">
                 <a:solidFill>
                   <a:srgbClr val="1A1A1A"/>
                 </a:solidFill>
@@ -9630,7 +9366,7 @@
               </a:spcAft>
             </a:pPr>
             <a:r>
-              <a:rPr sz="1300" dirty="0">
+              <a:rPr sz="1300">
                 <a:solidFill>
                   <a:srgbClr val="1A1A1A"/>
                 </a:solidFill>
@@ -10290,7 +10026,7 @@
         <p:spPr>
           <a:xfrm>
             <a:off x="6400800" y="4754880"/>
-            <a:ext cx="5212080" cy="646331"/>
+            <a:ext cx="5212080" cy="1280160"/>
           </a:xfrm>
           <a:prstGeom prst="rect">
             <a:avLst/>
@@ -10305,133 +10041,49 @@
           <a:p>
             <a:pPr algn="l"/>
             <a:r>
-              <a:rPr lang="en-US" sz="1200" b="0" i="1" dirty="0" err="1">
+              <a:rPr sz="1200" b="0" i="1">
                 <a:solidFill>
                   <a:srgbClr val="556070"/>
                 </a:solidFill>
                 <a:latin typeface="Calibri"/>
               </a:rPr>
-              <a:t>kNN</a:t>
-            </a:r>
-            <a:r>
-              <a:rPr lang="en-US" sz="1200" b="0" i="1" dirty="0">
+              <a:t>kNN beats both baselines on F1 — a real signal, not memorization of one dominant feature.</a:t>
+            </a:r>
+          </a:p>
+        </p:txBody>
+      </p:sp>
+      <p:sp>
+        <p:nvSpPr>
+          <p:cNvPr id="29" name="TextBox 28"/>
+          <p:cNvSpPr txBox="1"/>
+          <p:nvPr/>
+        </p:nvSpPr>
+        <p:spPr>
+          <a:xfrm>
+            <a:off x="457200" y="6492240"/>
+            <a:ext cx="7315200" cy="274320"/>
+          </a:xfrm>
+          <a:prstGeom prst="rect">
+            <a:avLst/>
+          </a:prstGeom>
+          <a:noFill/>
+        </p:spPr>
+        <p:txBody>
+          <a:bodyPr wrap="square" anchor="t">
+            <a:spAutoFit/>
+          </a:bodyPr>
+          <a:lstStyle/>
+          <a:p>
+            <a:pPr algn="l"/>
+            <a:r>
+              <a:rPr sz="1000" b="0" i="0">
                 <a:solidFill>
                   <a:srgbClr val="556070"/>
                 </a:solidFill>
                 <a:latin typeface="Calibri"/>
               </a:rPr>
-              <a:t> beats both baselines on F1 — a real signal… → The </a:t>
-            </a:r>
-            <a:r>
-              <a:rPr lang="en-US" sz="1200" b="0" i="1" dirty="0" err="1">
-                <a:solidFill>
-                  <a:srgbClr val="556070"/>
-                </a:solidFill>
-                <a:latin typeface="Calibri"/>
-              </a:rPr>
-              <a:t>PageValues</a:t>
-            </a:r>
-            <a:r>
-              <a:rPr lang="en-US" sz="1200" b="0" i="1" dirty="0">
-                <a:solidFill>
-                  <a:srgbClr val="556070"/>
-                </a:solidFill>
-                <a:latin typeface="Calibri"/>
-              </a:rPr>
-              <a:t> rule beats </a:t>
-            </a:r>
-            <a:r>
-              <a:rPr lang="en-US" sz="1200" b="0" i="1" dirty="0" err="1">
-                <a:solidFill>
-                  <a:srgbClr val="556070"/>
-                </a:solidFill>
-                <a:latin typeface="Calibri"/>
-              </a:rPr>
-              <a:t>kNN</a:t>
-            </a:r>
-            <a:r>
-              <a:rPr lang="en-US" sz="1200" b="0" i="1" dirty="0">
-                <a:solidFill>
-                  <a:srgbClr val="556070"/>
-                </a:solidFill>
-                <a:latin typeface="Calibri"/>
-              </a:rPr>
-              <a:t> on F1 — </a:t>
-            </a:r>
-            <a:r>
-              <a:rPr lang="en-US" sz="1200" b="0" i="1" dirty="0" err="1">
-                <a:solidFill>
-                  <a:srgbClr val="556070"/>
-                </a:solidFill>
-                <a:latin typeface="Calibri"/>
-              </a:rPr>
-              <a:t>kNN</a:t>
-            </a:r>
-            <a:r>
-              <a:rPr lang="en-US" sz="1200" b="0" i="1" dirty="0">
-                <a:solidFill>
-                  <a:srgbClr val="556070"/>
-                </a:solidFill>
-                <a:latin typeface="Calibri"/>
-              </a:rPr>
-              <a:t> dilutes the dominant signal across 28 features. A humbling, instructive result.</a:t>
-            </a:r>
-            <a:endParaRPr sz="1200" b="0" i="1" dirty="0">
-              <a:solidFill>
-                <a:srgbClr val="556070"/>
-              </a:solidFill>
-              <a:latin typeface="Calibri"/>
-            </a:endParaRPr>
-          </a:p>
-        </p:txBody>
-      </p:sp>
-      <p:sp>
-        <p:nvSpPr>
-          <p:cNvPr id="29" name="TextBox 28"/>
-          <p:cNvSpPr txBox="1"/>
-          <p:nvPr/>
-        </p:nvSpPr>
-        <p:spPr>
-          <a:xfrm>
-            <a:off x="457200" y="6492240"/>
-            <a:ext cx="7315200" cy="246221"/>
-          </a:xfrm>
-          <a:prstGeom prst="rect">
-            <a:avLst/>
-          </a:prstGeom>
-          <a:noFill/>
-        </p:spPr>
-        <p:txBody>
-          <a:bodyPr wrap="square" anchor="t">
-            <a:spAutoFit/>
-          </a:bodyPr>
-          <a:lstStyle/>
-          <a:p>
-            <a:pPr algn="l"/>
-            <a:r>
-              <a:rPr sz="1000" b="0" i="0" dirty="0">
-                <a:solidFill>
-                  <a:srgbClr val="556070"/>
-                </a:solidFill>
-                <a:latin typeface="Calibri"/>
-              </a:rPr>
-              <a:t>Online Shoppers Purchase-Intention Capstone  |  </a:t>
-            </a:r>
-            <a:r>
-              <a:rPr sz="1000" b="0" i="0" dirty="0" err="1">
-                <a:solidFill>
-                  <a:srgbClr val="556070"/>
-                </a:solidFill>
-                <a:latin typeface="Calibri"/>
-              </a:rPr>
-              <a:t>kNN</a:t>
-            </a:r>
-            <a:endParaRPr sz="1000" b="0" i="0" dirty="0">
-              <a:solidFill>
-                <a:srgbClr val="556070"/>
-              </a:solidFill>
-              <a:latin typeface="Calibri"/>
-            </a:endParaRPr>
+              <a:t>Online Shoppers Purchase-Intention Capstone  |  kNN from Scratch</a:t>
+            </a:r>
           </a:p>
         </p:txBody>
       </p:sp>
@@ -10465,7 +10117,7 @@
                 </a:solidFill>
                 <a:latin typeface="Calibri"/>
               </a:rPr>
-              <a:t>Slide 16</a:t>
+              <a:t>Slide 17</a:t>
             </a:r>
           </a:p>
         </p:txBody>
@@ -11065,7 +10717,7 @@
         <p:spPr>
           <a:xfrm>
             <a:off x="457200" y="6492240"/>
-            <a:ext cx="7315200" cy="246221"/>
+            <a:ext cx="7315200" cy="274320"/>
           </a:xfrm>
           <a:prstGeom prst="rect">
             <a:avLst/>
@@ -11080,29 +10732,14 @@
           <a:p>
             <a:pPr algn="l"/>
             <a:r>
-              <a:rPr sz="1000" b="0" i="0" dirty="0">
+              <a:rPr sz="1000" b="0" i="0">
                 <a:solidFill>
                   <a:srgbClr val="556070"/>
                 </a:solidFill>
                 <a:latin typeface="Calibri"/>
               </a:rPr>
-              <a:t>Online Shoppers Purchase-Intention Capstone  |  </a:t>
-            </a:r>
-            <a:r>
-              <a:rPr sz="1000" b="0" i="0" dirty="0" err="1">
-                <a:solidFill>
-                  <a:srgbClr val="556070"/>
-                </a:solidFill>
-                <a:latin typeface="Calibri"/>
-              </a:rPr>
-              <a:t>kNN</a:t>
-            </a:r>
-            <a:endParaRPr sz="1000" b="0" i="0" dirty="0">
-              <a:solidFill>
-                <a:srgbClr val="556070"/>
-              </a:solidFill>
-              <a:latin typeface="Calibri"/>
-            </a:endParaRPr>
+              <a:t>Online Shoppers Purchase-Intention Capstone  |  kNN from Scratch</a:t>
+            </a:r>
           </a:p>
         </p:txBody>
       </p:sp>
@@ -11136,7 +10773,7 @@
                 </a:solidFill>
                 <a:latin typeface="Calibri"/>
               </a:rPr>
-              <a:t>Slide 17</a:t>
+              <a:t>Slide 18</a:t>
             </a:r>
           </a:p>
         </p:txBody>
@@ -11348,7 +10985,7 @@
           <a:p>
             <a:pPr algn="l"/>
             <a:r>
-              <a:rPr sz="1500" b="0" i="1" dirty="0">
+              <a:rPr sz="1500" b="0" i="1">
                 <a:solidFill>
                   <a:srgbClr val="556070"/>
                 </a:solidFill>
@@ -11506,7 +11143,7 @@
           <a:p>
             <a:pPr algn="l"/>
             <a:r>
-              <a:rPr sz="1200" b="0" i="0" dirty="0">
+              <a:rPr sz="1200" b="0" i="0">
                 <a:solidFill>
                   <a:srgbClr val="1A1A1A"/>
                 </a:solidFill>
@@ -11734,7 +11371,7 @@
           <a:p>
             <a:pPr algn="l"/>
             <a:r>
-              <a:rPr sz="1200" b="0" i="0" dirty="0">
+              <a:rPr sz="1200" b="0" i="0">
                 <a:solidFill>
                   <a:srgbClr val="1A1A1A"/>
                 </a:solidFill>
@@ -11797,8 +11434,8 @@
         </p:nvSpPr>
         <p:spPr>
           <a:xfrm>
-            <a:off x="731520" y="4148697"/>
-            <a:ext cx="3108960" cy="553998"/>
+            <a:off x="731520" y="4105656"/>
+            <a:ext cx="3108960" cy="640080"/>
           </a:xfrm>
           <a:prstGeom prst="rect">
             <a:avLst/>
@@ -11813,38 +11450,14 @@
           <a:p>
             <a:pPr algn="l"/>
             <a:r>
-              <a:rPr lang="en-US" sz="1500" b="1" i="0" dirty="0">
+              <a:rPr sz="1500" b="1" i="0">
                 <a:solidFill>
                   <a:srgbClr val="1F3A5F"/>
                 </a:solidFill>
                 <a:latin typeface="Calibri"/>
               </a:rPr>
-              <a:t>A one-feature </a:t>
-            </a:r>
-            <a:r>
-              <a:rPr lang="en-US" sz="1500" b="1" i="0" dirty="0" err="1">
-                <a:solidFill>
-                  <a:srgbClr val="1F3A5F"/>
-                </a:solidFill>
-                <a:latin typeface="Calibri"/>
-              </a:rPr>
-              <a:t>PageValues</a:t>
-            </a:r>
-            <a:r>
-              <a:rPr lang="en-US" sz="1500" b="1" i="0" dirty="0">
-                <a:solidFill>
-                  <a:srgbClr val="1F3A5F"/>
-                </a:solidFill>
-                <a:latin typeface="Calibri"/>
-              </a:rPr>
-              <a:t> rule beats the full model </a:t>
-            </a:r>
-            <a:endParaRPr sz="1500" b="1" i="0" dirty="0">
-              <a:solidFill>
-                <a:srgbClr val="1F3A5F"/>
-              </a:solidFill>
-              <a:latin typeface="Calibri"/>
-            </a:endParaRPr>
+              <a:t>k tuned on the test set</a:t>
+            </a:r>
           </a:p>
         </p:txBody>
       </p:sp>
@@ -11856,8 +11469,8 @@
         </p:nvSpPr>
         <p:spPr>
           <a:xfrm>
-            <a:off x="3931920" y="4287196"/>
-            <a:ext cx="7772400" cy="276999"/>
+            <a:off x="3931920" y="4105656"/>
+            <a:ext cx="7772400" cy="640080"/>
           </a:xfrm>
           <a:prstGeom prst="rect">
             <a:avLst/>
@@ -11872,29 +11485,14 @@
           <a:p>
             <a:pPr algn="l"/>
             <a:r>
-              <a:rPr lang="en-US" sz="1200" b="0" i="0" dirty="0" err="1">
+              <a:rPr sz="1200" b="0" i="0">
                 <a:solidFill>
                   <a:srgbClr val="1A1A1A"/>
                 </a:solidFill>
                 <a:latin typeface="Calibri"/>
               </a:rPr>
-              <a:t>kNN</a:t>
-            </a:r>
-            <a:r>
-              <a:rPr lang="en-US" sz="1200" b="0" i="0" dirty="0">
-                <a:solidFill>
-                  <a:srgbClr val="1A1A1A"/>
-                </a:solidFill>
-                <a:latin typeface="Calibri"/>
-              </a:rPr>
-              <a:t> doesn't do feature selection.</a:t>
-            </a:r>
-            <a:endParaRPr sz="1200" b="0" i="0" dirty="0">
-              <a:solidFill>
-                <a:srgbClr val="1A1A1A"/>
-              </a:solidFill>
-              <a:latin typeface="Calibri"/>
-            </a:endParaRPr>
+              <a:t>Best F1 was selected directly on the test set. A clean protocol would use a separate validation split. CV partially mitigates this.</a:t>
+            </a:r>
           </a:p>
         </p:txBody>
       </p:sp>
@@ -12135,7 +11733,7 @@
         <p:spPr>
           <a:xfrm>
             <a:off x="457200" y="6492240"/>
-            <a:ext cx="7315200" cy="246221"/>
+            <a:ext cx="7315200" cy="274320"/>
           </a:xfrm>
           <a:prstGeom prst="rect">
             <a:avLst/>
@@ -12150,29 +11748,14 @@
           <a:p>
             <a:pPr algn="l"/>
             <a:r>
-              <a:rPr sz="1000" b="0" i="0" dirty="0">
+              <a:rPr sz="1000" b="0" i="0">
                 <a:solidFill>
                   <a:srgbClr val="556070"/>
                 </a:solidFill>
                 <a:latin typeface="Calibri"/>
               </a:rPr>
-              <a:t>Online Shoppers Purchase-Intention Capstone  |  </a:t>
-            </a:r>
-            <a:r>
-              <a:rPr sz="1000" b="0" i="0" dirty="0" err="1">
-                <a:solidFill>
-                  <a:srgbClr val="556070"/>
-                </a:solidFill>
-                <a:latin typeface="Calibri"/>
-              </a:rPr>
-              <a:t>kNN</a:t>
-            </a:r>
-            <a:endParaRPr sz="1000" b="0" i="0" dirty="0">
-              <a:solidFill>
-                <a:srgbClr val="556070"/>
-              </a:solidFill>
-              <a:latin typeface="Calibri"/>
-            </a:endParaRPr>
+              <a:t>Online Shoppers Purchase-Intention Capstone  |  kNN from Scratch</a:t>
+            </a:r>
           </a:p>
         </p:txBody>
       </p:sp>
@@ -12206,7 +11789,7 @@
                 </a:solidFill>
                 <a:latin typeface="Calibri"/>
               </a:rPr>
-              <a:t>Slide 18</a:t>
+              <a:t>Slide 19</a:t>
             </a:r>
           </a:p>
         </p:txBody>
@@ -13376,7 +12959,7 @@
         <p:spPr>
           <a:xfrm>
             <a:off x="457200" y="6492240"/>
-            <a:ext cx="7315200" cy="246221"/>
+            <a:ext cx="7315200" cy="274320"/>
           </a:xfrm>
           <a:prstGeom prst="rect">
             <a:avLst/>
@@ -13391,29 +12974,14 @@
           <a:p>
             <a:pPr algn="l"/>
             <a:r>
-              <a:rPr sz="1000" b="0" i="0" dirty="0">
+              <a:rPr sz="1000" b="0" i="0">
                 <a:solidFill>
                   <a:srgbClr val="556070"/>
                 </a:solidFill>
                 <a:latin typeface="Calibri"/>
               </a:rPr>
-              <a:t>Online Shoppers Purchase-Intention Capstone  |  </a:t>
-            </a:r>
-            <a:r>
-              <a:rPr sz="1000" b="0" i="0" dirty="0" err="1">
-                <a:solidFill>
-                  <a:srgbClr val="556070"/>
-                </a:solidFill>
-                <a:latin typeface="Calibri"/>
-              </a:rPr>
-              <a:t>kNN</a:t>
-            </a:r>
-            <a:endParaRPr sz="1000" b="0" i="0" dirty="0">
-              <a:solidFill>
-                <a:srgbClr val="556070"/>
-              </a:solidFill>
-              <a:latin typeface="Calibri"/>
-            </a:endParaRPr>
+              <a:t>Online Shoppers Purchase-Intention Capstone  |  kNN from Scratch</a:t>
+            </a:r>
           </a:p>
         </p:txBody>
       </p:sp>
@@ -13447,7 +13015,7 @@
                 </a:solidFill>
                 <a:latin typeface="Calibri"/>
               </a:rPr>
-              <a:t>Slide 19</a:t>
+              <a:t>Slide 20</a:t>
             </a:r>
           </a:p>
         </p:txBody>
@@ -13644,7 +13212,7 @@
         <p:spPr>
           <a:xfrm>
             <a:off x="457200" y="1280160"/>
-            <a:ext cx="11247120" cy="323165"/>
+            <a:ext cx="11247120" cy="365760"/>
           </a:xfrm>
           <a:prstGeom prst="rect">
             <a:avLst/>
@@ -13659,22 +13227,13 @@
           <a:p>
             <a:pPr algn="l"/>
             <a:r>
-              <a:rPr lang="en-US" sz="1500" i="1" dirty="0">
+              <a:rPr sz="1500" b="0" i="1">
                 <a:solidFill>
                   <a:srgbClr val="556070"/>
                 </a:solidFill>
                 <a:latin typeface="Calibri"/>
               </a:rPr>
-              <a:t>F</a:t>
-            </a:r>
-            <a:r>
-              <a:rPr sz="1500" b="0" i="1" dirty="0">
-                <a:solidFill>
-                  <a:srgbClr val="556070"/>
-                </a:solidFill>
-                <a:latin typeface="Calibri"/>
-              </a:rPr>
-              <a:t>rom the question to the answer to the caveats.</a:t>
+              <a:t>Step-by-step problem solving — from the question to the answer to the caveats.</a:t>
             </a:r>
           </a:p>
         </p:txBody>
@@ -15073,7 +14632,7 @@
         <p:spPr>
           <a:xfrm>
             <a:off x="457200" y="6492240"/>
-            <a:ext cx="7315200" cy="246221"/>
+            <a:ext cx="7315200" cy="274320"/>
           </a:xfrm>
           <a:prstGeom prst="rect">
             <a:avLst/>
@@ -15088,29 +14647,14 @@
           <a:p>
             <a:pPr algn="l"/>
             <a:r>
-              <a:rPr sz="1000" b="0" i="0" dirty="0">
+              <a:rPr sz="1000" b="0" i="0">
                 <a:solidFill>
                   <a:srgbClr val="556070"/>
                 </a:solidFill>
                 <a:latin typeface="Calibri"/>
               </a:rPr>
-              <a:t>Online Shoppers Purchase-Intention Capstone  |  </a:t>
-            </a:r>
-            <a:r>
-              <a:rPr sz="1000" b="0" i="0" dirty="0" err="1">
-                <a:solidFill>
-                  <a:srgbClr val="556070"/>
-                </a:solidFill>
-                <a:latin typeface="Calibri"/>
-              </a:rPr>
-              <a:t>kNN</a:t>
-            </a:r>
-            <a:endParaRPr sz="1000" b="0" i="0" dirty="0">
-              <a:solidFill>
-                <a:srgbClr val="556070"/>
-              </a:solidFill>
-              <a:latin typeface="Calibri"/>
-            </a:endParaRPr>
+              <a:t>Online Shoppers Purchase-Intention Capstone  |  kNN from Scratch</a:t>
+            </a:r>
           </a:p>
         </p:txBody>
       </p:sp>
@@ -15444,7 +14988,7 @@
           <a:p>
             <a:pPr algn="ctr"/>
             <a:r>
-              <a:rPr sz="2000" b="1" i="0" dirty="0">
+              <a:rPr sz="2000" b="1" i="0">
                 <a:solidFill>
                   <a:srgbClr val="FFFFFF"/>
                 </a:solidFill>
@@ -15463,8 +15007,8 @@
         </p:nvSpPr>
         <p:spPr>
           <a:xfrm>
-            <a:off x="1417320" y="2413903"/>
-            <a:ext cx="10241280" cy="338554"/>
+            <a:off x="1417320" y="2194560"/>
+            <a:ext cx="10241280" cy="777240"/>
           </a:xfrm>
           <a:prstGeom prst="rect">
             <a:avLst/>
@@ -15479,49 +15023,13 @@
           <a:p>
             <a:pPr algn="l"/>
             <a:r>
-              <a:rPr sz="1600" b="0" i="0" dirty="0">
+              <a:rPr sz="1600" b="0" i="0">
                 <a:solidFill>
                   <a:srgbClr val="1A1A1A"/>
                 </a:solidFill>
                 <a:latin typeface="Calibri"/>
               </a:rPr>
-              <a:t>A </a:t>
-            </a:r>
-            <a:r>
-              <a:rPr sz="1600" b="0" i="0" dirty="0" err="1">
-                <a:solidFill>
-                  <a:srgbClr val="1A1A1A"/>
-                </a:solidFill>
-                <a:latin typeface="Calibri"/>
-              </a:rPr>
-              <a:t>kNN</a:t>
-            </a:r>
-            <a:r>
-              <a:rPr sz="1600" b="0" i="0" dirty="0">
-                <a:solidFill>
-                  <a:srgbClr val="1A1A1A"/>
-                </a:solidFill>
-                <a:latin typeface="Calibri"/>
-              </a:rPr>
-              <a:t> classifier</a:t>
-            </a:r>
-            <a:r>
-              <a:rPr lang="en-US" sz="1600" b="0" i="0" dirty="0">
-                <a:solidFill>
-                  <a:srgbClr val="1A1A1A"/>
-                </a:solidFill>
-                <a:latin typeface="Calibri"/>
-              </a:rPr>
-              <a:t> </a:t>
-            </a:r>
-            <a:r>
-              <a:rPr sz="1600" b="0" i="0" dirty="0">
-                <a:solidFill>
-                  <a:srgbClr val="1A1A1A"/>
-                </a:solidFill>
-                <a:latin typeface="Calibri"/>
-              </a:rPr>
-              <a:t>can learn real, transferable signal from web-session data.</a:t>
+              <a:t>A kNN classifier built from scratch can learn real, transferable signal from web-session data.</a:t>
             </a:r>
           </a:p>
         </p:txBody>
@@ -15629,7 +15137,7 @@
           <a:p>
             <a:pPr algn="l"/>
             <a:r>
-              <a:rPr sz="1600" b="0" i="0" dirty="0">
+              <a:rPr sz="1600" b="0" i="0">
                 <a:solidFill>
                   <a:srgbClr val="1A1A1A"/>
                 </a:solidFill>
@@ -15743,7 +15251,7 @@
           <a:p>
             <a:pPr algn="l"/>
             <a:r>
-              <a:rPr sz="1600" b="0" i="0" dirty="0">
+              <a:rPr sz="1600" b="0" i="0">
                 <a:solidFill>
                   <a:srgbClr val="1A1A1A"/>
                 </a:solidFill>
@@ -15857,7 +15365,7 @@
           <a:p>
             <a:pPr algn="l"/>
             <a:r>
-              <a:rPr sz="1600" b="0" i="0" dirty="0">
+              <a:rPr sz="1600" b="0" i="0">
                 <a:solidFill>
                   <a:srgbClr val="1A1A1A"/>
                 </a:solidFill>
@@ -15971,7 +15479,7 @@
           <a:p>
             <a:pPr algn="l"/>
             <a:r>
-              <a:rPr sz="1600" b="0" i="0" dirty="0">
+              <a:rPr sz="1600" b="0" i="0">
                 <a:solidFill>
                   <a:srgbClr val="1A1A1A"/>
                 </a:solidFill>
@@ -15991,7 +15499,7 @@
         <p:spPr>
           <a:xfrm>
             <a:off x="457200" y="6492240"/>
-            <a:ext cx="7315200" cy="246221"/>
+            <a:ext cx="7315200" cy="274320"/>
           </a:xfrm>
           <a:prstGeom prst="rect">
             <a:avLst/>
@@ -16006,29 +15514,14 @@
           <a:p>
             <a:pPr algn="l"/>
             <a:r>
-              <a:rPr sz="1000" b="0" i="0" dirty="0">
+              <a:rPr sz="1000" b="0" i="0">
                 <a:solidFill>
                   <a:srgbClr val="556070"/>
                 </a:solidFill>
                 <a:latin typeface="Calibri"/>
               </a:rPr>
-              <a:t>Online Shoppers Purchase-Intention Capstone  |  </a:t>
-            </a:r>
-            <a:r>
-              <a:rPr sz="1000" b="0" i="0" dirty="0" err="1">
-                <a:solidFill>
-                  <a:srgbClr val="556070"/>
-                </a:solidFill>
-                <a:latin typeface="Calibri"/>
-              </a:rPr>
-              <a:t>kNN</a:t>
-            </a:r>
-            <a:endParaRPr sz="1000" b="0" i="0" dirty="0">
-              <a:solidFill>
-                <a:srgbClr val="556070"/>
-              </a:solidFill>
-              <a:latin typeface="Calibri"/>
-            </a:endParaRPr>
+              <a:t>Online Shoppers Purchase-Intention Capstone  |  kNN from Scratch</a:t>
+            </a:r>
           </a:p>
         </p:txBody>
       </p:sp>
@@ -16062,7 +15555,7 @@
                 </a:solidFill>
                 <a:latin typeface="Calibri"/>
               </a:rPr>
-              <a:t>Slide 20</a:t>
+              <a:t>Slide 21</a:t>
             </a:r>
           </a:p>
         </p:txBody>
@@ -16260,7 +15753,7 @@
         <p:spPr>
           <a:xfrm>
             <a:off x="457200" y="4754880"/>
-            <a:ext cx="11247120" cy="369332"/>
+            <a:ext cx="11247120" cy="457200"/>
           </a:xfrm>
           <a:prstGeom prst="rect">
             <a:avLst/>
@@ -16275,29 +15768,49 @@
           <a:p>
             <a:pPr algn="ctr"/>
             <a:r>
-              <a:rPr sz="1800" b="0" i="0" dirty="0">
+              <a:rPr sz="1800" b="0" i="0">
                 <a:solidFill>
                   <a:srgbClr val="FFFFFF"/>
                 </a:solidFill>
                 <a:latin typeface="Calibri"/>
               </a:rPr>
-              <a:t>Predicting Online Shoppers’ Purchase Intention  •  </a:t>
-            </a:r>
-            <a:r>
-              <a:rPr sz="1800" b="0" i="0" dirty="0" err="1">
+              <a:t>Predicting Online Shoppers’ Purchase Intention  •  kNN from Scratch</a:t>
+            </a:r>
+          </a:p>
+        </p:txBody>
+      </p:sp>
+      <p:sp>
+        <p:nvSpPr>
+          <p:cNvPr id="7" name="TextBox 6"/>
+          <p:cNvSpPr txBox="1"/>
+          <p:nvPr/>
+        </p:nvSpPr>
+        <p:spPr>
+          <a:xfrm>
+            <a:off x="457200" y="5303520"/>
+            <a:ext cx="11247120" cy="457200"/>
+          </a:xfrm>
+          <a:prstGeom prst="rect">
+            <a:avLst/>
+          </a:prstGeom>
+          <a:noFill/>
+        </p:spPr>
+        <p:txBody>
+          <a:bodyPr wrap="square" anchor="t">
+            <a:spAutoFit/>
+          </a:bodyPr>
+          <a:lstStyle/>
+          <a:p>
+            <a:pPr algn="ctr"/>
+            <a:r>
+              <a:rPr sz="1400" b="0" i="1">
                 <a:solidFill>
                   <a:srgbClr val="FFFFFF"/>
                 </a:solidFill>
                 <a:latin typeface="Calibri"/>
               </a:rPr>
-              <a:t>kNN</a:t>
-            </a:r>
-            <a:endParaRPr sz="1800" b="0" i="0" dirty="0">
-              <a:solidFill>
-                <a:srgbClr val="FFFFFF"/>
-              </a:solidFill>
-              <a:latin typeface="Calibri"/>
-            </a:endParaRPr>
+              <a:t>Code, figures, and report bundled in the project folder.</a:t>
+            </a:r>
           </a:p>
         </p:txBody>
       </p:sp>
@@ -16508,7 +16021,7 @@
           <a:p>
             <a:pPr algn="l"/>
             <a:r>
-              <a:rPr sz="1500" b="0" i="1" dirty="0">
+              <a:rPr sz="1500" b="0" i="1">
                 <a:solidFill>
                   <a:srgbClr val="556070"/>
                 </a:solidFill>
@@ -16915,7 +16428,7 @@
         <p:spPr>
           <a:xfrm>
             <a:off x="457200" y="6492240"/>
-            <a:ext cx="7315200" cy="246221"/>
+            <a:ext cx="7315200" cy="274320"/>
           </a:xfrm>
           <a:prstGeom prst="rect">
             <a:avLst/>
@@ -16930,29 +16443,14 @@
           <a:p>
             <a:pPr algn="l"/>
             <a:r>
-              <a:rPr sz="1000" b="0" i="0" dirty="0">
+              <a:rPr sz="1000" b="0" i="0">
                 <a:solidFill>
                   <a:srgbClr val="556070"/>
                 </a:solidFill>
                 <a:latin typeface="Calibri"/>
               </a:rPr>
-              <a:t>Online Shoppers Purchase-Intention Capstone  |  </a:t>
-            </a:r>
-            <a:r>
-              <a:rPr sz="1000" b="0" i="0" dirty="0" err="1">
-                <a:solidFill>
-                  <a:srgbClr val="556070"/>
-                </a:solidFill>
-                <a:latin typeface="Calibri"/>
-              </a:rPr>
-              <a:t>kNN</a:t>
-            </a:r>
-            <a:endParaRPr sz="1000" b="0" i="0" dirty="0">
-              <a:solidFill>
-                <a:srgbClr val="556070"/>
-              </a:solidFill>
-              <a:latin typeface="Calibri"/>
-            </a:endParaRPr>
+              <a:t>Online Shoppers Purchase-Intention Capstone  |  kNN from Scratch</a:t>
+            </a:r>
           </a:p>
         </p:txBody>
       </p:sp>
@@ -18395,7 +17893,7 @@
         <p:spPr>
           <a:xfrm>
             <a:off x="457200" y="6492240"/>
-            <a:ext cx="7315200" cy="246221"/>
+            <a:ext cx="7315200" cy="274320"/>
           </a:xfrm>
           <a:prstGeom prst="rect">
             <a:avLst/>
@@ -18410,29 +17908,14 @@
           <a:p>
             <a:pPr algn="l"/>
             <a:r>
-              <a:rPr sz="1000" b="0" i="0" dirty="0">
+              <a:rPr sz="1000" b="0" i="0">
                 <a:solidFill>
                   <a:srgbClr val="556070"/>
                 </a:solidFill>
                 <a:latin typeface="Calibri"/>
               </a:rPr>
-              <a:t>Online Shoppers Purchase-Intention Capstone  |  </a:t>
-            </a:r>
-            <a:r>
-              <a:rPr sz="1000" b="0" i="0" dirty="0" err="1">
-                <a:solidFill>
-                  <a:srgbClr val="556070"/>
-                </a:solidFill>
-                <a:latin typeface="Calibri"/>
-              </a:rPr>
-              <a:t>kNN</a:t>
-            </a:r>
-            <a:endParaRPr sz="1000" b="0" i="0" dirty="0">
-              <a:solidFill>
-                <a:srgbClr val="556070"/>
-              </a:solidFill>
-              <a:latin typeface="Calibri"/>
-            </a:endParaRPr>
+              <a:t>Online Shoppers Purchase-Intention Capstone  |  kNN from Scratch</a:t>
+            </a:r>
           </a:p>
         </p:txBody>
       </p:sp>
@@ -18947,7 +18430,7 @@
         <p:spPr>
           <a:xfrm>
             <a:off x="457200" y="6492240"/>
-            <a:ext cx="7315200" cy="246221"/>
+            <a:ext cx="7315200" cy="274320"/>
           </a:xfrm>
           <a:prstGeom prst="rect">
             <a:avLst/>
@@ -18962,29 +18445,14 @@
           <a:p>
             <a:pPr algn="l"/>
             <a:r>
-              <a:rPr sz="1000" b="0" i="0" dirty="0">
+              <a:rPr sz="1000" b="0" i="0">
                 <a:solidFill>
                   <a:srgbClr val="556070"/>
                 </a:solidFill>
                 <a:latin typeface="Calibri"/>
               </a:rPr>
-              <a:t>Online Shoppers Purchase-Intention Capstone  |  </a:t>
-            </a:r>
-            <a:r>
-              <a:rPr sz="1000" b="0" i="0" dirty="0" err="1">
-                <a:solidFill>
-                  <a:srgbClr val="556070"/>
-                </a:solidFill>
-                <a:latin typeface="Calibri"/>
-              </a:rPr>
-              <a:t>kNN</a:t>
-            </a:r>
-            <a:endParaRPr sz="1000" b="0" i="0" dirty="0">
-              <a:solidFill>
-                <a:srgbClr val="556070"/>
-              </a:solidFill>
-              <a:latin typeface="Calibri"/>
-            </a:endParaRPr>
+              <a:t>Online Shoppers Purchase-Intention Capstone  |  kNN from Scratch</a:t>
+            </a:r>
           </a:p>
         </p:txBody>
       </p:sp>
@@ -19301,8 +18769,8 @@
         </p:blipFill>
         <p:spPr>
           <a:xfrm>
-            <a:off x="457200" y="1783080"/>
-            <a:ext cx="6736384" cy="4709160"/>
+            <a:off x="365760" y="1828800"/>
+            <a:ext cx="6858000" cy="6156000"/>
           </a:xfrm>
           <a:prstGeom prst="rect">
             <a:avLst/>
@@ -19557,7 +19025,7 @@
         <p:spPr>
           <a:xfrm>
             <a:off x="457200" y="6492240"/>
-            <a:ext cx="7315200" cy="246221"/>
+            <a:ext cx="7315200" cy="274320"/>
           </a:xfrm>
           <a:prstGeom prst="rect">
             <a:avLst/>
@@ -19572,29 +19040,14 @@
           <a:p>
             <a:pPr algn="l"/>
             <a:r>
-              <a:rPr sz="1000" b="0" i="0" dirty="0">
+              <a:rPr sz="1000" b="0" i="0">
                 <a:solidFill>
                   <a:srgbClr val="556070"/>
                 </a:solidFill>
                 <a:latin typeface="Calibri"/>
               </a:rPr>
-              <a:t>Online Shoppers Purchase-Intention Capstone  |  </a:t>
-            </a:r>
-            <a:r>
-              <a:rPr lang="en-US" sz="1000" b="0" i="0" dirty="0" err="1">
-                <a:solidFill>
-                  <a:srgbClr val="556070"/>
-                </a:solidFill>
-                <a:latin typeface="Calibri"/>
-              </a:rPr>
-              <a:t>kNN</a:t>
-            </a:r>
-            <a:endParaRPr sz="1000" b="0" i="0" dirty="0">
-              <a:solidFill>
-                <a:srgbClr val="556070"/>
-              </a:solidFill>
-              <a:latin typeface="Calibri"/>
-            </a:endParaRPr>
+              <a:t>Online Shoppers Purchase-Intention Capstone  |  kNN from Scratch</a:t>
+            </a:r>
           </a:p>
         </p:txBody>
       </p:sp>
@@ -20186,7 +19639,7 @@
         <p:spPr>
           <a:xfrm>
             <a:off x="457200" y="6492240"/>
-            <a:ext cx="7315200" cy="246221"/>
+            <a:ext cx="7315200" cy="274320"/>
           </a:xfrm>
           <a:prstGeom prst="rect">
             <a:avLst/>
@@ -20201,29 +19654,14 @@
           <a:p>
             <a:pPr algn="l"/>
             <a:r>
-              <a:rPr sz="1000" b="0" i="0" dirty="0">
+              <a:rPr sz="1000" b="0" i="0">
                 <a:solidFill>
                   <a:srgbClr val="556070"/>
                 </a:solidFill>
                 <a:latin typeface="Calibri"/>
               </a:rPr>
-              <a:t>Online Shoppers Purchase-Intention Capstone  |  </a:t>
-            </a:r>
-            <a:r>
-              <a:rPr sz="1000" b="0" i="0" dirty="0" err="1">
-                <a:solidFill>
-                  <a:srgbClr val="556070"/>
-                </a:solidFill>
-                <a:latin typeface="Calibri"/>
-              </a:rPr>
-              <a:t>kNN</a:t>
-            </a:r>
-            <a:endParaRPr sz="1000" b="0" i="0" dirty="0">
-              <a:solidFill>
-                <a:srgbClr val="556070"/>
-              </a:solidFill>
-              <a:latin typeface="Calibri"/>
-            </a:endParaRPr>
+              <a:t>Online Shoppers Purchase-Intention Capstone  |  kNN from Scratch</a:t>
+            </a:r>
           </a:p>
         </p:txBody>
       </p:sp>
@@ -20815,7 +20253,7 @@
         <p:spPr>
           <a:xfrm>
             <a:off x="457200" y="6492240"/>
-            <a:ext cx="7315200" cy="246221"/>
+            <a:ext cx="7315200" cy="274320"/>
           </a:xfrm>
           <a:prstGeom prst="rect">
             <a:avLst/>
@@ -20830,29 +20268,14 @@
           <a:p>
             <a:pPr algn="l"/>
             <a:r>
-              <a:rPr sz="1000" b="0" i="0" dirty="0">
+              <a:rPr sz="1000" b="0" i="0">
                 <a:solidFill>
                   <a:srgbClr val="556070"/>
                 </a:solidFill>
                 <a:latin typeface="Calibri"/>
               </a:rPr>
-              <a:t>Online Shoppers Purchase-Intention Capstone  |  </a:t>
-            </a:r>
-            <a:r>
-              <a:rPr sz="1000" b="0" i="0" dirty="0" err="1">
-                <a:solidFill>
-                  <a:srgbClr val="556070"/>
-                </a:solidFill>
-                <a:latin typeface="Calibri"/>
-              </a:rPr>
-              <a:t>kNN</a:t>
-            </a:r>
-            <a:endParaRPr sz="1000" b="0" i="0" dirty="0">
-              <a:solidFill>
-                <a:srgbClr val="556070"/>
-              </a:solidFill>
-              <a:latin typeface="Calibri"/>
-            </a:endParaRPr>
+              <a:t>Online Shoppers Purchase-Intention Capstone  |  kNN from Scratch</a:t>
+            </a:r>
           </a:p>
         </p:txBody>
       </p:sp>
@@ -21482,7 +20905,7 @@
         <p:spPr>
           <a:xfrm>
             <a:off x="457200" y="6492240"/>
-            <a:ext cx="7315200" cy="246221"/>
+            <a:ext cx="7315200" cy="274320"/>
           </a:xfrm>
           <a:prstGeom prst="rect">
             <a:avLst/>
@@ -21497,29 +20920,14 @@
           <a:p>
             <a:pPr algn="l"/>
             <a:r>
-              <a:rPr sz="1000" b="0" i="0" dirty="0">
+              <a:rPr sz="1000" b="0" i="0">
                 <a:solidFill>
                   <a:srgbClr val="556070"/>
                 </a:solidFill>
                 <a:latin typeface="Calibri"/>
               </a:rPr>
-              <a:t>Online Shoppers Purchase-Intention Capstone  |  </a:t>
-            </a:r>
-            <a:r>
-              <a:rPr sz="1000" b="0" i="0" dirty="0" err="1">
-                <a:solidFill>
-                  <a:srgbClr val="556070"/>
-                </a:solidFill>
-                <a:latin typeface="Calibri"/>
-              </a:rPr>
-              <a:t>kNN</a:t>
-            </a:r>
-            <a:endParaRPr sz="1000" b="0" i="0" dirty="0">
-              <a:solidFill>
-                <a:srgbClr val="556070"/>
-              </a:solidFill>
-              <a:latin typeface="Calibri"/>
-            </a:endParaRPr>
+              <a:t>Online Shoppers Purchase-Intention Capstone  |  kNN from Scratch</a:t>
+            </a:r>
           </a:p>
         </p:txBody>
       </p:sp>

--- a/Capstone_Presentation.pptx
+++ b/Capstone_Presentation.pptx
@@ -15,17 +15,17 @@
     <p:sldId id="263" r:id="rId9"/>
     <p:sldId id="264" r:id="rId10"/>
     <p:sldId id="265" r:id="rId11"/>
-    <p:sldId id="267" r:id="rId12"/>
-    <p:sldId id="268" r:id="rId13"/>
-    <p:sldId id="269" r:id="rId14"/>
-    <p:sldId id="270" r:id="rId15"/>
-    <p:sldId id="271" r:id="rId16"/>
-    <p:sldId id="272" r:id="rId17"/>
-    <p:sldId id="273" r:id="rId18"/>
-    <p:sldId id="274" r:id="rId19"/>
-    <p:sldId id="275" r:id="rId20"/>
-    <p:sldId id="276" r:id="rId21"/>
-    <p:sldId id="277" r:id="rId22"/>
+    <p:sldId id="266" r:id="rId12"/>
+    <p:sldId id="267" r:id="rId13"/>
+    <p:sldId id="268" r:id="rId14"/>
+    <p:sldId id="269" r:id="rId15"/>
+    <p:sldId id="270" r:id="rId16"/>
+    <p:sldId id="271" r:id="rId17"/>
+    <p:sldId id="272" r:id="rId18"/>
+    <p:sldId id="273" r:id="rId19"/>
+    <p:sldId id="274" r:id="rId20"/>
+    <p:sldId id="275" r:id="rId21"/>
+    <p:sldId id="276" r:id="rId22"/>
   </p:sldIdLst>
   <p:sldSz cx="12192000" cy="6858000"/>
   <p:notesSz cx="6858000" cy="9144000"/>
@@ -3289,8 +3289,8 @@
         </p:nvSpPr>
         <p:spPr>
           <a:xfrm>
-            <a:off x="457200" y="2926080"/>
-            <a:ext cx="11247120" cy="1097280"/>
+            <a:off x="457200" y="3243887"/>
+            <a:ext cx="11247120" cy="461665"/>
           </a:xfrm>
           <a:prstGeom prst="rect">
             <a:avLst/>
@@ -3305,13 +3305,13 @@
           <a:p>
             <a:pPr algn="ctr"/>
             <a:r>
-              <a:rPr sz="2400" b="1" i="0">
+              <a:rPr sz="2400" b="1" i="0" dirty="0">
                 <a:solidFill>
                   <a:srgbClr val="FFFFFF"/>
                 </a:solidFill>
                 <a:latin typeface="Calibri"/>
               </a:rPr>
-              <a:t>A k-Nearest Neighbors Classifier Built From Scratch</a:t>
+              <a:t>A k-Nearest Neighbors Classifier</a:t>
             </a:r>
           </a:p>
         </p:txBody>
@@ -3858,7 +3858,7 @@
           <a:p>
             <a:pPr algn="l"/>
             <a:r>
-              <a:rPr sz="1600" b="1" i="0">
+              <a:rPr sz="1600" b="1" i="0" dirty="0">
                 <a:solidFill>
                   <a:srgbClr val="DD8452"/>
                 </a:solidFill>
@@ -3877,7 +3877,7 @@
         </p:nvSpPr>
         <p:spPr>
           <a:xfrm>
-            <a:off x="7726679" y="5212080"/>
+            <a:off x="7772400" y="4983480"/>
             <a:ext cx="3931920" cy="1371600"/>
           </a:xfrm>
           <a:prstGeom prst="rect">
@@ -3900,7 +3900,7 @@
               </a:spcAft>
             </a:pPr>
             <a:r>
-              <a:rPr sz="1300">
+              <a:rPr sz="1300" dirty="0">
                 <a:solidFill>
                   <a:srgbClr val="1A1A1A"/>
                 </a:solidFill>
@@ -3919,7 +3919,7 @@
               </a:spcAft>
             </a:pPr>
             <a:r>
-              <a:rPr sz="1300">
+              <a:rPr sz="1300" dirty="0">
                 <a:solidFill>
                   <a:srgbClr val="1A1A1A"/>
                 </a:solidFill>
@@ -3939,7 +3939,7 @@
         <p:spPr>
           <a:xfrm>
             <a:off x="457200" y="6492240"/>
-            <a:ext cx="7315200" cy="274320"/>
+            <a:ext cx="7315200" cy="246221"/>
           </a:xfrm>
           <a:prstGeom prst="rect">
             <a:avLst/>
@@ -3954,14 +3954,29 @@
           <a:p>
             <a:pPr algn="l"/>
             <a:r>
-              <a:rPr sz="1000" b="0" i="0">
+              <a:rPr sz="1000" b="0" i="0" dirty="0">
                 <a:solidFill>
                   <a:srgbClr val="556070"/>
                 </a:solidFill>
                 <a:latin typeface="Calibri"/>
               </a:rPr>
-              <a:t>Online Shoppers Purchase-Intention Capstone  |  kNN from Scratch</a:t>
-            </a:r>
+              <a:t>Online Shoppers Purchase-Intention Capstone  |  </a:t>
+            </a:r>
+            <a:r>
+              <a:rPr sz="1000" b="0" i="0" dirty="0" err="1">
+                <a:solidFill>
+                  <a:srgbClr val="556070"/>
+                </a:solidFill>
+                <a:latin typeface="Calibri"/>
+              </a:rPr>
+              <a:t>kNN</a:t>
+            </a:r>
+            <a:endParaRPr sz="1000" b="0" i="0" dirty="0">
+              <a:solidFill>
+                <a:srgbClr val="556070"/>
+              </a:solidFill>
+              <a:latin typeface="Calibri"/>
+            </a:endParaRPr>
           </a:p>
         </p:txBody>
       </p:sp>
@@ -4178,7 +4193,7 @@
                 </a:solidFill>
                 <a:latin typeface="Calibri"/>
               </a:rPr>
-              <a:t>The Same Idea in Four Steps</a:t>
+              <a:t>k-Nearest Neighbors in One Picture</a:t>
             </a:r>
           </a:p>
         </p:txBody>
@@ -4376,7 +4391,7 @@
           <a:p>
             <a:pPr algn="ctr"/>
             <a:r>
-              <a:rPr sz="2000" b="1" i="0">
+              <a:rPr sz="2000" b="1" i="0" dirty="0">
                 <a:solidFill>
                   <a:srgbClr val="FFFFFF"/>
                 </a:solidFill>
@@ -5051,7 +5066,7 @@
         <p:spPr>
           <a:xfrm>
             <a:off x="457200" y="6492240"/>
-            <a:ext cx="7315200" cy="274320"/>
+            <a:ext cx="7315200" cy="246221"/>
           </a:xfrm>
           <a:prstGeom prst="rect">
             <a:avLst/>
@@ -5066,14 +5081,29 @@
           <a:p>
             <a:pPr algn="l"/>
             <a:r>
-              <a:rPr sz="1000" b="0" i="0">
+              <a:rPr sz="1000" b="0" i="0" dirty="0">
                 <a:solidFill>
                   <a:srgbClr val="556070"/>
                 </a:solidFill>
                 <a:latin typeface="Calibri"/>
               </a:rPr>
-              <a:t>Online Shoppers Purchase-Intention Capstone  |  kNN from Scratch</a:t>
-            </a:r>
+              <a:t>Online Shoppers Purchase-Intention Capstone  |  </a:t>
+            </a:r>
+            <a:r>
+              <a:rPr sz="1000" b="0" i="0" dirty="0" err="1">
+                <a:solidFill>
+                  <a:srgbClr val="556070"/>
+                </a:solidFill>
+                <a:latin typeface="Calibri"/>
+              </a:rPr>
+              <a:t>kNN</a:t>
+            </a:r>
+            <a:endParaRPr sz="1000" b="0" i="0" dirty="0">
+              <a:solidFill>
+                <a:srgbClr val="556070"/>
+              </a:solidFill>
+              <a:latin typeface="Calibri"/>
+            </a:endParaRPr>
           </a:p>
         </p:txBody>
       </p:sp>
@@ -5107,7 +5137,7 @@
                 </a:solidFill>
                 <a:latin typeface="Calibri"/>
               </a:rPr>
-              <a:t>Slide 12</a:t>
+              <a:t>Slide 11</a:t>
             </a:r>
           </a:p>
         </p:txBody>
@@ -5269,7 +5299,7 @@
         <p:spPr>
           <a:xfrm>
             <a:off x="457200" y="685800"/>
-            <a:ext cx="11247120" cy="640080"/>
+            <a:ext cx="11247120" cy="553998"/>
           </a:xfrm>
           <a:prstGeom prst="rect">
             <a:avLst/>
@@ -5284,13 +5314,31 @@
           <a:p>
             <a:pPr algn="l"/>
             <a:r>
-              <a:rPr sz="3000" b="1" i="0">
+              <a:rPr sz="3000" b="1" i="0" dirty="0">
                 <a:solidFill>
                   <a:srgbClr val="1F3A5F"/>
                 </a:solidFill>
                 <a:latin typeface="Calibri"/>
               </a:rPr>
-              <a:t>The Pipeline We Built — Seven Scripts, No scikit-learn Estimators</a:t>
+              <a:t>The Pipeline We Built — Seven Scripts</a:t>
+            </a:r>
+            <a:r>
+              <a:rPr lang="en-US" sz="3000" b="1" dirty="0">
+                <a:solidFill>
+                  <a:srgbClr val="1F3A5F"/>
+                </a:solidFill>
+                <a:latin typeface="Calibri"/>
+              </a:rPr>
+              <a:t> </a:t>
+            </a:r>
+            <a:r>
+              <a:rPr sz="3000" b="1" i="0" dirty="0">
+                <a:solidFill>
+                  <a:srgbClr val="1F3A5F"/>
+                </a:solidFill>
+                <a:latin typeface="Calibri"/>
+              </a:rPr>
+              <a:t>Estimators</a:t>
             </a:r>
           </a:p>
         </p:txBody>
@@ -5304,7 +5352,7 @@
         <p:spPr>
           <a:xfrm>
             <a:off x="457200" y="1280160"/>
-            <a:ext cx="11247120" cy="365760"/>
+            <a:ext cx="11247120" cy="323165"/>
           </a:xfrm>
           <a:prstGeom prst="rect">
             <a:avLst/>
@@ -5319,13 +5367,31 @@
           <a:p>
             <a:pPr algn="l"/>
             <a:r>
-              <a:rPr sz="1500" b="0" i="1">
+              <a:rPr sz="1500" b="0" i="1" dirty="0">
                 <a:solidFill>
                   <a:srgbClr val="556070"/>
                 </a:solidFill>
                 <a:latin typeface="Calibri"/>
               </a:rPr>
-              <a:t>Every step was implemented from scratch in NumPy to make the algorithm visible.</a:t>
+              <a:t>Every step was implemented from</a:t>
+            </a:r>
+            <a:r>
+              <a:rPr lang="en-US" sz="1500" i="1" dirty="0">
+                <a:solidFill>
+                  <a:srgbClr val="556070"/>
+                </a:solidFill>
+                <a:latin typeface="Calibri"/>
+              </a:rPr>
+              <a:t> </a:t>
+            </a:r>
+            <a:r>
+              <a:rPr sz="1500" b="0" i="1" dirty="0">
+                <a:solidFill>
+                  <a:srgbClr val="556070"/>
+                </a:solidFill>
+                <a:latin typeface="Calibri"/>
+              </a:rPr>
+              <a:t>NumPy to make the algorithm visible.</a:t>
             </a:r>
           </a:p>
         </p:txBody>
@@ -6502,7 +6568,7 @@
               </a:spcAft>
             </a:pPr>
             <a:r>
-              <a:rPr sz="1300">
+              <a:rPr sz="1300" dirty="0">
                 <a:solidFill>
                   <a:srgbClr val="1A1A1A"/>
                 </a:solidFill>
@@ -6521,7 +6587,7 @@
               </a:spcAft>
             </a:pPr>
             <a:r>
-              <a:rPr sz="1300">
+              <a:rPr sz="1300" dirty="0">
                 <a:solidFill>
                   <a:srgbClr val="1A1A1A"/>
                 </a:solidFill>
@@ -6540,7 +6606,7 @@
               </a:spcAft>
             </a:pPr>
             <a:r>
-              <a:rPr sz="1300">
+              <a:rPr sz="1300" dirty="0">
                 <a:solidFill>
                   <a:srgbClr val="1A1A1A"/>
                 </a:solidFill>
@@ -6559,13 +6625,31 @@
               </a:spcAft>
             </a:pPr>
             <a:r>
-              <a:rPr sz="1300">
+              <a:rPr sz="1300" dirty="0">
                 <a:solidFill>
                   <a:srgbClr val="1A1A1A"/>
                 </a:solidFill>
                 <a:latin typeface="Calibri"/>
               </a:rPr>
-              <a:t>•  Manual confusion matrix and metrics — no sklearn.metrics shortcut.</a:t>
+              <a:t>•  Manual confusion matrix and metrics — no </a:t>
+            </a:r>
+            <a:r>
+              <a:rPr sz="1300" dirty="0" err="1">
+                <a:solidFill>
+                  <a:srgbClr val="1A1A1A"/>
+                </a:solidFill>
+                <a:latin typeface="Calibri"/>
+              </a:rPr>
+              <a:t>sklearn.metrics</a:t>
+            </a:r>
+            <a:r>
+              <a:rPr sz="1300" dirty="0">
+                <a:solidFill>
+                  <a:srgbClr val="1A1A1A"/>
+                </a:solidFill>
+                <a:latin typeface="Calibri"/>
+              </a:rPr>
+              <a:t> shortcut.</a:t>
             </a:r>
           </a:p>
         </p:txBody>
@@ -6579,7 +6663,7 @@
         <p:spPr>
           <a:xfrm>
             <a:off x="457200" y="6492240"/>
-            <a:ext cx="7315200" cy="274320"/>
+            <a:ext cx="7315200" cy="246221"/>
           </a:xfrm>
           <a:prstGeom prst="rect">
             <a:avLst/>
@@ -6594,14 +6678,29 @@
           <a:p>
             <a:pPr algn="l"/>
             <a:r>
-              <a:rPr sz="1000" b="0" i="0">
+              <a:rPr sz="1000" b="0" i="0" dirty="0">
                 <a:solidFill>
                   <a:srgbClr val="556070"/>
                 </a:solidFill>
                 <a:latin typeface="Calibri"/>
               </a:rPr>
-              <a:t>Online Shoppers Purchase-Intention Capstone  |  kNN from Scratch</a:t>
-            </a:r>
+              <a:t>Online Shoppers Purchase-Intention Capstone  |  </a:t>
+            </a:r>
+            <a:r>
+              <a:rPr sz="1000" b="0" i="0" dirty="0" err="1">
+                <a:solidFill>
+                  <a:srgbClr val="556070"/>
+                </a:solidFill>
+                <a:latin typeface="Calibri"/>
+              </a:rPr>
+              <a:t>kNN</a:t>
+            </a:r>
+            <a:endParaRPr sz="1000" b="0" i="0" dirty="0">
+              <a:solidFill>
+                <a:srgbClr val="556070"/>
+              </a:solidFill>
+              <a:latin typeface="Calibri"/>
+            </a:endParaRPr>
           </a:p>
         </p:txBody>
       </p:sp>
@@ -6635,7 +6734,7 @@
                 </a:solidFill>
                 <a:latin typeface="Calibri"/>
               </a:rPr>
-              <a:t>Slide 13</a:t>
+              <a:t>Slide 12</a:t>
             </a:r>
           </a:p>
         </p:txBody>
@@ -6832,7 +6931,7 @@
         <p:spPr>
           <a:xfrm>
             <a:off x="457200" y="1280160"/>
-            <a:ext cx="11247120" cy="365760"/>
+            <a:ext cx="11247120" cy="323165"/>
           </a:xfrm>
           <a:prstGeom prst="rect">
             <a:avLst/>
@@ -6847,14 +6946,20 @@
           <a:p>
             <a:pPr algn="l"/>
             <a:r>
-              <a:rPr sz="1500" b="0" i="1">
+              <a:rPr lang="en-US" sz="1500" b="0" i="1" dirty="0">
                 <a:solidFill>
                   <a:srgbClr val="556070"/>
                 </a:solidFill>
                 <a:latin typeface="Calibri"/>
               </a:rPr>
-              <a:t>F1 peaks at k = 7. Recall and precision pull in opposite directions.</a:t>
-            </a:r>
+              <a:t>F1 peaks at k = 3; we chose k = 7 for its higher precision. Recall and precision pull in opposite directions.</a:t>
+            </a:r>
+            <a:endParaRPr sz="1500" b="0" i="1" dirty="0">
+              <a:solidFill>
+                <a:srgbClr val="556070"/>
+              </a:solidFill>
+              <a:latin typeface="Calibri"/>
+            </a:endParaRPr>
           </a:p>
         </p:txBody>
       </p:sp>
@@ -6902,30 +7007,6 @@
           </a:p>
         </p:txBody>
       </p:sp>
-      <p:pic>
-        <p:nvPicPr>
-          <p:cNvPr id="8" name="Picture 7" descr="fig7_k_tuning.png"/>
-          <p:cNvPicPr>
-            <a:picLocks noChangeAspect="1"/>
-          </p:cNvPicPr>
-          <p:nvPr/>
-        </p:nvPicPr>
-        <p:blipFill>
-          <a:blip r:embed="rId2"/>
-          <a:stretch>
-            <a:fillRect/>
-          </a:stretch>
-        </p:blipFill>
-        <p:spPr>
-          <a:xfrm>
-            <a:off x="365760" y="1920240"/>
-            <a:ext cx="7315200" cy="3948596"/>
-          </a:xfrm>
-          <a:prstGeom prst="rect">
-            <a:avLst/>
-          </a:prstGeom>
-        </p:spPr>
-      </p:pic>
       <p:sp>
         <p:nvSpPr>
           <p:cNvPr id="9" name="Rounded Rectangle 8"/>
@@ -7016,8 +7097,8 @@
         </p:nvSpPr>
         <p:spPr>
           <a:xfrm>
-            <a:off x="8092440" y="2606040"/>
-            <a:ext cx="3566160" cy="2377440"/>
+            <a:off x="8046720" y="2614832"/>
+            <a:ext cx="3566160" cy="1536896"/>
           </a:xfrm>
           <a:prstGeom prst="rect">
             <a:avLst/>
@@ -7039,7 +7120,7 @@
               </a:spcAft>
             </a:pPr>
             <a:r>
-              <a:rPr sz="1300">
+              <a:rPr sz="1300" dirty="0">
                 <a:solidFill>
                   <a:srgbClr val="1A1A1A"/>
                 </a:solidFill>
@@ -7058,7 +7139,7 @@
               </a:spcAft>
             </a:pPr>
             <a:r>
-              <a:rPr sz="1300">
+              <a:rPr sz="1300" dirty="0">
                 <a:solidFill>
                   <a:srgbClr val="1A1A1A"/>
                 </a:solidFill>
@@ -7077,7 +7158,7 @@
               </a:spcAft>
             </a:pPr>
             <a:r>
-              <a:rPr sz="1300">
+              <a:rPr sz="1300" dirty="0">
                 <a:solidFill>
                   <a:srgbClr val="1A1A1A"/>
                 </a:solidFill>
@@ -7096,73 +7177,30 @@
               </a:spcAft>
             </a:pPr>
             <a:r>
-              <a:rPr sz="1300">
+              <a:rPr sz="1300" dirty="0">
                 <a:solidFill>
                   <a:srgbClr val="1A1A1A"/>
                 </a:solidFill>
                 <a:latin typeface="Calibri"/>
               </a:rPr>
-              <a:t>•  Best F1:         k = 7  ← chosen</a:t>
-            </a:r>
-          </a:p>
-        </p:txBody>
-      </p:sp>
-      <p:sp>
-        <p:nvSpPr>
-          <p:cNvPr id="12" name="TextBox 11"/>
-          <p:cNvSpPr txBox="1"/>
-          <p:nvPr/>
-        </p:nvSpPr>
-        <p:spPr>
-          <a:xfrm>
-            <a:off x="8092440" y="4572000"/>
-            <a:ext cx="3566160" cy="457200"/>
-          </a:xfrm>
-          <a:prstGeom prst="rect">
-            <a:avLst/>
-          </a:prstGeom>
-          <a:noFill/>
-        </p:spPr>
-        <p:txBody>
-          <a:bodyPr wrap="square" anchor="t">
-            <a:spAutoFit/>
-          </a:bodyPr>
-          <a:lstStyle/>
-          <a:p>
-            <a:pPr algn="l"/>
-            <a:r>
-              <a:rPr sz="1600" b="1" i="0">
-                <a:solidFill>
-                  <a:srgbClr val="DD8452"/>
-                </a:solidFill>
-                <a:latin typeface="Calibri"/>
-              </a:rPr>
-              <a:t>Why F1?</a:t>
-            </a:r>
-          </a:p>
-        </p:txBody>
-      </p:sp>
-      <p:sp>
-        <p:nvSpPr>
-          <p:cNvPr id="13" name="TextBox 12"/>
-          <p:cNvSpPr txBox="1"/>
-          <p:nvPr/>
-        </p:nvSpPr>
-        <p:spPr>
-          <a:xfrm>
-            <a:off x="8092440" y="5029200"/>
-            <a:ext cx="3566160" cy="1371600"/>
-          </a:xfrm>
-          <a:prstGeom prst="rect">
-            <a:avLst/>
-          </a:prstGeom>
-          <a:noFill/>
-        </p:spPr>
-        <p:txBody>
-          <a:bodyPr wrap="square">
-            <a:spAutoFit/>
-          </a:bodyPr>
-          <a:lstStyle/>
+              <a:t>•  Best F1:         k = </a:t>
+            </a:r>
+            <a:r>
+              <a:rPr lang="en-PH" sz="1300" dirty="0">
+                <a:solidFill>
+                  <a:srgbClr val="1A1A1A"/>
+                </a:solidFill>
+                <a:latin typeface="Calibri"/>
+              </a:rPr>
+              <a:t>3</a:t>
+            </a:r>
+            <a:endParaRPr lang="en-US" sz="1300" dirty="0">
+              <a:solidFill>
+                <a:srgbClr val="1A1A1A"/>
+              </a:solidFill>
+              <a:latin typeface="Calibri"/>
+            </a:endParaRPr>
+          </a:p>
           <a:p>
             <a:pPr algn="l">
               <a:lnSpc>
@@ -7173,15 +7211,85 @@
               </a:spcAft>
             </a:pPr>
             <a:r>
-              <a:rPr sz="1200">
+              <a:rPr lang="en-US" sz="1300" dirty="0">
                 <a:solidFill>
                   <a:srgbClr val="1A1A1A"/>
                 </a:solidFill>
                 <a:latin typeface="Calibri"/>
               </a:rPr>
-              <a:t>•  Balances precision and recall.</a:t>
-            </a:r>
-          </a:p>
+              <a:t>Chosen:             k = 7 (higher precision)</a:t>
+            </a:r>
+            <a:endParaRPr sz="1300" dirty="0">
+              <a:solidFill>
+                <a:srgbClr val="1A1A1A"/>
+              </a:solidFill>
+              <a:latin typeface="Calibri"/>
+            </a:endParaRPr>
+          </a:p>
+        </p:txBody>
+      </p:sp>
+      <p:sp>
+        <p:nvSpPr>
+          <p:cNvPr id="12" name="TextBox 11"/>
+          <p:cNvSpPr txBox="1"/>
+          <p:nvPr/>
+        </p:nvSpPr>
+        <p:spPr>
+          <a:xfrm>
+            <a:off x="8092440" y="4572000"/>
+            <a:ext cx="3566160" cy="338554"/>
+          </a:xfrm>
+          <a:prstGeom prst="rect">
+            <a:avLst/>
+          </a:prstGeom>
+          <a:noFill/>
+        </p:spPr>
+        <p:txBody>
+          <a:bodyPr wrap="square" anchor="t">
+            <a:spAutoFit/>
+          </a:bodyPr>
+          <a:lstStyle/>
+          <a:p>
+            <a:pPr algn="l"/>
+            <a:r>
+              <a:rPr lang="en-PH" sz="1600" b="1" i="0" dirty="0">
+                <a:solidFill>
+                  <a:srgbClr val="DD8452"/>
+                </a:solidFill>
+                <a:latin typeface="Calibri"/>
+              </a:rPr>
+              <a:t>How we chose k</a:t>
+            </a:r>
+            <a:endParaRPr sz="1600" b="1" i="0" dirty="0">
+              <a:solidFill>
+                <a:srgbClr val="DD8452"/>
+              </a:solidFill>
+              <a:latin typeface="Calibri"/>
+            </a:endParaRPr>
+          </a:p>
+        </p:txBody>
+      </p:sp>
+      <p:sp>
+        <p:nvSpPr>
+          <p:cNvPr id="13" name="TextBox 12"/>
+          <p:cNvSpPr txBox="1"/>
+          <p:nvPr/>
+        </p:nvSpPr>
+        <p:spPr>
+          <a:xfrm>
+            <a:off x="8092440" y="5029200"/>
+            <a:ext cx="3566160" cy="1006301"/>
+          </a:xfrm>
+          <a:prstGeom prst="rect">
+            <a:avLst/>
+          </a:prstGeom>
+          <a:noFill/>
+        </p:spPr>
+        <p:txBody>
+          <a:bodyPr wrap="square">
+            <a:spAutoFit/>
+          </a:bodyPr>
+          <a:lstStyle/>
           <a:p>
             <a:pPr algn="l">
               <a:lnSpc>
@@ -7192,14 +7300,57 @@
               </a:spcAft>
             </a:pPr>
             <a:r>
-              <a:rPr sz="1200">
+              <a:rPr sz="1200" dirty="0">
                 <a:solidFill>
                   <a:srgbClr val="1A1A1A"/>
                 </a:solidFill>
                 <a:latin typeface="Calibri"/>
               </a:rPr>
-              <a:t>•  The right metric when both false positives and false negatives matter.</a:t>
-            </a:r>
+              <a:t>•  </a:t>
+            </a:r>
+            <a:r>
+              <a:rPr lang="en-US" sz="1200" dirty="0">
+                <a:solidFill>
+                  <a:srgbClr val="1A1A1A"/>
+                </a:solidFill>
+                <a:latin typeface="Calibri"/>
+              </a:rPr>
+              <a:t>F1 to find the peak region (k ≈ 3–9), avoiding both extremes.</a:t>
+            </a:r>
+          </a:p>
+          <a:p>
+            <a:pPr algn="l">
+              <a:lnSpc>
+                <a:spcPct val="115000"/>
+              </a:lnSpc>
+              <a:spcAft>
+                <a:spcPts val="600"/>
+              </a:spcAft>
+            </a:pPr>
+            <a:r>
+              <a:rPr sz="1200" dirty="0">
+                <a:solidFill>
+                  <a:srgbClr val="1A1A1A"/>
+                </a:solidFill>
+                <a:latin typeface="Calibri"/>
+              </a:rPr>
+              <a:t>•  </a:t>
+            </a:r>
+            <a:r>
+              <a:rPr lang="en-US" sz="1200" dirty="0">
+                <a:solidFill>
+                  <a:srgbClr val="1A1A1A"/>
+                </a:solidFill>
+                <a:latin typeface="Calibri"/>
+              </a:rPr>
+              <a:t>Precision to pick within it → k = 7 — a confident, conservative classifier.</a:t>
+            </a:r>
+            <a:endParaRPr sz="1200" dirty="0">
+              <a:solidFill>
+                <a:srgbClr val="1A1A1A"/>
+              </a:solidFill>
+              <a:latin typeface="Calibri"/>
+            </a:endParaRPr>
           </a:p>
         </p:txBody>
       </p:sp>
@@ -7212,7 +7363,7 @@
         <p:spPr>
           <a:xfrm>
             <a:off x="457200" y="6492240"/>
-            <a:ext cx="7315200" cy="274320"/>
+            <a:ext cx="7315200" cy="246221"/>
           </a:xfrm>
           <a:prstGeom prst="rect">
             <a:avLst/>
@@ -7227,14 +7378,38 @@
           <a:p>
             <a:pPr algn="l"/>
             <a:r>
-              <a:rPr sz="1000" b="0" i="0">
+              <a:rPr sz="1000" b="0" i="0" dirty="0">
                 <a:solidFill>
                   <a:srgbClr val="556070"/>
                 </a:solidFill>
                 <a:latin typeface="Calibri"/>
               </a:rPr>
-              <a:t>Online Shoppers Purchase-Intention Capstone  |  kNN from Scratch</a:t>
-            </a:r>
+              <a:t>Online Shoppers Purchase-Intention Capstone  |  </a:t>
+            </a:r>
+            <a:r>
+              <a:rPr sz="1000" b="0" i="0" dirty="0" err="1">
+                <a:solidFill>
+                  <a:srgbClr val="556070"/>
+                </a:solidFill>
+                <a:latin typeface="Calibri"/>
+              </a:rPr>
+              <a:t>kN</a:t>
+            </a:r>
+            <a:r>
+              <a:rPr lang="en-US" sz="1000" b="0" i="0" dirty="0" err="1">
+                <a:solidFill>
+                  <a:srgbClr val="556070"/>
+                </a:solidFill>
+                <a:latin typeface="Calibri"/>
+              </a:rPr>
+              <a:t>N</a:t>
+            </a:r>
+            <a:endParaRPr sz="1000" b="0" i="0" dirty="0">
+              <a:solidFill>
+                <a:srgbClr val="556070"/>
+              </a:solidFill>
+              <a:latin typeface="Calibri"/>
+            </a:endParaRPr>
           </a:p>
         </p:txBody>
       </p:sp>
@@ -7268,11 +7443,41 @@
                 </a:solidFill>
                 <a:latin typeface="Calibri"/>
               </a:rPr>
-              <a:t>Slide 14</a:t>
-            </a:r>
-          </a:p>
-        </p:txBody>
-      </p:sp>
+              <a:t>Slide 13</a:t>
+            </a:r>
+          </a:p>
+        </p:txBody>
+      </p:sp>
+      <p:pic>
+        <p:nvPicPr>
+          <p:cNvPr id="17" name="Picture 16">
+            <a:extLst>
+              <a:ext uri="{FF2B5EF4-FFF2-40B4-BE49-F238E27FC236}">
+                <a16:creationId xmlns:a16="http://schemas.microsoft.com/office/drawing/2014/main" id="{F1B267E2-0090-66C2-4F43-9A070DDC2241}"/>
+              </a:ext>
+            </a:extLst>
+          </p:cNvPr>
+          <p:cNvPicPr>
+            <a:picLocks noChangeAspect="1"/>
+          </p:cNvPicPr>
+          <p:nvPr/>
+        </p:nvPicPr>
+        <p:blipFill>
+          <a:blip r:embed="rId2"/>
+          <a:stretch>
+            <a:fillRect/>
+          </a:stretch>
+        </p:blipFill>
+        <p:spPr>
+          <a:xfrm>
+            <a:off x="457200" y="1904729"/>
+            <a:ext cx="7315200" cy="3948596"/>
+          </a:xfrm>
+          <a:prstGeom prst="rect">
+            <a:avLst/>
+          </a:prstGeom>
+        </p:spPr>
+      </p:pic>
     </p:spTree>
   </p:cSld>
   <p:clrMapOvr>
@@ -8355,7 +8560,7 @@
         <p:spPr>
           <a:xfrm>
             <a:off x="457200" y="6492240"/>
-            <a:ext cx="7315200" cy="274320"/>
+            <a:ext cx="7315200" cy="246221"/>
           </a:xfrm>
           <a:prstGeom prst="rect">
             <a:avLst/>
@@ -8370,14 +8575,29 @@
           <a:p>
             <a:pPr algn="l"/>
             <a:r>
-              <a:rPr sz="1000" b="0" i="0">
+              <a:rPr sz="1000" b="0" i="0" dirty="0">
                 <a:solidFill>
                   <a:srgbClr val="556070"/>
                 </a:solidFill>
                 <a:latin typeface="Calibri"/>
               </a:rPr>
-              <a:t>Online Shoppers Purchase-Intention Capstone  |  kNN from Scratch</a:t>
-            </a:r>
+              <a:t>Online Shoppers Purchase-Intention Capstone  |  </a:t>
+            </a:r>
+            <a:r>
+              <a:rPr sz="1000" b="0" i="0" dirty="0" err="1">
+                <a:solidFill>
+                  <a:srgbClr val="556070"/>
+                </a:solidFill>
+                <a:latin typeface="Calibri"/>
+              </a:rPr>
+              <a:t>kNN</a:t>
+            </a:r>
+            <a:endParaRPr sz="1000" b="0" i="0" dirty="0">
+              <a:solidFill>
+                <a:srgbClr val="556070"/>
+              </a:solidFill>
+              <a:latin typeface="Calibri"/>
+            </a:endParaRPr>
           </a:p>
         </p:txBody>
       </p:sp>
@@ -8411,7 +8631,7 @@
                 </a:solidFill>
                 <a:latin typeface="Calibri"/>
               </a:rPr>
-              <a:t>Slide 15</a:t>
+              <a:t>Slide 14</a:t>
             </a:r>
           </a:p>
         </p:txBody>
@@ -8680,7 +8900,7 @@
       </p:sp>
       <p:pic>
         <p:nvPicPr>
-          <p:cNvPr id="8" name="Picture 7" descr="fig8_final_confusion_matrix.png"/>
+          <p:cNvPr id="8" name="Picture 7"/>
           <p:cNvPicPr>
             <a:picLocks noChangeAspect="1"/>
           </p:cNvPicPr>
@@ -8688,14 +8908,13 @@
         </p:nvPicPr>
         <p:blipFill>
           <a:blip r:embed="rId2"/>
-          <a:stretch>
-            <a:fillRect/>
-          </a:stretch>
+          <a:srcRect/>
+          <a:stretch/>
         </p:blipFill>
         <p:spPr>
           <a:xfrm>
             <a:off x="365760" y="1920240"/>
-            <a:ext cx="8229600" cy="2886678"/>
+            <a:ext cx="8229599" cy="4251960"/>
           </a:xfrm>
           <a:prstGeom prst="rect">
             <a:avLst/>
@@ -8873,7 +9092,7 @@
         <p:spPr>
           <a:xfrm>
             <a:off x="457200" y="6492240"/>
-            <a:ext cx="7315200" cy="274320"/>
+            <a:ext cx="7315200" cy="246221"/>
           </a:xfrm>
           <a:prstGeom prst="rect">
             <a:avLst/>
@@ -8888,14 +9107,29 @@
           <a:p>
             <a:pPr algn="l"/>
             <a:r>
-              <a:rPr sz="1000" b="0" i="0">
+              <a:rPr sz="1000" b="0" i="0" dirty="0">
                 <a:solidFill>
                   <a:srgbClr val="556070"/>
                 </a:solidFill>
                 <a:latin typeface="Calibri"/>
               </a:rPr>
-              <a:t>Online Shoppers Purchase-Intention Capstone  |  kNN from Scratch</a:t>
-            </a:r>
+              <a:t>Online Shoppers Purchase-Intention Capstone  |  </a:t>
+            </a:r>
+            <a:r>
+              <a:rPr sz="1000" b="0" i="0" dirty="0" err="1">
+                <a:solidFill>
+                  <a:srgbClr val="556070"/>
+                </a:solidFill>
+                <a:latin typeface="Calibri"/>
+              </a:rPr>
+              <a:t>kNN</a:t>
+            </a:r>
+            <a:endParaRPr sz="1000" b="0" i="0" dirty="0">
+              <a:solidFill>
+                <a:srgbClr val="556070"/>
+              </a:solidFill>
+              <a:latin typeface="Calibri"/>
+            </a:endParaRPr>
           </a:p>
         </p:txBody>
       </p:sp>
@@ -8929,7 +9163,7 @@
                 </a:solidFill>
                 <a:latin typeface="Calibri"/>
               </a:rPr>
-              <a:t>Slide 16</a:t>
+              <a:t>Slide 15</a:t>
             </a:r>
           </a:p>
         </p:txBody>
@@ -9091,7 +9325,7 @@
         <p:spPr>
           <a:xfrm>
             <a:off x="457200" y="685800"/>
-            <a:ext cx="11247120" cy="640080"/>
+            <a:ext cx="11247120" cy="553998"/>
           </a:xfrm>
           <a:prstGeom prst="rect">
             <a:avLst/>
@@ -9106,14 +9340,20 @@
           <a:p>
             <a:pPr algn="l"/>
             <a:r>
-              <a:rPr sz="3000" b="1" i="0">
+              <a:rPr lang="en-US" sz="3000" b="1" i="0" dirty="0">
                 <a:solidFill>
                   <a:srgbClr val="1F3A5F"/>
                 </a:solidFill>
                 <a:latin typeface="Calibri"/>
               </a:rPr>
-              <a:t>Validation: Stable Across Folds, and Beats the Baselines</a:t>
-            </a:r>
+              <a:t>Validation: Stable Across Folds — but a Simple Rule Beats Us</a:t>
+            </a:r>
+            <a:endParaRPr sz="3000" b="1" i="0" dirty="0">
+              <a:solidFill>
+                <a:srgbClr val="1F3A5F"/>
+              </a:solidFill>
+              <a:latin typeface="Calibri"/>
+            </a:endParaRPr>
           </a:p>
         </p:txBody>
       </p:sp>
@@ -9126,7 +9366,7 @@
         <p:spPr>
           <a:xfrm>
             <a:off x="457200" y="1280160"/>
-            <a:ext cx="11247120" cy="365760"/>
+            <a:ext cx="11247120" cy="323165"/>
           </a:xfrm>
           <a:prstGeom prst="rect">
             <a:avLst/>
@@ -9141,14 +9381,56 @@
           <a:p>
             <a:pPr algn="l"/>
             <a:r>
-              <a:rPr sz="1500" b="0" i="1">
+              <a:rPr lang="en-US" sz="1500" b="0" i="1" dirty="0">
                 <a:solidFill>
                   <a:srgbClr val="556070"/>
                 </a:solidFill>
                 <a:latin typeface="Calibri"/>
               </a:rPr>
-              <a:t>5-fold stratified CV plus two principled baselines confirm the result is real.</a:t>
-            </a:r>
+              <a:t>5-fold stratified CV confirms stability; but a one-feature </a:t>
+            </a:r>
+            <a:r>
+              <a:rPr lang="en-US" sz="1500" b="0" i="1" dirty="0" err="1">
+                <a:solidFill>
+                  <a:srgbClr val="556070"/>
+                </a:solidFill>
+                <a:latin typeface="Calibri"/>
+              </a:rPr>
+              <a:t>PageValues</a:t>
+            </a:r>
+            <a:r>
+              <a:rPr lang="en-US" sz="1500" b="0" i="1" dirty="0">
+                <a:solidFill>
+                  <a:srgbClr val="556070"/>
+                </a:solidFill>
+                <a:latin typeface="Calibri"/>
+              </a:rPr>
+              <a:t> rule outperforms our </a:t>
+            </a:r>
+            <a:r>
+              <a:rPr lang="en-US" sz="1500" b="0" i="1" dirty="0" err="1">
+                <a:solidFill>
+                  <a:srgbClr val="556070"/>
+                </a:solidFill>
+                <a:latin typeface="Calibri"/>
+              </a:rPr>
+              <a:t>kNN</a:t>
+            </a:r>
+            <a:r>
+              <a:rPr lang="en-US" sz="1500" b="0" i="1" dirty="0">
+                <a:solidFill>
+                  <a:srgbClr val="556070"/>
+                </a:solidFill>
+                <a:latin typeface="Calibri"/>
+              </a:rPr>
+              <a:t>.</a:t>
+            </a:r>
+            <a:endParaRPr sz="1500" b="0" i="1" dirty="0">
+              <a:solidFill>
+                <a:srgbClr val="556070"/>
+              </a:solidFill>
+              <a:latin typeface="Calibri"/>
+            </a:endParaRPr>
           </a:p>
         </p:txBody>
       </p:sp>
@@ -9309,7 +9591,7 @@
               </a:spcAft>
             </a:pPr>
             <a:r>
-              <a:rPr sz="1300">
+              <a:rPr sz="1300" dirty="0">
                 <a:solidFill>
                   <a:srgbClr val="1A1A1A"/>
                 </a:solidFill>
@@ -9328,7 +9610,7 @@
               </a:spcAft>
             </a:pPr>
             <a:r>
-              <a:rPr sz="1300">
+              <a:rPr sz="1300" dirty="0">
                 <a:solidFill>
                   <a:srgbClr val="1A1A1A"/>
                 </a:solidFill>
@@ -9347,7 +9629,7 @@
               </a:spcAft>
             </a:pPr>
             <a:r>
-              <a:rPr sz="1300">
+              <a:rPr sz="1300" dirty="0">
                 <a:solidFill>
                   <a:srgbClr val="1A1A1A"/>
                 </a:solidFill>
@@ -9366,7 +9648,7 @@
               </a:spcAft>
             </a:pPr>
             <a:r>
-              <a:rPr sz="1300">
+              <a:rPr sz="1300" dirty="0">
                 <a:solidFill>
                   <a:srgbClr val="1A1A1A"/>
                 </a:solidFill>
@@ -9804,8 +10086,8 @@
         </p:nvSpPr>
         <p:spPr>
           <a:xfrm>
-            <a:off x="8869680" y="3611880"/>
-            <a:ext cx="1463040" cy="411480"/>
+            <a:off x="8869680" y="3679120"/>
+            <a:ext cx="1463040" cy="276999"/>
           </a:xfrm>
           <a:prstGeom prst="rect">
             <a:avLst/>
@@ -9820,14 +10102,20 @@
           <a:p>
             <a:pPr algn="ctr"/>
             <a:r>
-              <a:rPr sz="1200" b="0" i="0">
+              <a:rPr lang="en-PH" sz="1200" b="0" i="0" dirty="0">
                 <a:solidFill>
                   <a:srgbClr val="1A1A1A"/>
                 </a:solidFill>
                 <a:latin typeface="Calibri"/>
               </a:rPr>
-              <a:t>~0.86</a:t>
-            </a:r>
+              <a:t>0.8929</a:t>
+            </a:r>
+            <a:endParaRPr sz="1200" b="0" i="0" dirty="0">
+              <a:solidFill>
+                <a:srgbClr val="1A1A1A"/>
+              </a:solidFill>
+              <a:latin typeface="Calibri"/>
+            </a:endParaRPr>
           </a:p>
         </p:txBody>
       </p:sp>
@@ -9839,8 +10127,8 @@
         </p:nvSpPr>
         <p:spPr>
           <a:xfrm>
-            <a:off x="10332720" y="3611880"/>
-            <a:ext cx="1280160" cy="411480"/>
+            <a:off x="10332720" y="3679120"/>
+            <a:ext cx="1280160" cy="276999"/>
           </a:xfrm>
           <a:prstGeom prst="rect">
             <a:avLst/>
@@ -9855,14 +10143,20 @@
           <a:p>
             <a:pPr algn="ctr"/>
             <a:r>
-              <a:rPr sz="1200" b="0" i="0">
+              <a:rPr lang="en-PH" sz="1200" b="0" i="0" dirty="0">
                 <a:solidFill>
                   <a:srgbClr val="1A1A1A"/>
                 </a:solidFill>
                 <a:latin typeface="Calibri"/>
               </a:rPr>
-              <a:t>~0.46</a:t>
-            </a:r>
+              <a:t>0.6819</a:t>
+            </a:r>
+            <a:endParaRPr sz="1200" b="0" i="0" dirty="0">
+              <a:solidFill>
+                <a:srgbClr val="1A1A1A"/>
+              </a:solidFill>
+              <a:latin typeface="Calibri"/>
+            </a:endParaRPr>
           </a:p>
         </p:txBody>
       </p:sp>
@@ -10026,7 +10320,7 @@
         <p:spPr>
           <a:xfrm>
             <a:off x="6400800" y="4754880"/>
-            <a:ext cx="5212080" cy="1280160"/>
+            <a:ext cx="5212080" cy="461665"/>
           </a:xfrm>
           <a:prstGeom prst="rect">
             <a:avLst/>
@@ -10041,14 +10335,74 @@
           <a:p>
             <a:pPr algn="l"/>
             <a:r>
-              <a:rPr sz="1200" b="0" i="1">
+              <a:rPr lang="en-US" sz="1200" b="0" i="1" dirty="0">
                 <a:solidFill>
                   <a:srgbClr val="556070"/>
                 </a:solidFill>
                 <a:latin typeface="Calibri"/>
               </a:rPr>
-              <a:t>kNN beats both baselines on F1 — a real signal, not memorization of one dominant feature.</a:t>
-            </a:r>
+              <a:t>The </a:t>
+            </a:r>
+            <a:r>
+              <a:rPr lang="en-US" sz="1200" b="0" i="1" dirty="0" err="1">
+                <a:solidFill>
+                  <a:srgbClr val="556070"/>
+                </a:solidFill>
+                <a:latin typeface="Calibri"/>
+              </a:rPr>
+              <a:t>PageValues</a:t>
+            </a:r>
+            <a:r>
+              <a:rPr lang="en-US" sz="1200" b="0" i="1" dirty="0">
+                <a:solidFill>
+                  <a:srgbClr val="556070"/>
+                </a:solidFill>
+                <a:latin typeface="Calibri"/>
+              </a:rPr>
+              <a:t> rule beats </a:t>
+            </a:r>
+            <a:r>
+              <a:rPr lang="en-US" sz="1200" b="0" i="1" dirty="0" err="1">
+                <a:solidFill>
+                  <a:srgbClr val="556070"/>
+                </a:solidFill>
+                <a:latin typeface="Calibri"/>
+              </a:rPr>
+              <a:t>kNN</a:t>
+            </a:r>
+            <a:r>
+              <a:rPr lang="en-US" sz="1200" b="0" i="1" dirty="0">
+                <a:solidFill>
+                  <a:srgbClr val="556070"/>
+                </a:solidFill>
+                <a:latin typeface="Calibri"/>
+              </a:rPr>
+              <a:t> on F1 — </a:t>
+            </a:r>
+            <a:r>
+              <a:rPr lang="en-US" sz="1200" b="0" i="1" dirty="0" err="1">
+                <a:solidFill>
+                  <a:srgbClr val="556070"/>
+                </a:solidFill>
+                <a:latin typeface="Calibri"/>
+              </a:rPr>
+              <a:t>kNN</a:t>
+            </a:r>
+            <a:r>
+              <a:rPr lang="en-US" sz="1200" b="0" i="1" dirty="0">
+                <a:solidFill>
+                  <a:srgbClr val="556070"/>
+                </a:solidFill>
+                <a:latin typeface="Calibri"/>
+              </a:rPr>
+              <a:t> dilutes the dominant signal across 28 features. A humbling, instructive result.</a:t>
+            </a:r>
+            <a:endParaRPr sz="1200" b="0" i="1" dirty="0">
+              <a:solidFill>
+                <a:srgbClr val="556070"/>
+              </a:solidFill>
+              <a:latin typeface="Calibri"/>
+            </a:endParaRPr>
           </a:p>
         </p:txBody>
       </p:sp>
@@ -10061,7 +10415,7 @@
         <p:spPr>
           <a:xfrm>
             <a:off x="457200" y="6492240"/>
-            <a:ext cx="7315200" cy="274320"/>
+            <a:ext cx="7315200" cy="246221"/>
           </a:xfrm>
           <a:prstGeom prst="rect">
             <a:avLst/>
@@ -10076,14 +10430,29 @@
           <a:p>
             <a:pPr algn="l"/>
             <a:r>
-              <a:rPr sz="1000" b="0" i="0">
+              <a:rPr sz="1000" b="0" i="0" dirty="0">
                 <a:solidFill>
                   <a:srgbClr val="556070"/>
                 </a:solidFill>
                 <a:latin typeface="Calibri"/>
               </a:rPr>
-              <a:t>Online Shoppers Purchase-Intention Capstone  |  kNN from Scratch</a:t>
-            </a:r>
+              <a:t>Online Shoppers Purchase-Intention Capstone  |  </a:t>
+            </a:r>
+            <a:r>
+              <a:rPr sz="1000" b="0" i="0" dirty="0" err="1">
+                <a:solidFill>
+                  <a:srgbClr val="556070"/>
+                </a:solidFill>
+                <a:latin typeface="Calibri"/>
+              </a:rPr>
+              <a:t>kNN</a:t>
+            </a:r>
+            <a:endParaRPr sz="1000" b="0" i="0" dirty="0">
+              <a:solidFill>
+                <a:srgbClr val="556070"/>
+              </a:solidFill>
+              <a:latin typeface="Calibri"/>
+            </a:endParaRPr>
           </a:p>
         </p:txBody>
       </p:sp>
@@ -10117,7 +10486,7 @@
                 </a:solidFill>
                 <a:latin typeface="Calibri"/>
               </a:rPr>
-              <a:t>Slide 17</a:t>
+              <a:t>Slide 16</a:t>
             </a:r>
           </a:p>
         </p:txBody>
@@ -10717,7 +11086,7 @@
         <p:spPr>
           <a:xfrm>
             <a:off x="457200" y="6492240"/>
-            <a:ext cx="7315200" cy="274320"/>
+            <a:ext cx="7315200" cy="246221"/>
           </a:xfrm>
           <a:prstGeom prst="rect">
             <a:avLst/>
@@ -10732,14 +11101,29 @@
           <a:p>
             <a:pPr algn="l"/>
             <a:r>
-              <a:rPr sz="1000" b="0" i="0">
+              <a:rPr sz="1000" b="0" i="0" dirty="0">
                 <a:solidFill>
                   <a:srgbClr val="556070"/>
                 </a:solidFill>
                 <a:latin typeface="Calibri"/>
               </a:rPr>
-              <a:t>Online Shoppers Purchase-Intention Capstone  |  kNN from Scratch</a:t>
-            </a:r>
+              <a:t>Online Shoppers Purchase-Intention Capstone  |  </a:t>
+            </a:r>
+            <a:r>
+              <a:rPr sz="1000" b="0" i="0" dirty="0" err="1">
+                <a:solidFill>
+                  <a:srgbClr val="556070"/>
+                </a:solidFill>
+                <a:latin typeface="Calibri"/>
+              </a:rPr>
+              <a:t>kNN</a:t>
+            </a:r>
+            <a:endParaRPr sz="1000" b="0" i="0" dirty="0">
+              <a:solidFill>
+                <a:srgbClr val="556070"/>
+              </a:solidFill>
+              <a:latin typeface="Calibri"/>
+            </a:endParaRPr>
           </a:p>
         </p:txBody>
       </p:sp>
@@ -10773,7 +11157,7 @@
                 </a:solidFill>
                 <a:latin typeface="Calibri"/>
               </a:rPr>
-              <a:t>Slide 18</a:t>
+              <a:t>Slide 17</a:t>
             </a:r>
           </a:p>
         </p:txBody>
@@ -10985,7 +11369,7 @@
           <a:p>
             <a:pPr algn="l"/>
             <a:r>
-              <a:rPr sz="1500" b="0" i="1">
+              <a:rPr sz="1500" b="0" i="1" dirty="0">
                 <a:solidFill>
                   <a:srgbClr val="556070"/>
                 </a:solidFill>
@@ -11143,7 +11527,7 @@
           <a:p>
             <a:pPr algn="l"/>
             <a:r>
-              <a:rPr sz="1200" b="0" i="0">
+              <a:rPr sz="1200" b="0" i="0" dirty="0">
                 <a:solidFill>
                   <a:srgbClr val="1A1A1A"/>
                 </a:solidFill>
@@ -11371,7 +11755,7 @@
           <a:p>
             <a:pPr algn="l"/>
             <a:r>
-              <a:rPr sz="1200" b="0" i="0">
+              <a:rPr sz="1200" b="0" i="0" dirty="0">
                 <a:solidFill>
                   <a:srgbClr val="1A1A1A"/>
                 </a:solidFill>
@@ -11434,8 +11818,8 @@
         </p:nvSpPr>
         <p:spPr>
           <a:xfrm>
-            <a:off x="731520" y="4105656"/>
-            <a:ext cx="3108960" cy="640080"/>
+            <a:off x="731520" y="4148697"/>
+            <a:ext cx="3108960" cy="553998"/>
           </a:xfrm>
           <a:prstGeom prst="rect">
             <a:avLst/>
@@ -11450,14 +11834,38 @@
           <a:p>
             <a:pPr algn="l"/>
             <a:r>
-              <a:rPr sz="1500" b="1" i="0">
+              <a:rPr lang="en-US" sz="1500" b="1" i="0" dirty="0">
                 <a:solidFill>
                   <a:srgbClr val="1F3A5F"/>
                 </a:solidFill>
                 <a:latin typeface="Calibri"/>
               </a:rPr>
-              <a:t>k tuned on the test set</a:t>
-            </a:r>
+              <a:t>A one-feature </a:t>
+            </a:r>
+            <a:r>
+              <a:rPr lang="en-US" sz="1500" b="1" i="0" dirty="0" err="1">
+                <a:solidFill>
+                  <a:srgbClr val="1F3A5F"/>
+                </a:solidFill>
+                <a:latin typeface="Calibri"/>
+              </a:rPr>
+              <a:t>PageValues</a:t>
+            </a:r>
+            <a:r>
+              <a:rPr lang="en-US" sz="1500" b="1" i="0" dirty="0">
+                <a:solidFill>
+                  <a:srgbClr val="1F3A5F"/>
+                </a:solidFill>
+                <a:latin typeface="Calibri"/>
+              </a:rPr>
+              <a:t> rule beats the full model </a:t>
+            </a:r>
+            <a:endParaRPr sz="1500" b="1" i="0" dirty="0">
+              <a:solidFill>
+                <a:srgbClr val="1F3A5F"/>
+              </a:solidFill>
+              <a:latin typeface="Calibri"/>
+            </a:endParaRPr>
           </a:p>
         </p:txBody>
       </p:sp>
@@ -11469,8 +11877,8 @@
         </p:nvSpPr>
         <p:spPr>
           <a:xfrm>
-            <a:off x="3931920" y="4105656"/>
-            <a:ext cx="7772400" cy="640080"/>
+            <a:off x="3931920" y="4287196"/>
+            <a:ext cx="7772400" cy="276999"/>
           </a:xfrm>
           <a:prstGeom prst="rect">
             <a:avLst/>
@@ -11485,14 +11893,29 @@
           <a:p>
             <a:pPr algn="l"/>
             <a:r>
-              <a:rPr sz="1200" b="0" i="0">
+              <a:rPr lang="en-US" sz="1200" b="0" i="0" dirty="0" err="1">
                 <a:solidFill>
                   <a:srgbClr val="1A1A1A"/>
                 </a:solidFill>
                 <a:latin typeface="Calibri"/>
               </a:rPr>
-              <a:t>Best F1 was selected directly on the test set. A clean protocol would use a separate validation split. CV partially mitigates this.</a:t>
-            </a:r>
+              <a:t>kNN</a:t>
+            </a:r>
+            <a:r>
+              <a:rPr lang="en-US" sz="1200" b="0" i="0" dirty="0">
+                <a:solidFill>
+                  <a:srgbClr val="1A1A1A"/>
+                </a:solidFill>
+                <a:latin typeface="Calibri"/>
+              </a:rPr>
+              <a:t> doesn't do feature selection.</a:t>
+            </a:r>
+            <a:endParaRPr sz="1200" b="0" i="0" dirty="0">
+              <a:solidFill>
+                <a:srgbClr val="1A1A1A"/>
+              </a:solidFill>
+              <a:latin typeface="Calibri"/>
+            </a:endParaRPr>
           </a:p>
         </p:txBody>
       </p:sp>
@@ -11733,7 +12156,7 @@
         <p:spPr>
           <a:xfrm>
             <a:off x="457200" y="6492240"/>
-            <a:ext cx="7315200" cy="274320"/>
+            <a:ext cx="7315200" cy="246221"/>
           </a:xfrm>
           <a:prstGeom prst="rect">
             <a:avLst/>
@@ -11748,14 +12171,29 @@
           <a:p>
             <a:pPr algn="l"/>
             <a:r>
-              <a:rPr sz="1000" b="0" i="0">
+              <a:rPr sz="1000" b="0" i="0" dirty="0">
                 <a:solidFill>
                   <a:srgbClr val="556070"/>
                 </a:solidFill>
                 <a:latin typeface="Calibri"/>
               </a:rPr>
-              <a:t>Online Shoppers Purchase-Intention Capstone  |  kNN from Scratch</a:t>
-            </a:r>
+              <a:t>Online Shoppers Purchase-Intention Capstone  |  </a:t>
+            </a:r>
+            <a:r>
+              <a:rPr sz="1000" b="0" i="0" dirty="0" err="1">
+                <a:solidFill>
+                  <a:srgbClr val="556070"/>
+                </a:solidFill>
+                <a:latin typeface="Calibri"/>
+              </a:rPr>
+              <a:t>kNN</a:t>
+            </a:r>
+            <a:endParaRPr sz="1000" b="0" i="0" dirty="0">
+              <a:solidFill>
+                <a:srgbClr val="556070"/>
+              </a:solidFill>
+              <a:latin typeface="Calibri"/>
+            </a:endParaRPr>
           </a:p>
         </p:txBody>
       </p:sp>
@@ -11789,7 +12227,7 @@
                 </a:solidFill>
                 <a:latin typeface="Calibri"/>
               </a:rPr>
-              <a:t>Slide 19</a:t>
+              <a:t>Slide 18</a:t>
             </a:r>
           </a:p>
         </p:txBody>
@@ -12959,7 +13397,7 @@
         <p:spPr>
           <a:xfrm>
             <a:off x="457200" y="6492240"/>
-            <a:ext cx="7315200" cy="274320"/>
+            <a:ext cx="7315200" cy="246221"/>
           </a:xfrm>
           <a:prstGeom prst="rect">
             <a:avLst/>
@@ -12974,14 +13412,29 @@
           <a:p>
             <a:pPr algn="l"/>
             <a:r>
-              <a:rPr sz="1000" b="0" i="0">
+              <a:rPr sz="1000" b="0" i="0" dirty="0">
                 <a:solidFill>
                   <a:srgbClr val="556070"/>
                 </a:solidFill>
                 <a:latin typeface="Calibri"/>
               </a:rPr>
-              <a:t>Online Shoppers Purchase-Intention Capstone  |  kNN from Scratch</a:t>
-            </a:r>
+              <a:t>Online Shoppers Purchase-Intention Capstone  |  </a:t>
+            </a:r>
+            <a:r>
+              <a:rPr sz="1000" b="0" i="0" dirty="0" err="1">
+                <a:solidFill>
+                  <a:srgbClr val="556070"/>
+                </a:solidFill>
+                <a:latin typeface="Calibri"/>
+              </a:rPr>
+              <a:t>kNN</a:t>
+            </a:r>
+            <a:endParaRPr sz="1000" b="0" i="0" dirty="0">
+              <a:solidFill>
+                <a:srgbClr val="556070"/>
+              </a:solidFill>
+              <a:latin typeface="Calibri"/>
+            </a:endParaRPr>
           </a:p>
         </p:txBody>
       </p:sp>
@@ -13015,7 +13468,7 @@
                 </a:solidFill>
                 <a:latin typeface="Calibri"/>
               </a:rPr>
-              <a:t>Slide 20</a:t>
+              <a:t>Slide 19</a:t>
             </a:r>
           </a:p>
         </p:txBody>
@@ -13212,7 +13665,7 @@
         <p:spPr>
           <a:xfrm>
             <a:off x="457200" y="1280160"/>
-            <a:ext cx="11247120" cy="365760"/>
+            <a:ext cx="11247120" cy="323165"/>
           </a:xfrm>
           <a:prstGeom prst="rect">
             <a:avLst/>
@@ -13227,13 +13680,22 @@
           <a:p>
             <a:pPr algn="l"/>
             <a:r>
-              <a:rPr sz="1500" b="0" i="1">
+              <a:rPr lang="en-US" sz="1500" i="1" dirty="0">
                 <a:solidFill>
                   <a:srgbClr val="556070"/>
                 </a:solidFill>
                 <a:latin typeface="Calibri"/>
               </a:rPr>
-              <a:t>Step-by-step problem solving — from the question to the answer to the caveats.</a:t>
+              <a:t>F</a:t>
+            </a:r>
+            <a:r>
+              <a:rPr sz="1500" b="0" i="1" dirty="0">
+                <a:solidFill>
+                  <a:srgbClr val="556070"/>
+                </a:solidFill>
+                <a:latin typeface="Calibri"/>
+              </a:rPr>
+              <a:t>rom the question to the answer to the caveats.</a:t>
             </a:r>
           </a:p>
         </p:txBody>
@@ -14632,7 +15094,7 @@
         <p:spPr>
           <a:xfrm>
             <a:off x="457200" y="6492240"/>
-            <a:ext cx="7315200" cy="274320"/>
+            <a:ext cx="7315200" cy="246221"/>
           </a:xfrm>
           <a:prstGeom prst="rect">
             <a:avLst/>
@@ -14647,14 +15109,29 @@
           <a:p>
             <a:pPr algn="l"/>
             <a:r>
-              <a:rPr sz="1000" b="0" i="0">
+              <a:rPr sz="1000" b="0" i="0" dirty="0">
                 <a:solidFill>
                   <a:srgbClr val="556070"/>
                 </a:solidFill>
                 <a:latin typeface="Calibri"/>
               </a:rPr>
-              <a:t>Online Shoppers Purchase-Intention Capstone  |  kNN from Scratch</a:t>
-            </a:r>
+              <a:t>Online Shoppers Purchase-Intention Capstone  |  </a:t>
+            </a:r>
+            <a:r>
+              <a:rPr sz="1000" b="0" i="0" dirty="0" err="1">
+                <a:solidFill>
+                  <a:srgbClr val="556070"/>
+                </a:solidFill>
+                <a:latin typeface="Calibri"/>
+              </a:rPr>
+              <a:t>kNN</a:t>
+            </a:r>
+            <a:endParaRPr sz="1000" b="0" i="0" dirty="0">
+              <a:solidFill>
+                <a:srgbClr val="556070"/>
+              </a:solidFill>
+              <a:latin typeface="Calibri"/>
+            </a:endParaRPr>
           </a:p>
         </p:txBody>
       </p:sp>
@@ -14988,7 +15465,7 @@
           <a:p>
             <a:pPr algn="ctr"/>
             <a:r>
-              <a:rPr sz="2000" b="1" i="0">
+              <a:rPr sz="2000" b="1" i="0" dirty="0">
                 <a:solidFill>
                   <a:srgbClr val="FFFFFF"/>
                 </a:solidFill>
@@ -15007,8 +15484,8 @@
         </p:nvSpPr>
         <p:spPr>
           <a:xfrm>
-            <a:off x="1417320" y="2194560"/>
-            <a:ext cx="10241280" cy="777240"/>
+            <a:off x="1417320" y="2413903"/>
+            <a:ext cx="10241280" cy="338554"/>
           </a:xfrm>
           <a:prstGeom prst="rect">
             <a:avLst/>
@@ -15023,13 +15500,49 @@
           <a:p>
             <a:pPr algn="l"/>
             <a:r>
-              <a:rPr sz="1600" b="0" i="0">
+              <a:rPr sz="1600" b="0" i="0" dirty="0">
                 <a:solidFill>
                   <a:srgbClr val="1A1A1A"/>
                 </a:solidFill>
                 <a:latin typeface="Calibri"/>
               </a:rPr>
-              <a:t>A kNN classifier built from scratch can learn real, transferable signal from web-session data.</a:t>
+              <a:t>A </a:t>
+            </a:r>
+            <a:r>
+              <a:rPr sz="1600" b="0" i="0" dirty="0" err="1">
+                <a:solidFill>
+                  <a:srgbClr val="1A1A1A"/>
+                </a:solidFill>
+                <a:latin typeface="Calibri"/>
+              </a:rPr>
+              <a:t>kNN</a:t>
+            </a:r>
+            <a:r>
+              <a:rPr sz="1600" b="0" i="0" dirty="0">
+                <a:solidFill>
+                  <a:srgbClr val="1A1A1A"/>
+                </a:solidFill>
+                <a:latin typeface="Calibri"/>
+              </a:rPr>
+              <a:t> classifier</a:t>
+            </a:r>
+            <a:r>
+              <a:rPr lang="en-US" sz="1600" b="0" i="0" dirty="0">
+                <a:solidFill>
+                  <a:srgbClr val="1A1A1A"/>
+                </a:solidFill>
+                <a:latin typeface="Calibri"/>
+              </a:rPr>
+              <a:t> </a:t>
+            </a:r>
+            <a:r>
+              <a:rPr sz="1600" b="0" i="0" dirty="0">
+                <a:solidFill>
+                  <a:srgbClr val="1A1A1A"/>
+                </a:solidFill>
+                <a:latin typeface="Calibri"/>
+              </a:rPr>
+              <a:t>can learn real, transferable signal from web-session data.</a:t>
             </a:r>
           </a:p>
         </p:txBody>
@@ -15137,7 +15650,7 @@
           <a:p>
             <a:pPr algn="l"/>
             <a:r>
-              <a:rPr sz="1600" b="0" i="0">
+              <a:rPr sz="1600" b="0" i="0" dirty="0">
                 <a:solidFill>
                   <a:srgbClr val="1A1A1A"/>
                 </a:solidFill>
@@ -15251,7 +15764,7 @@
           <a:p>
             <a:pPr algn="l"/>
             <a:r>
-              <a:rPr sz="1600" b="0" i="0">
+              <a:rPr sz="1600" b="0" i="0" dirty="0">
                 <a:solidFill>
                   <a:srgbClr val="1A1A1A"/>
                 </a:solidFill>
@@ -15365,7 +15878,7 @@
           <a:p>
             <a:pPr algn="l"/>
             <a:r>
-              <a:rPr sz="1600" b="0" i="0">
+              <a:rPr sz="1600" b="0" i="0" dirty="0">
                 <a:solidFill>
                   <a:srgbClr val="1A1A1A"/>
                 </a:solidFill>
@@ -15479,7 +15992,7 @@
           <a:p>
             <a:pPr algn="l"/>
             <a:r>
-              <a:rPr sz="1600" b="0" i="0">
+              <a:rPr sz="1600" b="0" i="0" dirty="0">
                 <a:solidFill>
                   <a:srgbClr val="1A1A1A"/>
                 </a:solidFill>
@@ -15499,7 +16012,7 @@
         <p:spPr>
           <a:xfrm>
             <a:off x="457200" y="6492240"/>
-            <a:ext cx="7315200" cy="274320"/>
+            <a:ext cx="7315200" cy="246221"/>
           </a:xfrm>
           <a:prstGeom prst="rect">
             <a:avLst/>
@@ -15514,14 +16027,29 @@
           <a:p>
             <a:pPr algn="l"/>
             <a:r>
-              <a:rPr sz="1000" b="0" i="0">
+              <a:rPr sz="1000" b="0" i="0" dirty="0">
                 <a:solidFill>
                   <a:srgbClr val="556070"/>
                 </a:solidFill>
                 <a:latin typeface="Calibri"/>
               </a:rPr>
-              <a:t>Online Shoppers Purchase-Intention Capstone  |  kNN from Scratch</a:t>
-            </a:r>
+              <a:t>Online Shoppers Purchase-Intention Capstone  |  </a:t>
+            </a:r>
+            <a:r>
+              <a:rPr sz="1000" b="0" i="0" dirty="0" err="1">
+                <a:solidFill>
+                  <a:srgbClr val="556070"/>
+                </a:solidFill>
+                <a:latin typeface="Calibri"/>
+              </a:rPr>
+              <a:t>kNN</a:t>
+            </a:r>
+            <a:endParaRPr sz="1000" b="0" i="0" dirty="0">
+              <a:solidFill>
+                <a:srgbClr val="556070"/>
+              </a:solidFill>
+              <a:latin typeface="Calibri"/>
+            </a:endParaRPr>
           </a:p>
         </p:txBody>
       </p:sp>
@@ -15555,7 +16083,7 @@
                 </a:solidFill>
                 <a:latin typeface="Calibri"/>
               </a:rPr>
-              <a:t>Slide 21</a:t>
+              <a:t>Slide 20</a:t>
             </a:r>
           </a:p>
         </p:txBody>
@@ -15753,7 +16281,7 @@
         <p:spPr>
           <a:xfrm>
             <a:off x="457200" y="4754880"/>
-            <a:ext cx="11247120" cy="457200"/>
+            <a:ext cx="11247120" cy="369332"/>
           </a:xfrm>
           <a:prstGeom prst="rect">
             <a:avLst/>
@@ -15768,49 +16296,29 @@
           <a:p>
             <a:pPr algn="ctr"/>
             <a:r>
-              <a:rPr sz="1800" b="0" i="0">
+              <a:rPr sz="1800" b="0" i="0" dirty="0">
                 <a:solidFill>
                   <a:srgbClr val="FFFFFF"/>
                 </a:solidFill>
                 <a:latin typeface="Calibri"/>
               </a:rPr>
-              <a:t>Predicting Online Shoppers’ Purchase Intention  •  kNN from Scratch</a:t>
-            </a:r>
-          </a:p>
-        </p:txBody>
-      </p:sp>
-      <p:sp>
-        <p:nvSpPr>
-          <p:cNvPr id="7" name="TextBox 6"/>
-          <p:cNvSpPr txBox="1"/>
-          <p:nvPr/>
-        </p:nvSpPr>
-        <p:spPr>
-          <a:xfrm>
-            <a:off x="457200" y="5303520"/>
-            <a:ext cx="11247120" cy="457200"/>
-          </a:xfrm>
-          <a:prstGeom prst="rect">
-            <a:avLst/>
-          </a:prstGeom>
-          <a:noFill/>
-        </p:spPr>
-        <p:txBody>
-          <a:bodyPr wrap="square" anchor="t">
-            <a:spAutoFit/>
-          </a:bodyPr>
-          <a:lstStyle/>
-          <a:p>
-            <a:pPr algn="ctr"/>
-            <a:r>
-              <a:rPr sz="1400" b="0" i="1">
+              <a:t>Predicting Online Shoppers’ Purchase Intention  •  </a:t>
+            </a:r>
+            <a:r>
+              <a:rPr sz="1800" b="0" i="0" dirty="0" err="1">
                 <a:solidFill>
                   <a:srgbClr val="FFFFFF"/>
                 </a:solidFill>
                 <a:latin typeface="Calibri"/>
               </a:rPr>
-              <a:t>Code, figures, and report bundled in the project folder.</a:t>
-            </a:r>
+              <a:t>kNN</a:t>
+            </a:r>
+            <a:endParaRPr sz="1800" b="0" i="0" dirty="0">
+              <a:solidFill>
+                <a:srgbClr val="FFFFFF"/>
+              </a:solidFill>
+              <a:latin typeface="Calibri"/>
+            </a:endParaRPr>
           </a:p>
         </p:txBody>
       </p:sp>
@@ -16021,7 +16529,7 @@
           <a:p>
             <a:pPr algn="l"/>
             <a:r>
-              <a:rPr sz="1500" b="0" i="1">
+              <a:rPr sz="1500" b="0" i="1" dirty="0">
                 <a:solidFill>
                   <a:srgbClr val="556070"/>
                 </a:solidFill>
@@ -16428,7 +16936,7 @@
         <p:spPr>
           <a:xfrm>
             <a:off x="457200" y="6492240"/>
-            <a:ext cx="7315200" cy="274320"/>
+            <a:ext cx="7315200" cy="246221"/>
           </a:xfrm>
           <a:prstGeom prst="rect">
             <a:avLst/>
@@ -16443,14 +16951,29 @@
           <a:p>
             <a:pPr algn="l"/>
             <a:r>
-              <a:rPr sz="1000" b="0" i="0">
+              <a:rPr sz="1000" b="0" i="0" dirty="0">
                 <a:solidFill>
                   <a:srgbClr val="556070"/>
                 </a:solidFill>
                 <a:latin typeface="Calibri"/>
               </a:rPr>
-              <a:t>Online Shoppers Purchase-Intention Capstone  |  kNN from Scratch</a:t>
-            </a:r>
+              <a:t>Online Shoppers Purchase-Intention Capstone  |  </a:t>
+            </a:r>
+            <a:r>
+              <a:rPr sz="1000" b="0" i="0" dirty="0" err="1">
+                <a:solidFill>
+                  <a:srgbClr val="556070"/>
+                </a:solidFill>
+                <a:latin typeface="Calibri"/>
+              </a:rPr>
+              <a:t>kNN</a:t>
+            </a:r>
+            <a:endParaRPr sz="1000" b="0" i="0" dirty="0">
+              <a:solidFill>
+                <a:srgbClr val="556070"/>
+              </a:solidFill>
+              <a:latin typeface="Calibri"/>
+            </a:endParaRPr>
           </a:p>
         </p:txBody>
       </p:sp>
@@ -17893,7 +18416,7 @@
         <p:spPr>
           <a:xfrm>
             <a:off x="457200" y="6492240"/>
-            <a:ext cx="7315200" cy="274320"/>
+            <a:ext cx="7315200" cy="246221"/>
           </a:xfrm>
           <a:prstGeom prst="rect">
             <a:avLst/>
@@ -17908,14 +18431,29 @@
           <a:p>
             <a:pPr algn="l"/>
             <a:r>
-              <a:rPr sz="1000" b="0" i="0">
+              <a:rPr sz="1000" b="0" i="0" dirty="0">
                 <a:solidFill>
                   <a:srgbClr val="556070"/>
                 </a:solidFill>
                 <a:latin typeface="Calibri"/>
               </a:rPr>
-              <a:t>Online Shoppers Purchase-Intention Capstone  |  kNN from Scratch</a:t>
-            </a:r>
+              <a:t>Online Shoppers Purchase-Intention Capstone  |  </a:t>
+            </a:r>
+            <a:r>
+              <a:rPr sz="1000" b="0" i="0" dirty="0" err="1">
+                <a:solidFill>
+                  <a:srgbClr val="556070"/>
+                </a:solidFill>
+                <a:latin typeface="Calibri"/>
+              </a:rPr>
+              <a:t>kNN</a:t>
+            </a:r>
+            <a:endParaRPr sz="1000" b="0" i="0" dirty="0">
+              <a:solidFill>
+                <a:srgbClr val="556070"/>
+              </a:solidFill>
+              <a:latin typeface="Calibri"/>
+            </a:endParaRPr>
           </a:p>
         </p:txBody>
       </p:sp>
@@ -18430,7 +18968,7 @@
         <p:spPr>
           <a:xfrm>
             <a:off x="457200" y="6492240"/>
-            <a:ext cx="7315200" cy="274320"/>
+            <a:ext cx="7315200" cy="246221"/>
           </a:xfrm>
           <a:prstGeom prst="rect">
             <a:avLst/>
@@ -18445,14 +18983,29 @@
           <a:p>
             <a:pPr algn="l"/>
             <a:r>
-              <a:rPr sz="1000" b="0" i="0">
+              <a:rPr sz="1000" b="0" i="0" dirty="0">
                 <a:solidFill>
                   <a:srgbClr val="556070"/>
                 </a:solidFill>
                 <a:latin typeface="Calibri"/>
               </a:rPr>
-              <a:t>Online Shoppers Purchase-Intention Capstone  |  kNN from Scratch</a:t>
-            </a:r>
+              <a:t>Online Shoppers Purchase-Intention Capstone  |  </a:t>
+            </a:r>
+            <a:r>
+              <a:rPr sz="1000" b="0" i="0" dirty="0" err="1">
+                <a:solidFill>
+                  <a:srgbClr val="556070"/>
+                </a:solidFill>
+                <a:latin typeface="Calibri"/>
+              </a:rPr>
+              <a:t>kNN</a:t>
+            </a:r>
+            <a:endParaRPr sz="1000" b="0" i="0" dirty="0">
+              <a:solidFill>
+                <a:srgbClr val="556070"/>
+              </a:solidFill>
+              <a:latin typeface="Calibri"/>
+            </a:endParaRPr>
           </a:p>
         </p:txBody>
       </p:sp>
@@ -18769,8 +19322,8 @@
         </p:blipFill>
         <p:spPr>
           <a:xfrm>
-            <a:off x="365760" y="1828800"/>
-            <a:ext cx="6858000" cy="6156000"/>
+            <a:off x="457200" y="1783080"/>
+            <a:ext cx="6736384" cy="4709160"/>
           </a:xfrm>
           <a:prstGeom prst="rect">
             <a:avLst/>
@@ -18868,7 +19421,7 @@
         <p:spPr>
           <a:xfrm>
             <a:off x="7635240" y="2514600"/>
-            <a:ext cx="4023360" cy="2286000"/>
+            <a:ext cx="4023360" cy="1439112"/>
           </a:xfrm>
           <a:prstGeom prst="rect">
             <a:avLst/>
@@ -18890,13 +19443,49 @@
               </a:spcAft>
             </a:pPr>
             <a:r>
-              <a:rPr sz="1600">
+              <a:rPr sz="1600" dirty="0">
                 <a:solidFill>
                   <a:srgbClr val="1A1A1A"/>
                 </a:solidFill>
                 <a:latin typeface="Calibri"/>
               </a:rPr>
-              <a:t>•  BounceRates ↔ ExitRates:  r = 0.913</a:t>
+              <a:t>•  </a:t>
+            </a:r>
+            <a:r>
+              <a:rPr sz="1600" dirty="0" err="1">
+                <a:solidFill>
+                  <a:srgbClr val="1A1A1A"/>
+                </a:solidFill>
+                <a:latin typeface="Calibri"/>
+              </a:rPr>
+              <a:t>BounceRates</a:t>
+            </a:r>
+            <a:r>
+              <a:rPr sz="1600" dirty="0">
+                <a:solidFill>
+                  <a:srgbClr val="1A1A1A"/>
+                </a:solidFill>
+                <a:latin typeface="Calibri"/>
+              </a:rPr>
+              <a:t> ↔ </a:t>
+            </a:r>
+            <a:r>
+              <a:rPr sz="1600" dirty="0" err="1">
+                <a:solidFill>
+                  <a:srgbClr val="1A1A1A"/>
+                </a:solidFill>
+                <a:latin typeface="Calibri"/>
+              </a:rPr>
+              <a:t>ExitRates</a:t>
+            </a:r>
+            <a:r>
+              <a:rPr sz="1600" dirty="0">
+                <a:solidFill>
+                  <a:srgbClr val="1A1A1A"/>
+                </a:solidFill>
+                <a:latin typeface="Calibri"/>
+              </a:rPr>
+              <a:t>:  r = 0.913</a:t>
             </a:r>
           </a:p>
           <a:p>
@@ -18909,73 +19498,39 @@
               </a:spcAft>
             </a:pPr>
             <a:r>
-              <a:rPr sz="1600">
+              <a:rPr sz="1600" dirty="0">
                 <a:solidFill>
                   <a:srgbClr val="1A1A1A"/>
                 </a:solidFill>
                 <a:latin typeface="Calibri"/>
               </a:rPr>
-              <a:t>•  ProductRelated ↔ ProductRelated_Duration:  r = 0.861</a:t>
-            </a:r>
-          </a:p>
-        </p:txBody>
-      </p:sp>
-      <p:sp>
-        <p:nvSpPr>
-          <p:cNvPr id="12" name="TextBox 11"/>
-          <p:cNvSpPr txBox="1"/>
-          <p:nvPr/>
-        </p:nvSpPr>
-        <p:spPr>
-          <a:xfrm>
-            <a:off x="7635240" y="4297680"/>
-            <a:ext cx="4023360" cy="457200"/>
-          </a:xfrm>
-          <a:prstGeom prst="rect">
-            <a:avLst/>
-          </a:prstGeom>
-          <a:noFill/>
-        </p:spPr>
-        <p:txBody>
-          <a:bodyPr wrap="square" anchor="t">
-            <a:spAutoFit/>
-          </a:bodyPr>
-          <a:lstStyle/>
-          <a:p>
-            <a:pPr algn="l"/>
-            <a:r>
-              <a:rPr sz="1600" b="1" i="0">
-                <a:solidFill>
-                  <a:srgbClr val="DD8452"/>
-                </a:solidFill>
-                <a:latin typeface="Calibri"/>
-              </a:rPr>
-              <a:t>Why It Matters</a:t>
-            </a:r>
-          </a:p>
-        </p:txBody>
-      </p:sp>
-      <p:sp>
-        <p:nvSpPr>
-          <p:cNvPr id="13" name="TextBox 12"/>
-          <p:cNvSpPr txBox="1"/>
-          <p:nvPr/>
-        </p:nvSpPr>
-        <p:spPr>
-          <a:xfrm>
-            <a:off x="7635240" y="4754880"/>
-            <a:ext cx="4023360" cy="1371600"/>
-          </a:xfrm>
-          <a:prstGeom prst="rect">
-            <a:avLst/>
-          </a:prstGeom>
-          <a:noFill/>
-        </p:spPr>
-        <p:txBody>
-          <a:bodyPr wrap="square">
-            <a:spAutoFit/>
-          </a:bodyPr>
-          <a:lstStyle/>
+              <a:t>•  </a:t>
+            </a:r>
+            <a:r>
+              <a:rPr sz="1600" dirty="0" err="1">
+                <a:solidFill>
+                  <a:srgbClr val="1A1A1A"/>
+                </a:solidFill>
+                <a:latin typeface="Calibri"/>
+              </a:rPr>
+              <a:t>ProductRelated</a:t>
+            </a:r>
+            <a:r>
+              <a:rPr sz="1600" dirty="0">
+                <a:solidFill>
+                  <a:srgbClr val="1A1A1A"/>
+                </a:solidFill>
+                <a:latin typeface="Calibri"/>
+              </a:rPr>
+              <a:t> </a:t>
+            </a:r>
+            <a:endParaRPr lang="en-US" sz="1600" dirty="0">
+              <a:solidFill>
+                <a:srgbClr val="1A1A1A"/>
+              </a:solidFill>
+              <a:latin typeface="Calibri"/>
+            </a:endParaRPr>
+          </a:p>
           <a:p>
             <a:pPr algn="l">
               <a:lnSpc>
@@ -18986,13 +19541,13 @@
               </a:spcAft>
             </a:pPr>
             <a:r>
-              <a:rPr sz="1300">
+              <a:rPr lang="en-PH" sz="1600" dirty="0">
                 <a:solidFill>
                   <a:srgbClr val="1A1A1A"/>
                 </a:solidFill>
                 <a:latin typeface="Calibri"/>
               </a:rPr>
-              <a:t>•  kNN measures distance using all features at once.</a:t>
+              <a:t>	↔ </a:t>
             </a:r>
           </a:p>
           <a:p>
@@ -19005,12 +19560,117 @@
               </a:spcAft>
             </a:pPr>
             <a:r>
+              <a:rPr sz="1600" dirty="0" err="1">
+                <a:solidFill>
+                  <a:srgbClr val="1A1A1A"/>
+                </a:solidFill>
+                <a:latin typeface="Calibri"/>
+              </a:rPr>
+              <a:t>ProductRelated_Duration</a:t>
+            </a:r>
+            <a:r>
+              <a:rPr sz="1600" dirty="0">
+                <a:solidFill>
+                  <a:srgbClr val="1A1A1A"/>
+                </a:solidFill>
+                <a:latin typeface="Calibri"/>
+              </a:rPr>
+              <a:t>:  r = 0.861</a:t>
+            </a:r>
+          </a:p>
+        </p:txBody>
+      </p:sp>
+      <p:sp>
+        <p:nvSpPr>
+          <p:cNvPr id="12" name="TextBox 11"/>
+          <p:cNvSpPr txBox="1"/>
+          <p:nvPr/>
+        </p:nvSpPr>
+        <p:spPr>
+          <a:xfrm>
+            <a:off x="7635240" y="4297680"/>
+            <a:ext cx="4023360" cy="457200"/>
+          </a:xfrm>
+          <a:prstGeom prst="rect">
+            <a:avLst/>
+          </a:prstGeom>
+          <a:noFill/>
+        </p:spPr>
+        <p:txBody>
+          <a:bodyPr wrap="square" anchor="t">
+            <a:spAutoFit/>
+          </a:bodyPr>
+          <a:lstStyle/>
+          <a:p>
+            <a:pPr algn="l"/>
+            <a:r>
+              <a:rPr sz="1600" b="1" i="0">
+                <a:solidFill>
+                  <a:srgbClr val="DD8452"/>
+                </a:solidFill>
+                <a:latin typeface="Calibri"/>
+              </a:rPr>
+              <a:t>Why It Matters</a:t>
+            </a:r>
+          </a:p>
+        </p:txBody>
+      </p:sp>
+      <p:sp>
+        <p:nvSpPr>
+          <p:cNvPr id="13" name="TextBox 12"/>
+          <p:cNvSpPr txBox="1"/>
+          <p:nvPr/>
+        </p:nvSpPr>
+        <p:spPr>
+          <a:xfrm>
+            <a:off x="7635240" y="4754880"/>
+            <a:ext cx="4023360" cy="1371600"/>
+          </a:xfrm>
+          <a:prstGeom prst="rect">
+            <a:avLst/>
+          </a:prstGeom>
+          <a:noFill/>
+        </p:spPr>
+        <p:txBody>
+          <a:bodyPr wrap="square">
+            <a:spAutoFit/>
+          </a:bodyPr>
+          <a:lstStyle/>
+          <a:p>
+            <a:pPr algn="l">
+              <a:lnSpc>
+                <a:spcPct val="115000"/>
+              </a:lnSpc>
+              <a:spcAft>
+                <a:spcPts val="600"/>
+              </a:spcAft>
+            </a:pPr>
+            <a:r>
               <a:rPr sz="1300">
                 <a:solidFill>
                   <a:srgbClr val="1A1A1A"/>
                 </a:solidFill>
                 <a:latin typeface="Calibri"/>
               </a:rPr>
+              <a:t>•  kNN measures distance using all features at once.</a:t>
+            </a:r>
+          </a:p>
+          <a:p>
+            <a:pPr algn="l">
+              <a:lnSpc>
+                <a:spcPct val="115000"/>
+              </a:lnSpc>
+              <a:spcAft>
+                <a:spcPts val="600"/>
+              </a:spcAft>
+            </a:pPr>
+            <a:r>
+              <a:rPr sz="1300">
+                <a:solidFill>
+                  <a:srgbClr val="1A1A1A"/>
+                </a:solidFill>
+                <a:latin typeface="Calibri"/>
+              </a:rPr>
               <a:t>•  Duplicate features inflate that behavior’s influence on neighbor selection.</a:t>
             </a:r>
           </a:p>
@@ -19025,7 +19685,7 @@
         <p:spPr>
           <a:xfrm>
             <a:off x="457200" y="6492240"/>
-            <a:ext cx="7315200" cy="274320"/>
+            <a:ext cx="7315200" cy="246221"/>
           </a:xfrm>
           <a:prstGeom prst="rect">
             <a:avLst/>
@@ -19040,14 +19700,29 @@
           <a:p>
             <a:pPr algn="l"/>
             <a:r>
-              <a:rPr sz="1000" b="0" i="0">
+              <a:rPr sz="1000" b="0" i="0" dirty="0">
                 <a:solidFill>
                   <a:srgbClr val="556070"/>
                 </a:solidFill>
                 <a:latin typeface="Calibri"/>
               </a:rPr>
-              <a:t>Online Shoppers Purchase-Intention Capstone  |  kNN from Scratch</a:t>
-            </a:r>
+              <a:t>Online Shoppers Purchase-Intention Capstone  |  </a:t>
+            </a:r>
+            <a:r>
+              <a:rPr lang="en-US" sz="1000" b="0" i="0" dirty="0" err="1">
+                <a:solidFill>
+                  <a:srgbClr val="556070"/>
+                </a:solidFill>
+                <a:latin typeface="Calibri"/>
+              </a:rPr>
+              <a:t>kNN</a:t>
+            </a:r>
+            <a:endParaRPr sz="1000" b="0" i="0" dirty="0">
+              <a:solidFill>
+                <a:srgbClr val="556070"/>
+              </a:solidFill>
+              <a:latin typeface="Calibri"/>
+            </a:endParaRPr>
           </a:p>
         </p:txBody>
       </p:sp>
@@ -19639,7 +20314,7 @@
         <p:spPr>
           <a:xfrm>
             <a:off x="457200" y="6492240"/>
-            <a:ext cx="7315200" cy="274320"/>
+            <a:ext cx="7315200" cy="246221"/>
           </a:xfrm>
           <a:prstGeom prst="rect">
             <a:avLst/>
@@ -19654,14 +20329,29 @@
           <a:p>
             <a:pPr algn="l"/>
             <a:r>
-              <a:rPr sz="1000" b="0" i="0">
+              <a:rPr sz="1000" b="0" i="0" dirty="0">
                 <a:solidFill>
                   <a:srgbClr val="556070"/>
                 </a:solidFill>
                 <a:latin typeface="Calibri"/>
               </a:rPr>
-              <a:t>Online Shoppers Purchase-Intention Capstone  |  kNN from Scratch</a:t>
-            </a:r>
+              <a:t>Online Shoppers Purchase-Intention Capstone  |  </a:t>
+            </a:r>
+            <a:r>
+              <a:rPr sz="1000" b="0" i="0" dirty="0" err="1">
+                <a:solidFill>
+                  <a:srgbClr val="556070"/>
+                </a:solidFill>
+                <a:latin typeface="Calibri"/>
+              </a:rPr>
+              <a:t>kNN</a:t>
+            </a:r>
+            <a:endParaRPr sz="1000" b="0" i="0" dirty="0">
+              <a:solidFill>
+                <a:srgbClr val="556070"/>
+              </a:solidFill>
+              <a:latin typeface="Calibri"/>
+            </a:endParaRPr>
           </a:p>
         </p:txBody>
       </p:sp>
@@ -20253,7 +20943,7 @@
         <p:spPr>
           <a:xfrm>
             <a:off x="457200" y="6492240"/>
-            <a:ext cx="7315200" cy="274320"/>
+            <a:ext cx="7315200" cy="246221"/>
           </a:xfrm>
           <a:prstGeom prst="rect">
             <a:avLst/>
@@ -20268,14 +20958,29 @@
           <a:p>
             <a:pPr algn="l"/>
             <a:r>
-              <a:rPr sz="1000" b="0" i="0">
+              <a:rPr sz="1000" b="0" i="0" dirty="0">
                 <a:solidFill>
                   <a:srgbClr val="556070"/>
                 </a:solidFill>
                 <a:latin typeface="Calibri"/>
               </a:rPr>
-              <a:t>Online Shoppers Purchase-Intention Capstone  |  kNN from Scratch</a:t>
-            </a:r>
+              <a:t>Online Shoppers Purchase-Intention Capstone  |  </a:t>
+            </a:r>
+            <a:r>
+              <a:rPr sz="1000" b="0" i="0" dirty="0" err="1">
+                <a:solidFill>
+                  <a:srgbClr val="556070"/>
+                </a:solidFill>
+                <a:latin typeface="Calibri"/>
+              </a:rPr>
+              <a:t>kNN</a:t>
+            </a:r>
+            <a:endParaRPr sz="1000" b="0" i="0" dirty="0">
+              <a:solidFill>
+                <a:srgbClr val="556070"/>
+              </a:solidFill>
+              <a:latin typeface="Calibri"/>
+            </a:endParaRPr>
           </a:p>
         </p:txBody>
       </p:sp>
@@ -20905,7 +21610,7 @@
         <p:spPr>
           <a:xfrm>
             <a:off x="457200" y="6492240"/>
-            <a:ext cx="7315200" cy="274320"/>
+            <a:ext cx="7315200" cy="246221"/>
           </a:xfrm>
           <a:prstGeom prst="rect">
             <a:avLst/>
@@ -20920,14 +21625,29 @@
           <a:p>
             <a:pPr algn="l"/>
             <a:r>
-              <a:rPr sz="1000" b="0" i="0">
+              <a:rPr sz="1000" b="0" i="0" dirty="0">
                 <a:solidFill>
                   <a:srgbClr val="556070"/>
                 </a:solidFill>
                 <a:latin typeface="Calibri"/>
               </a:rPr>
-              <a:t>Online Shoppers Purchase-Intention Capstone  |  kNN from Scratch</a:t>
-            </a:r>
+              <a:t>Online Shoppers Purchase-Intention Capstone  |  </a:t>
+            </a:r>
+            <a:r>
+              <a:rPr sz="1000" b="0" i="0" dirty="0" err="1">
+                <a:solidFill>
+                  <a:srgbClr val="556070"/>
+                </a:solidFill>
+                <a:latin typeface="Calibri"/>
+              </a:rPr>
+              <a:t>kNN</a:t>
+            </a:r>
+            <a:endParaRPr sz="1000" b="0" i="0" dirty="0">
+              <a:solidFill>
+                <a:srgbClr val="556070"/>
+              </a:solidFill>
+              <a:latin typeface="Calibri"/>
+            </a:endParaRPr>
           </a:p>
         </p:txBody>
       </p:sp>

--- a/Capstone_Presentation.pptx
+++ b/Capstone_Presentation.pptx
@@ -322,7 +322,7 @@
           <a:p>
             <a:fld id="{5BCAD085-E8A6-8845-BD4E-CB4CCA059FC4}" type="datetimeFigureOut">
               <a:rPr lang="en-US" smtClean="0"/>
-              <a:t>5/22/2026</a:t>
+              <a:t>5/23/2026</a:t>
             </a:fld>
             <a:endParaRPr lang="en-US"/>
           </a:p>
@@ -490,7 +490,7 @@
           <a:p>
             <a:fld id="{5BCAD085-E8A6-8845-BD4E-CB4CCA059FC4}" type="datetimeFigureOut">
               <a:rPr lang="en-US" smtClean="0"/>
-              <a:t>5/22/2026</a:t>
+              <a:t>5/23/2026</a:t>
             </a:fld>
             <a:endParaRPr lang="en-US"/>
           </a:p>
@@ -668,7 +668,7 @@
           <a:p>
             <a:fld id="{5BCAD085-E8A6-8845-BD4E-CB4CCA059FC4}" type="datetimeFigureOut">
               <a:rPr lang="en-US" smtClean="0"/>
-              <a:t>5/22/2026</a:t>
+              <a:t>5/23/2026</a:t>
             </a:fld>
             <a:endParaRPr lang="en-US"/>
           </a:p>
@@ -836,7 +836,7 @@
           <a:p>
             <a:fld id="{5BCAD085-E8A6-8845-BD4E-CB4CCA059FC4}" type="datetimeFigureOut">
               <a:rPr lang="en-US" smtClean="0"/>
-              <a:t>5/22/2026</a:t>
+              <a:t>5/23/2026</a:t>
             </a:fld>
             <a:endParaRPr lang="en-US"/>
           </a:p>
@@ -1081,7 +1081,7 @@
           <a:p>
             <a:fld id="{5BCAD085-E8A6-8845-BD4E-CB4CCA059FC4}" type="datetimeFigureOut">
               <a:rPr lang="en-US" smtClean="0"/>
-              <a:t>5/22/2026</a:t>
+              <a:t>5/23/2026</a:t>
             </a:fld>
             <a:endParaRPr lang="en-US"/>
           </a:p>
@@ -1366,7 +1366,7 @@
           <a:p>
             <a:fld id="{5BCAD085-E8A6-8845-BD4E-CB4CCA059FC4}" type="datetimeFigureOut">
               <a:rPr lang="en-US" smtClean="0"/>
-              <a:t>5/22/2026</a:t>
+              <a:t>5/23/2026</a:t>
             </a:fld>
             <a:endParaRPr lang="en-US"/>
           </a:p>
@@ -1785,7 +1785,7 @@
           <a:p>
             <a:fld id="{5BCAD085-E8A6-8845-BD4E-CB4CCA059FC4}" type="datetimeFigureOut">
               <a:rPr lang="en-US" smtClean="0"/>
-              <a:t>5/22/2026</a:t>
+              <a:t>5/23/2026</a:t>
             </a:fld>
             <a:endParaRPr lang="en-US"/>
           </a:p>
@@ -1902,7 +1902,7 @@
           <a:p>
             <a:fld id="{5BCAD085-E8A6-8845-BD4E-CB4CCA059FC4}" type="datetimeFigureOut">
               <a:rPr lang="en-US" smtClean="0"/>
-              <a:t>5/22/2026</a:t>
+              <a:t>5/23/2026</a:t>
             </a:fld>
             <a:endParaRPr lang="en-US"/>
           </a:p>
@@ -1997,7 +1997,7 @@
           <a:p>
             <a:fld id="{5BCAD085-E8A6-8845-BD4E-CB4CCA059FC4}" type="datetimeFigureOut">
               <a:rPr lang="en-US" smtClean="0"/>
-              <a:t>5/22/2026</a:t>
+              <a:t>5/23/2026</a:t>
             </a:fld>
             <a:endParaRPr lang="en-US"/>
           </a:p>
@@ -2272,7 +2272,7 @@
           <a:p>
             <a:fld id="{5BCAD085-E8A6-8845-BD4E-CB4CCA059FC4}" type="datetimeFigureOut">
               <a:rPr lang="en-US" smtClean="0"/>
-              <a:t>5/22/2026</a:t>
+              <a:t>5/23/2026</a:t>
             </a:fld>
             <a:endParaRPr lang="en-US"/>
           </a:p>
@@ -2524,7 +2524,7 @@
           <a:p>
             <a:fld id="{5BCAD085-E8A6-8845-BD4E-CB4CCA059FC4}" type="datetimeFigureOut">
               <a:rPr lang="en-US" smtClean="0"/>
-              <a:t>5/22/2026</a:t>
+              <a:t>5/23/2026</a:t>
             </a:fld>
             <a:endParaRPr lang="en-US"/>
           </a:p>
@@ -2735,7 +2735,7 @@
           <a:p>
             <a:fld id="{5BCAD085-E8A6-8845-BD4E-CB4CCA059FC4}" type="datetimeFigureOut">
               <a:rPr lang="en-US" smtClean="0"/>
-              <a:t>5/22/2026</a:t>
+              <a:t>5/23/2026</a:t>
             </a:fld>
             <a:endParaRPr lang="en-US"/>
           </a:p>
@@ -5320,26 +5320,32 @@
                 </a:solidFill>
                 <a:latin typeface="Calibri"/>
               </a:rPr>
-              <a:t>The Pipeline We Built — Seven Scripts</a:t>
-            </a:r>
-            <a:r>
-              <a:rPr lang="en-US" sz="3000" b="1" dirty="0">
+              <a:t>The Pipeline We Built — </a:t>
+            </a:r>
+            <a:r>
+              <a:rPr sz="3000" b="1" i="0">
                 <a:solidFill>
                   <a:srgbClr val="1F3A5F"/>
                 </a:solidFill>
                 <a:latin typeface="Calibri"/>
               </a:rPr>
-              <a:t> </a:t>
-            </a:r>
-            <a:r>
-              <a:rPr sz="3000" b="1" i="0" dirty="0">
+              <a:t>Seven Script</a:t>
+            </a:r>
+            <a:r>
+              <a:rPr lang="en-US" sz="3000" b="1" i="0">
                 <a:solidFill>
                   <a:srgbClr val="1F3A5F"/>
                 </a:solidFill>
                 <a:latin typeface="Calibri"/>
               </a:rPr>
-              <a:t>Estimators</a:t>
-            </a:r>
+              <a:t>s</a:t>
+            </a:r>
+            <a:endParaRPr sz="3000" b="1" i="0" dirty="0">
+              <a:solidFill>
+                <a:srgbClr val="1F3A5F"/>
+              </a:solidFill>
+              <a:latin typeface="Calibri"/>
+            </a:endParaRPr>
           </a:p>
         </p:txBody>
       </p:sp>

--- a/Capstone_Presentation.pptx
+++ b/Capstone_Presentation.pptx
@@ -17,15 +17,16 @@
     <p:sldId id="265" r:id="rId11"/>
     <p:sldId id="266" r:id="rId12"/>
     <p:sldId id="267" r:id="rId13"/>
-    <p:sldId id="268" r:id="rId14"/>
-    <p:sldId id="269" r:id="rId15"/>
-    <p:sldId id="270" r:id="rId16"/>
-    <p:sldId id="271" r:id="rId17"/>
-    <p:sldId id="272" r:id="rId18"/>
-    <p:sldId id="273" r:id="rId19"/>
-    <p:sldId id="274" r:id="rId20"/>
-    <p:sldId id="275" r:id="rId21"/>
-    <p:sldId id="276" r:id="rId22"/>
+    <p:sldId id="277" r:id="rId14"/>
+    <p:sldId id="268" r:id="rId15"/>
+    <p:sldId id="269" r:id="rId16"/>
+    <p:sldId id="270" r:id="rId17"/>
+    <p:sldId id="271" r:id="rId18"/>
+    <p:sldId id="272" r:id="rId19"/>
+    <p:sldId id="273" r:id="rId20"/>
+    <p:sldId id="274" r:id="rId21"/>
+    <p:sldId id="275" r:id="rId22"/>
+    <p:sldId id="276" r:id="rId23"/>
   </p:sldIdLst>
   <p:sldSz cx="12192000" cy="6858000"/>
   <p:notesSz cx="6858000" cy="9144000"/>
@@ -5320,32 +5321,26 @@
                 </a:solidFill>
                 <a:latin typeface="Calibri"/>
               </a:rPr>
-              <a:t>The Pipeline We Built — </a:t>
-            </a:r>
-            <a:r>
-              <a:rPr sz="3000" b="1" i="0">
+              <a:t>The Pipeline We Built — Seven Scripts</a:t>
+            </a:r>
+            <a:r>
+              <a:rPr lang="en-US" sz="3000" b="1" dirty="0">
                 <a:solidFill>
                   <a:srgbClr val="1F3A5F"/>
                 </a:solidFill>
                 <a:latin typeface="Calibri"/>
               </a:rPr>
-              <a:t>Seven Script</a:t>
-            </a:r>
-            <a:r>
-              <a:rPr lang="en-US" sz="3000" b="1" i="0">
+              <a:t> </a:t>
+            </a:r>
+            <a:r>
+              <a:rPr sz="3000" b="1" i="0" dirty="0">
                 <a:solidFill>
                   <a:srgbClr val="1F3A5F"/>
                 </a:solidFill>
                 <a:latin typeface="Calibri"/>
               </a:rPr>
-              <a:t>s</a:t>
-            </a:r>
-            <a:endParaRPr sz="3000" b="1" i="0" dirty="0">
-              <a:solidFill>
-                <a:srgbClr val="1F3A5F"/>
-              </a:solidFill>
-              <a:latin typeface="Calibri"/>
-            </a:endParaRPr>
+              <a:t>Estimators</a:t>
+            </a:r>
           </a:p>
         </p:txBody>
       </p:sp>
@@ -6835,6 +6830,7 @@
           <a:ln>
             <a:noFill/>
           </a:ln>
+          <a:effectLst/>
         </p:spPr>
         <p:style>
           <a:lnRef idx="1">
@@ -6876,19 +6872,20 @@
           <a:noFill/>
         </p:spPr>
         <p:txBody>
-          <a:bodyPr wrap="none" tIns="0" bIns="0">
+          <a:bodyPr wrap="square" anchor="t">
             <a:spAutoFit/>
           </a:bodyPr>
           <a:lstStyle/>
           <a:p>
             <a:pPr algn="l"/>
             <a:r>
-              <a:rPr sz="1400" b="1">
+              <a:rPr sz="1400" b="1" i="0">
                 <a:solidFill>
                   <a:srgbClr val="FFFFFF"/>
                 </a:solidFill>
-              </a:rPr>
-              <a:t>06  •  Tuning</a:t>
+                <a:latin typeface="Calibri"/>
+              </a:rPr>
+              <a:t>05  •  Method — Worked example</a:t>
             </a:r>
           </a:p>
         </p:txBody>
@@ -6923,7 +6920,7 @@
                 </a:solidFill>
                 <a:latin typeface="Calibri"/>
               </a:rPr>
-              <a:t>Sweeping k from 1 to 30</a:t>
+              <a:t>One Prediction, Walked Through</a:t>
             </a:r>
           </a:p>
         </p:txBody>
@@ -6937,7 +6934,7 @@
         <p:spPr>
           <a:xfrm>
             <a:off x="457200" y="1280160"/>
-            <a:ext cx="11247120" cy="323165"/>
+            <a:ext cx="11247120" cy="365760"/>
           </a:xfrm>
           <a:prstGeom prst="rect">
             <a:avLst/>
@@ -6952,20 +6949,14 @@
           <a:p>
             <a:pPr algn="l"/>
             <a:r>
-              <a:rPr lang="en-US" sz="1500" b="0" i="1" dirty="0">
+              <a:rPr sz="1500" b="0" i="1">
                 <a:solidFill>
                   <a:srgbClr val="556070"/>
                 </a:solidFill>
                 <a:latin typeface="Calibri"/>
               </a:rPr>
-              <a:t>F1 peaks at k = 3; we chose k = 7 for its higher precision. Recall and precision pull in opposite directions.</a:t>
-            </a:r>
-            <a:endParaRPr sz="1500" b="0" i="1" dirty="0">
-              <a:solidFill>
-                <a:srgbClr val="556070"/>
-              </a:solidFill>
-              <a:latin typeface="Calibri"/>
-            </a:endParaRPr>
+              <a:t>The same algorithm on a single new session — its seven closest neighbors cast the vote.</a:t>
+            </a:r>
           </a:p>
         </p:txBody>
       </p:sp>
@@ -7013,6 +7004,30 @@
           </a:p>
         </p:txBody>
       </p:sp>
+      <p:pic>
+        <p:nvPicPr>
+          <p:cNvPr id="8" name="Picture 7" descr="fig9_sample_prediction.png"/>
+          <p:cNvPicPr>
+            <a:picLocks noChangeAspect="1"/>
+          </p:cNvPicPr>
+          <p:nvPr/>
+        </p:nvPicPr>
+        <p:blipFill>
+          <a:blip r:embed="rId2"/>
+          <a:stretch>
+            <a:fillRect/>
+          </a:stretch>
+        </p:blipFill>
+        <p:spPr>
+          <a:xfrm>
+            <a:off x="365760" y="1828800"/>
+            <a:ext cx="5742580" cy="3977639"/>
+          </a:xfrm>
+          <a:prstGeom prst="rect">
+            <a:avLst/>
+          </a:prstGeom>
+        </p:spPr>
+      </p:pic>
       <p:sp>
         <p:nvSpPr>
           <p:cNvPr id="9" name="Rounded Rectangle 8"/>
@@ -7021,8 +7036,8 @@
         </p:nvSpPr>
         <p:spPr>
           <a:xfrm>
-            <a:off x="7955279" y="1920240"/>
-            <a:ext cx="3840480" cy="4297680"/>
+            <a:off x="7863840" y="1828800"/>
+            <a:ext cx="3931920" cy="3977639"/>
           </a:xfrm>
           <a:prstGeom prst="roundRect">
             <a:avLst/>
@@ -7068,8 +7083,8 @@
         </p:nvSpPr>
         <p:spPr>
           <a:xfrm>
-            <a:off x="8092440" y="2057400"/>
-            <a:ext cx="3566160" cy="457200"/>
+            <a:off x="8028431" y="2011680"/>
+            <a:ext cx="3611880" cy="457200"/>
           </a:xfrm>
           <a:prstGeom prst="rect">
             <a:avLst/>
@@ -7084,13 +7099,13 @@
           <a:p>
             <a:pPr algn="l"/>
             <a:r>
-              <a:rPr sz="1800" b="1" i="0">
+              <a:rPr sz="2000" b="1" i="0">
                 <a:solidFill>
                   <a:srgbClr val="1F3A5F"/>
                 </a:solidFill>
                 <a:latin typeface="Calibri"/>
               </a:rPr>
-              <a:t>Best k by metric</a:t>
+              <a:t>The Vote</a:t>
             </a:r>
           </a:p>
         </p:txBody>
@@ -7103,8 +7118,8 @@
         </p:nvSpPr>
         <p:spPr>
           <a:xfrm>
-            <a:off x="8046720" y="2614832"/>
-            <a:ext cx="3566160" cy="1536896"/>
+            <a:off x="8028431" y="2560320"/>
+            <a:ext cx="3611880" cy="3383280"/>
           </a:xfrm>
           <a:prstGeom prst="rect">
             <a:avLst/>
@@ -7126,13 +7141,13 @@
               </a:spcAft>
             </a:pPr>
             <a:r>
-              <a:rPr sz="1300" dirty="0">
+              <a:rPr sz="1300">
                 <a:solidFill>
                   <a:srgbClr val="1A1A1A"/>
                 </a:solidFill>
                 <a:latin typeface="Calibri"/>
               </a:rPr>
-              <a:t>•  Best Accuracy:   k = 21</a:t>
+              <a:t>•  New session: PageValues = 22.4, BounceRates = 0.005, Month = Nov, VisitorType = New.</a:t>
             </a:r>
           </a:p>
           <a:p>
@@ -7145,13 +7160,13 @@
               </a:spcAft>
             </a:pPr>
             <a:r>
-              <a:rPr sz="1300" dirty="0">
+              <a:rPr sz="1300">
                 <a:solidFill>
                   <a:srgbClr val="1A1A1A"/>
                 </a:solidFill>
                 <a:latin typeface="Calibri"/>
               </a:rPr>
-              <a:t>•  Best Precision: k = 24</a:t>
+              <a:t>•  Find the 7 most similar past sessions by standardized distance.</a:t>
             </a:r>
           </a:p>
           <a:p>
@@ -7164,13 +7179,13 @@
               </a:spcAft>
             </a:pPr>
             <a:r>
-              <a:rPr sz="1300" dirty="0">
+              <a:rPr sz="1300">
                 <a:solidFill>
                   <a:srgbClr val="1A1A1A"/>
                 </a:solidFill>
                 <a:latin typeface="Calibri"/>
               </a:rPr>
-              <a:t>•  Best Recall:     k = 1</a:t>
+              <a:t>•  They split 5 buyers vs. 2 non-buyers.</a:t>
             </a:r>
           </a:p>
           <a:p>
@@ -7183,29 +7198,14 @@
               </a:spcAft>
             </a:pPr>
             <a:r>
-              <a:rPr sz="1300" dirty="0">
+              <a:rPr sz="1300">
                 <a:solidFill>
                   <a:srgbClr val="1A1A1A"/>
                 </a:solidFill>
                 <a:latin typeface="Calibri"/>
               </a:rPr>
-              <a:t>•  Best F1:         k = </a:t>
-            </a:r>
-            <a:r>
-              <a:rPr lang="en-PH" sz="1300" dirty="0">
-                <a:solidFill>
-                  <a:srgbClr val="1A1A1A"/>
-                </a:solidFill>
-                <a:latin typeface="Calibri"/>
-              </a:rPr>
-              <a:t>3</a:t>
-            </a:r>
-            <a:endParaRPr lang="en-US" sz="1300" dirty="0">
-              <a:solidFill>
-                <a:srgbClr val="1A1A1A"/>
-              </a:solidFill>
-              <a:latin typeface="Calibri"/>
-            </a:endParaRPr>
+              <a:t>•  Majority wins → predict PURCHASE.</a:t>
+            </a:r>
           </a:p>
           <a:p>
             <a:pPr algn="l">
@@ -7217,33 +7217,27 @@
               </a:spcAft>
             </a:pPr>
             <a:r>
-              <a:rPr lang="en-US" sz="1300" dirty="0">
+              <a:rPr sz="1300">
                 <a:solidFill>
                   <a:srgbClr val="1A1A1A"/>
                 </a:solidFill>
                 <a:latin typeface="Calibri"/>
               </a:rPr>
-              <a:t>Chosen:             k = 7 (higher precision)</a:t>
-            </a:r>
-            <a:endParaRPr sz="1300" dirty="0">
-              <a:solidFill>
-                <a:srgbClr val="1A1A1A"/>
-              </a:solidFill>
-              <a:latin typeface="Calibri"/>
-            </a:endParaRPr>
-          </a:p>
-        </p:txBody>
-      </p:sp>
-      <p:sp>
-        <p:nvSpPr>
-          <p:cNvPr id="12" name="TextBox 11"/>
-          <p:cNvSpPr txBox="1"/>
-          <p:nvPr/>
-        </p:nvSpPr>
-        <p:spPr>
-          <a:xfrm>
-            <a:off x="8092440" y="4572000"/>
-            <a:ext cx="3566160" cy="338554"/>
+              <a:t>•  Actual label: Purchase ✓ — the prediction is correct.</a:t>
+            </a:r>
+          </a:p>
+        </p:txBody>
+      </p:sp>
+      <p:sp>
+        <p:nvSpPr>
+          <p:cNvPr id="13" name="TextBox 12"/>
+          <p:cNvSpPr txBox="1"/>
+          <p:nvPr/>
+        </p:nvSpPr>
+        <p:spPr>
+          <a:xfrm>
+            <a:off x="457200" y="6492240"/>
+            <a:ext cx="8229600" cy="246221"/>
           </a:xfrm>
           <a:prstGeom prst="rect">
             <a:avLst/>
@@ -7258,132 +7252,6 @@
           <a:p>
             <a:pPr algn="l"/>
             <a:r>
-              <a:rPr lang="en-PH" sz="1600" b="1" i="0" dirty="0">
-                <a:solidFill>
-                  <a:srgbClr val="DD8452"/>
-                </a:solidFill>
-                <a:latin typeface="Calibri"/>
-              </a:rPr>
-              <a:t>How we chose k</a:t>
-            </a:r>
-            <a:endParaRPr sz="1600" b="1" i="0" dirty="0">
-              <a:solidFill>
-                <a:srgbClr val="DD8452"/>
-              </a:solidFill>
-              <a:latin typeface="Calibri"/>
-            </a:endParaRPr>
-          </a:p>
-        </p:txBody>
-      </p:sp>
-      <p:sp>
-        <p:nvSpPr>
-          <p:cNvPr id="13" name="TextBox 12"/>
-          <p:cNvSpPr txBox="1"/>
-          <p:nvPr/>
-        </p:nvSpPr>
-        <p:spPr>
-          <a:xfrm>
-            <a:off x="8092440" y="5029200"/>
-            <a:ext cx="3566160" cy="1006301"/>
-          </a:xfrm>
-          <a:prstGeom prst="rect">
-            <a:avLst/>
-          </a:prstGeom>
-          <a:noFill/>
-        </p:spPr>
-        <p:txBody>
-          <a:bodyPr wrap="square">
-            <a:spAutoFit/>
-          </a:bodyPr>
-          <a:lstStyle/>
-          <a:p>
-            <a:pPr algn="l">
-              <a:lnSpc>
-                <a:spcPct val="115000"/>
-              </a:lnSpc>
-              <a:spcAft>
-                <a:spcPts val="600"/>
-              </a:spcAft>
-            </a:pPr>
-            <a:r>
-              <a:rPr sz="1200" dirty="0">
-                <a:solidFill>
-                  <a:srgbClr val="1A1A1A"/>
-                </a:solidFill>
-                <a:latin typeface="Calibri"/>
-              </a:rPr>
-              <a:t>•  </a:t>
-            </a:r>
-            <a:r>
-              <a:rPr lang="en-US" sz="1200" dirty="0">
-                <a:solidFill>
-                  <a:srgbClr val="1A1A1A"/>
-                </a:solidFill>
-                <a:latin typeface="Calibri"/>
-              </a:rPr>
-              <a:t>F1 to find the peak region (k ≈ 3–9), avoiding both extremes.</a:t>
-            </a:r>
-          </a:p>
-          <a:p>
-            <a:pPr algn="l">
-              <a:lnSpc>
-                <a:spcPct val="115000"/>
-              </a:lnSpc>
-              <a:spcAft>
-                <a:spcPts val="600"/>
-              </a:spcAft>
-            </a:pPr>
-            <a:r>
-              <a:rPr sz="1200" dirty="0">
-                <a:solidFill>
-                  <a:srgbClr val="1A1A1A"/>
-                </a:solidFill>
-                <a:latin typeface="Calibri"/>
-              </a:rPr>
-              <a:t>•  </a:t>
-            </a:r>
-            <a:r>
-              <a:rPr lang="en-US" sz="1200" dirty="0">
-                <a:solidFill>
-                  <a:srgbClr val="1A1A1A"/>
-                </a:solidFill>
-                <a:latin typeface="Calibri"/>
-              </a:rPr>
-              <a:t>Precision to pick within it → k = 7 — a confident, conservative classifier.</a:t>
-            </a:r>
-            <a:endParaRPr sz="1200" dirty="0">
-              <a:solidFill>
-                <a:srgbClr val="1A1A1A"/>
-              </a:solidFill>
-              <a:latin typeface="Calibri"/>
-            </a:endParaRPr>
-          </a:p>
-        </p:txBody>
-      </p:sp>
-      <p:sp>
-        <p:nvSpPr>
-          <p:cNvPr id="14" name="TextBox 13"/>
-          <p:cNvSpPr txBox="1"/>
-          <p:nvPr/>
-        </p:nvSpPr>
-        <p:spPr>
-          <a:xfrm>
-            <a:off x="457200" y="6492240"/>
-            <a:ext cx="7315200" cy="246221"/>
-          </a:xfrm>
-          <a:prstGeom prst="rect">
-            <a:avLst/>
-          </a:prstGeom>
-          <a:noFill/>
-        </p:spPr>
-        <p:txBody>
-          <a:bodyPr wrap="square" anchor="t">
-            <a:spAutoFit/>
-          </a:bodyPr>
-          <a:lstStyle/>
-          <a:p>
-            <a:pPr algn="l"/>
-            <a:r>
               <a:rPr sz="1000" b="0" i="0" dirty="0">
                 <a:solidFill>
                   <a:srgbClr val="556070"/>
@@ -7399,16 +7267,7 @@
                 </a:solidFill>
                 <a:latin typeface="Calibri"/>
               </a:rPr>
-              <a:t>kN</a:t>
-            </a:r>
-            <a:r>
-              <a:rPr lang="en-US" sz="1000" b="0" i="0" dirty="0" err="1">
-                <a:solidFill>
-                  <a:srgbClr val="556070"/>
-                </a:solidFill>
-                <a:latin typeface="Calibri"/>
-              </a:rPr>
-              <a:t>N</a:t>
+              <a:t>kNN</a:t>
             </a:r>
             <a:endParaRPr sz="1000" b="0" i="0" dirty="0">
               <a:solidFill>
@@ -7419,72 +7278,12 @@
           </a:p>
         </p:txBody>
       </p:sp>
-      <p:sp>
-        <p:nvSpPr>
-          <p:cNvPr id="15" name="TextBox 14"/>
-          <p:cNvSpPr txBox="1"/>
-          <p:nvPr/>
-        </p:nvSpPr>
-        <p:spPr>
-          <a:xfrm>
-            <a:off x="10515600" y="6492240"/>
-            <a:ext cx="1188720" cy="274320"/>
-          </a:xfrm>
-          <a:prstGeom prst="rect">
-            <a:avLst/>
-          </a:prstGeom>
-          <a:noFill/>
-        </p:spPr>
-        <p:txBody>
-          <a:bodyPr wrap="square" anchor="t">
-            <a:spAutoFit/>
-          </a:bodyPr>
-          <a:lstStyle/>
-          <a:p>
-            <a:pPr algn="r"/>
-            <a:r>
-              <a:rPr sz="1000" b="0" i="0">
-                <a:solidFill>
-                  <a:srgbClr val="556070"/>
-                </a:solidFill>
-                <a:latin typeface="Calibri"/>
-              </a:rPr>
-              <a:t>Slide 13</a:t>
-            </a:r>
-          </a:p>
-        </p:txBody>
-      </p:sp>
-      <p:pic>
-        <p:nvPicPr>
-          <p:cNvPr id="17" name="Picture 16">
-            <a:extLst>
-              <a:ext uri="{FF2B5EF4-FFF2-40B4-BE49-F238E27FC236}">
-                <a16:creationId xmlns:a16="http://schemas.microsoft.com/office/drawing/2014/main" id="{F1B267E2-0090-66C2-4F43-9A070DDC2241}"/>
-              </a:ext>
-            </a:extLst>
-          </p:cNvPr>
-          <p:cNvPicPr>
-            <a:picLocks noChangeAspect="1"/>
-          </p:cNvPicPr>
-          <p:nvPr/>
-        </p:nvPicPr>
-        <p:blipFill>
-          <a:blip r:embed="rId2"/>
-          <a:stretch>
-            <a:fillRect/>
-          </a:stretch>
-        </p:blipFill>
-        <p:spPr>
-          <a:xfrm>
-            <a:off x="457200" y="1904729"/>
-            <a:ext cx="7315200" cy="3948596"/>
-          </a:xfrm>
-          <a:prstGeom prst="rect">
-            <a:avLst/>
-          </a:prstGeom>
-        </p:spPr>
-      </p:pic>
     </p:spTree>
+    <p:extLst>
+      <p:ext uri="{BB962C8B-B14F-4D97-AF65-F5344CB8AC3E}">
+        <p14:creationId xmlns:p14="http://schemas.microsoft.com/office/powerpoint/2010/main" val="3988810227"/>
+      </p:ext>
+    </p:extLst>
   </p:cSld>
   <p:clrMapOvr>
     <a:masterClrMapping/>
@@ -7627,7 +7426,7 @@
                   <a:srgbClr val="FFFFFF"/>
                 </a:solidFill>
               </a:rPr>
-              <a:t>07  •  Results</a:t>
+              <a:t>06  •  Tuning</a:t>
             </a:r>
           </a:p>
         </p:txBody>
@@ -7662,7 +7461,7 @@
                 </a:solidFill>
                 <a:latin typeface="Calibri"/>
               </a:rPr>
-              <a:t>Final Test-Set Performance  (k = 7)</a:t>
+              <a:t>Sweeping k from 1 to 30</a:t>
             </a:r>
           </a:p>
         </p:txBody>
@@ -7676,7 +7475,7 @@
         <p:spPr>
           <a:xfrm>
             <a:off x="457200" y="1280160"/>
-            <a:ext cx="11247120" cy="365760"/>
+            <a:ext cx="11247120" cy="323165"/>
           </a:xfrm>
           <a:prstGeom prst="rect">
             <a:avLst/>
@@ -7691,14 +7490,20 @@
           <a:p>
             <a:pPr algn="l"/>
             <a:r>
-              <a:rPr sz="1500" b="0" i="1">
+              <a:rPr lang="en-US" sz="1500" b="0" i="1" dirty="0">
                 <a:solidFill>
                   <a:srgbClr val="556070"/>
                 </a:solidFill>
                 <a:latin typeface="Calibri"/>
               </a:rPr>
-              <a:t>Held-out 20% test set, 2,465 sessions, never seen during tuning preparation.</a:t>
-            </a:r>
+              <a:t>F1 peaks at k = 3; we chose k = 7 for its higher precision. Recall and precision pull in opposite directions.</a:t>
+            </a:r>
+            <a:endParaRPr sz="1500" b="0" i="1" dirty="0">
+              <a:solidFill>
+                <a:srgbClr val="556070"/>
+              </a:solidFill>
+              <a:latin typeface="Calibri"/>
+            </a:endParaRPr>
           </a:p>
         </p:txBody>
       </p:sp>
@@ -7748,14 +7553,14 @@
       </p:sp>
       <p:sp>
         <p:nvSpPr>
-          <p:cNvPr id="8" name="Rounded Rectangle 7"/>
+          <p:cNvPr id="9" name="Rounded Rectangle 8"/>
           <p:cNvSpPr/>
           <p:nvPr/>
         </p:nvSpPr>
         <p:spPr>
           <a:xfrm>
-            <a:off x="457200" y="2011680"/>
-            <a:ext cx="2697480" cy="1463040"/>
+            <a:off x="7955279" y="1920240"/>
+            <a:ext cx="3840480" cy="4297680"/>
           </a:xfrm>
           <a:prstGeom prst="roundRect">
             <a:avLst/>
@@ -7795,14 +7600,14 @@
       </p:sp>
       <p:sp>
         <p:nvSpPr>
-          <p:cNvPr id="9" name="TextBox 8"/>
-          <p:cNvSpPr txBox="1"/>
-          <p:nvPr/>
-        </p:nvSpPr>
-        <p:spPr>
-          <a:xfrm>
-            <a:off x="457200" y="2194560"/>
-            <a:ext cx="2697480" cy="640080"/>
+          <p:cNvPr id="10" name="TextBox 9"/>
+          <p:cNvSpPr txBox="1"/>
+          <p:nvPr/>
+        </p:nvSpPr>
+        <p:spPr>
+          <a:xfrm>
+            <a:off x="8092440" y="2057400"/>
+            <a:ext cx="3566160" cy="457200"/>
           </a:xfrm>
           <a:prstGeom prst="rect">
             <a:avLst/>
@@ -7815,497 +7620,29 @@
           </a:bodyPr>
           <a:lstStyle/>
           <a:p>
-            <a:pPr algn="ctr"/>
-            <a:r>
-              <a:rPr sz="3000" b="1" i="0">
+            <a:pPr algn="l"/>
+            <a:r>
+              <a:rPr sz="1800" b="1" i="0">
                 <a:solidFill>
                   <a:srgbClr val="1F3A5F"/>
                 </a:solidFill>
                 <a:latin typeface="Calibri"/>
               </a:rPr>
-              <a:t>87.67%</a:t>
-            </a:r>
-          </a:p>
-        </p:txBody>
-      </p:sp>
-      <p:sp>
-        <p:nvSpPr>
-          <p:cNvPr id="10" name="TextBox 9"/>
-          <p:cNvSpPr txBox="1"/>
-          <p:nvPr/>
-        </p:nvSpPr>
-        <p:spPr>
-          <a:xfrm>
-            <a:off x="457200" y="2880360"/>
-            <a:ext cx="2697480" cy="365760"/>
-          </a:xfrm>
-          <a:prstGeom prst="rect">
-            <a:avLst/>
-          </a:prstGeom>
-          <a:noFill/>
-        </p:spPr>
-        <p:txBody>
-          <a:bodyPr wrap="square" anchor="t">
-            <a:spAutoFit/>
-          </a:bodyPr>
-          <a:lstStyle/>
-          <a:p>
-            <a:pPr algn="ctr"/>
-            <a:r>
-              <a:rPr sz="1300" b="0" i="0">
-                <a:solidFill>
-                  <a:srgbClr val="556070"/>
-                </a:solidFill>
-                <a:latin typeface="Calibri"/>
-              </a:rPr>
-              <a:t>Accuracy</a:t>
-            </a:r>
-          </a:p>
-        </p:txBody>
-      </p:sp>
-      <p:sp>
-        <p:nvSpPr>
-          <p:cNvPr id="11" name="Rounded Rectangle 10"/>
-          <p:cNvSpPr/>
-          <p:nvPr/>
-        </p:nvSpPr>
-        <p:spPr>
-          <a:xfrm>
-            <a:off x="3337560" y="2011680"/>
-            <a:ext cx="2697480" cy="1463040"/>
-          </a:xfrm>
-          <a:prstGeom prst="roundRect">
-            <a:avLst/>
-          </a:prstGeom>
-          <a:solidFill>
-            <a:srgbClr val="FFFFFF"/>
-          </a:solidFill>
-          <a:ln w="15875">
-            <a:solidFill>
-              <a:srgbClr val="1F3A5F"/>
-            </a:solidFill>
-          </a:ln>
-          <a:effectLst/>
-        </p:spPr>
-        <p:style>
-          <a:lnRef idx="1">
-            <a:schemeClr val="accent1"/>
-          </a:lnRef>
-          <a:fillRef idx="3">
-            <a:schemeClr val="accent1"/>
-          </a:fillRef>
-          <a:effectRef idx="2">
-            <a:schemeClr val="accent1"/>
-          </a:effectRef>
-          <a:fontRef idx="minor">
-            <a:schemeClr val="lt1"/>
-          </a:fontRef>
-        </p:style>
-        <p:txBody>
-          <a:bodyPr rtlCol="0" anchor="ctr"/>
-          <a:lstStyle/>
-          <a:p>
-            <a:pPr algn="ctr"/>
-            <a:endParaRPr/>
-          </a:p>
-        </p:txBody>
-      </p:sp>
-      <p:sp>
-        <p:nvSpPr>
-          <p:cNvPr id="12" name="TextBox 11"/>
-          <p:cNvSpPr txBox="1"/>
-          <p:nvPr/>
-        </p:nvSpPr>
-        <p:spPr>
-          <a:xfrm>
-            <a:off x="3337560" y="2194560"/>
-            <a:ext cx="2697480" cy="640080"/>
-          </a:xfrm>
-          <a:prstGeom prst="rect">
-            <a:avLst/>
-          </a:prstGeom>
-          <a:noFill/>
-        </p:spPr>
-        <p:txBody>
-          <a:bodyPr wrap="square" anchor="t">
-            <a:spAutoFit/>
-          </a:bodyPr>
-          <a:lstStyle/>
-          <a:p>
-            <a:pPr algn="ctr"/>
-            <a:r>
-              <a:rPr sz="3000" b="1" i="0">
-                <a:solidFill>
-                  <a:srgbClr val="4C72B0"/>
-                </a:solidFill>
-                <a:latin typeface="Calibri"/>
-              </a:rPr>
-              <a:t>0.6974</a:t>
-            </a:r>
-          </a:p>
-        </p:txBody>
-      </p:sp>
-      <p:sp>
-        <p:nvSpPr>
-          <p:cNvPr id="13" name="TextBox 12"/>
-          <p:cNvSpPr txBox="1"/>
-          <p:nvPr/>
-        </p:nvSpPr>
-        <p:spPr>
-          <a:xfrm>
-            <a:off x="3337560" y="2880360"/>
-            <a:ext cx="2697480" cy="365760"/>
-          </a:xfrm>
-          <a:prstGeom prst="rect">
-            <a:avLst/>
-          </a:prstGeom>
-          <a:noFill/>
-        </p:spPr>
-        <p:txBody>
-          <a:bodyPr wrap="square" anchor="t">
-            <a:spAutoFit/>
-          </a:bodyPr>
-          <a:lstStyle/>
-          <a:p>
-            <a:pPr algn="ctr"/>
-            <a:r>
-              <a:rPr sz="1300" b="0" i="0">
-                <a:solidFill>
-                  <a:srgbClr val="556070"/>
-                </a:solidFill>
-                <a:latin typeface="Calibri"/>
-              </a:rPr>
-              <a:t>Precision</a:t>
-            </a:r>
-          </a:p>
-        </p:txBody>
-      </p:sp>
-      <p:sp>
-        <p:nvSpPr>
-          <p:cNvPr id="14" name="Rounded Rectangle 13"/>
-          <p:cNvSpPr/>
-          <p:nvPr/>
-        </p:nvSpPr>
-        <p:spPr>
-          <a:xfrm>
-            <a:off x="6217920" y="2011680"/>
-            <a:ext cx="2697480" cy="1463040"/>
-          </a:xfrm>
-          <a:prstGeom prst="roundRect">
-            <a:avLst/>
-          </a:prstGeom>
-          <a:solidFill>
-            <a:srgbClr val="FFFFFF"/>
-          </a:solidFill>
-          <a:ln w="15875">
-            <a:solidFill>
-              <a:srgbClr val="1F3A5F"/>
-            </a:solidFill>
-          </a:ln>
-          <a:effectLst/>
-        </p:spPr>
-        <p:style>
-          <a:lnRef idx="1">
-            <a:schemeClr val="accent1"/>
-          </a:lnRef>
-          <a:fillRef idx="3">
-            <a:schemeClr val="accent1"/>
-          </a:fillRef>
-          <a:effectRef idx="2">
-            <a:schemeClr val="accent1"/>
-          </a:effectRef>
-          <a:fontRef idx="minor">
-            <a:schemeClr val="lt1"/>
-          </a:fontRef>
-        </p:style>
-        <p:txBody>
-          <a:bodyPr rtlCol="0" anchor="ctr"/>
-          <a:lstStyle/>
-          <a:p>
-            <a:pPr algn="ctr"/>
-            <a:endParaRPr/>
-          </a:p>
-        </p:txBody>
-      </p:sp>
-      <p:sp>
-        <p:nvSpPr>
-          <p:cNvPr id="15" name="TextBox 14"/>
-          <p:cNvSpPr txBox="1"/>
-          <p:nvPr/>
-        </p:nvSpPr>
-        <p:spPr>
-          <a:xfrm>
-            <a:off x="6217920" y="2194560"/>
-            <a:ext cx="2697480" cy="640080"/>
-          </a:xfrm>
-          <a:prstGeom prst="rect">
-            <a:avLst/>
-          </a:prstGeom>
-          <a:noFill/>
-        </p:spPr>
-        <p:txBody>
-          <a:bodyPr wrap="square" anchor="t">
-            <a:spAutoFit/>
-          </a:bodyPr>
-          <a:lstStyle/>
-          <a:p>
-            <a:pPr algn="ctr"/>
-            <a:r>
-              <a:rPr sz="3000" b="1" i="0">
-                <a:solidFill>
-                  <a:srgbClr val="DD8452"/>
-                </a:solidFill>
-                <a:latin typeface="Calibri"/>
-              </a:rPr>
-              <a:t>0.3570</a:t>
-            </a:r>
-          </a:p>
-        </p:txBody>
-      </p:sp>
-      <p:sp>
-        <p:nvSpPr>
-          <p:cNvPr id="16" name="TextBox 15"/>
-          <p:cNvSpPr txBox="1"/>
-          <p:nvPr/>
-        </p:nvSpPr>
-        <p:spPr>
-          <a:xfrm>
-            <a:off x="6217920" y="2880360"/>
-            <a:ext cx="2697480" cy="365760"/>
-          </a:xfrm>
-          <a:prstGeom prst="rect">
-            <a:avLst/>
-          </a:prstGeom>
-          <a:noFill/>
-        </p:spPr>
-        <p:txBody>
-          <a:bodyPr wrap="square" anchor="t">
-            <a:spAutoFit/>
-          </a:bodyPr>
-          <a:lstStyle/>
-          <a:p>
-            <a:pPr algn="ctr"/>
-            <a:r>
-              <a:rPr sz="1300" b="0" i="0">
-                <a:solidFill>
-                  <a:srgbClr val="556070"/>
-                </a:solidFill>
-                <a:latin typeface="Calibri"/>
-              </a:rPr>
-              <a:t>Recall</a:t>
-            </a:r>
-          </a:p>
-        </p:txBody>
-      </p:sp>
-      <p:sp>
-        <p:nvSpPr>
-          <p:cNvPr id="17" name="Rounded Rectangle 16"/>
-          <p:cNvSpPr/>
-          <p:nvPr/>
-        </p:nvSpPr>
-        <p:spPr>
-          <a:xfrm>
-            <a:off x="9098280" y="2011680"/>
-            <a:ext cx="2697480" cy="1463040"/>
-          </a:xfrm>
-          <a:prstGeom prst="roundRect">
-            <a:avLst/>
-          </a:prstGeom>
-          <a:solidFill>
-            <a:srgbClr val="FFFFFF"/>
-          </a:solidFill>
-          <a:ln w="15875">
-            <a:solidFill>
-              <a:srgbClr val="1F3A5F"/>
-            </a:solidFill>
-          </a:ln>
-          <a:effectLst/>
-        </p:spPr>
-        <p:style>
-          <a:lnRef idx="1">
-            <a:schemeClr val="accent1"/>
-          </a:lnRef>
-          <a:fillRef idx="3">
-            <a:schemeClr val="accent1"/>
-          </a:fillRef>
-          <a:effectRef idx="2">
-            <a:schemeClr val="accent1"/>
-          </a:effectRef>
-          <a:fontRef idx="minor">
-            <a:schemeClr val="lt1"/>
-          </a:fontRef>
-        </p:style>
-        <p:txBody>
-          <a:bodyPr rtlCol="0" anchor="ctr"/>
-          <a:lstStyle/>
-          <a:p>
-            <a:pPr algn="ctr"/>
-            <a:endParaRPr/>
-          </a:p>
-        </p:txBody>
-      </p:sp>
-      <p:sp>
-        <p:nvSpPr>
-          <p:cNvPr id="18" name="TextBox 17"/>
-          <p:cNvSpPr txBox="1"/>
-          <p:nvPr/>
-        </p:nvSpPr>
-        <p:spPr>
-          <a:xfrm>
-            <a:off x="9098280" y="2194560"/>
-            <a:ext cx="2697480" cy="640080"/>
-          </a:xfrm>
-          <a:prstGeom prst="rect">
-            <a:avLst/>
-          </a:prstGeom>
-          <a:noFill/>
-        </p:spPr>
-        <p:txBody>
-          <a:bodyPr wrap="square" anchor="t">
-            <a:spAutoFit/>
-          </a:bodyPr>
-          <a:lstStyle/>
-          <a:p>
-            <a:pPr algn="ctr"/>
-            <a:r>
-              <a:rPr sz="3000" b="1" i="0">
-                <a:solidFill>
-                  <a:srgbClr val="1F3A5F"/>
-                </a:solidFill>
-                <a:latin typeface="Calibri"/>
-              </a:rPr>
-              <a:t>0.4722</a:t>
-            </a:r>
-          </a:p>
-        </p:txBody>
-      </p:sp>
-      <p:sp>
-        <p:nvSpPr>
-          <p:cNvPr id="19" name="TextBox 18"/>
-          <p:cNvSpPr txBox="1"/>
-          <p:nvPr/>
-        </p:nvSpPr>
-        <p:spPr>
-          <a:xfrm>
-            <a:off x="9098280" y="2880360"/>
-            <a:ext cx="2697480" cy="365760"/>
-          </a:xfrm>
-          <a:prstGeom prst="rect">
-            <a:avLst/>
-          </a:prstGeom>
-          <a:noFill/>
-        </p:spPr>
-        <p:txBody>
-          <a:bodyPr wrap="square" anchor="t">
-            <a:spAutoFit/>
-          </a:bodyPr>
-          <a:lstStyle/>
-          <a:p>
-            <a:pPr algn="ctr"/>
-            <a:r>
-              <a:rPr sz="1300" b="0" i="0">
-                <a:solidFill>
-                  <a:srgbClr val="556070"/>
-                </a:solidFill>
-                <a:latin typeface="Calibri"/>
-              </a:rPr>
-              <a:t>F1 Score</a:t>
-            </a:r>
-          </a:p>
-        </p:txBody>
-      </p:sp>
-      <p:sp>
-        <p:nvSpPr>
-          <p:cNvPr id="20" name="Rounded Rectangle 19"/>
-          <p:cNvSpPr/>
-          <p:nvPr/>
-        </p:nvSpPr>
-        <p:spPr>
-          <a:xfrm>
-            <a:off x="457200" y="3703320"/>
-            <a:ext cx="5486400" cy="2606040"/>
-          </a:xfrm>
-          <a:prstGeom prst="roundRect">
-            <a:avLst/>
-          </a:prstGeom>
-          <a:solidFill>
-            <a:srgbClr val="FFFFFF"/>
-          </a:solidFill>
-          <a:ln w="15875">
-            <a:solidFill>
-              <a:srgbClr val="1F3A5F"/>
-            </a:solidFill>
-          </a:ln>
-          <a:effectLst/>
-        </p:spPr>
-        <p:style>
-          <a:lnRef idx="1">
-            <a:schemeClr val="accent1"/>
-          </a:lnRef>
-          <a:fillRef idx="3">
-            <a:schemeClr val="accent1"/>
-          </a:fillRef>
-          <a:effectRef idx="2">
-            <a:schemeClr val="accent1"/>
-          </a:effectRef>
-          <a:fontRef idx="minor">
-            <a:schemeClr val="lt1"/>
-          </a:fontRef>
-        </p:style>
-        <p:txBody>
-          <a:bodyPr rtlCol="0" anchor="ctr"/>
-          <a:lstStyle/>
-          <a:p>
-            <a:pPr algn="ctr"/>
-            <a:endParaRPr/>
-          </a:p>
-        </p:txBody>
-      </p:sp>
-      <p:sp>
-        <p:nvSpPr>
-          <p:cNvPr id="21" name="TextBox 20"/>
-          <p:cNvSpPr txBox="1"/>
-          <p:nvPr/>
-        </p:nvSpPr>
-        <p:spPr>
-          <a:xfrm>
-            <a:off x="594360" y="3840480"/>
-            <a:ext cx="5212080" cy="457200"/>
-          </a:xfrm>
-          <a:prstGeom prst="rect">
-            <a:avLst/>
-          </a:prstGeom>
-          <a:noFill/>
-        </p:spPr>
-        <p:txBody>
-          <a:bodyPr wrap="square" anchor="t">
-            <a:spAutoFit/>
-          </a:bodyPr>
-          <a:lstStyle/>
-          <a:p>
-            <a:pPr algn="l"/>
-            <a:r>
-              <a:rPr sz="1800" b="1" i="0">
-                <a:solidFill>
-                  <a:srgbClr val="1F3A5F"/>
-                </a:solidFill>
-                <a:latin typeface="Calibri"/>
-              </a:rPr>
-              <a:t>How to read these numbers</a:t>
-            </a:r>
-          </a:p>
-        </p:txBody>
-      </p:sp>
-      <p:sp>
-        <p:nvSpPr>
-          <p:cNvPr id="22" name="TextBox 21"/>
-          <p:cNvSpPr txBox="1"/>
-          <p:nvPr/>
-        </p:nvSpPr>
-        <p:spPr>
-          <a:xfrm>
-            <a:off x="594360" y="4343400"/>
-            <a:ext cx="5212080" cy="1828800"/>
+              <a:t>Best k by metric</a:t>
+            </a:r>
+          </a:p>
+        </p:txBody>
+      </p:sp>
+      <p:sp>
+        <p:nvSpPr>
+          <p:cNvPr id="11" name="TextBox 10"/>
+          <p:cNvSpPr txBox="1"/>
+          <p:nvPr/>
+        </p:nvSpPr>
+        <p:spPr>
+          <a:xfrm>
+            <a:off x="8046720" y="2614832"/>
+            <a:ext cx="3566160" cy="1536896"/>
           </a:xfrm>
           <a:prstGeom prst="rect">
             <a:avLst/>
@@ -8327,13 +7664,13 @@
               </a:spcAft>
             </a:pPr>
             <a:r>
-              <a:rPr sz="1300">
+              <a:rPr sz="1300" dirty="0">
                 <a:solidFill>
                   <a:srgbClr val="1A1A1A"/>
                 </a:solidFill>
                 <a:latin typeface="Calibri"/>
               </a:rPr>
-              <a:t>•  Precision 0.70 → when we say "buyer", we’re right 70% of the time.</a:t>
+              <a:t>•  Best Accuracy:   k = 21</a:t>
             </a:r>
           </a:p>
           <a:p>
@@ -8346,13 +7683,13 @@
               </a:spcAft>
             </a:pPr>
             <a:r>
-              <a:rPr sz="1300">
+              <a:rPr sz="1300" dirty="0">
                 <a:solidFill>
                   <a:srgbClr val="1A1A1A"/>
                 </a:solidFill>
                 <a:latin typeface="Calibri"/>
               </a:rPr>
-              <a:t>•  Recall 0.36 → we catch only 36% of the actual buyers.</a:t>
+              <a:t>•  Best Precision: k = 24</a:t>
             </a:r>
           </a:p>
           <a:p>
@@ -8365,120 +7702,15 @@
               </a:spcAft>
             </a:pPr>
             <a:r>
-              <a:rPr sz="1300">
+              <a:rPr sz="1300" dirty="0">
                 <a:solidFill>
                   <a:srgbClr val="1A1A1A"/>
                 </a:solidFill>
                 <a:latin typeface="Calibri"/>
               </a:rPr>
-              <a:t>•  High precision, lower recall — a conservative classifier.</a:t>
-            </a:r>
-          </a:p>
-        </p:txBody>
-      </p:sp>
-      <p:sp>
-        <p:nvSpPr>
-          <p:cNvPr id="23" name="Rounded Rectangle 22"/>
-          <p:cNvSpPr/>
-          <p:nvPr/>
-        </p:nvSpPr>
-        <p:spPr>
-          <a:xfrm>
-            <a:off x="6217920" y="3703320"/>
-            <a:ext cx="5486400" cy="2606040"/>
-          </a:xfrm>
-          <a:prstGeom prst="roundRect">
-            <a:avLst/>
-          </a:prstGeom>
-          <a:solidFill>
-            <a:srgbClr val="1F3A5F"/>
-          </a:solidFill>
-          <a:ln w="15875">
-            <a:solidFill>
-              <a:srgbClr val="1F3A5F"/>
-            </a:solidFill>
-          </a:ln>
-          <a:effectLst/>
-        </p:spPr>
-        <p:style>
-          <a:lnRef idx="1">
-            <a:schemeClr val="accent1"/>
-          </a:lnRef>
-          <a:fillRef idx="3">
-            <a:schemeClr val="accent1"/>
-          </a:fillRef>
-          <a:effectRef idx="2">
-            <a:schemeClr val="accent1"/>
-          </a:effectRef>
-          <a:fontRef idx="minor">
-            <a:schemeClr val="lt1"/>
-          </a:fontRef>
-        </p:style>
-        <p:txBody>
-          <a:bodyPr rtlCol="0" anchor="ctr"/>
-          <a:lstStyle/>
-          <a:p>
-            <a:pPr algn="ctr"/>
-            <a:endParaRPr/>
-          </a:p>
-        </p:txBody>
-      </p:sp>
-      <p:sp>
-        <p:nvSpPr>
-          <p:cNvPr id="24" name="TextBox 23"/>
-          <p:cNvSpPr txBox="1"/>
-          <p:nvPr/>
-        </p:nvSpPr>
-        <p:spPr>
-          <a:xfrm>
-            <a:off x="6355080" y="3840480"/>
-            <a:ext cx="5212080" cy="457200"/>
-          </a:xfrm>
-          <a:prstGeom prst="rect">
-            <a:avLst/>
-          </a:prstGeom>
-          <a:noFill/>
-        </p:spPr>
-        <p:txBody>
-          <a:bodyPr wrap="square" anchor="t">
-            <a:spAutoFit/>
-          </a:bodyPr>
-          <a:lstStyle/>
-          <a:p>
-            <a:pPr algn="l"/>
-            <a:r>
-              <a:rPr sz="1800" b="1" i="0">
-                <a:solidFill>
-                  <a:srgbClr val="DD8452"/>
-                </a:solidFill>
-                <a:latin typeface="Calibri"/>
-              </a:rPr>
-              <a:t>Confusion matrix counts</a:t>
-            </a:r>
-          </a:p>
-        </p:txBody>
-      </p:sp>
-      <p:sp>
-        <p:nvSpPr>
-          <p:cNvPr id="25" name="TextBox 24"/>
-          <p:cNvSpPr txBox="1"/>
-          <p:nvPr/>
-        </p:nvSpPr>
-        <p:spPr>
-          <a:xfrm>
-            <a:off x="6355080" y="4343400"/>
-            <a:ext cx="5212080" cy="1828800"/>
-          </a:xfrm>
-          <a:prstGeom prst="rect">
-            <a:avLst/>
-          </a:prstGeom>
-          <a:noFill/>
-        </p:spPr>
-        <p:txBody>
-          <a:bodyPr wrap="square">
-            <a:spAutoFit/>
-          </a:bodyPr>
-          <a:lstStyle/>
+              <a:t>•  Best Recall:     k = 1</a:t>
+            </a:r>
+          </a:p>
           <a:p>
             <a:pPr algn="l">
               <a:lnSpc>
@@ -8489,14 +7721,29 @@
               </a:spcAft>
             </a:pPr>
             <a:r>
-              <a:rPr sz="1300">
-                <a:solidFill>
-                  <a:srgbClr val="FFFFFF"/>
-                </a:solidFill>
-                <a:latin typeface="Calibri"/>
-              </a:rPr>
-              <a:t>•  TP = 136     (correctly flagged buyers)</a:t>
-            </a:r>
+              <a:rPr sz="1300" dirty="0">
+                <a:solidFill>
+                  <a:srgbClr val="1A1A1A"/>
+                </a:solidFill>
+                <a:latin typeface="Calibri"/>
+              </a:rPr>
+              <a:t>•  Best F1:         k = </a:t>
+            </a:r>
+            <a:r>
+              <a:rPr lang="en-PH" sz="1300" dirty="0">
+                <a:solidFill>
+                  <a:srgbClr val="1A1A1A"/>
+                </a:solidFill>
+                <a:latin typeface="Calibri"/>
+              </a:rPr>
+              <a:t>3</a:t>
+            </a:r>
+            <a:endParaRPr lang="en-US" sz="1300" dirty="0">
+              <a:solidFill>
+                <a:srgbClr val="1A1A1A"/>
+              </a:solidFill>
+              <a:latin typeface="Calibri"/>
+            </a:endParaRPr>
           </a:p>
           <a:p>
             <a:pPr algn="l">
@@ -8508,15 +7755,85 @@
               </a:spcAft>
             </a:pPr>
             <a:r>
-              <a:rPr sz="1300">
-                <a:solidFill>
-                  <a:srgbClr val="FFFFFF"/>
-                </a:solidFill>
-                <a:latin typeface="Calibri"/>
-              </a:rPr>
-              <a:t>•  FP =  59     (predicted buy, didn’t)</a:t>
-            </a:r>
-          </a:p>
+              <a:rPr lang="en-US" sz="1300" dirty="0">
+                <a:solidFill>
+                  <a:srgbClr val="1A1A1A"/>
+                </a:solidFill>
+                <a:latin typeface="Calibri"/>
+              </a:rPr>
+              <a:t>Chosen:             k = 7 (higher precision)</a:t>
+            </a:r>
+            <a:endParaRPr sz="1300" dirty="0">
+              <a:solidFill>
+                <a:srgbClr val="1A1A1A"/>
+              </a:solidFill>
+              <a:latin typeface="Calibri"/>
+            </a:endParaRPr>
+          </a:p>
+        </p:txBody>
+      </p:sp>
+      <p:sp>
+        <p:nvSpPr>
+          <p:cNvPr id="12" name="TextBox 11"/>
+          <p:cNvSpPr txBox="1"/>
+          <p:nvPr/>
+        </p:nvSpPr>
+        <p:spPr>
+          <a:xfrm>
+            <a:off x="8092440" y="4572000"/>
+            <a:ext cx="3566160" cy="338554"/>
+          </a:xfrm>
+          <a:prstGeom prst="rect">
+            <a:avLst/>
+          </a:prstGeom>
+          <a:noFill/>
+        </p:spPr>
+        <p:txBody>
+          <a:bodyPr wrap="square" anchor="t">
+            <a:spAutoFit/>
+          </a:bodyPr>
+          <a:lstStyle/>
+          <a:p>
+            <a:pPr algn="l"/>
+            <a:r>
+              <a:rPr lang="en-PH" sz="1600" b="1" i="0" dirty="0">
+                <a:solidFill>
+                  <a:srgbClr val="DD8452"/>
+                </a:solidFill>
+                <a:latin typeface="Calibri"/>
+              </a:rPr>
+              <a:t>How we chose k</a:t>
+            </a:r>
+            <a:endParaRPr sz="1600" b="1" i="0" dirty="0">
+              <a:solidFill>
+                <a:srgbClr val="DD8452"/>
+              </a:solidFill>
+              <a:latin typeface="Calibri"/>
+            </a:endParaRPr>
+          </a:p>
+        </p:txBody>
+      </p:sp>
+      <p:sp>
+        <p:nvSpPr>
+          <p:cNvPr id="13" name="TextBox 12"/>
+          <p:cNvSpPr txBox="1"/>
+          <p:nvPr/>
+        </p:nvSpPr>
+        <p:spPr>
+          <a:xfrm>
+            <a:off x="8092440" y="5029200"/>
+            <a:ext cx="3566160" cy="1006301"/>
+          </a:xfrm>
+          <a:prstGeom prst="rect">
+            <a:avLst/>
+          </a:prstGeom>
+          <a:noFill/>
+        </p:spPr>
+        <p:txBody>
+          <a:bodyPr wrap="square">
+            <a:spAutoFit/>
+          </a:bodyPr>
+          <a:lstStyle/>
           <a:p>
             <a:pPr algn="l">
               <a:lnSpc>
@@ -8527,13 +7844,22 @@
               </a:spcAft>
             </a:pPr>
             <a:r>
-              <a:rPr sz="1300">
-                <a:solidFill>
-                  <a:srgbClr val="FFFFFF"/>
-                </a:solidFill>
-                <a:latin typeface="Calibri"/>
-              </a:rPr>
-              <a:t>•  FN = 245     (missed buyers — recall pain)</a:t>
+              <a:rPr sz="1200" dirty="0">
+                <a:solidFill>
+                  <a:srgbClr val="1A1A1A"/>
+                </a:solidFill>
+                <a:latin typeface="Calibri"/>
+              </a:rPr>
+              <a:t>•  </a:t>
+            </a:r>
+            <a:r>
+              <a:rPr lang="en-US" sz="1200" dirty="0">
+                <a:solidFill>
+                  <a:srgbClr val="1A1A1A"/>
+                </a:solidFill>
+                <a:latin typeface="Calibri"/>
+              </a:rPr>
+              <a:t>F1 to find the peak region (k ≈ 3–9), avoiding both extremes.</a:t>
             </a:r>
           </a:p>
           <a:p>
@@ -8546,20 +7872,35 @@
               </a:spcAft>
             </a:pPr>
             <a:r>
-              <a:rPr sz="1300">
-                <a:solidFill>
-                  <a:srgbClr val="FFFFFF"/>
-                </a:solidFill>
-                <a:latin typeface="Calibri"/>
-              </a:rPr>
-              <a:t>•  TN = 2,025   (correctly excluded non-buyers)</a:t>
-            </a:r>
-          </a:p>
-        </p:txBody>
-      </p:sp>
-      <p:sp>
-        <p:nvSpPr>
-          <p:cNvPr id="26" name="TextBox 25"/>
+              <a:rPr sz="1200" dirty="0">
+                <a:solidFill>
+                  <a:srgbClr val="1A1A1A"/>
+                </a:solidFill>
+                <a:latin typeface="Calibri"/>
+              </a:rPr>
+              <a:t>•  </a:t>
+            </a:r>
+            <a:r>
+              <a:rPr lang="en-US" sz="1200" dirty="0">
+                <a:solidFill>
+                  <a:srgbClr val="1A1A1A"/>
+                </a:solidFill>
+                <a:latin typeface="Calibri"/>
+              </a:rPr>
+              <a:t>Precision to pick within it → k = 7 — a confident, conservative classifier.</a:t>
+            </a:r>
+            <a:endParaRPr sz="1200" dirty="0">
+              <a:solidFill>
+                <a:srgbClr val="1A1A1A"/>
+              </a:solidFill>
+              <a:latin typeface="Calibri"/>
+            </a:endParaRPr>
+          </a:p>
+        </p:txBody>
+      </p:sp>
+      <p:sp>
+        <p:nvSpPr>
+          <p:cNvPr id="14" name="TextBox 13"/>
           <p:cNvSpPr txBox="1"/>
           <p:nvPr/>
         </p:nvSpPr>
@@ -8596,7 +7937,16 @@
                 </a:solidFill>
                 <a:latin typeface="Calibri"/>
               </a:rPr>
-              <a:t>kNN</a:t>
+              <a:t>kN</a:t>
+            </a:r>
+            <a:r>
+              <a:rPr lang="en-US" sz="1000" b="0" i="0" dirty="0" err="1">
+                <a:solidFill>
+                  <a:srgbClr val="556070"/>
+                </a:solidFill>
+                <a:latin typeface="Calibri"/>
+              </a:rPr>
+              <a:t>N</a:t>
             </a:r>
             <a:endParaRPr sz="1000" b="0" i="0" dirty="0">
               <a:solidFill>
@@ -8609,7 +7959,7 @@
       </p:sp>
       <p:sp>
         <p:nvSpPr>
-          <p:cNvPr id="27" name="TextBox 26"/>
+          <p:cNvPr id="15" name="TextBox 14"/>
           <p:cNvSpPr txBox="1"/>
           <p:nvPr/>
         </p:nvSpPr>
@@ -8637,11 +7987,41 @@
                 </a:solidFill>
                 <a:latin typeface="Calibri"/>
               </a:rPr>
-              <a:t>Slide 14</a:t>
-            </a:r>
-          </a:p>
-        </p:txBody>
-      </p:sp>
+              <a:t>Slide 13</a:t>
+            </a:r>
+          </a:p>
+        </p:txBody>
+      </p:sp>
+      <p:pic>
+        <p:nvPicPr>
+          <p:cNvPr id="17" name="Picture 16">
+            <a:extLst>
+              <a:ext uri="{FF2B5EF4-FFF2-40B4-BE49-F238E27FC236}">
+                <a16:creationId xmlns:a16="http://schemas.microsoft.com/office/drawing/2014/main" id="{F1B267E2-0090-66C2-4F43-9A070DDC2241}"/>
+              </a:ext>
+            </a:extLst>
+          </p:cNvPr>
+          <p:cNvPicPr>
+            <a:picLocks noChangeAspect="1"/>
+          </p:cNvPicPr>
+          <p:nvPr/>
+        </p:nvPicPr>
+        <p:blipFill>
+          <a:blip r:embed="rId2"/>
+          <a:stretch>
+            <a:fillRect/>
+          </a:stretch>
+        </p:blipFill>
+        <p:spPr>
+          <a:xfrm>
+            <a:off x="457200" y="1904729"/>
+            <a:ext cx="7315200" cy="3948596"/>
+          </a:xfrm>
+          <a:prstGeom prst="rect">
+            <a:avLst/>
+          </a:prstGeom>
+        </p:spPr>
+      </p:pic>
     </p:spTree>
   </p:cSld>
   <p:clrMapOvr>
@@ -8785,7 +8165,7 @@
                   <a:srgbClr val="FFFFFF"/>
                 </a:solidFill>
               </a:rPr>
-              <a:t>07  •  Results — Confusion matrix</a:t>
+              <a:t>07  •  Results</a:t>
             </a:r>
           </a:p>
         </p:txBody>
@@ -8820,7 +8200,7 @@
                 </a:solidFill>
                 <a:latin typeface="Calibri"/>
               </a:rPr>
-              <a:t>Confusion Matrix — Counts and Row Percentages</a:t>
+              <a:t>Final Test-Set Performance  (k = 7)</a:t>
             </a:r>
           </a:p>
         </p:txBody>
@@ -8855,7 +8235,7 @@
                 </a:solidFill>
                 <a:latin typeface="Calibri"/>
               </a:rPr>
-              <a:t>Where the model is right, and where it pays the cost of class imbalance.</a:t>
+              <a:t>Held-out 20% test set, 2,465 sessions, never seen during tuning preparation.</a:t>
             </a:r>
           </a:p>
         </p:txBody>
@@ -8904,39 +8284,16 @@
           </a:p>
         </p:txBody>
       </p:sp>
-      <p:pic>
-        <p:nvPicPr>
-          <p:cNvPr id="8" name="Picture 7"/>
-          <p:cNvPicPr>
-            <a:picLocks noChangeAspect="1"/>
-          </p:cNvPicPr>
-          <p:nvPr/>
-        </p:nvPicPr>
-        <p:blipFill>
-          <a:blip r:embed="rId2"/>
-          <a:srcRect/>
-          <a:stretch/>
-        </p:blipFill>
-        <p:spPr>
-          <a:xfrm>
-            <a:off x="365760" y="1920240"/>
-            <a:ext cx="8229599" cy="4251960"/>
-          </a:xfrm>
-          <a:prstGeom prst="rect">
-            <a:avLst/>
-          </a:prstGeom>
-        </p:spPr>
-      </p:pic>
-      <p:sp>
-        <p:nvSpPr>
-          <p:cNvPr id="9" name="Rounded Rectangle 8"/>
+      <p:sp>
+        <p:nvSpPr>
+          <p:cNvPr id="8" name="Rounded Rectangle 7"/>
           <p:cNvSpPr/>
           <p:nvPr/>
         </p:nvSpPr>
         <p:spPr>
           <a:xfrm>
-            <a:off x="8869680" y="1920240"/>
-            <a:ext cx="2926080" cy="4297680"/>
+            <a:off x="457200" y="2011680"/>
+            <a:ext cx="2697480" cy="1463040"/>
           </a:xfrm>
           <a:prstGeom prst="roundRect">
             <a:avLst/>
@@ -8976,14 +8333,49 @@
       </p:sp>
       <p:sp>
         <p:nvSpPr>
+          <p:cNvPr id="9" name="TextBox 8"/>
+          <p:cNvSpPr txBox="1"/>
+          <p:nvPr/>
+        </p:nvSpPr>
+        <p:spPr>
+          <a:xfrm>
+            <a:off x="457200" y="2194560"/>
+            <a:ext cx="2697480" cy="640080"/>
+          </a:xfrm>
+          <a:prstGeom prst="rect">
+            <a:avLst/>
+          </a:prstGeom>
+          <a:noFill/>
+        </p:spPr>
+        <p:txBody>
+          <a:bodyPr wrap="square" anchor="t">
+            <a:spAutoFit/>
+          </a:bodyPr>
+          <a:lstStyle/>
+          <a:p>
+            <a:pPr algn="ctr"/>
+            <a:r>
+              <a:rPr sz="3000" b="1" i="0">
+                <a:solidFill>
+                  <a:srgbClr val="1F3A5F"/>
+                </a:solidFill>
+                <a:latin typeface="Calibri"/>
+              </a:rPr>
+              <a:t>87.67%</a:t>
+            </a:r>
+          </a:p>
+        </p:txBody>
+      </p:sp>
+      <p:sp>
+        <p:nvSpPr>
           <p:cNvPr id="10" name="TextBox 9"/>
           <p:cNvSpPr txBox="1"/>
           <p:nvPr/>
         </p:nvSpPr>
         <p:spPr>
           <a:xfrm>
-            <a:off x="9006840" y="2057400"/>
-            <a:ext cx="2651760" cy="457200"/>
+            <a:off x="457200" y="2880360"/>
+            <a:ext cx="2697480" cy="365760"/>
           </a:xfrm>
           <a:prstGeom prst="rect">
             <a:avLst/>
@@ -8996,6 +8388,439 @@
           </a:bodyPr>
           <a:lstStyle/>
           <a:p>
+            <a:pPr algn="ctr"/>
+            <a:r>
+              <a:rPr sz="1300" b="0" i="0">
+                <a:solidFill>
+                  <a:srgbClr val="556070"/>
+                </a:solidFill>
+                <a:latin typeface="Calibri"/>
+              </a:rPr>
+              <a:t>Accuracy</a:t>
+            </a:r>
+          </a:p>
+        </p:txBody>
+      </p:sp>
+      <p:sp>
+        <p:nvSpPr>
+          <p:cNvPr id="11" name="Rounded Rectangle 10"/>
+          <p:cNvSpPr/>
+          <p:nvPr/>
+        </p:nvSpPr>
+        <p:spPr>
+          <a:xfrm>
+            <a:off x="3337560" y="2011680"/>
+            <a:ext cx="2697480" cy="1463040"/>
+          </a:xfrm>
+          <a:prstGeom prst="roundRect">
+            <a:avLst/>
+          </a:prstGeom>
+          <a:solidFill>
+            <a:srgbClr val="FFFFFF"/>
+          </a:solidFill>
+          <a:ln w="15875">
+            <a:solidFill>
+              <a:srgbClr val="1F3A5F"/>
+            </a:solidFill>
+          </a:ln>
+          <a:effectLst/>
+        </p:spPr>
+        <p:style>
+          <a:lnRef idx="1">
+            <a:schemeClr val="accent1"/>
+          </a:lnRef>
+          <a:fillRef idx="3">
+            <a:schemeClr val="accent1"/>
+          </a:fillRef>
+          <a:effectRef idx="2">
+            <a:schemeClr val="accent1"/>
+          </a:effectRef>
+          <a:fontRef idx="minor">
+            <a:schemeClr val="lt1"/>
+          </a:fontRef>
+        </p:style>
+        <p:txBody>
+          <a:bodyPr rtlCol="0" anchor="ctr"/>
+          <a:lstStyle/>
+          <a:p>
+            <a:pPr algn="ctr"/>
+            <a:endParaRPr/>
+          </a:p>
+        </p:txBody>
+      </p:sp>
+      <p:sp>
+        <p:nvSpPr>
+          <p:cNvPr id="12" name="TextBox 11"/>
+          <p:cNvSpPr txBox="1"/>
+          <p:nvPr/>
+        </p:nvSpPr>
+        <p:spPr>
+          <a:xfrm>
+            <a:off x="3337560" y="2194560"/>
+            <a:ext cx="2697480" cy="640080"/>
+          </a:xfrm>
+          <a:prstGeom prst="rect">
+            <a:avLst/>
+          </a:prstGeom>
+          <a:noFill/>
+        </p:spPr>
+        <p:txBody>
+          <a:bodyPr wrap="square" anchor="t">
+            <a:spAutoFit/>
+          </a:bodyPr>
+          <a:lstStyle/>
+          <a:p>
+            <a:pPr algn="ctr"/>
+            <a:r>
+              <a:rPr sz="3000" b="1" i="0">
+                <a:solidFill>
+                  <a:srgbClr val="4C72B0"/>
+                </a:solidFill>
+                <a:latin typeface="Calibri"/>
+              </a:rPr>
+              <a:t>0.6974</a:t>
+            </a:r>
+          </a:p>
+        </p:txBody>
+      </p:sp>
+      <p:sp>
+        <p:nvSpPr>
+          <p:cNvPr id="13" name="TextBox 12"/>
+          <p:cNvSpPr txBox="1"/>
+          <p:nvPr/>
+        </p:nvSpPr>
+        <p:spPr>
+          <a:xfrm>
+            <a:off x="3337560" y="2880360"/>
+            <a:ext cx="2697480" cy="365760"/>
+          </a:xfrm>
+          <a:prstGeom prst="rect">
+            <a:avLst/>
+          </a:prstGeom>
+          <a:noFill/>
+        </p:spPr>
+        <p:txBody>
+          <a:bodyPr wrap="square" anchor="t">
+            <a:spAutoFit/>
+          </a:bodyPr>
+          <a:lstStyle/>
+          <a:p>
+            <a:pPr algn="ctr"/>
+            <a:r>
+              <a:rPr sz="1300" b="0" i="0">
+                <a:solidFill>
+                  <a:srgbClr val="556070"/>
+                </a:solidFill>
+                <a:latin typeface="Calibri"/>
+              </a:rPr>
+              <a:t>Precision</a:t>
+            </a:r>
+          </a:p>
+        </p:txBody>
+      </p:sp>
+      <p:sp>
+        <p:nvSpPr>
+          <p:cNvPr id="14" name="Rounded Rectangle 13"/>
+          <p:cNvSpPr/>
+          <p:nvPr/>
+        </p:nvSpPr>
+        <p:spPr>
+          <a:xfrm>
+            <a:off x="6217920" y="2011680"/>
+            <a:ext cx="2697480" cy="1463040"/>
+          </a:xfrm>
+          <a:prstGeom prst="roundRect">
+            <a:avLst/>
+          </a:prstGeom>
+          <a:solidFill>
+            <a:srgbClr val="FFFFFF"/>
+          </a:solidFill>
+          <a:ln w="15875">
+            <a:solidFill>
+              <a:srgbClr val="1F3A5F"/>
+            </a:solidFill>
+          </a:ln>
+          <a:effectLst/>
+        </p:spPr>
+        <p:style>
+          <a:lnRef idx="1">
+            <a:schemeClr val="accent1"/>
+          </a:lnRef>
+          <a:fillRef idx="3">
+            <a:schemeClr val="accent1"/>
+          </a:fillRef>
+          <a:effectRef idx="2">
+            <a:schemeClr val="accent1"/>
+          </a:effectRef>
+          <a:fontRef idx="minor">
+            <a:schemeClr val="lt1"/>
+          </a:fontRef>
+        </p:style>
+        <p:txBody>
+          <a:bodyPr rtlCol="0" anchor="ctr"/>
+          <a:lstStyle/>
+          <a:p>
+            <a:pPr algn="ctr"/>
+            <a:endParaRPr/>
+          </a:p>
+        </p:txBody>
+      </p:sp>
+      <p:sp>
+        <p:nvSpPr>
+          <p:cNvPr id="15" name="TextBox 14"/>
+          <p:cNvSpPr txBox="1"/>
+          <p:nvPr/>
+        </p:nvSpPr>
+        <p:spPr>
+          <a:xfrm>
+            <a:off x="6217920" y="2194560"/>
+            <a:ext cx="2697480" cy="640080"/>
+          </a:xfrm>
+          <a:prstGeom prst="rect">
+            <a:avLst/>
+          </a:prstGeom>
+          <a:noFill/>
+        </p:spPr>
+        <p:txBody>
+          <a:bodyPr wrap="square" anchor="t">
+            <a:spAutoFit/>
+          </a:bodyPr>
+          <a:lstStyle/>
+          <a:p>
+            <a:pPr algn="ctr"/>
+            <a:r>
+              <a:rPr sz="3000" b="1" i="0">
+                <a:solidFill>
+                  <a:srgbClr val="DD8452"/>
+                </a:solidFill>
+                <a:latin typeface="Calibri"/>
+              </a:rPr>
+              <a:t>0.3570</a:t>
+            </a:r>
+          </a:p>
+        </p:txBody>
+      </p:sp>
+      <p:sp>
+        <p:nvSpPr>
+          <p:cNvPr id="16" name="TextBox 15"/>
+          <p:cNvSpPr txBox="1"/>
+          <p:nvPr/>
+        </p:nvSpPr>
+        <p:spPr>
+          <a:xfrm>
+            <a:off x="6217920" y="2880360"/>
+            <a:ext cx="2697480" cy="365760"/>
+          </a:xfrm>
+          <a:prstGeom prst="rect">
+            <a:avLst/>
+          </a:prstGeom>
+          <a:noFill/>
+        </p:spPr>
+        <p:txBody>
+          <a:bodyPr wrap="square" anchor="t">
+            <a:spAutoFit/>
+          </a:bodyPr>
+          <a:lstStyle/>
+          <a:p>
+            <a:pPr algn="ctr"/>
+            <a:r>
+              <a:rPr sz="1300" b="0" i="0">
+                <a:solidFill>
+                  <a:srgbClr val="556070"/>
+                </a:solidFill>
+                <a:latin typeface="Calibri"/>
+              </a:rPr>
+              <a:t>Recall</a:t>
+            </a:r>
+          </a:p>
+        </p:txBody>
+      </p:sp>
+      <p:sp>
+        <p:nvSpPr>
+          <p:cNvPr id="17" name="Rounded Rectangle 16"/>
+          <p:cNvSpPr/>
+          <p:nvPr/>
+        </p:nvSpPr>
+        <p:spPr>
+          <a:xfrm>
+            <a:off x="9098280" y="2011680"/>
+            <a:ext cx="2697480" cy="1463040"/>
+          </a:xfrm>
+          <a:prstGeom prst="roundRect">
+            <a:avLst/>
+          </a:prstGeom>
+          <a:solidFill>
+            <a:srgbClr val="FFFFFF"/>
+          </a:solidFill>
+          <a:ln w="15875">
+            <a:solidFill>
+              <a:srgbClr val="1F3A5F"/>
+            </a:solidFill>
+          </a:ln>
+          <a:effectLst/>
+        </p:spPr>
+        <p:style>
+          <a:lnRef idx="1">
+            <a:schemeClr val="accent1"/>
+          </a:lnRef>
+          <a:fillRef idx="3">
+            <a:schemeClr val="accent1"/>
+          </a:fillRef>
+          <a:effectRef idx="2">
+            <a:schemeClr val="accent1"/>
+          </a:effectRef>
+          <a:fontRef idx="minor">
+            <a:schemeClr val="lt1"/>
+          </a:fontRef>
+        </p:style>
+        <p:txBody>
+          <a:bodyPr rtlCol="0" anchor="ctr"/>
+          <a:lstStyle/>
+          <a:p>
+            <a:pPr algn="ctr"/>
+            <a:endParaRPr/>
+          </a:p>
+        </p:txBody>
+      </p:sp>
+      <p:sp>
+        <p:nvSpPr>
+          <p:cNvPr id="18" name="TextBox 17"/>
+          <p:cNvSpPr txBox="1"/>
+          <p:nvPr/>
+        </p:nvSpPr>
+        <p:spPr>
+          <a:xfrm>
+            <a:off x="9098280" y="2194560"/>
+            <a:ext cx="2697480" cy="640080"/>
+          </a:xfrm>
+          <a:prstGeom prst="rect">
+            <a:avLst/>
+          </a:prstGeom>
+          <a:noFill/>
+        </p:spPr>
+        <p:txBody>
+          <a:bodyPr wrap="square" anchor="t">
+            <a:spAutoFit/>
+          </a:bodyPr>
+          <a:lstStyle/>
+          <a:p>
+            <a:pPr algn="ctr"/>
+            <a:r>
+              <a:rPr sz="3000" b="1" i="0">
+                <a:solidFill>
+                  <a:srgbClr val="1F3A5F"/>
+                </a:solidFill>
+                <a:latin typeface="Calibri"/>
+              </a:rPr>
+              <a:t>0.4722</a:t>
+            </a:r>
+          </a:p>
+        </p:txBody>
+      </p:sp>
+      <p:sp>
+        <p:nvSpPr>
+          <p:cNvPr id="19" name="TextBox 18"/>
+          <p:cNvSpPr txBox="1"/>
+          <p:nvPr/>
+        </p:nvSpPr>
+        <p:spPr>
+          <a:xfrm>
+            <a:off x="9098280" y="2880360"/>
+            <a:ext cx="2697480" cy="365760"/>
+          </a:xfrm>
+          <a:prstGeom prst="rect">
+            <a:avLst/>
+          </a:prstGeom>
+          <a:noFill/>
+        </p:spPr>
+        <p:txBody>
+          <a:bodyPr wrap="square" anchor="t">
+            <a:spAutoFit/>
+          </a:bodyPr>
+          <a:lstStyle/>
+          <a:p>
+            <a:pPr algn="ctr"/>
+            <a:r>
+              <a:rPr sz="1300" b="0" i="0">
+                <a:solidFill>
+                  <a:srgbClr val="556070"/>
+                </a:solidFill>
+                <a:latin typeface="Calibri"/>
+              </a:rPr>
+              <a:t>F1 Score</a:t>
+            </a:r>
+          </a:p>
+        </p:txBody>
+      </p:sp>
+      <p:sp>
+        <p:nvSpPr>
+          <p:cNvPr id="20" name="Rounded Rectangle 19"/>
+          <p:cNvSpPr/>
+          <p:nvPr/>
+        </p:nvSpPr>
+        <p:spPr>
+          <a:xfrm>
+            <a:off x="457200" y="3703320"/>
+            <a:ext cx="5486400" cy="2606040"/>
+          </a:xfrm>
+          <a:prstGeom prst="roundRect">
+            <a:avLst/>
+          </a:prstGeom>
+          <a:solidFill>
+            <a:srgbClr val="FFFFFF"/>
+          </a:solidFill>
+          <a:ln w="15875">
+            <a:solidFill>
+              <a:srgbClr val="1F3A5F"/>
+            </a:solidFill>
+          </a:ln>
+          <a:effectLst/>
+        </p:spPr>
+        <p:style>
+          <a:lnRef idx="1">
+            <a:schemeClr val="accent1"/>
+          </a:lnRef>
+          <a:fillRef idx="3">
+            <a:schemeClr val="accent1"/>
+          </a:fillRef>
+          <a:effectRef idx="2">
+            <a:schemeClr val="accent1"/>
+          </a:effectRef>
+          <a:fontRef idx="minor">
+            <a:schemeClr val="lt1"/>
+          </a:fontRef>
+        </p:style>
+        <p:txBody>
+          <a:bodyPr rtlCol="0" anchor="ctr"/>
+          <a:lstStyle/>
+          <a:p>
+            <a:pPr algn="ctr"/>
+            <a:endParaRPr/>
+          </a:p>
+        </p:txBody>
+      </p:sp>
+      <p:sp>
+        <p:nvSpPr>
+          <p:cNvPr id="21" name="TextBox 20"/>
+          <p:cNvSpPr txBox="1"/>
+          <p:nvPr/>
+        </p:nvSpPr>
+        <p:spPr>
+          <a:xfrm>
+            <a:off x="594360" y="3840480"/>
+            <a:ext cx="5212080" cy="457200"/>
+          </a:xfrm>
+          <a:prstGeom prst="rect">
+            <a:avLst/>
+          </a:prstGeom>
+          <a:noFill/>
+        </p:spPr>
+        <p:txBody>
+          <a:bodyPr wrap="square" anchor="t">
+            <a:spAutoFit/>
+          </a:bodyPr>
+          <a:lstStyle/>
+          <a:p>
             <a:pPr algn="l"/>
             <a:r>
               <a:rPr sz="1800" b="1" i="0">
@@ -9004,21 +8829,21 @@
                 </a:solidFill>
                 <a:latin typeface="Calibri"/>
               </a:rPr>
-              <a:t>In Plain English</a:t>
-            </a:r>
-          </a:p>
-        </p:txBody>
-      </p:sp>
-      <p:sp>
-        <p:nvSpPr>
-          <p:cNvPr id="11" name="TextBox 10"/>
-          <p:cNvSpPr txBox="1"/>
-          <p:nvPr/>
-        </p:nvSpPr>
-        <p:spPr>
-          <a:xfrm>
-            <a:off x="9006840" y="2606040"/>
-            <a:ext cx="2651760" cy="3200400"/>
+              <a:t>How to read these numbers</a:t>
+            </a:r>
+          </a:p>
+        </p:txBody>
+      </p:sp>
+      <p:sp>
+        <p:nvSpPr>
+          <p:cNvPr id="22" name="TextBox 21"/>
+          <p:cNvSpPr txBox="1"/>
+          <p:nvPr/>
+        </p:nvSpPr>
+        <p:spPr>
+          <a:xfrm>
+            <a:off x="594360" y="4343400"/>
+            <a:ext cx="5212080" cy="1828800"/>
           </a:xfrm>
           <a:prstGeom prst="rect">
             <a:avLst/>
@@ -9046,7 +8871,7 @@
                 </a:solidFill>
                 <a:latin typeface="Calibri"/>
               </a:rPr>
-              <a:t>•  Most non-buyers are correctly identified (97.2%).</a:t>
+              <a:t>•  Precision 0.70 → when we say "buyer", we’re right 70% of the time.</a:t>
             </a:r>
           </a:p>
           <a:p>
@@ -9065,7 +8890,7 @@
                 </a:solidFill>
                 <a:latin typeface="Calibri"/>
               </a:rPr>
-              <a:t>•  Most buyers slip through (we catch only 35.7%).</a:t>
+              <a:t>•  Recall 0.36 → we catch only 36% of the actual buyers.</a:t>
             </a:r>
           </a:p>
           <a:p>
@@ -9084,14 +8909,195 @@
                 </a:solidFill>
                 <a:latin typeface="Calibri"/>
               </a:rPr>
-              <a:t>•  When we do flag a buyer, we’re usually right.</a:t>
-            </a:r>
-          </a:p>
-        </p:txBody>
-      </p:sp>
-      <p:sp>
-        <p:nvSpPr>
-          <p:cNvPr id="12" name="TextBox 11"/>
+              <a:t>•  High precision, lower recall — a conservative classifier.</a:t>
+            </a:r>
+          </a:p>
+        </p:txBody>
+      </p:sp>
+      <p:sp>
+        <p:nvSpPr>
+          <p:cNvPr id="23" name="Rounded Rectangle 22"/>
+          <p:cNvSpPr/>
+          <p:nvPr/>
+        </p:nvSpPr>
+        <p:spPr>
+          <a:xfrm>
+            <a:off x="6217920" y="3703320"/>
+            <a:ext cx="5486400" cy="2606040"/>
+          </a:xfrm>
+          <a:prstGeom prst="roundRect">
+            <a:avLst/>
+          </a:prstGeom>
+          <a:solidFill>
+            <a:srgbClr val="1F3A5F"/>
+          </a:solidFill>
+          <a:ln w="15875">
+            <a:solidFill>
+              <a:srgbClr val="1F3A5F"/>
+            </a:solidFill>
+          </a:ln>
+          <a:effectLst/>
+        </p:spPr>
+        <p:style>
+          <a:lnRef idx="1">
+            <a:schemeClr val="accent1"/>
+          </a:lnRef>
+          <a:fillRef idx="3">
+            <a:schemeClr val="accent1"/>
+          </a:fillRef>
+          <a:effectRef idx="2">
+            <a:schemeClr val="accent1"/>
+          </a:effectRef>
+          <a:fontRef idx="minor">
+            <a:schemeClr val="lt1"/>
+          </a:fontRef>
+        </p:style>
+        <p:txBody>
+          <a:bodyPr rtlCol="0" anchor="ctr"/>
+          <a:lstStyle/>
+          <a:p>
+            <a:pPr algn="ctr"/>
+            <a:endParaRPr/>
+          </a:p>
+        </p:txBody>
+      </p:sp>
+      <p:sp>
+        <p:nvSpPr>
+          <p:cNvPr id="24" name="TextBox 23"/>
+          <p:cNvSpPr txBox="1"/>
+          <p:nvPr/>
+        </p:nvSpPr>
+        <p:spPr>
+          <a:xfrm>
+            <a:off x="6355080" y="3840480"/>
+            <a:ext cx="5212080" cy="457200"/>
+          </a:xfrm>
+          <a:prstGeom prst="rect">
+            <a:avLst/>
+          </a:prstGeom>
+          <a:noFill/>
+        </p:spPr>
+        <p:txBody>
+          <a:bodyPr wrap="square" anchor="t">
+            <a:spAutoFit/>
+          </a:bodyPr>
+          <a:lstStyle/>
+          <a:p>
+            <a:pPr algn="l"/>
+            <a:r>
+              <a:rPr sz="1800" b="1" i="0">
+                <a:solidFill>
+                  <a:srgbClr val="DD8452"/>
+                </a:solidFill>
+                <a:latin typeface="Calibri"/>
+              </a:rPr>
+              <a:t>Confusion matrix counts</a:t>
+            </a:r>
+          </a:p>
+        </p:txBody>
+      </p:sp>
+      <p:sp>
+        <p:nvSpPr>
+          <p:cNvPr id="25" name="TextBox 24"/>
+          <p:cNvSpPr txBox="1"/>
+          <p:nvPr/>
+        </p:nvSpPr>
+        <p:spPr>
+          <a:xfrm>
+            <a:off x="6355080" y="4343400"/>
+            <a:ext cx="5212080" cy="1828800"/>
+          </a:xfrm>
+          <a:prstGeom prst="rect">
+            <a:avLst/>
+          </a:prstGeom>
+          <a:noFill/>
+        </p:spPr>
+        <p:txBody>
+          <a:bodyPr wrap="square">
+            <a:spAutoFit/>
+          </a:bodyPr>
+          <a:lstStyle/>
+          <a:p>
+            <a:pPr algn="l">
+              <a:lnSpc>
+                <a:spcPct val="115000"/>
+              </a:lnSpc>
+              <a:spcAft>
+                <a:spcPts val="600"/>
+              </a:spcAft>
+            </a:pPr>
+            <a:r>
+              <a:rPr sz="1300">
+                <a:solidFill>
+                  <a:srgbClr val="FFFFFF"/>
+                </a:solidFill>
+                <a:latin typeface="Calibri"/>
+              </a:rPr>
+              <a:t>•  TP = 136     (correctly flagged buyers)</a:t>
+            </a:r>
+          </a:p>
+          <a:p>
+            <a:pPr algn="l">
+              <a:lnSpc>
+                <a:spcPct val="115000"/>
+              </a:lnSpc>
+              <a:spcAft>
+                <a:spcPts val="600"/>
+              </a:spcAft>
+            </a:pPr>
+            <a:r>
+              <a:rPr sz="1300">
+                <a:solidFill>
+                  <a:srgbClr val="FFFFFF"/>
+                </a:solidFill>
+                <a:latin typeface="Calibri"/>
+              </a:rPr>
+              <a:t>•  FP =  59     (predicted buy, didn’t)</a:t>
+            </a:r>
+          </a:p>
+          <a:p>
+            <a:pPr algn="l">
+              <a:lnSpc>
+                <a:spcPct val="115000"/>
+              </a:lnSpc>
+              <a:spcAft>
+                <a:spcPts val="600"/>
+              </a:spcAft>
+            </a:pPr>
+            <a:r>
+              <a:rPr sz="1300">
+                <a:solidFill>
+                  <a:srgbClr val="FFFFFF"/>
+                </a:solidFill>
+                <a:latin typeface="Calibri"/>
+              </a:rPr>
+              <a:t>•  FN = 245     (missed buyers — recall pain)</a:t>
+            </a:r>
+          </a:p>
+          <a:p>
+            <a:pPr algn="l">
+              <a:lnSpc>
+                <a:spcPct val="115000"/>
+              </a:lnSpc>
+              <a:spcAft>
+                <a:spcPts val="600"/>
+              </a:spcAft>
+            </a:pPr>
+            <a:r>
+              <a:rPr sz="1300">
+                <a:solidFill>
+                  <a:srgbClr val="FFFFFF"/>
+                </a:solidFill>
+                <a:latin typeface="Calibri"/>
+              </a:rPr>
+              <a:t>•  TN = 2,025   (correctly excluded non-buyers)</a:t>
+            </a:r>
+          </a:p>
+        </p:txBody>
+      </p:sp>
+      <p:sp>
+        <p:nvSpPr>
+          <p:cNvPr id="26" name="TextBox 25"/>
           <p:cNvSpPr txBox="1"/>
           <p:nvPr/>
         </p:nvSpPr>
@@ -9141,7 +9147,7 @@
       </p:sp>
       <p:sp>
         <p:nvSpPr>
-          <p:cNvPr id="13" name="TextBox 12"/>
+          <p:cNvPr id="27" name="TextBox 26"/>
           <p:cNvSpPr txBox="1"/>
           <p:nvPr/>
         </p:nvSpPr>
@@ -9169,7 +9175,7 @@
                 </a:solidFill>
                 <a:latin typeface="Calibri"/>
               </a:rPr>
-              <a:t>Slide 15</a:t>
+              <a:t>Slide 14</a:t>
             </a:r>
           </a:p>
         </p:txBody>
@@ -9317,7 +9323,7 @@
                   <a:srgbClr val="FFFFFF"/>
                 </a:solidFill>
               </a:rPr>
-              <a:t>08  •  Validation</a:t>
+              <a:t>07  •  Results — Confusion matrix</a:t>
             </a:r>
           </a:p>
         </p:txBody>
@@ -9331,7 +9337,7 @@
         <p:spPr>
           <a:xfrm>
             <a:off x="457200" y="685800"/>
-            <a:ext cx="11247120" cy="553998"/>
+            <a:ext cx="11247120" cy="640080"/>
           </a:xfrm>
           <a:prstGeom prst="rect">
             <a:avLst/>
@@ -9346,20 +9352,14 @@
           <a:p>
             <a:pPr algn="l"/>
             <a:r>
-              <a:rPr lang="en-US" sz="3000" b="1" i="0" dirty="0">
+              <a:rPr sz="3000" b="1" i="0">
                 <a:solidFill>
                   <a:srgbClr val="1F3A5F"/>
                 </a:solidFill>
                 <a:latin typeface="Calibri"/>
               </a:rPr>
-              <a:t>Validation: Stable Across Folds — but a Simple Rule Beats Us</a:t>
-            </a:r>
-            <a:endParaRPr sz="3000" b="1" i="0" dirty="0">
-              <a:solidFill>
-                <a:srgbClr val="1F3A5F"/>
-              </a:solidFill>
-              <a:latin typeface="Calibri"/>
-            </a:endParaRPr>
+              <a:t>Confusion Matrix — Counts and Row Percentages</a:t>
+            </a:r>
           </a:p>
         </p:txBody>
       </p:sp>
@@ -9372,7 +9372,7 @@
         <p:spPr>
           <a:xfrm>
             <a:off x="457200" y="1280160"/>
-            <a:ext cx="11247120" cy="323165"/>
+            <a:ext cx="11247120" cy="365760"/>
           </a:xfrm>
           <a:prstGeom prst="rect">
             <a:avLst/>
@@ -9387,56 +9387,14 @@
           <a:p>
             <a:pPr algn="l"/>
             <a:r>
-              <a:rPr lang="en-US" sz="1500" b="0" i="1" dirty="0">
+              <a:rPr sz="1500" b="0" i="1">
                 <a:solidFill>
                   <a:srgbClr val="556070"/>
                 </a:solidFill>
                 <a:latin typeface="Calibri"/>
               </a:rPr>
-              <a:t>5-fold stratified CV confirms stability; but a one-feature </a:t>
-            </a:r>
-            <a:r>
-              <a:rPr lang="en-US" sz="1500" b="0" i="1" dirty="0" err="1">
-                <a:solidFill>
-                  <a:srgbClr val="556070"/>
-                </a:solidFill>
-                <a:latin typeface="Calibri"/>
-              </a:rPr>
-              <a:t>PageValues</a:t>
-            </a:r>
-            <a:r>
-              <a:rPr lang="en-US" sz="1500" b="0" i="1" dirty="0">
-                <a:solidFill>
-                  <a:srgbClr val="556070"/>
-                </a:solidFill>
-                <a:latin typeface="Calibri"/>
-              </a:rPr>
-              <a:t> rule outperforms our </a:t>
-            </a:r>
-            <a:r>
-              <a:rPr lang="en-US" sz="1500" b="0" i="1" dirty="0" err="1">
-                <a:solidFill>
-                  <a:srgbClr val="556070"/>
-                </a:solidFill>
-                <a:latin typeface="Calibri"/>
-              </a:rPr>
-              <a:t>kNN</a:t>
-            </a:r>
-            <a:r>
-              <a:rPr lang="en-US" sz="1500" b="0" i="1" dirty="0">
-                <a:solidFill>
-                  <a:srgbClr val="556070"/>
-                </a:solidFill>
-                <a:latin typeface="Calibri"/>
-              </a:rPr>
-              <a:t>.</a:t>
-            </a:r>
-            <a:endParaRPr sz="1500" b="0" i="1" dirty="0">
-              <a:solidFill>
-                <a:srgbClr val="556070"/>
-              </a:solidFill>
-              <a:latin typeface="Calibri"/>
-            </a:endParaRPr>
+              <a:t>Where the model is right, and where it pays the cost of class imbalance.</a:t>
+            </a:r>
           </a:p>
         </p:txBody>
       </p:sp>
@@ -9484,16 +9442,39 @@
           </a:p>
         </p:txBody>
       </p:sp>
-      <p:sp>
-        <p:nvSpPr>
-          <p:cNvPr id="8" name="Rounded Rectangle 7"/>
+      <p:pic>
+        <p:nvPicPr>
+          <p:cNvPr id="8" name="Picture 7"/>
+          <p:cNvPicPr>
+            <a:picLocks noChangeAspect="1"/>
+          </p:cNvPicPr>
+          <p:nvPr/>
+        </p:nvPicPr>
+        <p:blipFill>
+          <a:blip r:embed="rId2"/>
+          <a:srcRect/>
+          <a:stretch/>
+        </p:blipFill>
+        <p:spPr>
+          <a:xfrm>
+            <a:off x="365760" y="1920240"/>
+            <a:ext cx="8229599" cy="4251960"/>
+          </a:xfrm>
+          <a:prstGeom prst="rect">
+            <a:avLst/>
+          </a:prstGeom>
+        </p:spPr>
+      </p:pic>
+      <p:sp>
+        <p:nvSpPr>
+          <p:cNvPr id="9" name="Rounded Rectangle 8"/>
           <p:cNvSpPr/>
           <p:nvPr/>
         </p:nvSpPr>
         <p:spPr>
           <a:xfrm>
-            <a:off x="457200" y="1965960"/>
-            <a:ext cx="5577840" cy="4389120"/>
+            <a:off x="8869680" y="1920240"/>
+            <a:ext cx="2926080" cy="4297680"/>
           </a:xfrm>
           <a:prstGeom prst="roundRect">
             <a:avLst/>
@@ -9533,14 +9514,14 @@
       </p:sp>
       <p:sp>
         <p:nvSpPr>
-          <p:cNvPr id="9" name="TextBox 8"/>
-          <p:cNvSpPr txBox="1"/>
-          <p:nvPr/>
-        </p:nvSpPr>
-        <p:spPr>
-          <a:xfrm>
-            <a:off x="640080" y="2103120"/>
-            <a:ext cx="5212080" cy="457200"/>
+          <p:cNvPr id="10" name="TextBox 9"/>
+          <p:cNvSpPr txBox="1"/>
+          <p:nvPr/>
+        </p:nvSpPr>
+        <p:spPr>
+          <a:xfrm>
+            <a:off x="9006840" y="2057400"/>
+            <a:ext cx="2651760" cy="457200"/>
           </a:xfrm>
           <a:prstGeom prst="rect">
             <a:avLst/>
@@ -9561,21 +9542,21 @@
                 </a:solidFill>
                 <a:latin typeface="Calibri"/>
               </a:rPr>
-              <a:t>5-fold Stratified Cross-Validation</a:t>
-            </a:r>
-          </a:p>
-        </p:txBody>
-      </p:sp>
-      <p:sp>
-        <p:nvSpPr>
-          <p:cNvPr id="10" name="TextBox 9"/>
-          <p:cNvSpPr txBox="1"/>
-          <p:nvPr/>
-        </p:nvSpPr>
-        <p:spPr>
-          <a:xfrm>
-            <a:off x="640080" y="2651760"/>
-            <a:ext cx="5212080" cy="3291840"/>
+              <a:t>In Plain English</a:t>
+            </a:r>
+          </a:p>
+        </p:txBody>
+      </p:sp>
+      <p:sp>
+        <p:nvSpPr>
+          <p:cNvPr id="11" name="TextBox 10"/>
+          <p:cNvSpPr txBox="1"/>
+          <p:nvPr/>
+        </p:nvSpPr>
+        <p:spPr>
+          <a:xfrm>
+            <a:off x="9006840" y="2606040"/>
+            <a:ext cx="2651760" cy="3200400"/>
           </a:xfrm>
           <a:prstGeom prst="rect">
             <a:avLst/>
@@ -9597,13 +9578,13 @@
               </a:spcAft>
             </a:pPr>
             <a:r>
-              <a:rPr sz="1300" dirty="0">
+              <a:rPr sz="1300">
                 <a:solidFill>
                   <a:srgbClr val="1A1A1A"/>
                 </a:solidFill>
                 <a:latin typeface="Calibri"/>
               </a:rPr>
-              <a:t>•  Stratified folds preserve the 84.5 / 15.5 class ratio in every fold.</a:t>
+              <a:t>•  Most non-buyers are correctly identified (97.2%).</a:t>
             </a:r>
           </a:p>
           <a:p>
@@ -9616,13 +9597,13 @@
               </a:spcAft>
             </a:pPr>
             <a:r>
-              <a:rPr sz="1300" dirty="0">
+              <a:rPr sz="1300">
                 <a:solidFill>
                   <a:srgbClr val="1A1A1A"/>
                 </a:solidFill>
                 <a:latin typeface="Calibri"/>
               </a:rPr>
-              <a:t>•  Each fold gets its own train-only standardization (no leakage).</a:t>
+              <a:t>•  Most buyers slip through (we catch only 35.7%).</a:t>
             </a:r>
           </a:p>
           <a:p>
@@ -9635,786 +9616,20 @@
               </a:spcAft>
             </a:pPr>
             <a:r>
-              <a:rPr sz="1300" dirty="0">
+              <a:rPr sz="1300">
                 <a:solidFill>
                   <a:srgbClr val="1A1A1A"/>
                 </a:solidFill>
                 <a:latin typeface="Calibri"/>
               </a:rPr>
-              <a:t>•  Per-fold metrics are tightly clustered.</a:t>
-            </a:r>
-          </a:p>
-          <a:p>
-            <a:pPr algn="l">
-              <a:lnSpc>
-                <a:spcPct val="115000"/>
-              </a:lnSpc>
-              <a:spcAft>
-                <a:spcPts val="600"/>
-              </a:spcAft>
-            </a:pPr>
-            <a:r>
-              <a:rPr sz="1300" dirty="0">
-                <a:solidFill>
-                  <a:srgbClr val="1A1A1A"/>
-                </a:solidFill>
-                <a:latin typeface="Calibri"/>
-              </a:rPr>
-              <a:t>•  Conclusion: the test-set numbers are not a lucky split.</a:t>
-            </a:r>
-          </a:p>
-        </p:txBody>
-      </p:sp>
-      <p:sp>
-        <p:nvSpPr>
-          <p:cNvPr id="11" name="Rounded Rectangle 10"/>
-          <p:cNvSpPr/>
-          <p:nvPr/>
-        </p:nvSpPr>
-        <p:spPr>
-          <a:xfrm>
-            <a:off x="6217920" y="1965960"/>
-            <a:ext cx="5577840" cy="4389120"/>
-          </a:xfrm>
-          <a:prstGeom prst="roundRect">
-            <a:avLst/>
-          </a:prstGeom>
-          <a:solidFill>
-            <a:srgbClr val="FFFFFF"/>
-          </a:solidFill>
-          <a:ln w="15875">
-            <a:solidFill>
-              <a:srgbClr val="1F3A5F"/>
-            </a:solidFill>
-          </a:ln>
-          <a:effectLst/>
-        </p:spPr>
-        <p:style>
-          <a:lnRef idx="1">
-            <a:schemeClr val="accent1"/>
-          </a:lnRef>
-          <a:fillRef idx="3">
-            <a:schemeClr val="accent1"/>
-          </a:fillRef>
-          <a:effectRef idx="2">
-            <a:schemeClr val="accent1"/>
-          </a:effectRef>
-          <a:fontRef idx="minor">
-            <a:schemeClr val="lt1"/>
-          </a:fontRef>
-        </p:style>
-        <p:txBody>
-          <a:bodyPr rtlCol="0" anchor="ctr"/>
-          <a:lstStyle/>
-          <a:p>
-            <a:pPr algn="ctr"/>
-            <a:endParaRPr/>
+              <a:t>•  When we do flag a buyer, we’re usually right.</a:t>
+            </a:r>
           </a:p>
         </p:txBody>
       </p:sp>
       <p:sp>
         <p:nvSpPr>
           <p:cNvPr id="12" name="TextBox 11"/>
-          <p:cNvSpPr txBox="1"/>
-          <p:nvPr/>
-        </p:nvSpPr>
-        <p:spPr>
-          <a:xfrm>
-            <a:off x="6400800" y="2103120"/>
-            <a:ext cx="5212080" cy="457200"/>
-          </a:xfrm>
-          <a:prstGeom prst="rect">
-            <a:avLst/>
-          </a:prstGeom>
-          <a:noFill/>
-        </p:spPr>
-        <p:txBody>
-          <a:bodyPr wrap="square" anchor="t">
-            <a:spAutoFit/>
-          </a:bodyPr>
-          <a:lstStyle/>
-          <a:p>
-            <a:pPr algn="l"/>
-            <a:r>
-              <a:rPr sz="1800" b="1" i="0">
-                <a:solidFill>
-                  <a:srgbClr val="1F3A5F"/>
-                </a:solidFill>
-                <a:latin typeface="Calibri"/>
-              </a:rPr>
-              <a:t>Baseline Comparison</a:t>
-            </a:r>
-          </a:p>
-        </p:txBody>
-      </p:sp>
-      <p:sp>
-        <p:nvSpPr>
-          <p:cNvPr id="13" name="TextBox 12"/>
-          <p:cNvSpPr txBox="1"/>
-          <p:nvPr/>
-        </p:nvSpPr>
-        <p:spPr>
-          <a:xfrm>
-            <a:off x="6400800" y="2697480"/>
-            <a:ext cx="2468880" cy="365760"/>
-          </a:xfrm>
-          <a:prstGeom prst="rect">
-            <a:avLst/>
-          </a:prstGeom>
-          <a:noFill/>
-        </p:spPr>
-        <p:txBody>
-          <a:bodyPr wrap="square" anchor="t">
-            <a:spAutoFit/>
-          </a:bodyPr>
-          <a:lstStyle/>
-          <a:p>
-            <a:pPr algn="l"/>
-            <a:r>
-              <a:rPr sz="1200" b="1" i="0">
-                <a:solidFill>
-                  <a:srgbClr val="556070"/>
-                </a:solidFill>
-                <a:latin typeface="Calibri"/>
-              </a:rPr>
-              <a:t>Model</a:t>
-            </a:r>
-          </a:p>
-        </p:txBody>
-      </p:sp>
-      <p:sp>
-        <p:nvSpPr>
-          <p:cNvPr id="14" name="TextBox 13"/>
-          <p:cNvSpPr txBox="1"/>
-          <p:nvPr/>
-        </p:nvSpPr>
-        <p:spPr>
-          <a:xfrm>
-            <a:off x="8869680" y="2697480"/>
-            <a:ext cx="1463040" cy="365760"/>
-          </a:xfrm>
-          <a:prstGeom prst="rect">
-            <a:avLst/>
-          </a:prstGeom>
-          <a:noFill/>
-        </p:spPr>
-        <p:txBody>
-          <a:bodyPr wrap="square" anchor="t">
-            <a:spAutoFit/>
-          </a:bodyPr>
-          <a:lstStyle/>
-          <a:p>
-            <a:pPr algn="ctr"/>
-            <a:r>
-              <a:rPr sz="1200" b="1" i="0">
-                <a:solidFill>
-                  <a:srgbClr val="556070"/>
-                </a:solidFill>
-                <a:latin typeface="Calibri"/>
-              </a:rPr>
-              <a:t>Accuracy</a:t>
-            </a:r>
-          </a:p>
-        </p:txBody>
-      </p:sp>
-      <p:sp>
-        <p:nvSpPr>
-          <p:cNvPr id="15" name="TextBox 14"/>
-          <p:cNvSpPr txBox="1"/>
-          <p:nvPr/>
-        </p:nvSpPr>
-        <p:spPr>
-          <a:xfrm>
-            <a:off x="10332720" y="2697480"/>
-            <a:ext cx="1280160" cy="365760"/>
-          </a:xfrm>
-          <a:prstGeom prst="rect">
-            <a:avLst/>
-          </a:prstGeom>
-          <a:noFill/>
-        </p:spPr>
-        <p:txBody>
-          <a:bodyPr wrap="square" anchor="t">
-            <a:spAutoFit/>
-          </a:bodyPr>
-          <a:lstStyle/>
-          <a:p>
-            <a:pPr algn="ctr"/>
-            <a:r>
-              <a:rPr sz="1200" b="1" i="0">
-                <a:solidFill>
-                  <a:srgbClr val="556070"/>
-                </a:solidFill>
-                <a:latin typeface="Calibri"/>
-              </a:rPr>
-              <a:t>F1</a:t>
-            </a:r>
-          </a:p>
-        </p:txBody>
-      </p:sp>
-      <p:sp>
-        <p:nvSpPr>
-          <p:cNvPr id="16" name="Rectangle 15"/>
-          <p:cNvSpPr/>
-          <p:nvPr/>
-        </p:nvSpPr>
-        <p:spPr>
-          <a:xfrm>
-            <a:off x="6400800" y="3154680"/>
-            <a:ext cx="5212080" cy="411480"/>
-          </a:xfrm>
-          <a:prstGeom prst="rect">
-            <a:avLst/>
-          </a:prstGeom>
-          <a:solidFill>
-            <a:srgbClr val="FFFFFF"/>
-          </a:solidFill>
-          <a:ln w="6350">
-            <a:solidFill>
-              <a:srgbClr val="1F3A5F"/>
-            </a:solidFill>
-          </a:ln>
-        </p:spPr>
-        <p:style>
-          <a:lnRef idx="1">
-            <a:schemeClr val="accent1"/>
-          </a:lnRef>
-          <a:fillRef idx="3">
-            <a:schemeClr val="accent1"/>
-          </a:fillRef>
-          <a:effectRef idx="2">
-            <a:schemeClr val="accent1"/>
-          </a:effectRef>
-          <a:fontRef idx="minor">
-            <a:schemeClr val="lt1"/>
-          </a:fontRef>
-        </p:style>
-        <p:txBody>
-          <a:bodyPr rtlCol="0" anchor="ctr"/>
-          <a:lstStyle/>
-          <a:p>
-            <a:pPr algn="ctr"/>
-            <a:endParaRPr/>
-          </a:p>
-        </p:txBody>
-      </p:sp>
-      <p:sp>
-        <p:nvSpPr>
-          <p:cNvPr id="17" name="TextBox 16"/>
-          <p:cNvSpPr txBox="1"/>
-          <p:nvPr/>
-        </p:nvSpPr>
-        <p:spPr>
-          <a:xfrm>
-            <a:off x="6400800" y="3154680"/>
-            <a:ext cx="2468880" cy="411480"/>
-          </a:xfrm>
-          <a:prstGeom prst="rect">
-            <a:avLst/>
-          </a:prstGeom>
-          <a:noFill/>
-        </p:spPr>
-        <p:txBody>
-          <a:bodyPr wrap="square" anchor="ctr">
-            <a:spAutoFit/>
-          </a:bodyPr>
-          <a:lstStyle/>
-          <a:p>
-            <a:pPr algn="l"/>
-            <a:r>
-              <a:rPr sz="1200" b="0" i="0">
-                <a:solidFill>
-                  <a:srgbClr val="1A1A1A"/>
-                </a:solidFill>
-                <a:latin typeface="Calibri"/>
-              </a:rPr>
-              <a:t>Always "No-Purchase"</a:t>
-            </a:r>
-          </a:p>
-        </p:txBody>
-      </p:sp>
-      <p:sp>
-        <p:nvSpPr>
-          <p:cNvPr id="18" name="TextBox 17"/>
-          <p:cNvSpPr txBox="1"/>
-          <p:nvPr/>
-        </p:nvSpPr>
-        <p:spPr>
-          <a:xfrm>
-            <a:off x="8869680" y="3154680"/>
-            <a:ext cx="1463040" cy="411480"/>
-          </a:xfrm>
-          <a:prstGeom prst="rect">
-            <a:avLst/>
-          </a:prstGeom>
-          <a:noFill/>
-        </p:spPr>
-        <p:txBody>
-          <a:bodyPr wrap="square" anchor="ctr">
-            <a:spAutoFit/>
-          </a:bodyPr>
-          <a:lstStyle/>
-          <a:p>
-            <a:pPr algn="ctr"/>
-            <a:r>
-              <a:rPr sz="1200" b="0" i="0">
-                <a:solidFill>
-                  <a:srgbClr val="1A1A1A"/>
-                </a:solidFill>
-                <a:latin typeface="Calibri"/>
-              </a:rPr>
-              <a:t>0.8454</a:t>
-            </a:r>
-          </a:p>
-        </p:txBody>
-      </p:sp>
-      <p:sp>
-        <p:nvSpPr>
-          <p:cNvPr id="19" name="TextBox 18"/>
-          <p:cNvSpPr txBox="1"/>
-          <p:nvPr/>
-        </p:nvSpPr>
-        <p:spPr>
-          <a:xfrm>
-            <a:off x="10332720" y="3154680"/>
-            <a:ext cx="1280160" cy="411480"/>
-          </a:xfrm>
-          <a:prstGeom prst="rect">
-            <a:avLst/>
-          </a:prstGeom>
-          <a:noFill/>
-        </p:spPr>
-        <p:txBody>
-          <a:bodyPr wrap="square" anchor="ctr">
-            <a:spAutoFit/>
-          </a:bodyPr>
-          <a:lstStyle/>
-          <a:p>
-            <a:pPr algn="ctr"/>
-            <a:r>
-              <a:rPr sz="1200" b="0" i="0">
-                <a:solidFill>
-                  <a:srgbClr val="1A1A1A"/>
-                </a:solidFill>
-                <a:latin typeface="Calibri"/>
-              </a:rPr>
-              <a:t>0.0000</a:t>
-            </a:r>
-          </a:p>
-        </p:txBody>
-      </p:sp>
-      <p:sp>
-        <p:nvSpPr>
-          <p:cNvPr id="20" name="Rectangle 19"/>
-          <p:cNvSpPr/>
-          <p:nvPr/>
-        </p:nvSpPr>
-        <p:spPr>
-          <a:xfrm>
-            <a:off x="6400800" y="3611880"/>
-            <a:ext cx="5212080" cy="411480"/>
-          </a:xfrm>
-          <a:prstGeom prst="rect">
-            <a:avLst/>
-          </a:prstGeom>
-          <a:solidFill>
-            <a:srgbClr val="FFFFFF"/>
-          </a:solidFill>
-          <a:ln w="6350">
-            <a:solidFill>
-              <a:srgbClr val="1F3A5F"/>
-            </a:solidFill>
-          </a:ln>
-        </p:spPr>
-        <p:style>
-          <a:lnRef idx="1">
-            <a:schemeClr val="accent1"/>
-          </a:lnRef>
-          <a:fillRef idx="3">
-            <a:schemeClr val="accent1"/>
-          </a:fillRef>
-          <a:effectRef idx="2">
-            <a:schemeClr val="accent1"/>
-          </a:effectRef>
-          <a:fontRef idx="minor">
-            <a:schemeClr val="lt1"/>
-          </a:fontRef>
-        </p:style>
-        <p:txBody>
-          <a:bodyPr rtlCol="0" anchor="ctr"/>
-          <a:lstStyle/>
-          <a:p>
-            <a:pPr algn="ctr"/>
-            <a:endParaRPr/>
-          </a:p>
-        </p:txBody>
-      </p:sp>
-      <p:sp>
-        <p:nvSpPr>
-          <p:cNvPr id="21" name="TextBox 20"/>
-          <p:cNvSpPr txBox="1"/>
-          <p:nvPr/>
-        </p:nvSpPr>
-        <p:spPr>
-          <a:xfrm>
-            <a:off x="6400800" y="3611880"/>
-            <a:ext cx="2468880" cy="411480"/>
-          </a:xfrm>
-          <a:prstGeom prst="rect">
-            <a:avLst/>
-          </a:prstGeom>
-          <a:noFill/>
-        </p:spPr>
-        <p:txBody>
-          <a:bodyPr wrap="square" anchor="ctr">
-            <a:spAutoFit/>
-          </a:bodyPr>
-          <a:lstStyle/>
-          <a:p>
-            <a:pPr algn="l"/>
-            <a:r>
-              <a:rPr sz="1200" b="0" i="0">
-                <a:solidFill>
-                  <a:srgbClr val="1A1A1A"/>
-                </a:solidFill>
-                <a:latin typeface="Calibri"/>
-              </a:rPr>
-              <a:t>Rule on PageValues</a:t>
-            </a:r>
-          </a:p>
-        </p:txBody>
-      </p:sp>
-      <p:sp>
-        <p:nvSpPr>
-          <p:cNvPr id="22" name="TextBox 21"/>
-          <p:cNvSpPr txBox="1"/>
-          <p:nvPr/>
-        </p:nvSpPr>
-        <p:spPr>
-          <a:xfrm>
-            <a:off x="8869680" y="3679120"/>
-            <a:ext cx="1463040" cy="276999"/>
-          </a:xfrm>
-          <a:prstGeom prst="rect">
-            <a:avLst/>
-          </a:prstGeom>
-          <a:noFill/>
-        </p:spPr>
-        <p:txBody>
-          <a:bodyPr wrap="square" anchor="ctr">
-            <a:spAutoFit/>
-          </a:bodyPr>
-          <a:lstStyle/>
-          <a:p>
-            <a:pPr algn="ctr"/>
-            <a:r>
-              <a:rPr lang="en-PH" sz="1200" b="0" i="0" dirty="0">
-                <a:solidFill>
-                  <a:srgbClr val="1A1A1A"/>
-                </a:solidFill>
-                <a:latin typeface="Calibri"/>
-              </a:rPr>
-              <a:t>0.8929</a:t>
-            </a:r>
-            <a:endParaRPr sz="1200" b="0" i="0" dirty="0">
-              <a:solidFill>
-                <a:srgbClr val="1A1A1A"/>
-              </a:solidFill>
-              <a:latin typeface="Calibri"/>
-            </a:endParaRPr>
-          </a:p>
-        </p:txBody>
-      </p:sp>
-      <p:sp>
-        <p:nvSpPr>
-          <p:cNvPr id="23" name="TextBox 22"/>
-          <p:cNvSpPr txBox="1"/>
-          <p:nvPr/>
-        </p:nvSpPr>
-        <p:spPr>
-          <a:xfrm>
-            <a:off x="10332720" y="3679120"/>
-            <a:ext cx="1280160" cy="276999"/>
-          </a:xfrm>
-          <a:prstGeom prst="rect">
-            <a:avLst/>
-          </a:prstGeom>
-          <a:noFill/>
-        </p:spPr>
-        <p:txBody>
-          <a:bodyPr wrap="square" anchor="ctr">
-            <a:spAutoFit/>
-          </a:bodyPr>
-          <a:lstStyle/>
-          <a:p>
-            <a:pPr algn="ctr"/>
-            <a:r>
-              <a:rPr lang="en-PH" sz="1200" b="0" i="0" dirty="0">
-                <a:solidFill>
-                  <a:srgbClr val="1A1A1A"/>
-                </a:solidFill>
-                <a:latin typeface="Calibri"/>
-              </a:rPr>
-              <a:t>0.6819</a:t>
-            </a:r>
-            <a:endParaRPr sz="1200" b="0" i="0" dirty="0">
-              <a:solidFill>
-                <a:srgbClr val="1A1A1A"/>
-              </a:solidFill>
-              <a:latin typeface="Calibri"/>
-            </a:endParaRPr>
-          </a:p>
-        </p:txBody>
-      </p:sp>
-      <p:sp>
-        <p:nvSpPr>
-          <p:cNvPr id="24" name="Rectangle 23"/>
-          <p:cNvSpPr/>
-          <p:nvPr/>
-        </p:nvSpPr>
-        <p:spPr>
-          <a:xfrm>
-            <a:off x="6400800" y="4069080"/>
-            <a:ext cx="5212080" cy="411480"/>
-          </a:xfrm>
-          <a:prstGeom prst="rect">
-            <a:avLst/>
-          </a:prstGeom>
-          <a:solidFill>
-            <a:srgbClr val="DD8452"/>
-          </a:solidFill>
-          <a:ln w="6350">
-            <a:solidFill>
-              <a:srgbClr val="1F3A5F"/>
-            </a:solidFill>
-          </a:ln>
-        </p:spPr>
-        <p:style>
-          <a:lnRef idx="1">
-            <a:schemeClr val="accent1"/>
-          </a:lnRef>
-          <a:fillRef idx="3">
-            <a:schemeClr val="accent1"/>
-          </a:fillRef>
-          <a:effectRef idx="2">
-            <a:schemeClr val="accent1"/>
-          </a:effectRef>
-          <a:fontRef idx="minor">
-            <a:schemeClr val="lt1"/>
-          </a:fontRef>
-        </p:style>
-        <p:txBody>
-          <a:bodyPr rtlCol="0" anchor="ctr"/>
-          <a:lstStyle/>
-          <a:p>
-            <a:pPr algn="ctr"/>
-            <a:endParaRPr/>
-          </a:p>
-        </p:txBody>
-      </p:sp>
-      <p:sp>
-        <p:nvSpPr>
-          <p:cNvPr id="25" name="TextBox 24"/>
-          <p:cNvSpPr txBox="1"/>
-          <p:nvPr/>
-        </p:nvSpPr>
-        <p:spPr>
-          <a:xfrm>
-            <a:off x="6400800" y="4069080"/>
-            <a:ext cx="2468880" cy="411480"/>
-          </a:xfrm>
-          <a:prstGeom prst="rect">
-            <a:avLst/>
-          </a:prstGeom>
-          <a:noFill/>
-        </p:spPr>
-        <p:txBody>
-          <a:bodyPr wrap="square" anchor="ctr">
-            <a:spAutoFit/>
-          </a:bodyPr>
-          <a:lstStyle/>
-          <a:p>
-            <a:pPr algn="l"/>
-            <a:r>
-              <a:rPr sz="1200" b="1" i="0">
-                <a:solidFill>
-                  <a:srgbClr val="FFFFFF"/>
-                </a:solidFill>
-                <a:latin typeface="Calibri"/>
-              </a:rPr>
-              <a:t>kNN (k = 7) — our model</a:t>
-            </a:r>
-          </a:p>
-        </p:txBody>
-      </p:sp>
-      <p:sp>
-        <p:nvSpPr>
-          <p:cNvPr id="26" name="TextBox 25"/>
-          <p:cNvSpPr txBox="1"/>
-          <p:nvPr/>
-        </p:nvSpPr>
-        <p:spPr>
-          <a:xfrm>
-            <a:off x="8869680" y="4069080"/>
-            <a:ext cx="1463040" cy="411480"/>
-          </a:xfrm>
-          <a:prstGeom prst="rect">
-            <a:avLst/>
-          </a:prstGeom>
-          <a:noFill/>
-        </p:spPr>
-        <p:txBody>
-          <a:bodyPr wrap="square" anchor="ctr">
-            <a:spAutoFit/>
-          </a:bodyPr>
-          <a:lstStyle/>
-          <a:p>
-            <a:pPr algn="ctr"/>
-            <a:r>
-              <a:rPr sz="1200" b="1" i="0">
-                <a:solidFill>
-                  <a:srgbClr val="FFFFFF"/>
-                </a:solidFill>
-                <a:latin typeface="Calibri"/>
-              </a:rPr>
-              <a:t>0.8767</a:t>
-            </a:r>
-          </a:p>
-        </p:txBody>
-      </p:sp>
-      <p:sp>
-        <p:nvSpPr>
-          <p:cNvPr id="27" name="TextBox 26"/>
-          <p:cNvSpPr txBox="1"/>
-          <p:nvPr/>
-        </p:nvSpPr>
-        <p:spPr>
-          <a:xfrm>
-            <a:off x="10332720" y="4069080"/>
-            <a:ext cx="1280160" cy="411480"/>
-          </a:xfrm>
-          <a:prstGeom prst="rect">
-            <a:avLst/>
-          </a:prstGeom>
-          <a:noFill/>
-        </p:spPr>
-        <p:txBody>
-          <a:bodyPr wrap="square" anchor="ctr">
-            <a:spAutoFit/>
-          </a:bodyPr>
-          <a:lstStyle/>
-          <a:p>
-            <a:pPr algn="ctr"/>
-            <a:r>
-              <a:rPr sz="1200" b="1" i="0">
-                <a:solidFill>
-                  <a:srgbClr val="FFFFFF"/>
-                </a:solidFill>
-                <a:latin typeface="Calibri"/>
-              </a:rPr>
-              <a:t>0.4722</a:t>
-            </a:r>
-          </a:p>
-        </p:txBody>
-      </p:sp>
-      <p:sp>
-        <p:nvSpPr>
-          <p:cNvPr id="28" name="TextBox 27"/>
-          <p:cNvSpPr txBox="1"/>
-          <p:nvPr/>
-        </p:nvSpPr>
-        <p:spPr>
-          <a:xfrm>
-            <a:off x="6400800" y="4754880"/>
-            <a:ext cx="5212080" cy="461665"/>
-          </a:xfrm>
-          <a:prstGeom prst="rect">
-            <a:avLst/>
-          </a:prstGeom>
-          <a:noFill/>
-        </p:spPr>
-        <p:txBody>
-          <a:bodyPr wrap="square" anchor="t">
-            <a:spAutoFit/>
-          </a:bodyPr>
-          <a:lstStyle/>
-          <a:p>
-            <a:pPr algn="l"/>
-            <a:r>
-              <a:rPr lang="en-US" sz="1200" b="0" i="1" dirty="0">
-                <a:solidFill>
-                  <a:srgbClr val="556070"/>
-                </a:solidFill>
-                <a:latin typeface="Calibri"/>
-              </a:rPr>
-              <a:t>The </a:t>
-            </a:r>
-            <a:r>
-              <a:rPr lang="en-US" sz="1200" b="0" i="1" dirty="0" err="1">
-                <a:solidFill>
-                  <a:srgbClr val="556070"/>
-                </a:solidFill>
-                <a:latin typeface="Calibri"/>
-              </a:rPr>
-              <a:t>PageValues</a:t>
-            </a:r>
-            <a:r>
-              <a:rPr lang="en-US" sz="1200" b="0" i="1" dirty="0">
-                <a:solidFill>
-                  <a:srgbClr val="556070"/>
-                </a:solidFill>
-                <a:latin typeface="Calibri"/>
-              </a:rPr>
-              <a:t> rule beats </a:t>
-            </a:r>
-            <a:r>
-              <a:rPr lang="en-US" sz="1200" b="0" i="1" dirty="0" err="1">
-                <a:solidFill>
-                  <a:srgbClr val="556070"/>
-                </a:solidFill>
-                <a:latin typeface="Calibri"/>
-              </a:rPr>
-              <a:t>kNN</a:t>
-            </a:r>
-            <a:r>
-              <a:rPr lang="en-US" sz="1200" b="0" i="1" dirty="0">
-                <a:solidFill>
-                  <a:srgbClr val="556070"/>
-                </a:solidFill>
-                <a:latin typeface="Calibri"/>
-              </a:rPr>
-              <a:t> on F1 — </a:t>
-            </a:r>
-            <a:r>
-              <a:rPr lang="en-US" sz="1200" b="0" i="1" dirty="0" err="1">
-                <a:solidFill>
-                  <a:srgbClr val="556070"/>
-                </a:solidFill>
-                <a:latin typeface="Calibri"/>
-              </a:rPr>
-              <a:t>kNN</a:t>
-            </a:r>
-            <a:r>
-              <a:rPr lang="en-US" sz="1200" b="0" i="1" dirty="0">
-                <a:solidFill>
-                  <a:srgbClr val="556070"/>
-                </a:solidFill>
-                <a:latin typeface="Calibri"/>
-              </a:rPr>
-              <a:t> dilutes the dominant signal across 28 features. A humbling, instructive result.</a:t>
-            </a:r>
-            <a:endParaRPr sz="1200" b="0" i="1" dirty="0">
-              <a:solidFill>
-                <a:srgbClr val="556070"/>
-              </a:solidFill>
-              <a:latin typeface="Calibri"/>
-            </a:endParaRPr>
-          </a:p>
-        </p:txBody>
-      </p:sp>
-      <p:sp>
-        <p:nvSpPr>
-          <p:cNvPr id="29" name="TextBox 28"/>
           <p:cNvSpPr txBox="1"/>
           <p:nvPr/>
         </p:nvSpPr>
@@ -10464,7 +9679,7 @@
       </p:sp>
       <p:sp>
         <p:nvSpPr>
-          <p:cNvPr id="30" name="TextBox 29"/>
+          <p:cNvPr id="13" name="TextBox 12"/>
           <p:cNvSpPr txBox="1"/>
           <p:nvPr/>
         </p:nvSpPr>
@@ -10492,7 +9707,7 @@
                 </a:solidFill>
                 <a:latin typeface="Calibri"/>
               </a:rPr>
-              <a:t>Slide 16</a:t>
+              <a:t>Slide 15</a:t>
             </a:r>
           </a:p>
         </p:txBody>
@@ -10640,7 +9855,7 @@
                   <a:srgbClr val="FFFFFF"/>
                 </a:solidFill>
               </a:rPr>
-              <a:t>09  •  Discussion</a:t>
+              <a:t>08  •  Validation</a:t>
             </a:r>
           </a:p>
         </p:txBody>
@@ -10654,7 +9869,7 @@
         <p:spPr>
           <a:xfrm>
             <a:off x="457200" y="685800"/>
-            <a:ext cx="11247120" cy="640080"/>
+            <a:ext cx="11247120" cy="553998"/>
           </a:xfrm>
           <a:prstGeom prst="rect">
             <a:avLst/>
@@ -10669,14 +9884,20 @@
           <a:p>
             <a:pPr algn="l"/>
             <a:r>
-              <a:rPr sz="3000" b="1" i="0">
+              <a:rPr lang="en-US" sz="3000" b="1" i="0" dirty="0">
                 <a:solidFill>
                   <a:srgbClr val="1F3A5F"/>
                 </a:solidFill>
                 <a:latin typeface="Calibri"/>
               </a:rPr>
-              <a:t>What the Numbers Mean for the Business</a:t>
-            </a:r>
+              <a:t>Validation: Stable Across Folds — but a Simple Rule Beats Us</a:t>
+            </a:r>
+            <a:endParaRPr sz="3000" b="1" i="0" dirty="0">
+              <a:solidFill>
+                <a:srgbClr val="1F3A5F"/>
+              </a:solidFill>
+              <a:latin typeface="Calibri"/>
+            </a:endParaRPr>
           </a:p>
         </p:txBody>
       </p:sp>
@@ -10689,7 +9910,7 @@
         <p:spPr>
           <a:xfrm>
             <a:off x="457200" y="1280160"/>
-            <a:ext cx="11247120" cy="365760"/>
+            <a:ext cx="11247120" cy="323165"/>
           </a:xfrm>
           <a:prstGeom prst="rect">
             <a:avLst/>
@@ -10704,14 +9925,56 @@
           <a:p>
             <a:pPr algn="l"/>
             <a:r>
-              <a:rPr sz="1500" b="0" i="1">
+              <a:rPr lang="en-US" sz="1500" b="0" i="1" dirty="0">
                 <a:solidFill>
                   <a:srgbClr val="556070"/>
                 </a:solidFill>
                 <a:latin typeface="Calibri"/>
               </a:rPr>
-              <a:t>A high-precision, lower-recall classifier — useful for some interventions, weak for others.</a:t>
-            </a:r>
+              <a:t>5-fold stratified CV confirms stability; but a one-feature </a:t>
+            </a:r>
+            <a:r>
+              <a:rPr lang="en-US" sz="1500" b="0" i="1" dirty="0" err="1">
+                <a:solidFill>
+                  <a:srgbClr val="556070"/>
+                </a:solidFill>
+                <a:latin typeface="Calibri"/>
+              </a:rPr>
+              <a:t>PageValues</a:t>
+            </a:r>
+            <a:r>
+              <a:rPr lang="en-US" sz="1500" b="0" i="1" dirty="0">
+                <a:solidFill>
+                  <a:srgbClr val="556070"/>
+                </a:solidFill>
+                <a:latin typeface="Calibri"/>
+              </a:rPr>
+              <a:t> rule outperforms our </a:t>
+            </a:r>
+            <a:r>
+              <a:rPr lang="en-US" sz="1500" b="0" i="1" dirty="0" err="1">
+                <a:solidFill>
+                  <a:srgbClr val="556070"/>
+                </a:solidFill>
+                <a:latin typeface="Calibri"/>
+              </a:rPr>
+              <a:t>kNN</a:t>
+            </a:r>
+            <a:r>
+              <a:rPr lang="en-US" sz="1500" b="0" i="1" dirty="0">
+                <a:solidFill>
+                  <a:srgbClr val="556070"/>
+                </a:solidFill>
+                <a:latin typeface="Calibri"/>
+              </a:rPr>
+              <a:t>.</a:t>
+            </a:r>
+            <a:endParaRPr sz="1500" b="0" i="1" dirty="0">
+              <a:solidFill>
+                <a:srgbClr val="556070"/>
+              </a:solidFill>
+              <a:latin typeface="Calibri"/>
+            </a:endParaRPr>
           </a:p>
         </p:txBody>
       </p:sp>
@@ -10768,7 +10031,7 @@
         <p:spPr>
           <a:xfrm>
             <a:off x="457200" y="1965960"/>
-            <a:ext cx="5577840" cy="4297680"/>
+            <a:ext cx="5577840" cy="4389120"/>
           </a:xfrm>
           <a:prstGeom prst="roundRect">
             <a:avLst/>
@@ -10836,7 +10099,7 @@
                 </a:solidFill>
                 <a:latin typeface="Calibri"/>
               </a:rPr>
-              <a:t>Good Fit If…</a:t>
+              <a:t>5-fold Stratified Cross-Validation</a:t>
             </a:r>
           </a:p>
         </p:txBody>
@@ -10850,7 +10113,7 @@
         <p:spPr>
           <a:xfrm>
             <a:off x="640080" y="2651760"/>
-            <a:ext cx="5212080" cy="3200400"/>
+            <a:ext cx="5212080" cy="3291840"/>
           </a:xfrm>
           <a:prstGeom prst="rect">
             <a:avLst/>
@@ -10872,13 +10135,13 @@
               </a:spcAft>
             </a:pPr>
             <a:r>
-              <a:rPr sz="1400">
+              <a:rPr sz="1300" dirty="0">
                 <a:solidFill>
                   <a:srgbClr val="1A1A1A"/>
                 </a:solidFill>
                 <a:latin typeface="Calibri"/>
               </a:rPr>
-              <a:t>•  Acting on a non-buyer is expensive (e.g., heavy discount, live agent).</a:t>
+              <a:t>•  Stratified folds preserve the 84.5 / 15.5 class ratio in every fold.</a:t>
             </a:r>
           </a:p>
           <a:p>
@@ -10891,13 +10154,13 @@
               </a:spcAft>
             </a:pPr>
             <a:r>
-              <a:rPr sz="1400">
+              <a:rPr sz="1300" dirty="0">
                 <a:solidFill>
                   <a:srgbClr val="1A1A1A"/>
                 </a:solidFill>
                 <a:latin typeface="Calibri"/>
               </a:rPr>
-              <a:t>•  You want fewer-but-confident alerts, not blanket coverage.</a:t>
+              <a:t>•  Each fold gets its own train-only standardization (no leakage).</a:t>
             </a:r>
           </a:p>
           <a:p>
@@ -10910,120 +10173,15 @@
               </a:spcAft>
             </a:pPr>
             <a:r>
-              <a:rPr sz="1400">
+              <a:rPr sz="1300" dirty="0">
                 <a:solidFill>
                   <a:srgbClr val="1A1A1A"/>
                 </a:solidFill>
                 <a:latin typeface="Calibri"/>
               </a:rPr>
-              <a:t>•  You can pair this model with low-cost site-wide nudges that catch the rest.</a:t>
-            </a:r>
-          </a:p>
-        </p:txBody>
-      </p:sp>
-      <p:sp>
-        <p:nvSpPr>
-          <p:cNvPr id="11" name="Rounded Rectangle 10"/>
-          <p:cNvSpPr/>
-          <p:nvPr/>
-        </p:nvSpPr>
-        <p:spPr>
-          <a:xfrm>
-            <a:off x="6217920" y="1965960"/>
-            <a:ext cx="5577840" cy="4297680"/>
-          </a:xfrm>
-          <a:prstGeom prst="roundRect">
-            <a:avLst/>
-          </a:prstGeom>
-          <a:solidFill>
-            <a:srgbClr val="1F3A5F"/>
-          </a:solidFill>
-          <a:ln w="15875">
-            <a:solidFill>
-              <a:srgbClr val="1F3A5F"/>
-            </a:solidFill>
-          </a:ln>
-          <a:effectLst/>
-        </p:spPr>
-        <p:style>
-          <a:lnRef idx="1">
-            <a:schemeClr val="accent1"/>
-          </a:lnRef>
-          <a:fillRef idx="3">
-            <a:schemeClr val="accent1"/>
-          </a:fillRef>
-          <a:effectRef idx="2">
-            <a:schemeClr val="accent1"/>
-          </a:effectRef>
-          <a:fontRef idx="minor">
-            <a:schemeClr val="lt1"/>
-          </a:fontRef>
-        </p:style>
-        <p:txBody>
-          <a:bodyPr rtlCol="0" anchor="ctr"/>
-          <a:lstStyle/>
-          <a:p>
-            <a:pPr algn="ctr"/>
-            <a:endParaRPr/>
-          </a:p>
-        </p:txBody>
-      </p:sp>
-      <p:sp>
-        <p:nvSpPr>
-          <p:cNvPr id="12" name="TextBox 11"/>
-          <p:cNvSpPr txBox="1"/>
-          <p:nvPr/>
-        </p:nvSpPr>
-        <p:spPr>
-          <a:xfrm>
-            <a:off x="6400800" y="2103120"/>
-            <a:ext cx="5212080" cy="457200"/>
-          </a:xfrm>
-          <a:prstGeom prst="rect">
-            <a:avLst/>
-          </a:prstGeom>
-          <a:noFill/>
-        </p:spPr>
-        <p:txBody>
-          <a:bodyPr wrap="square" anchor="t">
-            <a:spAutoFit/>
-          </a:bodyPr>
-          <a:lstStyle/>
-          <a:p>
-            <a:pPr algn="l"/>
-            <a:r>
-              <a:rPr sz="1800" b="1" i="0">
-                <a:solidFill>
-                  <a:srgbClr val="DD8452"/>
-                </a:solidFill>
-                <a:latin typeface="Calibri"/>
-              </a:rPr>
-              <a:t>Bad Fit If…</a:t>
-            </a:r>
-          </a:p>
-        </p:txBody>
-      </p:sp>
-      <p:sp>
-        <p:nvSpPr>
-          <p:cNvPr id="13" name="TextBox 12"/>
-          <p:cNvSpPr txBox="1"/>
-          <p:nvPr/>
-        </p:nvSpPr>
-        <p:spPr>
-          <a:xfrm>
-            <a:off x="6400800" y="2651760"/>
-            <a:ext cx="5212080" cy="3200400"/>
-          </a:xfrm>
-          <a:prstGeom prst="rect">
-            <a:avLst/>
-          </a:prstGeom>
-          <a:noFill/>
-        </p:spPr>
-        <p:txBody>
-          <a:bodyPr wrap="square">
-            <a:spAutoFit/>
-          </a:bodyPr>
-          <a:lstStyle/>
+              <a:t>•  Per-fold metrics are tightly clustered.</a:t>
+            </a:r>
+          </a:p>
           <a:p>
             <a:pPr algn="l">
               <a:lnSpc>
@@ -11034,58 +10192,767 @@
               </a:spcAft>
             </a:pPr>
             <a:r>
-              <a:rPr sz="1400">
+              <a:rPr sz="1300" dirty="0">
+                <a:solidFill>
+                  <a:srgbClr val="1A1A1A"/>
+                </a:solidFill>
+                <a:latin typeface="Calibri"/>
+              </a:rPr>
+              <a:t>•  Conclusion: the test-set numbers are not a lucky split.</a:t>
+            </a:r>
+          </a:p>
+        </p:txBody>
+      </p:sp>
+      <p:sp>
+        <p:nvSpPr>
+          <p:cNvPr id="11" name="Rounded Rectangle 10"/>
+          <p:cNvSpPr/>
+          <p:nvPr/>
+        </p:nvSpPr>
+        <p:spPr>
+          <a:xfrm>
+            <a:off x="6217920" y="1965960"/>
+            <a:ext cx="5577840" cy="4389120"/>
+          </a:xfrm>
+          <a:prstGeom prst="roundRect">
+            <a:avLst/>
+          </a:prstGeom>
+          <a:solidFill>
+            <a:srgbClr val="FFFFFF"/>
+          </a:solidFill>
+          <a:ln w="15875">
+            <a:solidFill>
+              <a:srgbClr val="1F3A5F"/>
+            </a:solidFill>
+          </a:ln>
+          <a:effectLst/>
+        </p:spPr>
+        <p:style>
+          <a:lnRef idx="1">
+            <a:schemeClr val="accent1"/>
+          </a:lnRef>
+          <a:fillRef idx="3">
+            <a:schemeClr val="accent1"/>
+          </a:fillRef>
+          <a:effectRef idx="2">
+            <a:schemeClr val="accent1"/>
+          </a:effectRef>
+          <a:fontRef idx="minor">
+            <a:schemeClr val="lt1"/>
+          </a:fontRef>
+        </p:style>
+        <p:txBody>
+          <a:bodyPr rtlCol="0" anchor="ctr"/>
+          <a:lstStyle/>
+          <a:p>
+            <a:pPr algn="ctr"/>
+            <a:endParaRPr/>
+          </a:p>
+        </p:txBody>
+      </p:sp>
+      <p:sp>
+        <p:nvSpPr>
+          <p:cNvPr id="12" name="TextBox 11"/>
+          <p:cNvSpPr txBox="1"/>
+          <p:nvPr/>
+        </p:nvSpPr>
+        <p:spPr>
+          <a:xfrm>
+            <a:off x="6400800" y="2103120"/>
+            <a:ext cx="5212080" cy="457200"/>
+          </a:xfrm>
+          <a:prstGeom prst="rect">
+            <a:avLst/>
+          </a:prstGeom>
+          <a:noFill/>
+        </p:spPr>
+        <p:txBody>
+          <a:bodyPr wrap="square" anchor="t">
+            <a:spAutoFit/>
+          </a:bodyPr>
+          <a:lstStyle/>
+          <a:p>
+            <a:pPr algn="l"/>
+            <a:r>
+              <a:rPr sz="1800" b="1" i="0">
+                <a:solidFill>
+                  <a:srgbClr val="1F3A5F"/>
+                </a:solidFill>
+                <a:latin typeface="Calibri"/>
+              </a:rPr>
+              <a:t>Baseline Comparison</a:t>
+            </a:r>
+          </a:p>
+        </p:txBody>
+      </p:sp>
+      <p:sp>
+        <p:nvSpPr>
+          <p:cNvPr id="13" name="TextBox 12"/>
+          <p:cNvSpPr txBox="1"/>
+          <p:nvPr/>
+        </p:nvSpPr>
+        <p:spPr>
+          <a:xfrm>
+            <a:off x="6400800" y="2697480"/>
+            <a:ext cx="2468880" cy="365760"/>
+          </a:xfrm>
+          <a:prstGeom prst="rect">
+            <a:avLst/>
+          </a:prstGeom>
+          <a:noFill/>
+        </p:spPr>
+        <p:txBody>
+          <a:bodyPr wrap="square" anchor="t">
+            <a:spAutoFit/>
+          </a:bodyPr>
+          <a:lstStyle/>
+          <a:p>
+            <a:pPr algn="l"/>
+            <a:r>
+              <a:rPr sz="1200" b="1" i="0">
+                <a:solidFill>
+                  <a:srgbClr val="556070"/>
+                </a:solidFill>
+                <a:latin typeface="Calibri"/>
+              </a:rPr>
+              <a:t>Model</a:t>
+            </a:r>
+          </a:p>
+        </p:txBody>
+      </p:sp>
+      <p:sp>
+        <p:nvSpPr>
+          <p:cNvPr id="14" name="TextBox 13"/>
+          <p:cNvSpPr txBox="1"/>
+          <p:nvPr/>
+        </p:nvSpPr>
+        <p:spPr>
+          <a:xfrm>
+            <a:off x="8869680" y="2697480"/>
+            <a:ext cx="1463040" cy="365760"/>
+          </a:xfrm>
+          <a:prstGeom prst="rect">
+            <a:avLst/>
+          </a:prstGeom>
+          <a:noFill/>
+        </p:spPr>
+        <p:txBody>
+          <a:bodyPr wrap="square" anchor="t">
+            <a:spAutoFit/>
+          </a:bodyPr>
+          <a:lstStyle/>
+          <a:p>
+            <a:pPr algn="ctr"/>
+            <a:r>
+              <a:rPr sz="1200" b="1" i="0">
+                <a:solidFill>
+                  <a:srgbClr val="556070"/>
+                </a:solidFill>
+                <a:latin typeface="Calibri"/>
+              </a:rPr>
+              <a:t>Accuracy</a:t>
+            </a:r>
+          </a:p>
+        </p:txBody>
+      </p:sp>
+      <p:sp>
+        <p:nvSpPr>
+          <p:cNvPr id="15" name="TextBox 14"/>
+          <p:cNvSpPr txBox="1"/>
+          <p:nvPr/>
+        </p:nvSpPr>
+        <p:spPr>
+          <a:xfrm>
+            <a:off x="10332720" y="2697480"/>
+            <a:ext cx="1280160" cy="365760"/>
+          </a:xfrm>
+          <a:prstGeom prst="rect">
+            <a:avLst/>
+          </a:prstGeom>
+          <a:noFill/>
+        </p:spPr>
+        <p:txBody>
+          <a:bodyPr wrap="square" anchor="t">
+            <a:spAutoFit/>
+          </a:bodyPr>
+          <a:lstStyle/>
+          <a:p>
+            <a:pPr algn="ctr"/>
+            <a:r>
+              <a:rPr sz="1200" b="1" i="0">
+                <a:solidFill>
+                  <a:srgbClr val="556070"/>
+                </a:solidFill>
+                <a:latin typeface="Calibri"/>
+              </a:rPr>
+              <a:t>F1</a:t>
+            </a:r>
+          </a:p>
+        </p:txBody>
+      </p:sp>
+      <p:sp>
+        <p:nvSpPr>
+          <p:cNvPr id="16" name="Rectangle 15"/>
+          <p:cNvSpPr/>
+          <p:nvPr/>
+        </p:nvSpPr>
+        <p:spPr>
+          <a:xfrm>
+            <a:off x="6400800" y="3154680"/>
+            <a:ext cx="5212080" cy="411480"/>
+          </a:xfrm>
+          <a:prstGeom prst="rect">
+            <a:avLst/>
+          </a:prstGeom>
+          <a:solidFill>
+            <a:srgbClr val="FFFFFF"/>
+          </a:solidFill>
+          <a:ln w="6350">
+            <a:solidFill>
+              <a:srgbClr val="1F3A5F"/>
+            </a:solidFill>
+          </a:ln>
+        </p:spPr>
+        <p:style>
+          <a:lnRef idx="1">
+            <a:schemeClr val="accent1"/>
+          </a:lnRef>
+          <a:fillRef idx="3">
+            <a:schemeClr val="accent1"/>
+          </a:fillRef>
+          <a:effectRef idx="2">
+            <a:schemeClr val="accent1"/>
+          </a:effectRef>
+          <a:fontRef idx="minor">
+            <a:schemeClr val="lt1"/>
+          </a:fontRef>
+        </p:style>
+        <p:txBody>
+          <a:bodyPr rtlCol="0" anchor="ctr"/>
+          <a:lstStyle/>
+          <a:p>
+            <a:pPr algn="ctr"/>
+            <a:endParaRPr/>
+          </a:p>
+        </p:txBody>
+      </p:sp>
+      <p:sp>
+        <p:nvSpPr>
+          <p:cNvPr id="17" name="TextBox 16"/>
+          <p:cNvSpPr txBox="1"/>
+          <p:nvPr/>
+        </p:nvSpPr>
+        <p:spPr>
+          <a:xfrm>
+            <a:off x="6400800" y="3154680"/>
+            <a:ext cx="2468880" cy="411480"/>
+          </a:xfrm>
+          <a:prstGeom prst="rect">
+            <a:avLst/>
+          </a:prstGeom>
+          <a:noFill/>
+        </p:spPr>
+        <p:txBody>
+          <a:bodyPr wrap="square" anchor="ctr">
+            <a:spAutoFit/>
+          </a:bodyPr>
+          <a:lstStyle/>
+          <a:p>
+            <a:pPr algn="l"/>
+            <a:r>
+              <a:rPr sz="1200" b="0" i="0">
+                <a:solidFill>
+                  <a:srgbClr val="1A1A1A"/>
+                </a:solidFill>
+                <a:latin typeface="Calibri"/>
+              </a:rPr>
+              <a:t>Always "No-Purchase"</a:t>
+            </a:r>
+          </a:p>
+        </p:txBody>
+      </p:sp>
+      <p:sp>
+        <p:nvSpPr>
+          <p:cNvPr id="18" name="TextBox 17"/>
+          <p:cNvSpPr txBox="1"/>
+          <p:nvPr/>
+        </p:nvSpPr>
+        <p:spPr>
+          <a:xfrm>
+            <a:off x="8869680" y="3154680"/>
+            <a:ext cx="1463040" cy="411480"/>
+          </a:xfrm>
+          <a:prstGeom prst="rect">
+            <a:avLst/>
+          </a:prstGeom>
+          <a:noFill/>
+        </p:spPr>
+        <p:txBody>
+          <a:bodyPr wrap="square" anchor="ctr">
+            <a:spAutoFit/>
+          </a:bodyPr>
+          <a:lstStyle/>
+          <a:p>
+            <a:pPr algn="ctr"/>
+            <a:r>
+              <a:rPr sz="1200" b="0" i="0">
+                <a:solidFill>
+                  <a:srgbClr val="1A1A1A"/>
+                </a:solidFill>
+                <a:latin typeface="Calibri"/>
+              </a:rPr>
+              <a:t>0.8454</a:t>
+            </a:r>
+          </a:p>
+        </p:txBody>
+      </p:sp>
+      <p:sp>
+        <p:nvSpPr>
+          <p:cNvPr id="19" name="TextBox 18"/>
+          <p:cNvSpPr txBox="1"/>
+          <p:nvPr/>
+        </p:nvSpPr>
+        <p:spPr>
+          <a:xfrm>
+            <a:off x="10332720" y="3154680"/>
+            <a:ext cx="1280160" cy="411480"/>
+          </a:xfrm>
+          <a:prstGeom prst="rect">
+            <a:avLst/>
+          </a:prstGeom>
+          <a:noFill/>
+        </p:spPr>
+        <p:txBody>
+          <a:bodyPr wrap="square" anchor="ctr">
+            <a:spAutoFit/>
+          </a:bodyPr>
+          <a:lstStyle/>
+          <a:p>
+            <a:pPr algn="ctr"/>
+            <a:r>
+              <a:rPr sz="1200" b="0" i="0">
+                <a:solidFill>
+                  <a:srgbClr val="1A1A1A"/>
+                </a:solidFill>
+                <a:latin typeface="Calibri"/>
+              </a:rPr>
+              <a:t>0.0000</a:t>
+            </a:r>
+          </a:p>
+        </p:txBody>
+      </p:sp>
+      <p:sp>
+        <p:nvSpPr>
+          <p:cNvPr id="20" name="Rectangle 19"/>
+          <p:cNvSpPr/>
+          <p:nvPr/>
+        </p:nvSpPr>
+        <p:spPr>
+          <a:xfrm>
+            <a:off x="6400800" y="3611880"/>
+            <a:ext cx="5212080" cy="411480"/>
+          </a:xfrm>
+          <a:prstGeom prst="rect">
+            <a:avLst/>
+          </a:prstGeom>
+          <a:solidFill>
+            <a:srgbClr val="FFFFFF"/>
+          </a:solidFill>
+          <a:ln w="6350">
+            <a:solidFill>
+              <a:srgbClr val="1F3A5F"/>
+            </a:solidFill>
+          </a:ln>
+        </p:spPr>
+        <p:style>
+          <a:lnRef idx="1">
+            <a:schemeClr val="accent1"/>
+          </a:lnRef>
+          <a:fillRef idx="3">
+            <a:schemeClr val="accent1"/>
+          </a:fillRef>
+          <a:effectRef idx="2">
+            <a:schemeClr val="accent1"/>
+          </a:effectRef>
+          <a:fontRef idx="minor">
+            <a:schemeClr val="lt1"/>
+          </a:fontRef>
+        </p:style>
+        <p:txBody>
+          <a:bodyPr rtlCol="0" anchor="ctr"/>
+          <a:lstStyle/>
+          <a:p>
+            <a:pPr algn="ctr"/>
+            <a:endParaRPr/>
+          </a:p>
+        </p:txBody>
+      </p:sp>
+      <p:sp>
+        <p:nvSpPr>
+          <p:cNvPr id="21" name="TextBox 20"/>
+          <p:cNvSpPr txBox="1"/>
+          <p:nvPr/>
+        </p:nvSpPr>
+        <p:spPr>
+          <a:xfrm>
+            <a:off x="6400800" y="3611880"/>
+            <a:ext cx="2468880" cy="411480"/>
+          </a:xfrm>
+          <a:prstGeom prst="rect">
+            <a:avLst/>
+          </a:prstGeom>
+          <a:noFill/>
+        </p:spPr>
+        <p:txBody>
+          <a:bodyPr wrap="square" anchor="ctr">
+            <a:spAutoFit/>
+          </a:bodyPr>
+          <a:lstStyle/>
+          <a:p>
+            <a:pPr algn="l"/>
+            <a:r>
+              <a:rPr sz="1200" b="0" i="0">
+                <a:solidFill>
+                  <a:srgbClr val="1A1A1A"/>
+                </a:solidFill>
+                <a:latin typeface="Calibri"/>
+              </a:rPr>
+              <a:t>Rule on PageValues</a:t>
+            </a:r>
+          </a:p>
+        </p:txBody>
+      </p:sp>
+      <p:sp>
+        <p:nvSpPr>
+          <p:cNvPr id="22" name="TextBox 21"/>
+          <p:cNvSpPr txBox="1"/>
+          <p:nvPr/>
+        </p:nvSpPr>
+        <p:spPr>
+          <a:xfrm>
+            <a:off x="8869680" y="3679120"/>
+            <a:ext cx="1463040" cy="276999"/>
+          </a:xfrm>
+          <a:prstGeom prst="rect">
+            <a:avLst/>
+          </a:prstGeom>
+          <a:noFill/>
+        </p:spPr>
+        <p:txBody>
+          <a:bodyPr wrap="square" anchor="ctr">
+            <a:spAutoFit/>
+          </a:bodyPr>
+          <a:lstStyle/>
+          <a:p>
+            <a:pPr algn="ctr"/>
+            <a:r>
+              <a:rPr lang="en-PH" sz="1200" b="0" i="0" dirty="0">
+                <a:solidFill>
+                  <a:srgbClr val="1A1A1A"/>
+                </a:solidFill>
+                <a:latin typeface="Calibri"/>
+              </a:rPr>
+              <a:t>0.8929</a:t>
+            </a:r>
+            <a:endParaRPr sz="1200" b="0" i="0" dirty="0">
+              <a:solidFill>
+                <a:srgbClr val="1A1A1A"/>
+              </a:solidFill>
+              <a:latin typeface="Calibri"/>
+            </a:endParaRPr>
+          </a:p>
+        </p:txBody>
+      </p:sp>
+      <p:sp>
+        <p:nvSpPr>
+          <p:cNvPr id="23" name="TextBox 22"/>
+          <p:cNvSpPr txBox="1"/>
+          <p:nvPr/>
+        </p:nvSpPr>
+        <p:spPr>
+          <a:xfrm>
+            <a:off x="10332720" y="3679120"/>
+            <a:ext cx="1280160" cy="276999"/>
+          </a:xfrm>
+          <a:prstGeom prst="rect">
+            <a:avLst/>
+          </a:prstGeom>
+          <a:noFill/>
+        </p:spPr>
+        <p:txBody>
+          <a:bodyPr wrap="square" anchor="ctr">
+            <a:spAutoFit/>
+          </a:bodyPr>
+          <a:lstStyle/>
+          <a:p>
+            <a:pPr algn="ctr"/>
+            <a:r>
+              <a:rPr lang="en-PH" sz="1200" b="0" i="0" dirty="0">
+                <a:solidFill>
+                  <a:srgbClr val="1A1A1A"/>
+                </a:solidFill>
+                <a:latin typeface="Calibri"/>
+              </a:rPr>
+              <a:t>0.6819</a:t>
+            </a:r>
+            <a:endParaRPr sz="1200" b="0" i="0" dirty="0">
+              <a:solidFill>
+                <a:srgbClr val="1A1A1A"/>
+              </a:solidFill>
+              <a:latin typeface="Calibri"/>
+            </a:endParaRPr>
+          </a:p>
+        </p:txBody>
+      </p:sp>
+      <p:sp>
+        <p:nvSpPr>
+          <p:cNvPr id="24" name="Rectangle 23"/>
+          <p:cNvSpPr/>
+          <p:nvPr/>
+        </p:nvSpPr>
+        <p:spPr>
+          <a:xfrm>
+            <a:off x="6400800" y="4069080"/>
+            <a:ext cx="5212080" cy="411480"/>
+          </a:xfrm>
+          <a:prstGeom prst="rect">
+            <a:avLst/>
+          </a:prstGeom>
+          <a:solidFill>
+            <a:srgbClr val="DD8452"/>
+          </a:solidFill>
+          <a:ln w="6350">
+            <a:solidFill>
+              <a:srgbClr val="1F3A5F"/>
+            </a:solidFill>
+          </a:ln>
+        </p:spPr>
+        <p:style>
+          <a:lnRef idx="1">
+            <a:schemeClr val="accent1"/>
+          </a:lnRef>
+          <a:fillRef idx="3">
+            <a:schemeClr val="accent1"/>
+          </a:fillRef>
+          <a:effectRef idx="2">
+            <a:schemeClr val="accent1"/>
+          </a:effectRef>
+          <a:fontRef idx="minor">
+            <a:schemeClr val="lt1"/>
+          </a:fontRef>
+        </p:style>
+        <p:txBody>
+          <a:bodyPr rtlCol="0" anchor="ctr"/>
+          <a:lstStyle/>
+          <a:p>
+            <a:pPr algn="ctr"/>
+            <a:endParaRPr/>
+          </a:p>
+        </p:txBody>
+      </p:sp>
+      <p:sp>
+        <p:nvSpPr>
+          <p:cNvPr id="25" name="TextBox 24"/>
+          <p:cNvSpPr txBox="1"/>
+          <p:nvPr/>
+        </p:nvSpPr>
+        <p:spPr>
+          <a:xfrm>
+            <a:off x="6400800" y="4069080"/>
+            <a:ext cx="2468880" cy="411480"/>
+          </a:xfrm>
+          <a:prstGeom prst="rect">
+            <a:avLst/>
+          </a:prstGeom>
+          <a:noFill/>
+        </p:spPr>
+        <p:txBody>
+          <a:bodyPr wrap="square" anchor="ctr">
+            <a:spAutoFit/>
+          </a:bodyPr>
+          <a:lstStyle/>
+          <a:p>
+            <a:pPr algn="l"/>
+            <a:r>
+              <a:rPr sz="1200" b="1" i="0">
                 <a:solidFill>
                   <a:srgbClr val="FFFFFF"/>
                 </a:solidFill>
                 <a:latin typeface="Calibri"/>
               </a:rPr>
-              <a:t>•  Missed buyers are far more costly than wasted offers.</a:t>
-            </a:r>
-          </a:p>
-          <a:p>
-            <a:pPr algn="l">
-              <a:lnSpc>
-                <a:spcPct val="115000"/>
-              </a:lnSpc>
-              <a:spcAft>
-                <a:spcPts val="600"/>
-              </a:spcAft>
-            </a:pPr>
-            <a:r>
-              <a:rPr sz="1400">
+              <a:t>kNN (k = 7) — our model</a:t>
+            </a:r>
+          </a:p>
+        </p:txBody>
+      </p:sp>
+      <p:sp>
+        <p:nvSpPr>
+          <p:cNvPr id="26" name="TextBox 25"/>
+          <p:cNvSpPr txBox="1"/>
+          <p:nvPr/>
+        </p:nvSpPr>
+        <p:spPr>
+          <a:xfrm>
+            <a:off x="8869680" y="4136320"/>
+            <a:ext cx="1463040" cy="276999"/>
+          </a:xfrm>
+          <a:prstGeom prst="rect">
+            <a:avLst/>
+          </a:prstGeom>
+          <a:noFill/>
+        </p:spPr>
+        <p:txBody>
+          <a:bodyPr wrap="square" anchor="ctr">
+            <a:spAutoFit/>
+          </a:bodyPr>
+          <a:lstStyle/>
+          <a:p>
+            <a:pPr algn="ctr"/>
+            <a:r>
+              <a:rPr sz="1200" i="0" dirty="0">
                 <a:solidFill>
                   <a:srgbClr val="FFFFFF"/>
                 </a:solidFill>
                 <a:latin typeface="Calibri"/>
               </a:rPr>
-              <a:t>•  The product needs blanket personalization (recall matters more than precision).</a:t>
-            </a:r>
-          </a:p>
-          <a:p>
-            <a:pPr algn="l">
-              <a:lnSpc>
-                <a:spcPct val="115000"/>
-              </a:lnSpc>
-              <a:spcAft>
-                <a:spcPts val="600"/>
-              </a:spcAft>
-            </a:pPr>
-            <a:r>
-              <a:rPr sz="1400">
+              <a:t>0.8767</a:t>
+            </a:r>
+          </a:p>
+        </p:txBody>
+      </p:sp>
+      <p:sp>
+        <p:nvSpPr>
+          <p:cNvPr id="27" name="TextBox 26"/>
+          <p:cNvSpPr txBox="1"/>
+          <p:nvPr/>
+        </p:nvSpPr>
+        <p:spPr>
+          <a:xfrm>
+            <a:off x="10332720" y="4136320"/>
+            <a:ext cx="1280160" cy="276999"/>
+          </a:xfrm>
+          <a:prstGeom prst="rect">
+            <a:avLst/>
+          </a:prstGeom>
+          <a:noFill/>
+        </p:spPr>
+        <p:txBody>
+          <a:bodyPr wrap="square" anchor="ctr">
+            <a:spAutoFit/>
+          </a:bodyPr>
+          <a:lstStyle/>
+          <a:p>
+            <a:pPr algn="ctr"/>
+            <a:r>
+              <a:rPr sz="1200" i="0" dirty="0">
                 <a:solidFill>
                   <a:srgbClr val="FFFFFF"/>
                 </a:solidFill>
                 <a:latin typeface="Calibri"/>
               </a:rPr>
-              <a:t>•  You need calibrated probabilities, not hard predictions.</a:t>
-            </a:r>
-          </a:p>
-        </p:txBody>
-      </p:sp>
-      <p:sp>
-        <p:nvSpPr>
-          <p:cNvPr id="14" name="TextBox 13"/>
+              <a:t>0.4722</a:t>
+            </a:r>
+          </a:p>
+        </p:txBody>
+      </p:sp>
+      <p:sp>
+        <p:nvSpPr>
+          <p:cNvPr id="28" name="TextBox 27"/>
+          <p:cNvSpPr txBox="1"/>
+          <p:nvPr/>
+        </p:nvSpPr>
+        <p:spPr>
+          <a:xfrm>
+            <a:off x="6400800" y="4754880"/>
+            <a:ext cx="5212080" cy="461665"/>
+          </a:xfrm>
+          <a:prstGeom prst="rect">
+            <a:avLst/>
+          </a:prstGeom>
+          <a:noFill/>
+        </p:spPr>
+        <p:txBody>
+          <a:bodyPr wrap="square" anchor="t">
+            <a:spAutoFit/>
+          </a:bodyPr>
+          <a:lstStyle/>
+          <a:p>
+            <a:pPr algn="l"/>
+            <a:r>
+              <a:rPr lang="en-US" sz="1200" b="0" i="1" dirty="0">
+                <a:solidFill>
+                  <a:srgbClr val="556070"/>
+                </a:solidFill>
+                <a:latin typeface="Calibri"/>
+              </a:rPr>
+              <a:t>The </a:t>
+            </a:r>
+            <a:r>
+              <a:rPr lang="en-US" sz="1200" b="0" i="1" dirty="0" err="1">
+                <a:solidFill>
+                  <a:srgbClr val="556070"/>
+                </a:solidFill>
+                <a:latin typeface="Calibri"/>
+              </a:rPr>
+              <a:t>PageValues</a:t>
+            </a:r>
+            <a:r>
+              <a:rPr lang="en-US" sz="1200" b="0" i="1" dirty="0">
+                <a:solidFill>
+                  <a:srgbClr val="556070"/>
+                </a:solidFill>
+                <a:latin typeface="Calibri"/>
+              </a:rPr>
+              <a:t> rule beats </a:t>
+            </a:r>
+            <a:r>
+              <a:rPr lang="en-US" sz="1200" b="0" i="1" dirty="0" err="1">
+                <a:solidFill>
+                  <a:srgbClr val="556070"/>
+                </a:solidFill>
+                <a:latin typeface="Calibri"/>
+              </a:rPr>
+              <a:t>kNN</a:t>
+            </a:r>
+            <a:r>
+              <a:rPr lang="en-US" sz="1200" b="0" i="1" dirty="0">
+                <a:solidFill>
+                  <a:srgbClr val="556070"/>
+                </a:solidFill>
+                <a:latin typeface="Calibri"/>
+              </a:rPr>
+              <a:t> on F1 — </a:t>
+            </a:r>
+            <a:r>
+              <a:rPr lang="en-US" sz="1200" b="0" i="1" dirty="0" err="1">
+                <a:solidFill>
+                  <a:srgbClr val="556070"/>
+                </a:solidFill>
+                <a:latin typeface="Calibri"/>
+              </a:rPr>
+              <a:t>kNN</a:t>
+            </a:r>
+            <a:r>
+              <a:rPr lang="en-US" sz="1200" b="0" i="1" dirty="0">
+                <a:solidFill>
+                  <a:srgbClr val="556070"/>
+                </a:solidFill>
+                <a:latin typeface="Calibri"/>
+              </a:rPr>
+              <a:t> dilutes the dominant signal across 28 features. A humbling, instructive result.</a:t>
+            </a:r>
+            <a:endParaRPr sz="1200" b="0" i="1" dirty="0">
+              <a:solidFill>
+                <a:srgbClr val="556070"/>
+              </a:solidFill>
+              <a:latin typeface="Calibri"/>
+            </a:endParaRPr>
+          </a:p>
+        </p:txBody>
+      </p:sp>
+      <p:sp>
+        <p:nvSpPr>
+          <p:cNvPr id="29" name="TextBox 28"/>
           <p:cNvSpPr txBox="1"/>
           <p:nvPr/>
         </p:nvSpPr>
@@ -11135,7 +11002,7 @@
       </p:sp>
       <p:sp>
         <p:nvSpPr>
-          <p:cNvPr id="15" name="TextBox 14"/>
+          <p:cNvPr id="30" name="TextBox 29"/>
           <p:cNvSpPr txBox="1"/>
           <p:nvPr/>
         </p:nvSpPr>
@@ -11163,7 +11030,7 @@
                 </a:solidFill>
                 <a:latin typeface="Calibri"/>
               </a:rPr>
-              <a:t>Slide 17</a:t>
+              <a:t>Slide 16</a:t>
             </a:r>
           </a:p>
         </p:txBody>
@@ -11311,7 +11178,7 @@
                   <a:srgbClr val="FFFFFF"/>
                 </a:solidFill>
               </a:rPr>
-              <a:t>10  •  Limitations</a:t>
+              <a:t>09  •  Discussion</a:t>
             </a:r>
           </a:p>
         </p:txBody>
@@ -11346,7 +11213,7 @@
                 </a:solidFill>
                 <a:latin typeface="Calibri"/>
               </a:rPr>
-              <a:t>Honest Limitations of This Model</a:t>
+              <a:t>What the Numbers Mean for the Business</a:t>
             </a:r>
           </a:p>
         </p:txBody>
@@ -11375,13 +11242,13 @@
           <a:p>
             <a:pPr algn="l"/>
             <a:r>
-              <a:rPr sz="1500" b="0" i="1" dirty="0">
+              <a:rPr sz="1500" b="0" i="1">
                 <a:solidFill>
                   <a:srgbClr val="556070"/>
                 </a:solidFill>
                 <a:latin typeface="Calibri"/>
               </a:rPr>
-              <a:t>A capstone is judged by candor as much as by score.</a:t>
+              <a:t>A high-precision, lower-recall classifier — useful for some interventions, weak for others.</a:t>
             </a:r>
           </a:p>
         </p:txBody>
@@ -11432,24 +11299,27 @@
       </p:sp>
       <p:sp>
         <p:nvSpPr>
-          <p:cNvPr id="8" name="Rectangle 7"/>
+          <p:cNvPr id="8" name="Rounded Rectangle 7"/>
           <p:cNvSpPr/>
           <p:nvPr/>
         </p:nvSpPr>
         <p:spPr>
           <a:xfrm>
-            <a:off x="457200" y="2029968"/>
-            <a:ext cx="118872" cy="548640"/>
-          </a:xfrm>
-          <a:prstGeom prst="rect">
+            <a:off x="457200" y="1965960"/>
+            <a:ext cx="5577840" cy="4297680"/>
+          </a:xfrm>
+          <a:prstGeom prst="roundRect">
             <a:avLst/>
           </a:prstGeom>
           <a:solidFill>
-            <a:srgbClr val="DD8452"/>
+            <a:srgbClr val="FFFFFF"/>
           </a:solidFill>
-          <a:ln>
-            <a:noFill/>
+          <a:ln w="15875">
+            <a:solidFill>
+              <a:srgbClr val="1F3A5F"/>
+            </a:solidFill>
           </a:ln>
+          <a:effectLst/>
         </p:spPr>
         <p:style>
           <a:lnRef idx="1">
@@ -11482,29 +11352,29 @@
         </p:nvSpPr>
         <p:spPr>
           <a:xfrm>
-            <a:off x="731520" y="1965960"/>
-            <a:ext cx="3108960" cy="640080"/>
-          </a:xfrm>
-          <a:prstGeom prst="rect">
-            <a:avLst/>
-          </a:prstGeom>
-          <a:noFill/>
-        </p:spPr>
-        <p:txBody>
-          <a:bodyPr wrap="square" anchor="ctr">
+            <a:off x="640080" y="2103120"/>
+            <a:ext cx="5212080" cy="457200"/>
+          </a:xfrm>
+          <a:prstGeom prst="rect">
+            <a:avLst/>
+          </a:prstGeom>
+          <a:noFill/>
+        </p:spPr>
+        <p:txBody>
+          <a:bodyPr wrap="square" anchor="t">
             <a:spAutoFit/>
           </a:bodyPr>
           <a:lstStyle/>
           <a:p>
             <a:pPr algn="l"/>
             <a:r>
-              <a:rPr sz="1500" b="1" i="0">
+              <a:rPr sz="1800" b="1" i="0">
                 <a:solidFill>
                   <a:srgbClr val="1F3A5F"/>
                 </a:solidFill>
                 <a:latin typeface="Calibri"/>
               </a:rPr>
-              <a:t>Imbalance not treated</a:t>
+              <a:t>Good Fit If…</a:t>
             </a:r>
           </a:p>
         </p:txBody>
@@ -11517,53 +11387,101 @@
         </p:nvSpPr>
         <p:spPr>
           <a:xfrm>
-            <a:off x="3931920" y="1965960"/>
-            <a:ext cx="7772400" cy="640080"/>
-          </a:xfrm>
-          <a:prstGeom prst="rect">
-            <a:avLst/>
-          </a:prstGeom>
-          <a:noFill/>
-        </p:spPr>
-        <p:txBody>
-          <a:bodyPr wrap="square" anchor="ctr">
-            <a:spAutoFit/>
-          </a:bodyPr>
-          <a:lstStyle/>
-          <a:p>
-            <a:pPr algn="l"/>
-            <a:r>
-              <a:rPr sz="1200" b="0" i="0" dirty="0">
+            <a:off x="640080" y="2651760"/>
+            <a:ext cx="5212080" cy="3200400"/>
+          </a:xfrm>
+          <a:prstGeom prst="rect">
+            <a:avLst/>
+          </a:prstGeom>
+          <a:noFill/>
+        </p:spPr>
+        <p:txBody>
+          <a:bodyPr wrap="square">
+            <a:spAutoFit/>
+          </a:bodyPr>
+          <a:lstStyle/>
+          <a:p>
+            <a:pPr algn="l">
+              <a:lnSpc>
+                <a:spcPct val="115000"/>
+              </a:lnSpc>
+              <a:spcAft>
+                <a:spcPts val="600"/>
+              </a:spcAft>
+            </a:pPr>
+            <a:r>
+              <a:rPr sz="1400">
                 <a:solidFill>
                   <a:srgbClr val="1A1A1A"/>
                 </a:solidFill>
                 <a:latin typeface="Calibri"/>
               </a:rPr>
-              <a:t>No SMOTE, no class weighting, no threshold tuning, no distance-weighted voting. The recall ceiling is largely a consequence of this.</a:t>
-            </a:r>
-          </a:p>
-        </p:txBody>
-      </p:sp>
-      <p:sp>
-        <p:nvSpPr>
-          <p:cNvPr id="11" name="Rectangle 10"/>
+              <a:t>•  Acting on a non-buyer is expensive (e.g., heavy discount, live agent).</a:t>
+            </a:r>
+          </a:p>
+          <a:p>
+            <a:pPr algn="l">
+              <a:lnSpc>
+                <a:spcPct val="115000"/>
+              </a:lnSpc>
+              <a:spcAft>
+                <a:spcPts val="600"/>
+              </a:spcAft>
+            </a:pPr>
+            <a:r>
+              <a:rPr sz="1400">
+                <a:solidFill>
+                  <a:srgbClr val="1A1A1A"/>
+                </a:solidFill>
+                <a:latin typeface="Calibri"/>
+              </a:rPr>
+              <a:t>•  You want fewer-but-confident alerts, not blanket coverage.</a:t>
+            </a:r>
+          </a:p>
+          <a:p>
+            <a:pPr algn="l">
+              <a:lnSpc>
+                <a:spcPct val="115000"/>
+              </a:lnSpc>
+              <a:spcAft>
+                <a:spcPts val="600"/>
+              </a:spcAft>
+            </a:pPr>
+            <a:r>
+              <a:rPr sz="1400">
+                <a:solidFill>
+                  <a:srgbClr val="1A1A1A"/>
+                </a:solidFill>
+                <a:latin typeface="Calibri"/>
+              </a:rPr>
+              <a:t>•  You can pair this model with low-cost site-wide nudges that catch the rest.</a:t>
+            </a:r>
+          </a:p>
+        </p:txBody>
+      </p:sp>
+      <p:sp>
+        <p:nvSpPr>
+          <p:cNvPr id="11" name="Rounded Rectangle 10"/>
           <p:cNvSpPr/>
           <p:nvPr/>
         </p:nvSpPr>
         <p:spPr>
           <a:xfrm>
-            <a:off x="457200" y="2743200"/>
-            <a:ext cx="118872" cy="548640"/>
-          </a:xfrm>
-          <a:prstGeom prst="rect">
+            <a:off x="6217920" y="1965960"/>
+            <a:ext cx="5577840" cy="4297680"/>
+          </a:xfrm>
+          <a:prstGeom prst="roundRect">
             <a:avLst/>
           </a:prstGeom>
           <a:solidFill>
-            <a:srgbClr val="DD8452"/>
+            <a:srgbClr val="1F3A5F"/>
           </a:solidFill>
-          <a:ln>
-            <a:noFill/>
+          <a:ln w="15875">
+            <a:solidFill>
+              <a:srgbClr val="1F3A5F"/>
+            </a:solidFill>
           </a:ln>
+          <a:effectLst/>
         </p:spPr>
         <p:style>
           <a:lnRef idx="1">
@@ -11596,29 +11514,29 @@
         </p:nvSpPr>
         <p:spPr>
           <a:xfrm>
-            <a:off x="731520" y="2679192"/>
-            <a:ext cx="3108960" cy="640080"/>
-          </a:xfrm>
-          <a:prstGeom prst="rect">
-            <a:avLst/>
-          </a:prstGeom>
-          <a:noFill/>
-        </p:spPr>
-        <p:txBody>
-          <a:bodyPr wrap="square" anchor="ctr">
+            <a:off x="6400800" y="2103120"/>
+            <a:ext cx="5212080" cy="457200"/>
+          </a:xfrm>
+          <a:prstGeom prst="rect">
+            <a:avLst/>
+          </a:prstGeom>
+          <a:noFill/>
+        </p:spPr>
+        <p:txBody>
+          <a:bodyPr wrap="square" anchor="t">
             <a:spAutoFit/>
           </a:bodyPr>
           <a:lstStyle/>
           <a:p>
             <a:pPr algn="l"/>
             <a:r>
-              <a:rPr sz="1500" b="1" i="0">
-                <a:solidFill>
-                  <a:srgbClr val="1F3A5F"/>
-                </a:solidFill>
-                <a:latin typeface="Calibri"/>
-              </a:rPr>
-              <a:t>Multicollinearity left in</a:t>
+              <a:rPr sz="1800" b="1" i="0">
+                <a:solidFill>
+                  <a:srgbClr val="DD8452"/>
+                </a:solidFill>
+                <a:latin typeface="Calibri"/>
+              </a:rPr>
+              <a:t>Bad Fit If…</a:t>
             </a:r>
           </a:p>
         </p:txBody>
@@ -11631,531 +11549,81 @@
         </p:nvSpPr>
         <p:spPr>
           <a:xfrm>
-            <a:off x="3931920" y="2679192"/>
-            <a:ext cx="7772400" cy="640080"/>
-          </a:xfrm>
-          <a:prstGeom prst="rect">
-            <a:avLst/>
-          </a:prstGeom>
-          <a:noFill/>
-        </p:spPr>
-        <p:txBody>
-          <a:bodyPr wrap="square" anchor="ctr">
-            <a:spAutoFit/>
-          </a:bodyPr>
-          <a:lstStyle/>
-          <a:p>
-            <a:pPr algn="l"/>
-            <a:r>
-              <a:rPr sz="1200" b="0" i="0">
-                <a:solidFill>
-                  <a:srgbClr val="1A1A1A"/>
-                </a:solidFill>
-                <a:latin typeface="Calibri"/>
-              </a:rPr>
-              <a:t>BounceRates / ExitRates (r = 0.913) and ProductRelated / *_Duration (r = 0.861) double-count behavior in distance.</a:t>
-            </a:r>
-          </a:p>
-        </p:txBody>
-      </p:sp>
-      <p:sp>
-        <p:nvSpPr>
-          <p:cNvPr id="14" name="Rectangle 13"/>
-          <p:cNvSpPr/>
-          <p:nvPr/>
-        </p:nvSpPr>
-        <p:spPr>
-          <a:xfrm>
-            <a:off x="457200" y="3456432"/>
-            <a:ext cx="118872" cy="548640"/>
-          </a:xfrm>
-          <a:prstGeom prst="rect">
-            <a:avLst/>
-          </a:prstGeom>
-          <a:solidFill>
-            <a:srgbClr val="DD8452"/>
-          </a:solidFill>
-          <a:ln>
-            <a:noFill/>
-          </a:ln>
-        </p:spPr>
-        <p:style>
-          <a:lnRef idx="1">
-            <a:schemeClr val="accent1"/>
-          </a:lnRef>
-          <a:fillRef idx="3">
-            <a:schemeClr val="accent1"/>
-          </a:fillRef>
-          <a:effectRef idx="2">
-            <a:schemeClr val="accent1"/>
-          </a:effectRef>
-          <a:fontRef idx="minor">
-            <a:schemeClr val="lt1"/>
-          </a:fontRef>
-        </p:style>
-        <p:txBody>
-          <a:bodyPr rtlCol="0" anchor="ctr"/>
-          <a:lstStyle/>
-          <a:p>
-            <a:pPr algn="ctr"/>
-            <a:endParaRPr/>
-          </a:p>
-        </p:txBody>
-      </p:sp>
-      <p:sp>
-        <p:nvSpPr>
-          <p:cNvPr id="15" name="TextBox 14"/>
-          <p:cNvSpPr txBox="1"/>
-          <p:nvPr/>
-        </p:nvSpPr>
-        <p:spPr>
-          <a:xfrm>
-            <a:off x="731520" y="3392424"/>
-            <a:ext cx="3108960" cy="640080"/>
-          </a:xfrm>
-          <a:prstGeom prst="rect">
-            <a:avLst/>
-          </a:prstGeom>
-          <a:noFill/>
-        </p:spPr>
-        <p:txBody>
-          <a:bodyPr wrap="square" anchor="ctr">
-            <a:spAutoFit/>
-          </a:bodyPr>
-          <a:lstStyle/>
-          <a:p>
-            <a:pPr algn="l"/>
-            <a:r>
-              <a:rPr sz="1500" b="1" i="0">
-                <a:solidFill>
-                  <a:srgbClr val="1F3A5F"/>
-                </a:solidFill>
-                <a:latin typeface="Calibri"/>
-              </a:rPr>
-              <a:t>One-hot inflates the distance space</a:t>
-            </a:r>
-          </a:p>
-        </p:txBody>
-      </p:sp>
-      <p:sp>
-        <p:nvSpPr>
-          <p:cNvPr id="16" name="TextBox 15"/>
-          <p:cNvSpPr txBox="1"/>
-          <p:nvPr/>
-        </p:nvSpPr>
-        <p:spPr>
-          <a:xfrm>
-            <a:off x="3931920" y="3392424"/>
-            <a:ext cx="7772400" cy="640080"/>
-          </a:xfrm>
-          <a:prstGeom prst="rect">
-            <a:avLst/>
-          </a:prstGeom>
-          <a:noFill/>
-        </p:spPr>
-        <p:txBody>
-          <a:bodyPr wrap="square" anchor="ctr">
-            <a:spAutoFit/>
-          </a:bodyPr>
-          <a:lstStyle/>
-          <a:p>
-            <a:pPr algn="l"/>
-            <a:r>
-              <a:rPr sz="1200" b="0" i="0" dirty="0">
-                <a:solidFill>
-                  <a:srgbClr val="1A1A1A"/>
-                </a:solidFill>
-                <a:latin typeface="Calibri"/>
-              </a:rPr>
-              <a:t>13 binary one-hot columns sit alongside 14 continuous ones in the same Euclidean geometry — distorts neighbor selection slightly.</a:t>
-            </a:r>
-          </a:p>
-        </p:txBody>
-      </p:sp>
-      <p:sp>
-        <p:nvSpPr>
-          <p:cNvPr id="17" name="Rectangle 16"/>
-          <p:cNvSpPr/>
-          <p:nvPr/>
-        </p:nvSpPr>
-        <p:spPr>
-          <a:xfrm>
-            <a:off x="457200" y="4169664"/>
-            <a:ext cx="118872" cy="548640"/>
-          </a:xfrm>
-          <a:prstGeom prst="rect">
-            <a:avLst/>
-          </a:prstGeom>
-          <a:solidFill>
-            <a:srgbClr val="DD8452"/>
-          </a:solidFill>
-          <a:ln>
-            <a:noFill/>
-          </a:ln>
-        </p:spPr>
-        <p:style>
-          <a:lnRef idx="1">
-            <a:schemeClr val="accent1"/>
-          </a:lnRef>
-          <a:fillRef idx="3">
-            <a:schemeClr val="accent1"/>
-          </a:fillRef>
-          <a:effectRef idx="2">
-            <a:schemeClr val="accent1"/>
-          </a:effectRef>
-          <a:fontRef idx="minor">
-            <a:schemeClr val="lt1"/>
-          </a:fontRef>
-        </p:style>
-        <p:txBody>
-          <a:bodyPr rtlCol="0" anchor="ctr"/>
-          <a:lstStyle/>
-          <a:p>
-            <a:pPr algn="ctr"/>
-            <a:endParaRPr/>
-          </a:p>
-        </p:txBody>
-      </p:sp>
-      <p:sp>
-        <p:nvSpPr>
-          <p:cNvPr id="18" name="TextBox 17"/>
-          <p:cNvSpPr txBox="1"/>
-          <p:nvPr/>
-        </p:nvSpPr>
-        <p:spPr>
-          <a:xfrm>
-            <a:off x="731520" y="4148697"/>
-            <a:ext cx="3108960" cy="553998"/>
-          </a:xfrm>
-          <a:prstGeom prst="rect">
-            <a:avLst/>
-          </a:prstGeom>
-          <a:noFill/>
-        </p:spPr>
-        <p:txBody>
-          <a:bodyPr wrap="square" anchor="ctr">
-            <a:spAutoFit/>
-          </a:bodyPr>
-          <a:lstStyle/>
-          <a:p>
-            <a:pPr algn="l"/>
-            <a:r>
-              <a:rPr lang="en-US" sz="1500" b="1" i="0" dirty="0">
-                <a:solidFill>
-                  <a:srgbClr val="1F3A5F"/>
-                </a:solidFill>
-                <a:latin typeface="Calibri"/>
-              </a:rPr>
-              <a:t>A one-feature </a:t>
-            </a:r>
-            <a:r>
-              <a:rPr lang="en-US" sz="1500" b="1" i="0" dirty="0" err="1">
-                <a:solidFill>
-                  <a:srgbClr val="1F3A5F"/>
-                </a:solidFill>
-                <a:latin typeface="Calibri"/>
-              </a:rPr>
-              <a:t>PageValues</a:t>
-            </a:r>
-            <a:r>
-              <a:rPr lang="en-US" sz="1500" b="1" i="0" dirty="0">
-                <a:solidFill>
-                  <a:srgbClr val="1F3A5F"/>
-                </a:solidFill>
-                <a:latin typeface="Calibri"/>
-              </a:rPr>
-              <a:t> rule beats the full model </a:t>
-            </a:r>
-            <a:endParaRPr sz="1500" b="1" i="0" dirty="0">
-              <a:solidFill>
-                <a:srgbClr val="1F3A5F"/>
-              </a:solidFill>
-              <a:latin typeface="Calibri"/>
-            </a:endParaRPr>
-          </a:p>
-        </p:txBody>
-      </p:sp>
-      <p:sp>
-        <p:nvSpPr>
-          <p:cNvPr id="19" name="TextBox 18"/>
-          <p:cNvSpPr txBox="1"/>
-          <p:nvPr/>
-        </p:nvSpPr>
-        <p:spPr>
-          <a:xfrm>
-            <a:off x="3931920" y="4287196"/>
-            <a:ext cx="7772400" cy="276999"/>
-          </a:xfrm>
-          <a:prstGeom prst="rect">
-            <a:avLst/>
-          </a:prstGeom>
-          <a:noFill/>
-        </p:spPr>
-        <p:txBody>
-          <a:bodyPr wrap="square" anchor="ctr">
-            <a:spAutoFit/>
-          </a:bodyPr>
-          <a:lstStyle/>
-          <a:p>
-            <a:pPr algn="l"/>
-            <a:r>
-              <a:rPr lang="en-US" sz="1200" b="0" i="0" dirty="0" err="1">
-                <a:solidFill>
-                  <a:srgbClr val="1A1A1A"/>
-                </a:solidFill>
-                <a:latin typeface="Calibri"/>
-              </a:rPr>
-              <a:t>kNN</a:t>
-            </a:r>
-            <a:r>
-              <a:rPr lang="en-US" sz="1200" b="0" i="0" dirty="0">
-                <a:solidFill>
-                  <a:srgbClr val="1A1A1A"/>
-                </a:solidFill>
-                <a:latin typeface="Calibri"/>
-              </a:rPr>
-              <a:t> doesn't do feature selection.</a:t>
-            </a:r>
-            <a:endParaRPr sz="1200" b="0" i="0" dirty="0">
-              <a:solidFill>
-                <a:srgbClr val="1A1A1A"/>
-              </a:solidFill>
-              <a:latin typeface="Calibri"/>
-            </a:endParaRPr>
-          </a:p>
-        </p:txBody>
-      </p:sp>
-      <p:sp>
-        <p:nvSpPr>
-          <p:cNvPr id="20" name="Rectangle 19"/>
-          <p:cNvSpPr/>
-          <p:nvPr/>
-        </p:nvSpPr>
-        <p:spPr>
-          <a:xfrm>
-            <a:off x="457200" y="4882896"/>
-            <a:ext cx="118872" cy="548640"/>
-          </a:xfrm>
-          <a:prstGeom prst="rect">
-            <a:avLst/>
-          </a:prstGeom>
-          <a:solidFill>
-            <a:srgbClr val="DD8452"/>
-          </a:solidFill>
-          <a:ln>
-            <a:noFill/>
-          </a:ln>
-        </p:spPr>
-        <p:style>
-          <a:lnRef idx="1">
-            <a:schemeClr val="accent1"/>
-          </a:lnRef>
-          <a:fillRef idx="3">
-            <a:schemeClr val="accent1"/>
-          </a:fillRef>
-          <a:effectRef idx="2">
-            <a:schemeClr val="accent1"/>
-          </a:effectRef>
-          <a:fontRef idx="minor">
-            <a:schemeClr val="lt1"/>
-          </a:fontRef>
-        </p:style>
-        <p:txBody>
-          <a:bodyPr rtlCol="0" anchor="ctr"/>
-          <a:lstStyle/>
-          <a:p>
-            <a:pPr algn="ctr"/>
-            <a:endParaRPr/>
-          </a:p>
-        </p:txBody>
-      </p:sp>
-      <p:sp>
-        <p:nvSpPr>
-          <p:cNvPr id="21" name="TextBox 20"/>
-          <p:cNvSpPr txBox="1"/>
-          <p:nvPr/>
-        </p:nvSpPr>
-        <p:spPr>
-          <a:xfrm>
-            <a:off x="731520" y="4818888"/>
-            <a:ext cx="3108960" cy="640080"/>
-          </a:xfrm>
-          <a:prstGeom prst="rect">
-            <a:avLst/>
-          </a:prstGeom>
-          <a:noFill/>
-        </p:spPr>
-        <p:txBody>
-          <a:bodyPr wrap="square" anchor="ctr">
-            <a:spAutoFit/>
-          </a:bodyPr>
-          <a:lstStyle/>
-          <a:p>
-            <a:pPr algn="l"/>
-            <a:r>
-              <a:rPr sz="1500" b="1" i="0">
-                <a:solidFill>
-                  <a:srgbClr val="1F3A5F"/>
-                </a:solidFill>
-                <a:latin typeface="Calibri"/>
-              </a:rPr>
-              <a:t>Only Euclidean + uniform vote</a:t>
-            </a:r>
-          </a:p>
-        </p:txBody>
-      </p:sp>
-      <p:sp>
-        <p:nvSpPr>
-          <p:cNvPr id="22" name="TextBox 21"/>
-          <p:cNvSpPr txBox="1"/>
-          <p:nvPr/>
-        </p:nvSpPr>
-        <p:spPr>
-          <a:xfrm>
-            <a:off x="3931920" y="4818888"/>
-            <a:ext cx="7772400" cy="640080"/>
-          </a:xfrm>
-          <a:prstGeom prst="rect">
-            <a:avLst/>
-          </a:prstGeom>
-          <a:noFill/>
-        </p:spPr>
-        <p:txBody>
-          <a:bodyPr wrap="square" anchor="ctr">
-            <a:spAutoFit/>
-          </a:bodyPr>
-          <a:lstStyle/>
-          <a:p>
-            <a:pPr algn="l"/>
-            <a:r>
-              <a:rPr sz="1200" b="0" i="0">
-                <a:solidFill>
-                  <a:srgbClr val="1A1A1A"/>
-                </a:solidFill>
-                <a:latin typeface="Calibri"/>
-              </a:rPr>
-              <a:t>No Manhattan / Mahalanobis / weighted-vote experiments. Distance-weighted voting in particular is known to help on imbalanced data.</a:t>
-            </a:r>
-          </a:p>
-        </p:txBody>
-      </p:sp>
-      <p:sp>
-        <p:nvSpPr>
-          <p:cNvPr id="23" name="Rectangle 22"/>
-          <p:cNvSpPr/>
-          <p:nvPr/>
-        </p:nvSpPr>
-        <p:spPr>
-          <a:xfrm>
-            <a:off x="457200" y="5596128"/>
-            <a:ext cx="118872" cy="548640"/>
-          </a:xfrm>
-          <a:prstGeom prst="rect">
-            <a:avLst/>
-          </a:prstGeom>
-          <a:solidFill>
-            <a:srgbClr val="DD8452"/>
-          </a:solidFill>
-          <a:ln>
-            <a:noFill/>
-          </a:ln>
-        </p:spPr>
-        <p:style>
-          <a:lnRef idx="1">
-            <a:schemeClr val="accent1"/>
-          </a:lnRef>
-          <a:fillRef idx="3">
-            <a:schemeClr val="accent1"/>
-          </a:fillRef>
-          <a:effectRef idx="2">
-            <a:schemeClr val="accent1"/>
-          </a:effectRef>
-          <a:fontRef idx="minor">
-            <a:schemeClr val="lt1"/>
-          </a:fontRef>
-        </p:style>
-        <p:txBody>
-          <a:bodyPr rtlCol="0" anchor="ctr"/>
-          <a:lstStyle/>
-          <a:p>
-            <a:pPr algn="ctr"/>
-            <a:endParaRPr/>
-          </a:p>
-        </p:txBody>
-      </p:sp>
-      <p:sp>
-        <p:nvSpPr>
-          <p:cNvPr id="24" name="TextBox 23"/>
-          <p:cNvSpPr txBox="1"/>
-          <p:nvPr/>
-        </p:nvSpPr>
-        <p:spPr>
-          <a:xfrm>
-            <a:off x="731520" y="5532120"/>
-            <a:ext cx="3108960" cy="640080"/>
-          </a:xfrm>
-          <a:prstGeom prst="rect">
-            <a:avLst/>
-          </a:prstGeom>
-          <a:noFill/>
-        </p:spPr>
-        <p:txBody>
-          <a:bodyPr wrap="square" anchor="ctr">
-            <a:spAutoFit/>
-          </a:bodyPr>
-          <a:lstStyle/>
-          <a:p>
-            <a:pPr algn="l"/>
-            <a:r>
-              <a:rPr sz="1500" b="1" i="0">
-                <a:solidFill>
-                  <a:srgbClr val="1F3A5F"/>
-                </a:solidFill>
-                <a:latin typeface="Calibri"/>
-              </a:rPr>
-              <a:t>No ROC / probability output</a:t>
-            </a:r>
-          </a:p>
-        </p:txBody>
-      </p:sp>
-      <p:sp>
-        <p:nvSpPr>
-          <p:cNvPr id="25" name="TextBox 24"/>
-          <p:cNvSpPr txBox="1"/>
-          <p:nvPr/>
-        </p:nvSpPr>
-        <p:spPr>
-          <a:xfrm>
-            <a:off x="3931920" y="5532120"/>
-            <a:ext cx="7772400" cy="640080"/>
-          </a:xfrm>
-          <a:prstGeom prst="rect">
-            <a:avLst/>
-          </a:prstGeom>
-          <a:noFill/>
-        </p:spPr>
-        <p:txBody>
-          <a:bodyPr wrap="square" anchor="ctr">
-            <a:spAutoFit/>
-          </a:bodyPr>
-          <a:lstStyle/>
-          <a:p>
-            <a:pPr algn="l"/>
-            <a:r>
-              <a:rPr sz="1200" b="0" i="0">
-                <a:solidFill>
-                  <a:srgbClr val="1A1A1A"/>
-                </a:solidFill>
-                <a:latin typeface="Calibri"/>
-              </a:rPr>
-              <a:t>Reported only point classification metrics. ROC + AUC would visualize the full precision-recall trade-off.</a:t>
-            </a:r>
-          </a:p>
-        </p:txBody>
-      </p:sp>
-      <p:sp>
-        <p:nvSpPr>
-          <p:cNvPr id="26" name="TextBox 25"/>
+            <a:off x="6400800" y="2651760"/>
+            <a:ext cx="5212080" cy="3200400"/>
+          </a:xfrm>
+          <a:prstGeom prst="rect">
+            <a:avLst/>
+          </a:prstGeom>
+          <a:noFill/>
+        </p:spPr>
+        <p:txBody>
+          <a:bodyPr wrap="square">
+            <a:spAutoFit/>
+          </a:bodyPr>
+          <a:lstStyle/>
+          <a:p>
+            <a:pPr algn="l">
+              <a:lnSpc>
+                <a:spcPct val="115000"/>
+              </a:lnSpc>
+              <a:spcAft>
+                <a:spcPts val="600"/>
+              </a:spcAft>
+            </a:pPr>
+            <a:r>
+              <a:rPr sz="1400">
+                <a:solidFill>
+                  <a:srgbClr val="FFFFFF"/>
+                </a:solidFill>
+                <a:latin typeface="Calibri"/>
+              </a:rPr>
+              <a:t>•  Missed buyers are far more costly than wasted offers.</a:t>
+            </a:r>
+          </a:p>
+          <a:p>
+            <a:pPr algn="l">
+              <a:lnSpc>
+                <a:spcPct val="115000"/>
+              </a:lnSpc>
+              <a:spcAft>
+                <a:spcPts val="600"/>
+              </a:spcAft>
+            </a:pPr>
+            <a:r>
+              <a:rPr sz="1400">
+                <a:solidFill>
+                  <a:srgbClr val="FFFFFF"/>
+                </a:solidFill>
+                <a:latin typeface="Calibri"/>
+              </a:rPr>
+              <a:t>•  The product needs blanket personalization (recall matters more than precision).</a:t>
+            </a:r>
+          </a:p>
+          <a:p>
+            <a:pPr algn="l">
+              <a:lnSpc>
+                <a:spcPct val="115000"/>
+              </a:lnSpc>
+              <a:spcAft>
+                <a:spcPts val="600"/>
+              </a:spcAft>
+            </a:pPr>
+            <a:r>
+              <a:rPr sz="1400">
+                <a:solidFill>
+                  <a:srgbClr val="FFFFFF"/>
+                </a:solidFill>
+                <a:latin typeface="Calibri"/>
+              </a:rPr>
+              <a:t>•  You need calibrated probabilities, not hard predictions.</a:t>
+            </a:r>
+          </a:p>
+        </p:txBody>
+      </p:sp>
+      <p:sp>
+        <p:nvSpPr>
+          <p:cNvPr id="14" name="TextBox 13"/>
           <p:cNvSpPr txBox="1"/>
           <p:nvPr/>
         </p:nvSpPr>
@@ -12205,7 +11673,7 @@
       </p:sp>
       <p:sp>
         <p:nvSpPr>
-          <p:cNvPr id="27" name="TextBox 26"/>
+          <p:cNvPr id="15" name="TextBox 14"/>
           <p:cNvSpPr txBox="1"/>
           <p:nvPr/>
         </p:nvSpPr>
@@ -12233,7 +11701,7 @@
                 </a:solidFill>
                 <a:latin typeface="Calibri"/>
               </a:rPr>
-              <a:t>Slide 18</a:t>
+              <a:t>Slide 17</a:t>
             </a:r>
           </a:p>
         </p:txBody>
@@ -12381,7 +11849,7 @@
                   <a:srgbClr val="FFFFFF"/>
                 </a:solidFill>
               </a:rPr>
-              <a:t>11  •  Future work</a:t>
+              <a:t>10  •  Limitations</a:t>
             </a:r>
           </a:p>
         </p:txBody>
@@ -12416,7 +11884,7 @@
                 </a:solidFill>
                 <a:latin typeface="Calibri"/>
               </a:rPr>
-              <a:t>What We Would Try Next</a:t>
+              <a:t>Honest Limitations of This Model</a:t>
             </a:r>
           </a:p>
         </p:txBody>
@@ -12445,13 +11913,13 @@
           <a:p>
             <a:pPr algn="l"/>
             <a:r>
-              <a:rPr sz="1500" b="0" i="1">
+              <a:rPr sz="1500" b="0" i="1" dirty="0">
                 <a:solidFill>
                   <a:srgbClr val="556070"/>
                 </a:solidFill>
                 <a:latin typeface="Calibri"/>
               </a:rPr>
-              <a:t>Concrete improvements that follow directly from the limitations on the previous slide.</a:t>
+              <a:t>A capstone is judged by candor as much as by score.</a:t>
             </a:r>
           </a:p>
         </p:txBody>
@@ -12502,20 +11970,20 @@
       </p:sp>
       <p:sp>
         <p:nvSpPr>
-          <p:cNvPr id="8" name="Oval 7"/>
+          <p:cNvPr id="8" name="Rectangle 7"/>
           <p:cNvSpPr/>
           <p:nvPr/>
         </p:nvSpPr>
         <p:spPr>
           <a:xfrm>
-            <a:off x="457200" y="2057400"/>
-            <a:ext cx="502920" cy="502920"/>
-          </a:xfrm>
-          <a:prstGeom prst="ellipse">
+            <a:off x="457200" y="2029968"/>
+            <a:ext cx="118872" cy="548640"/>
+          </a:xfrm>
+          <a:prstGeom prst="rect">
             <a:avLst/>
           </a:prstGeom>
           <a:solidFill>
-            <a:srgbClr val="1F3A5F"/>
+            <a:srgbClr val="DD8452"/>
           </a:solidFill>
           <a:ln>
             <a:noFill/>
@@ -12552,8 +12020,8 @@
         </p:nvSpPr>
         <p:spPr>
           <a:xfrm>
-            <a:off x="457200" y="2057400"/>
-            <a:ext cx="502920" cy="502920"/>
+            <a:off x="731520" y="1965960"/>
+            <a:ext cx="3108960" cy="640080"/>
           </a:xfrm>
           <a:prstGeom prst="rect">
             <a:avLst/>
@@ -12566,15 +12034,15 @@
           </a:bodyPr>
           <a:lstStyle/>
           <a:p>
-            <a:pPr algn="ctr"/>
-            <a:r>
-              <a:rPr sz="1800" b="1" i="0">
-                <a:solidFill>
-                  <a:srgbClr val="FFFFFF"/>
-                </a:solidFill>
-                <a:latin typeface="Calibri"/>
-              </a:rPr>
-              <a:t>1</a:t>
+            <a:pPr algn="l"/>
+            <a:r>
+              <a:rPr sz="1500" b="1" i="0">
+                <a:solidFill>
+                  <a:srgbClr val="1F3A5F"/>
+                </a:solidFill>
+                <a:latin typeface="Calibri"/>
+              </a:rPr>
+              <a:t>Imbalance not treated</a:t>
             </a:r>
           </a:p>
         </p:txBody>
@@ -12587,8 +12055,8 @@
         </p:nvSpPr>
         <p:spPr>
           <a:xfrm>
-            <a:off x="1143000" y="1965960"/>
-            <a:ext cx="3200400" cy="640080"/>
+            <a:off x="3931920" y="1965960"/>
+            <a:ext cx="7772400" cy="640080"/>
           </a:xfrm>
           <a:prstGeom prst="rect">
             <a:avLst/>
@@ -12603,68 +12071,33 @@
           <a:p>
             <a:pPr algn="l"/>
             <a:r>
-              <a:rPr sz="1500" b="1" i="0">
-                <a:solidFill>
-                  <a:srgbClr val="1F3A5F"/>
-                </a:solidFill>
-                <a:latin typeface="Calibri"/>
-              </a:rPr>
-              <a:t>Distance-weighted voting</a:t>
-            </a:r>
-          </a:p>
-        </p:txBody>
-      </p:sp>
-      <p:sp>
-        <p:nvSpPr>
-          <p:cNvPr id="11" name="TextBox 10"/>
-          <p:cNvSpPr txBox="1"/>
-          <p:nvPr/>
-        </p:nvSpPr>
-        <p:spPr>
-          <a:xfrm>
-            <a:off x="4434840" y="1965960"/>
-            <a:ext cx="7223760" cy="640080"/>
-          </a:xfrm>
-          <a:prstGeom prst="rect">
-            <a:avLst/>
-          </a:prstGeom>
-          <a:noFill/>
-        </p:spPr>
-        <p:txBody>
-          <a:bodyPr wrap="square" anchor="ctr">
-            <a:spAutoFit/>
-          </a:bodyPr>
-          <a:lstStyle/>
-          <a:p>
-            <a:pPr algn="l"/>
-            <a:r>
-              <a:rPr sz="1200" b="0" i="0">
+              <a:rPr sz="1200" b="0" i="0" dirty="0">
                 <a:solidFill>
                   <a:srgbClr val="1A1A1A"/>
                 </a:solidFill>
                 <a:latin typeface="Calibri"/>
               </a:rPr>
-              <a:t>Closer neighbors count more. Cheap to add; usually the single biggest win on imbalanced data.</a:t>
-            </a:r>
-          </a:p>
-        </p:txBody>
-      </p:sp>
-      <p:sp>
-        <p:nvSpPr>
-          <p:cNvPr id="12" name="Oval 11"/>
+              <a:t>No SMOTE, no class weighting, no threshold tuning, no distance-weighted voting. The recall ceiling is largely a consequence of this.</a:t>
+            </a:r>
+          </a:p>
+        </p:txBody>
+      </p:sp>
+      <p:sp>
+        <p:nvSpPr>
+          <p:cNvPr id="11" name="Rectangle 10"/>
           <p:cNvSpPr/>
           <p:nvPr/>
         </p:nvSpPr>
         <p:spPr>
           <a:xfrm>
-            <a:off x="457200" y="2770632"/>
-            <a:ext cx="502920" cy="502920"/>
-          </a:xfrm>
-          <a:prstGeom prst="ellipse">
+            <a:off x="457200" y="2743200"/>
+            <a:ext cx="118872" cy="548640"/>
+          </a:xfrm>
+          <a:prstGeom prst="rect">
             <a:avLst/>
           </a:prstGeom>
           <a:solidFill>
-            <a:srgbClr val="1F3A5F"/>
+            <a:srgbClr val="DD8452"/>
           </a:solidFill>
           <a:ln>
             <a:noFill/>
@@ -12695,14 +12128,49 @@
       </p:sp>
       <p:sp>
         <p:nvSpPr>
+          <p:cNvPr id="12" name="TextBox 11"/>
+          <p:cNvSpPr txBox="1"/>
+          <p:nvPr/>
+        </p:nvSpPr>
+        <p:spPr>
+          <a:xfrm>
+            <a:off x="731520" y="2679192"/>
+            <a:ext cx="3108960" cy="640080"/>
+          </a:xfrm>
+          <a:prstGeom prst="rect">
+            <a:avLst/>
+          </a:prstGeom>
+          <a:noFill/>
+        </p:spPr>
+        <p:txBody>
+          <a:bodyPr wrap="square" anchor="ctr">
+            <a:spAutoFit/>
+          </a:bodyPr>
+          <a:lstStyle/>
+          <a:p>
+            <a:pPr algn="l"/>
+            <a:r>
+              <a:rPr sz="1500" b="1" i="0">
+                <a:solidFill>
+                  <a:srgbClr val="1F3A5F"/>
+                </a:solidFill>
+                <a:latin typeface="Calibri"/>
+              </a:rPr>
+              <a:t>Multicollinearity left in</a:t>
+            </a:r>
+          </a:p>
+        </p:txBody>
+      </p:sp>
+      <p:sp>
+        <p:nvSpPr>
           <p:cNvPr id="13" name="TextBox 12"/>
           <p:cNvSpPr txBox="1"/>
           <p:nvPr/>
         </p:nvSpPr>
         <p:spPr>
           <a:xfrm>
-            <a:off x="457200" y="2770632"/>
-            <a:ext cx="502920" cy="502920"/>
+            <a:off x="3931920" y="2679192"/>
+            <a:ext cx="7772400" cy="640080"/>
           </a:xfrm>
           <a:prstGeom prst="rect">
             <a:avLst/>
@@ -12715,105 +12183,35 @@
           </a:bodyPr>
           <a:lstStyle/>
           <a:p>
-            <a:pPr algn="ctr"/>
-            <a:r>
-              <a:rPr sz="1800" b="1" i="0">
-                <a:solidFill>
-                  <a:srgbClr val="FFFFFF"/>
-                </a:solidFill>
-                <a:latin typeface="Calibri"/>
-              </a:rPr>
-              <a:t>2</a:t>
-            </a:r>
-          </a:p>
-        </p:txBody>
-      </p:sp>
-      <p:sp>
-        <p:nvSpPr>
-          <p:cNvPr id="14" name="TextBox 13"/>
-          <p:cNvSpPr txBox="1"/>
-          <p:nvPr/>
-        </p:nvSpPr>
-        <p:spPr>
-          <a:xfrm>
-            <a:off x="1143000" y="2679192"/>
-            <a:ext cx="3200400" cy="640080"/>
-          </a:xfrm>
-          <a:prstGeom prst="rect">
-            <a:avLst/>
-          </a:prstGeom>
-          <a:noFill/>
-        </p:spPr>
-        <p:txBody>
-          <a:bodyPr wrap="square" anchor="ctr">
-            <a:spAutoFit/>
-          </a:bodyPr>
-          <a:lstStyle/>
-          <a:p>
             <a:pPr algn="l"/>
             <a:r>
-              <a:rPr sz="1500" b="1" i="0">
-                <a:solidFill>
-                  <a:srgbClr val="1F3A5F"/>
-                </a:solidFill>
-                <a:latin typeface="Calibri"/>
-              </a:rPr>
-              <a:t>Threshold tuning on the kNN score</a:t>
-            </a:r>
-          </a:p>
-        </p:txBody>
-      </p:sp>
-      <p:sp>
-        <p:nvSpPr>
-          <p:cNvPr id="15" name="TextBox 14"/>
-          <p:cNvSpPr txBox="1"/>
-          <p:nvPr/>
-        </p:nvSpPr>
-        <p:spPr>
-          <a:xfrm>
-            <a:off x="4434840" y="2679192"/>
-            <a:ext cx="7223760" cy="640080"/>
-          </a:xfrm>
-          <a:prstGeom prst="rect">
-            <a:avLst/>
-          </a:prstGeom>
-          <a:noFill/>
-        </p:spPr>
-        <p:txBody>
-          <a:bodyPr wrap="square" anchor="ctr">
-            <a:spAutoFit/>
-          </a:bodyPr>
-          <a:lstStyle/>
-          <a:p>
-            <a:pPr algn="l"/>
-            <a:r>
               <a:rPr sz="1200" b="0" i="0">
                 <a:solidFill>
                   <a:srgbClr val="1A1A1A"/>
                 </a:solidFill>
                 <a:latin typeface="Calibri"/>
               </a:rPr>
-              <a:t>Use k_pos / k as a soft probability and pick the threshold by Youden’s J or by business cost.</a:t>
-            </a:r>
-          </a:p>
-        </p:txBody>
-      </p:sp>
-      <p:sp>
-        <p:nvSpPr>
-          <p:cNvPr id="16" name="Oval 15"/>
+              <a:t>BounceRates / ExitRates (r = 0.913) and ProductRelated / *_Duration (r = 0.861) double-count behavior in distance.</a:t>
+            </a:r>
+          </a:p>
+        </p:txBody>
+      </p:sp>
+      <p:sp>
+        <p:nvSpPr>
+          <p:cNvPr id="14" name="Rectangle 13"/>
           <p:cNvSpPr/>
           <p:nvPr/>
         </p:nvSpPr>
         <p:spPr>
           <a:xfrm>
-            <a:off x="457200" y="3483864"/>
-            <a:ext cx="502920" cy="502920"/>
-          </a:xfrm>
-          <a:prstGeom prst="ellipse">
+            <a:off x="457200" y="3456432"/>
+            <a:ext cx="118872" cy="548640"/>
+          </a:xfrm>
+          <a:prstGeom prst="rect">
             <a:avLst/>
           </a:prstGeom>
           <a:solidFill>
-            <a:srgbClr val="1F3A5F"/>
+            <a:srgbClr val="DD8452"/>
           </a:solidFill>
           <a:ln>
             <a:noFill/>
@@ -12844,14 +12242,14 @@
       </p:sp>
       <p:sp>
         <p:nvSpPr>
-          <p:cNvPr id="17" name="TextBox 16"/>
-          <p:cNvSpPr txBox="1"/>
-          <p:nvPr/>
-        </p:nvSpPr>
-        <p:spPr>
-          <a:xfrm>
-            <a:off x="457200" y="3483864"/>
-            <a:ext cx="502920" cy="502920"/>
+          <p:cNvPr id="15" name="TextBox 14"/>
+          <p:cNvSpPr txBox="1"/>
+          <p:nvPr/>
+        </p:nvSpPr>
+        <p:spPr>
+          <a:xfrm>
+            <a:off x="731520" y="3392424"/>
+            <a:ext cx="3108960" cy="640080"/>
           </a:xfrm>
           <a:prstGeom prst="rect">
             <a:avLst/>
@@ -12864,29 +12262,29 @@
           </a:bodyPr>
           <a:lstStyle/>
           <a:p>
-            <a:pPr algn="ctr"/>
-            <a:r>
-              <a:rPr sz="1800" b="1" i="0">
-                <a:solidFill>
-                  <a:srgbClr val="FFFFFF"/>
-                </a:solidFill>
-                <a:latin typeface="Calibri"/>
-              </a:rPr>
-              <a:t>3</a:t>
-            </a:r>
-          </a:p>
-        </p:txBody>
-      </p:sp>
-      <p:sp>
-        <p:nvSpPr>
-          <p:cNvPr id="18" name="TextBox 17"/>
-          <p:cNvSpPr txBox="1"/>
-          <p:nvPr/>
-        </p:nvSpPr>
-        <p:spPr>
-          <a:xfrm>
-            <a:off x="1143000" y="3392424"/>
-            <a:ext cx="3200400" cy="640080"/>
+            <a:pPr algn="l"/>
+            <a:r>
+              <a:rPr sz="1500" b="1" i="0">
+                <a:solidFill>
+                  <a:srgbClr val="1F3A5F"/>
+                </a:solidFill>
+                <a:latin typeface="Calibri"/>
+              </a:rPr>
+              <a:t>One-hot inflates the distance space</a:t>
+            </a:r>
+          </a:p>
+        </p:txBody>
+      </p:sp>
+      <p:sp>
+        <p:nvSpPr>
+          <p:cNvPr id="16" name="TextBox 15"/>
+          <p:cNvSpPr txBox="1"/>
+          <p:nvPr/>
+        </p:nvSpPr>
+        <p:spPr>
+          <a:xfrm>
+            <a:off x="3931920" y="3392424"/>
+            <a:ext cx="7772400" cy="640080"/>
           </a:xfrm>
           <a:prstGeom prst="rect">
             <a:avLst/>
@@ -12901,68 +12299,33 @@
           <a:p>
             <a:pPr algn="l"/>
             <a:r>
-              <a:rPr sz="1500" b="1" i="0">
-                <a:solidFill>
-                  <a:srgbClr val="1F3A5F"/>
-                </a:solidFill>
-                <a:latin typeface="Calibri"/>
-              </a:rPr>
-              <a:t>Resampling</a:t>
-            </a:r>
-          </a:p>
-        </p:txBody>
-      </p:sp>
-      <p:sp>
-        <p:nvSpPr>
-          <p:cNvPr id="19" name="TextBox 18"/>
-          <p:cNvSpPr txBox="1"/>
-          <p:nvPr/>
-        </p:nvSpPr>
-        <p:spPr>
-          <a:xfrm>
-            <a:off x="4434840" y="3392424"/>
-            <a:ext cx="7223760" cy="640080"/>
-          </a:xfrm>
-          <a:prstGeom prst="rect">
-            <a:avLst/>
-          </a:prstGeom>
-          <a:noFill/>
-        </p:spPr>
-        <p:txBody>
-          <a:bodyPr wrap="square" anchor="ctr">
-            <a:spAutoFit/>
-          </a:bodyPr>
-          <a:lstStyle/>
-          <a:p>
-            <a:pPr algn="l"/>
-            <a:r>
-              <a:rPr sz="1200" b="0" i="0">
+              <a:rPr sz="1200" b="0" i="0" dirty="0">
                 <a:solidFill>
                   <a:srgbClr val="1A1A1A"/>
                 </a:solidFill>
                 <a:latin typeface="Calibri"/>
               </a:rPr>
-              <a:t>SMOTE oversampling of the minority class (or principled under-sampling of the majority).</a:t>
-            </a:r>
-          </a:p>
-        </p:txBody>
-      </p:sp>
-      <p:sp>
-        <p:nvSpPr>
-          <p:cNvPr id="20" name="Oval 19"/>
+              <a:t>13 binary one-hot columns sit alongside 14 continuous ones in the same Euclidean geometry — distorts neighbor selection slightly.</a:t>
+            </a:r>
+          </a:p>
+        </p:txBody>
+      </p:sp>
+      <p:sp>
+        <p:nvSpPr>
+          <p:cNvPr id="17" name="Rectangle 16"/>
           <p:cNvSpPr/>
           <p:nvPr/>
         </p:nvSpPr>
         <p:spPr>
           <a:xfrm>
-            <a:off x="457200" y="4197096"/>
-            <a:ext cx="502920" cy="502920"/>
-          </a:xfrm>
-          <a:prstGeom prst="ellipse">
+            <a:off x="457200" y="4169664"/>
+            <a:ext cx="118872" cy="548640"/>
+          </a:xfrm>
+          <a:prstGeom prst="rect">
             <a:avLst/>
           </a:prstGeom>
           <a:solidFill>
-            <a:srgbClr val="1F3A5F"/>
+            <a:srgbClr val="DD8452"/>
           </a:solidFill>
           <a:ln>
             <a:noFill/>
@@ -12993,14 +12356,14 @@
       </p:sp>
       <p:sp>
         <p:nvSpPr>
-          <p:cNvPr id="21" name="TextBox 20"/>
-          <p:cNvSpPr txBox="1"/>
-          <p:nvPr/>
-        </p:nvSpPr>
-        <p:spPr>
-          <a:xfrm>
-            <a:off x="457200" y="4197096"/>
-            <a:ext cx="502920" cy="502920"/>
+          <p:cNvPr id="18" name="TextBox 17"/>
+          <p:cNvSpPr txBox="1"/>
+          <p:nvPr/>
+        </p:nvSpPr>
+        <p:spPr>
+          <a:xfrm>
+            <a:off x="731520" y="4148697"/>
+            <a:ext cx="3108960" cy="553998"/>
           </a:xfrm>
           <a:prstGeom prst="rect">
             <a:avLst/>
@@ -13013,29 +12376,53 @@
           </a:bodyPr>
           <a:lstStyle/>
           <a:p>
-            <a:pPr algn="ctr"/>
-            <a:r>
-              <a:rPr sz="1800" b="1" i="0">
-                <a:solidFill>
-                  <a:srgbClr val="FFFFFF"/>
-                </a:solidFill>
-                <a:latin typeface="Calibri"/>
-              </a:rPr>
-              <a:t>4</a:t>
-            </a:r>
-          </a:p>
-        </p:txBody>
-      </p:sp>
-      <p:sp>
-        <p:nvSpPr>
-          <p:cNvPr id="22" name="TextBox 21"/>
-          <p:cNvSpPr txBox="1"/>
-          <p:nvPr/>
-        </p:nvSpPr>
-        <p:spPr>
-          <a:xfrm>
-            <a:off x="1143000" y="4105656"/>
-            <a:ext cx="3200400" cy="640080"/>
+            <a:pPr algn="l"/>
+            <a:r>
+              <a:rPr lang="en-US" sz="1500" b="1" i="0" dirty="0">
+                <a:solidFill>
+                  <a:srgbClr val="1F3A5F"/>
+                </a:solidFill>
+                <a:latin typeface="Calibri"/>
+              </a:rPr>
+              <a:t>A one-feature </a:t>
+            </a:r>
+            <a:r>
+              <a:rPr lang="en-US" sz="1500" b="1" i="0" dirty="0" err="1">
+                <a:solidFill>
+                  <a:srgbClr val="1F3A5F"/>
+                </a:solidFill>
+                <a:latin typeface="Calibri"/>
+              </a:rPr>
+              <a:t>PageValues</a:t>
+            </a:r>
+            <a:r>
+              <a:rPr lang="en-US" sz="1500" b="1" i="0" dirty="0">
+                <a:solidFill>
+                  <a:srgbClr val="1F3A5F"/>
+                </a:solidFill>
+                <a:latin typeface="Calibri"/>
+              </a:rPr>
+              <a:t> rule beats the full model </a:t>
+            </a:r>
+            <a:endParaRPr sz="1500" b="1" i="0" dirty="0">
+              <a:solidFill>
+                <a:srgbClr val="1F3A5F"/>
+              </a:solidFill>
+              <a:latin typeface="Calibri"/>
+            </a:endParaRPr>
+          </a:p>
+        </p:txBody>
+      </p:sp>
+      <p:sp>
+        <p:nvSpPr>
+          <p:cNvPr id="19" name="TextBox 18"/>
+          <p:cNvSpPr txBox="1"/>
+          <p:nvPr/>
+        </p:nvSpPr>
+        <p:spPr>
+          <a:xfrm>
+            <a:off x="3931920" y="4287196"/>
+            <a:ext cx="7772400" cy="276999"/>
           </a:xfrm>
           <a:prstGeom prst="rect">
             <a:avLst/>
@@ -13050,68 +12437,48 @@
           <a:p>
             <a:pPr algn="l"/>
             <a:r>
-              <a:rPr sz="1500" b="1" i="0">
-                <a:solidFill>
-                  <a:srgbClr val="1F3A5F"/>
-                </a:solidFill>
-                <a:latin typeface="Calibri"/>
-              </a:rPr>
-              <a:t>Feature redundancy cleanup</a:t>
-            </a:r>
-          </a:p>
-        </p:txBody>
-      </p:sp>
-      <p:sp>
-        <p:nvSpPr>
-          <p:cNvPr id="23" name="TextBox 22"/>
-          <p:cNvSpPr txBox="1"/>
-          <p:nvPr/>
-        </p:nvSpPr>
-        <p:spPr>
-          <a:xfrm>
-            <a:off x="4434840" y="4105656"/>
-            <a:ext cx="7223760" cy="640080"/>
-          </a:xfrm>
-          <a:prstGeom prst="rect">
-            <a:avLst/>
-          </a:prstGeom>
-          <a:noFill/>
-        </p:spPr>
-        <p:txBody>
-          <a:bodyPr wrap="square" anchor="ctr">
-            <a:spAutoFit/>
-          </a:bodyPr>
-          <a:lstStyle/>
-          <a:p>
-            <a:pPr algn="l"/>
-            <a:r>
-              <a:rPr sz="1200" b="0" i="0">
+              <a:rPr lang="en-US" sz="1200" b="0" i="0" dirty="0" err="1">
                 <a:solidFill>
                   <a:srgbClr val="1A1A1A"/>
                 </a:solidFill>
                 <a:latin typeface="Calibri"/>
               </a:rPr>
-              <a:t>Drop ExitRates (keep BounceRates) and ProductRelated_Duration (keep ProductRelated), or run PCA.</a:t>
-            </a:r>
-          </a:p>
-        </p:txBody>
-      </p:sp>
-      <p:sp>
-        <p:nvSpPr>
-          <p:cNvPr id="24" name="Oval 23"/>
+              <a:t>kNN</a:t>
+            </a:r>
+            <a:r>
+              <a:rPr lang="en-US" sz="1200" b="0" i="0" dirty="0">
+                <a:solidFill>
+                  <a:srgbClr val="1A1A1A"/>
+                </a:solidFill>
+                <a:latin typeface="Calibri"/>
+              </a:rPr>
+              <a:t> doesn't do feature selection.</a:t>
+            </a:r>
+            <a:endParaRPr sz="1200" b="0" i="0" dirty="0">
+              <a:solidFill>
+                <a:srgbClr val="1A1A1A"/>
+              </a:solidFill>
+              <a:latin typeface="Calibri"/>
+            </a:endParaRPr>
+          </a:p>
+        </p:txBody>
+      </p:sp>
+      <p:sp>
+        <p:nvSpPr>
+          <p:cNvPr id="20" name="Rectangle 19"/>
           <p:cNvSpPr/>
           <p:nvPr/>
         </p:nvSpPr>
         <p:spPr>
           <a:xfrm>
-            <a:off x="457200" y="4910328"/>
-            <a:ext cx="502920" cy="502920"/>
-          </a:xfrm>
-          <a:prstGeom prst="ellipse">
+            <a:off x="457200" y="4882896"/>
+            <a:ext cx="118872" cy="548640"/>
+          </a:xfrm>
+          <a:prstGeom prst="rect">
             <a:avLst/>
           </a:prstGeom>
           <a:solidFill>
-            <a:srgbClr val="1F3A5F"/>
+            <a:srgbClr val="DD8452"/>
           </a:solidFill>
           <a:ln>
             <a:noFill/>
@@ -13142,14 +12509,14 @@
       </p:sp>
       <p:sp>
         <p:nvSpPr>
-          <p:cNvPr id="25" name="TextBox 24"/>
-          <p:cNvSpPr txBox="1"/>
-          <p:nvPr/>
-        </p:nvSpPr>
-        <p:spPr>
-          <a:xfrm>
-            <a:off x="457200" y="4910328"/>
-            <a:ext cx="502920" cy="502920"/>
+          <p:cNvPr id="21" name="TextBox 20"/>
+          <p:cNvSpPr txBox="1"/>
+          <p:nvPr/>
+        </p:nvSpPr>
+        <p:spPr>
+          <a:xfrm>
+            <a:off x="731520" y="4818888"/>
+            <a:ext cx="3108960" cy="640080"/>
           </a:xfrm>
           <a:prstGeom prst="rect">
             <a:avLst/>
@@ -13162,29 +12529,29 @@
           </a:bodyPr>
           <a:lstStyle/>
           <a:p>
-            <a:pPr algn="ctr"/>
-            <a:r>
-              <a:rPr sz="1800" b="1" i="0">
-                <a:solidFill>
-                  <a:srgbClr val="FFFFFF"/>
-                </a:solidFill>
-                <a:latin typeface="Calibri"/>
-              </a:rPr>
-              <a:t>5</a:t>
-            </a:r>
-          </a:p>
-        </p:txBody>
-      </p:sp>
-      <p:sp>
-        <p:nvSpPr>
-          <p:cNvPr id="26" name="TextBox 25"/>
-          <p:cNvSpPr txBox="1"/>
-          <p:nvPr/>
-        </p:nvSpPr>
-        <p:spPr>
-          <a:xfrm>
-            <a:off x="1143000" y="4818888"/>
-            <a:ext cx="3200400" cy="640080"/>
+            <a:pPr algn="l"/>
+            <a:r>
+              <a:rPr sz="1500" b="1" i="0">
+                <a:solidFill>
+                  <a:srgbClr val="1F3A5F"/>
+                </a:solidFill>
+                <a:latin typeface="Calibri"/>
+              </a:rPr>
+              <a:t>Only Euclidean + uniform vote</a:t>
+            </a:r>
+          </a:p>
+        </p:txBody>
+      </p:sp>
+      <p:sp>
+        <p:nvSpPr>
+          <p:cNvPr id="22" name="TextBox 21"/>
+          <p:cNvSpPr txBox="1"/>
+          <p:nvPr/>
+        </p:nvSpPr>
+        <p:spPr>
+          <a:xfrm>
+            <a:off x="3931920" y="4818888"/>
+            <a:ext cx="7772400" cy="640080"/>
           </a:xfrm>
           <a:prstGeom prst="rect">
             <a:avLst/>
@@ -13199,68 +12566,33 @@
           <a:p>
             <a:pPr algn="l"/>
             <a:r>
-              <a:rPr sz="1500" b="1" i="0">
-                <a:solidFill>
-                  <a:srgbClr val="1F3A5F"/>
-                </a:solidFill>
-                <a:latin typeface="Calibri"/>
-              </a:rPr>
-              <a:t>Cleaner tuning protocol</a:t>
-            </a:r>
-          </a:p>
-        </p:txBody>
-      </p:sp>
-      <p:sp>
-        <p:nvSpPr>
-          <p:cNvPr id="27" name="TextBox 26"/>
-          <p:cNvSpPr txBox="1"/>
-          <p:nvPr/>
-        </p:nvSpPr>
-        <p:spPr>
-          <a:xfrm>
-            <a:off x="4434840" y="4818888"/>
-            <a:ext cx="7223760" cy="640080"/>
-          </a:xfrm>
-          <a:prstGeom prst="rect">
-            <a:avLst/>
-          </a:prstGeom>
-          <a:noFill/>
-        </p:spPr>
-        <p:txBody>
-          <a:bodyPr wrap="square" anchor="ctr">
-            <a:spAutoFit/>
-          </a:bodyPr>
-          <a:lstStyle/>
-          <a:p>
-            <a:pPr algn="l"/>
-            <a:r>
               <a:rPr sz="1200" b="0" i="0">
                 <a:solidFill>
                   <a:srgbClr val="1A1A1A"/>
                 </a:solidFill>
                 <a:latin typeface="Calibri"/>
               </a:rPr>
-              <a:t>Hold out a true validation split or use nested CV so the test set is touched exactly once.</a:t>
-            </a:r>
-          </a:p>
-        </p:txBody>
-      </p:sp>
-      <p:sp>
-        <p:nvSpPr>
-          <p:cNvPr id="28" name="Oval 27"/>
+              <a:t>No Manhattan / Mahalanobis / weighted-vote experiments. Distance-weighted voting in particular is known to help on imbalanced data.</a:t>
+            </a:r>
+          </a:p>
+        </p:txBody>
+      </p:sp>
+      <p:sp>
+        <p:nvSpPr>
+          <p:cNvPr id="23" name="Rectangle 22"/>
           <p:cNvSpPr/>
           <p:nvPr/>
         </p:nvSpPr>
         <p:spPr>
           <a:xfrm>
-            <a:off x="457200" y="5623560"/>
-            <a:ext cx="502920" cy="502920"/>
-          </a:xfrm>
-          <a:prstGeom prst="ellipse">
+            <a:off x="457200" y="5596128"/>
+            <a:ext cx="118872" cy="548640"/>
+          </a:xfrm>
+          <a:prstGeom prst="rect">
             <a:avLst/>
           </a:prstGeom>
           <a:solidFill>
-            <a:srgbClr val="1F3A5F"/>
+            <a:srgbClr val="DD8452"/>
           </a:solidFill>
           <a:ln>
             <a:noFill/>
@@ -13291,14 +12623,14 @@
       </p:sp>
       <p:sp>
         <p:nvSpPr>
-          <p:cNvPr id="29" name="TextBox 28"/>
-          <p:cNvSpPr txBox="1"/>
-          <p:nvPr/>
-        </p:nvSpPr>
-        <p:spPr>
-          <a:xfrm>
-            <a:off x="457200" y="5623560"/>
-            <a:ext cx="502920" cy="502920"/>
+          <p:cNvPr id="24" name="TextBox 23"/>
+          <p:cNvSpPr txBox="1"/>
+          <p:nvPr/>
+        </p:nvSpPr>
+        <p:spPr>
+          <a:xfrm>
+            <a:off x="731520" y="5532120"/>
+            <a:ext cx="3108960" cy="640080"/>
           </a:xfrm>
           <a:prstGeom prst="rect">
             <a:avLst/>
@@ -13311,29 +12643,29 @@
           </a:bodyPr>
           <a:lstStyle/>
           <a:p>
-            <a:pPr algn="ctr"/>
-            <a:r>
-              <a:rPr sz="1800" b="1" i="0">
-                <a:solidFill>
-                  <a:srgbClr val="FFFFFF"/>
-                </a:solidFill>
-                <a:latin typeface="Calibri"/>
-              </a:rPr>
-              <a:t>6</a:t>
-            </a:r>
-          </a:p>
-        </p:txBody>
-      </p:sp>
-      <p:sp>
-        <p:nvSpPr>
-          <p:cNvPr id="30" name="TextBox 29"/>
-          <p:cNvSpPr txBox="1"/>
-          <p:nvPr/>
-        </p:nvSpPr>
-        <p:spPr>
-          <a:xfrm>
-            <a:off x="1143000" y="5532120"/>
-            <a:ext cx="3200400" cy="640080"/>
+            <a:pPr algn="l"/>
+            <a:r>
+              <a:rPr sz="1500" b="1" i="0" dirty="0">
+                <a:solidFill>
+                  <a:srgbClr val="1F3A5F"/>
+                </a:solidFill>
+                <a:latin typeface="Calibri"/>
+              </a:rPr>
+              <a:t>No ROC / probability output</a:t>
+            </a:r>
+          </a:p>
+        </p:txBody>
+      </p:sp>
+      <p:sp>
+        <p:nvSpPr>
+          <p:cNvPr id="25" name="TextBox 24"/>
+          <p:cNvSpPr txBox="1"/>
+          <p:nvPr/>
+        </p:nvSpPr>
+        <p:spPr>
+          <a:xfrm>
+            <a:off x="3931920" y="5532120"/>
+            <a:ext cx="7772400" cy="640080"/>
           </a:xfrm>
           <a:prstGeom prst="rect">
             <a:avLst/>
@@ -13348,55 +12680,20 @@
           <a:p>
             <a:pPr algn="l"/>
             <a:r>
-              <a:rPr sz="1500" b="1" i="0">
-                <a:solidFill>
-                  <a:srgbClr val="1F3A5F"/>
-                </a:solidFill>
-                <a:latin typeface="Calibri"/>
-              </a:rPr>
-              <a:t>Compare against tuned baselines</a:t>
-            </a:r>
-          </a:p>
-        </p:txBody>
-      </p:sp>
-      <p:sp>
-        <p:nvSpPr>
-          <p:cNvPr id="31" name="TextBox 30"/>
-          <p:cNvSpPr txBox="1"/>
-          <p:nvPr/>
-        </p:nvSpPr>
-        <p:spPr>
-          <a:xfrm>
-            <a:off x="4434840" y="5532120"/>
-            <a:ext cx="7223760" cy="640080"/>
-          </a:xfrm>
-          <a:prstGeom prst="rect">
-            <a:avLst/>
-          </a:prstGeom>
-          <a:noFill/>
-        </p:spPr>
-        <p:txBody>
-          <a:bodyPr wrap="square" anchor="ctr">
-            <a:spAutoFit/>
-          </a:bodyPr>
-          <a:lstStyle/>
-          <a:p>
-            <a:pPr algn="l"/>
-            <a:r>
               <a:rPr sz="1200" b="0" i="0">
                 <a:solidFill>
                   <a:srgbClr val="1A1A1A"/>
                 </a:solidFill>
                 <a:latin typeface="Calibri"/>
               </a:rPr>
-              <a:t>Logistic regression, random forest, gradient boosting — to position kNN against the literature on this dataset.</a:t>
-            </a:r>
-          </a:p>
-        </p:txBody>
-      </p:sp>
-      <p:sp>
-        <p:nvSpPr>
-          <p:cNvPr id="32" name="TextBox 31"/>
+              <a:t>Reported only point classification metrics. ROC + AUC would visualize the full precision-recall trade-off.</a:t>
+            </a:r>
+          </a:p>
+        </p:txBody>
+      </p:sp>
+      <p:sp>
+        <p:nvSpPr>
+          <p:cNvPr id="26" name="TextBox 25"/>
           <p:cNvSpPr txBox="1"/>
           <p:nvPr/>
         </p:nvSpPr>
@@ -13446,7 +12743,7 @@
       </p:sp>
       <p:sp>
         <p:nvSpPr>
-          <p:cNvPr id="33" name="TextBox 32"/>
+          <p:cNvPr id="27" name="TextBox 26"/>
           <p:cNvSpPr txBox="1"/>
           <p:nvPr/>
         </p:nvSpPr>
@@ -13474,7 +12771,7 @@
                 </a:solidFill>
                 <a:latin typeface="Calibri"/>
               </a:rPr>
-              <a:t>Slide 19</a:t>
+              <a:t>Slide 18</a:t>
             </a:r>
           </a:p>
         </p:txBody>
@@ -15319,7 +14616,7 @@
                   <a:srgbClr val="FFFFFF"/>
                 </a:solidFill>
               </a:rPr>
-              <a:t>12  •  Takeaways</a:t>
+              <a:t>11  •  Future work</a:t>
             </a:r>
           </a:p>
         </p:txBody>
@@ -15354,14 +14651,49 @@
                 </a:solidFill>
                 <a:latin typeface="Calibri"/>
               </a:rPr>
-              <a:t>Five Things to Take Away</a:t>
-            </a:r>
-          </a:p>
-        </p:txBody>
-      </p:sp>
-      <p:sp>
-        <p:nvSpPr>
-          <p:cNvPr id="6" name="Rectangle 5"/>
+              <a:t>What We Would Try Next</a:t>
+            </a:r>
+          </a:p>
+        </p:txBody>
+      </p:sp>
+      <p:sp>
+        <p:nvSpPr>
+          <p:cNvPr id="6" name="TextBox 5"/>
+          <p:cNvSpPr txBox="1"/>
+          <p:nvPr/>
+        </p:nvSpPr>
+        <p:spPr>
+          <a:xfrm>
+            <a:off x="457200" y="1280160"/>
+            <a:ext cx="11247120" cy="365760"/>
+          </a:xfrm>
+          <a:prstGeom prst="rect">
+            <a:avLst/>
+          </a:prstGeom>
+          <a:noFill/>
+        </p:spPr>
+        <p:txBody>
+          <a:bodyPr wrap="square" anchor="t">
+            <a:spAutoFit/>
+          </a:bodyPr>
+          <a:lstStyle/>
+          <a:p>
+            <a:pPr algn="l"/>
+            <a:r>
+              <a:rPr sz="1500" b="0" i="1">
+                <a:solidFill>
+                  <a:srgbClr val="556070"/>
+                </a:solidFill>
+                <a:latin typeface="Calibri"/>
+              </a:rPr>
+              <a:t>Concrete improvements that follow directly from the limitations on the previous slide.</a:t>
+            </a:r>
+          </a:p>
+        </p:txBody>
+      </p:sp>
+      <p:sp>
+        <p:nvSpPr>
+          <p:cNvPr id="7" name="Rectangle 6"/>
           <p:cNvSpPr/>
           <p:nvPr/>
         </p:nvSpPr>
@@ -15405,20 +14737,20 @@
       </p:sp>
       <p:sp>
         <p:nvSpPr>
-          <p:cNvPr id="7" name="Oval 6"/>
+          <p:cNvPr id="8" name="Oval 7"/>
           <p:cNvSpPr/>
           <p:nvPr/>
         </p:nvSpPr>
         <p:spPr>
           <a:xfrm>
-            <a:off x="640080" y="2286000"/>
-            <a:ext cx="548640" cy="548640"/>
+            <a:off x="457200" y="2057400"/>
+            <a:ext cx="502920" cy="502920"/>
           </a:xfrm>
           <a:prstGeom prst="ellipse">
             <a:avLst/>
           </a:prstGeom>
           <a:solidFill>
-            <a:srgbClr val="DD8452"/>
+            <a:srgbClr val="1F3A5F"/>
           </a:solidFill>
           <a:ln>
             <a:noFill/>
@@ -15449,14 +14781,14 @@
       </p:sp>
       <p:sp>
         <p:nvSpPr>
-          <p:cNvPr id="8" name="TextBox 7"/>
-          <p:cNvSpPr txBox="1"/>
-          <p:nvPr/>
-        </p:nvSpPr>
-        <p:spPr>
-          <a:xfrm>
-            <a:off x="640080" y="2286000"/>
-            <a:ext cx="548640" cy="548640"/>
+          <p:cNvPr id="9" name="TextBox 8"/>
+          <p:cNvSpPr txBox="1"/>
+          <p:nvPr/>
+        </p:nvSpPr>
+        <p:spPr>
+          <a:xfrm>
+            <a:off x="457200" y="2057400"/>
+            <a:ext cx="502920" cy="502920"/>
           </a:xfrm>
           <a:prstGeom prst="rect">
             <a:avLst/>
@@ -15471,7 +14803,7 @@
           <a:p>
             <a:pPr algn="ctr"/>
             <a:r>
-              <a:rPr sz="2000" b="1" i="0" dirty="0">
+              <a:rPr sz="1800" b="1" i="0">
                 <a:solidFill>
                   <a:srgbClr val="FFFFFF"/>
                 </a:solidFill>
@@ -15484,14 +14816,14 @@
       </p:sp>
       <p:sp>
         <p:nvSpPr>
-          <p:cNvPr id="9" name="TextBox 8"/>
-          <p:cNvSpPr txBox="1"/>
-          <p:nvPr/>
-        </p:nvSpPr>
-        <p:spPr>
-          <a:xfrm>
-            <a:off x="1417320" y="2413903"/>
-            <a:ext cx="10241280" cy="338554"/>
+          <p:cNvPr id="10" name="TextBox 9"/>
+          <p:cNvSpPr txBox="1"/>
+          <p:nvPr/>
+        </p:nvSpPr>
+        <p:spPr>
+          <a:xfrm>
+            <a:off x="1143000" y="1965960"/>
+            <a:ext cx="3200400" cy="640080"/>
           </a:xfrm>
           <a:prstGeom prst="rect">
             <a:avLst/>
@@ -15506,69 +14838,68 @@
           <a:p>
             <a:pPr algn="l"/>
             <a:r>
-              <a:rPr sz="1600" b="0" i="0" dirty="0">
+              <a:rPr sz="1500" b="1" i="0">
+                <a:solidFill>
+                  <a:srgbClr val="1F3A5F"/>
+                </a:solidFill>
+                <a:latin typeface="Calibri"/>
+              </a:rPr>
+              <a:t>Distance-weighted voting</a:t>
+            </a:r>
+          </a:p>
+        </p:txBody>
+      </p:sp>
+      <p:sp>
+        <p:nvSpPr>
+          <p:cNvPr id="11" name="TextBox 10"/>
+          <p:cNvSpPr txBox="1"/>
+          <p:nvPr/>
+        </p:nvSpPr>
+        <p:spPr>
+          <a:xfrm>
+            <a:off x="4434840" y="1965960"/>
+            <a:ext cx="7223760" cy="640080"/>
+          </a:xfrm>
+          <a:prstGeom prst="rect">
+            <a:avLst/>
+          </a:prstGeom>
+          <a:noFill/>
+        </p:spPr>
+        <p:txBody>
+          <a:bodyPr wrap="square" anchor="ctr">
+            <a:spAutoFit/>
+          </a:bodyPr>
+          <a:lstStyle/>
+          <a:p>
+            <a:pPr algn="l"/>
+            <a:r>
+              <a:rPr sz="1200" b="0" i="0">
                 <a:solidFill>
                   <a:srgbClr val="1A1A1A"/>
                 </a:solidFill>
                 <a:latin typeface="Calibri"/>
               </a:rPr>
-              <a:t>A </a:t>
-            </a:r>
-            <a:r>
-              <a:rPr sz="1600" b="0" i="0" dirty="0" err="1">
-                <a:solidFill>
-                  <a:srgbClr val="1A1A1A"/>
-                </a:solidFill>
-                <a:latin typeface="Calibri"/>
-              </a:rPr>
-              <a:t>kNN</a:t>
-            </a:r>
-            <a:r>
-              <a:rPr sz="1600" b="0" i="0" dirty="0">
-                <a:solidFill>
-                  <a:srgbClr val="1A1A1A"/>
-                </a:solidFill>
-                <a:latin typeface="Calibri"/>
-              </a:rPr>
-              <a:t> classifier</a:t>
-            </a:r>
-            <a:r>
-              <a:rPr lang="en-US" sz="1600" b="0" i="0" dirty="0">
-                <a:solidFill>
-                  <a:srgbClr val="1A1A1A"/>
-                </a:solidFill>
-                <a:latin typeface="Calibri"/>
-              </a:rPr>
-              <a:t> </a:t>
-            </a:r>
-            <a:r>
-              <a:rPr sz="1600" b="0" i="0" dirty="0">
-                <a:solidFill>
-                  <a:srgbClr val="1A1A1A"/>
-                </a:solidFill>
-                <a:latin typeface="Calibri"/>
-              </a:rPr>
-              <a:t>can learn real, transferable signal from web-session data.</a:t>
-            </a:r>
-          </a:p>
-        </p:txBody>
-      </p:sp>
-      <p:sp>
-        <p:nvSpPr>
-          <p:cNvPr id="10" name="Oval 9"/>
+              <a:t>Closer neighbors count more. Cheap to add; usually the single biggest win on imbalanced data.</a:t>
+            </a:r>
+          </a:p>
+        </p:txBody>
+      </p:sp>
+      <p:sp>
+        <p:nvSpPr>
+          <p:cNvPr id="12" name="Oval 11"/>
           <p:cNvSpPr/>
           <p:nvPr/>
         </p:nvSpPr>
         <p:spPr>
           <a:xfrm>
-            <a:off x="640080" y="3063240"/>
-            <a:ext cx="548640" cy="548640"/>
+            <a:off x="457200" y="2770632"/>
+            <a:ext cx="502920" cy="502920"/>
           </a:xfrm>
           <a:prstGeom prst="ellipse">
             <a:avLst/>
           </a:prstGeom>
           <a:solidFill>
-            <a:srgbClr val="DD8452"/>
+            <a:srgbClr val="1F3A5F"/>
           </a:solidFill>
           <a:ln>
             <a:noFill/>
@@ -15599,14 +14930,14 @@
       </p:sp>
       <p:sp>
         <p:nvSpPr>
-          <p:cNvPr id="11" name="TextBox 10"/>
-          <p:cNvSpPr txBox="1"/>
-          <p:nvPr/>
-        </p:nvSpPr>
-        <p:spPr>
-          <a:xfrm>
-            <a:off x="640080" y="3063240"/>
-            <a:ext cx="548640" cy="548640"/>
+          <p:cNvPr id="13" name="TextBox 12"/>
+          <p:cNvSpPr txBox="1"/>
+          <p:nvPr/>
+        </p:nvSpPr>
+        <p:spPr>
+          <a:xfrm>
+            <a:off x="457200" y="2770632"/>
+            <a:ext cx="502920" cy="502920"/>
           </a:xfrm>
           <a:prstGeom prst="rect">
             <a:avLst/>
@@ -15621,7 +14952,7 @@
           <a:p>
             <a:pPr algn="ctr"/>
             <a:r>
-              <a:rPr sz="2000" b="1" i="0">
+              <a:rPr sz="1800" b="1" i="0">
                 <a:solidFill>
                   <a:srgbClr val="FFFFFF"/>
                 </a:solidFill>
@@ -15634,14 +14965,14 @@
       </p:sp>
       <p:sp>
         <p:nvSpPr>
-          <p:cNvPr id="12" name="TextBox 11"/>
-          <p:cNvSpPr txBox="1"/>
-          <p:nvPr/>
-        </p:nvSpPr>
-        <p:spPr>
-          <a:xfrm>
-            <a:off x="1417320" y="2971800"/>
-            <a:ext cx="10241280" cy="777240"/>
+          <p:cNvPr id="14" name="TextBox 13"/>
+          <p:cNvSpPr txBox="1"/>
+          <p:nvPr/>
+        </p:nvSpPr>
+        <p:spPr>
+          <a:xfrm>
+            <a:off x="1143000" y="2679192"/>
+            <a:ext cx="3200400" cy="640080"/>
           </a:xfrm>
           <a:prstGeom prst="rect">
             <a:avLst/>
@@ -15656,33 +14987,68 @@
           <a:p>
             <a:pPr algn="l"/>
             <a:r>
-              <a:rPr sz="1600" b="0" i="0" dirty="0">
+              <a:rPr sz="1500" b="1" i="0">
+                <a:solidFill>
+                  <a:srgbClr val="1F3A5F"/>
+                </a:solidFill>
+                <a:latin typeface="Calibri"/>
+              </a:rPr>
+              <a:t>Threshold tuning on the kNN score</a:t>
+            </a:r>
+          </a:p>
+        </p:txBody>
+      </p:sp>
+      <p:sp>
+        <p:nvSpPr>
+          <p:cNvPr id="15" name="TextBox 14"/>
+          <p:cNvSpPr txBox="1"/>
+          <p:nvPr/>
+        </p:nvSpPr>
+        <p:spPr>
+          <a:xfrm>
+            <a:off x="4434840" y="2679192"/>
+            <a:ext cx="7223760" cy="640080"/>
+          </a:xfrm>
+          <a:prstGeom prst="rect">
+            <a:avLst/>
+          </a:prstGeom>
+          <a:noFill/>
+        </p:spPr>
+        <p:txBody>
+          <a:bodyPr wrap="square" anchor="ctr">
+            <a:spAutoFit/>
+          </a:bodyPr>
+          <a:lstStyle/>
+          <a:p>
+            <a:pPr algn="l"/>
+            <a:r>
+              <a:rPr sz="1200" b="0" i="0">
                 <a:solidFill>
                   <a:srgbClr val="1A1A1A"/>
                 </a:solidFill>
                 <a:latin typeface="Calibri"/>
               </a:rPr>
-              <a:t>On the UCI Online Shoppers data, k = 7 gave 87.67% accuracy and 0.47 F1 on a held-out test set.</a:t>
-            </a:r>
-          </a:p>
-        </p:txBody>
-      </p:sp>
-      <p:sp>
-        <p:nvSpPr>
-          <p:cNvPr id="13" name="Oval 12"/>
+              <a:t>Use k_pos / k as a soft probability and pick the threshold by Youden’s J or by business cost.</a:t>
+            </a:r>
+          </a:p>
+        </p:txBody>
+      </p:sp>
+      <p:sp>
+        <p:nvSpPr>
+          <p:cNvPr id="16" name="Oval 15"/>
           <p:cNvSpPr/>
           <p:nvPr/>
         </p:nvSpPr>
         <p:spPr>
           <a:xfrm>
-            <a:off x="640080" y="3840480"/>
-            <a:ext cx="548640" cy="548640"/>
+            <a:off x="457200" y="3483864"/>
+            <a:ext cx="502920" cy="502920"/>
           </a:xfrm>
           <a:prstGeom prst="ellipse">
             <a:avLst/>
           </a:prstGeom>
           <a:solidFill>
-            <a:srgbClr val="DD8452"/>
+            <a:srgbClr val="1F3A5F"/>
           </a:solidFill>
           <a:ln>
             <a:noFill/>
@@ -15713,14 +15079,14 @@
       </p:sp>
       <p:sp>
         <p:nvSpPr>
-          <p:cNvPr id="14" name="TextBox 13"/>
-          <p:cNvSpPr txBox="1"/>
-          <p:nvPr/>
-        </p:nvSpPr>
-        <p:spPr>
-          <a:xfrm>
-            <a:off x="640080" y="3840480"/>
-            <a:ext cx="548640" cy="548640"/>
+          <p:cNvPr id="17" name="TextBox 16"/>
+          <p:cNvSpPr txBox="1"/>
+          <p:nvPr/>
+        </p:nvSpPr>
+        <p:spPr>
+          <a:xfrm>
+            <a:off x="457200" y="3483864"/>
+            <a:ext cx="502920" cy="502920"/>
           </a:xfrm>
           <a:prstGeom prst="rect">
             <a:avLst/>
@@ -15735,7 +15101,7 @@
           <a:p>
             <a:pPr algn="ctr"/>
             <a:r>
-              <a:rPr sz="2000" b="1" i="0">
+              <a:rPr sz="1800" b="1" i="0">
                 <a:solidFill>
                   <a:srgbClr val="FFFFFF"/>
                 </a:solidFill>
@@ -15748,14 +15114,14 @@
       </p:sp>
       <p:sp>
         <p:nvSpPr>
-          <p:cNvPr id="15" name="TextBox 14"/>
-          <p:cNvSpPr txBox="1"/>
-          <p:nvPr/>
-        </p:nvSpPr>
-        <p:spPr>
-          <a:xfrm>
-            <a:off x="1417320" y="3749040"/>
-            <a:ext cx="10241280" cy="777240"/>
+          <p:cNvPr id="18" name="TextBox 17"/>
+          <p:cNvSpPr txBox="1"/>
+          <p:nvPr/>
+        </p:nvSpPr>
+        <p:spPr>
+          <a:xfrm>
+            <a:off x="1143000" y="3392424"/>
+            <a:ext cx="3200400" cy="640080"/>
           </a:xfrm>
           <a:prstGeom prst="rect">
             <a:avLst/>
@@ -15770,33 +15136,68 @@
           <a:p>
             <a:pPr algn="l"/>
             <a:r>
-              <a:rPr sz="1600" b="0" i="0" dirty="0">
+              <a:rPr sz="1500" b="1" i="0">
+                <a:solidFill>
+                  <a:srgbClr val="1F3A5F"/>
+                </a:solidFill>
+                <a:latin typeface="Calibri"/>
+              </a:rPr>
+              <a:t>Resampling</a:t>
+            </a:r>
+          </a:p>
+        </p:txBody>
+      </p:sp>
+      <p:sp>
+        <p:nvSpPr>
+          <p:cNvPr id="19" name="TextBox 18"/>
+          <p:cNvSpPr txBox="1"/>
+          <p:nvPr/>
+        </p:nvSpPr>
+        <p:spPr>
+          <a:xfrm>
+            <a:off x="4434840" y="3392424"/>
+            <a:ext cx="7223760" cy="640080"/>
+          </a:xfrm>
+          <a:prstGeom prst="rect">
+            <a:avLst/>
+          </a:prstGeom>
+          <a:noFill/>
+        </p:spPr>
+        <p:txBody>
+          <a:bodyPr wrap="square" anchor="ctr">
+            <a:spAutoFit/>
+          </a:bodyPr>
+          <a:lstStyle/>
+          <a:p>
+            <a:pPr algn="l"/>
+            <a:r>
+              <a:rPr sz="1200" b="0" i="0">
                 <a:solidFill>
                   <a:srgbClr val="1A1A1A"/>
                 </a:solidFill>
                 <a:latin typeface="Calibri"/>
               </a:rPr>
-              <a:t>Class imbalance is the single most important factor shaping these numbers.</a:t>
-            </a:r>
-          </a:p>
-        </p:txBody>
-      </p:sp>
-      <p:sp>
-        <p:nvSpPr>
-          <p:cNvPr id="16" name="Oval 15"/>
+              <a:t>SMOTE oversampling of the minority class (or principled under-sampling of the majority).</a:t>
+            </a:r>
+          </a:p>
+        </p:txBody>
+      </p:sp>
+      <p:sp>
+        <p:nvSpPr>
+          <p:cNvPr id="20" name="Oval 19"/>
           <p:cNvSpPr/>
           <p:nvPr/>
         </p:nvSpPr>
         <p:spPr>
           <a:xfrm>
-            <a:off x="640080" y="4617720"/>
-            <a:ext cx="548640" cy="548640"/>
+            <a:off x="457200" y="4197096"/>
+            <a:ext cx="502920" cy="502920"/>
           </a:xfrm>
           <a:prstGeom prst="ellipse">
             <a:avLst/>
           </a:prstGeom>
           <a:solidFill>
-            <a:srgbClr val="DD8452"/>
+            <a:srgbClr val="1F3A5F"/>
           </a:solidFill>
           <a:ln>
             <a:noFill/>
@@ -15827,14 +15228,14 @@
       </p:sp>
       <p:sp>
         <p:nvSpPr>
-          <p:cNvPr id="17" name="TextBox 16"/>
-          <p:cNvSpPr txBox="1"/>
-          <p:nvPr/>
-        </p:nvSpPr>
-        <p:spPr>
-          <a:xfrm>
-            <a:off x="640080" y="4617720"/>
-            <a:ext cx="548640" cy="548640"/>
+          <p:cNvPr id="21" name="TextBox 20"/>
+          <p:cNvSpPr txBox="1"/>
+          <p:nvPr/>
+        </p:nvSpPr>
+        <p:spPr>
+          <a:xfrm>
+            <a:off x="457200" y="4197096"/>
+            <a:ext cx="502920" cy="502920"/>
           </a:xfrm>
           <a:prstGeom prst="rect">
             <a:avLst/>
@@ -15849,7 +15250,7 @@
           <a:p>
             <a:pPr algn="ctr"/>
             <a:r>
-              <a:rPr sz="2000" b="1" i="0">
+              <a:rPr sz="1800" b="1" i="0">
                 <a:solidFill>
                   <a:srgbClr val="FFFFFF"/>
                 </a:solidFill>
@@ -15862,14 +15263,14 @@
       </p:sp>
       <p:sp>
         <p:nvSpPr>
-          <p:cNvPr id="18" name="TextBox 17"/>
-          <p:cNvSpPr txBox="1"/>
-          <p:nvPr/>
-        </p:nvSpPr>
-        <p:spPr>
-          <a:xfrm>
-            <a:off x="1417320" y="4526280"/>
-            <a:ext cx="10241280" cy="777240"/>
+          <p:cNvPr id="22" name="TextBox 21"/>
+          <p:cNvSpPr txBox="1"/>
+          <p:nvPr/>
+        </p:nvSpPr>
+        <p:spPr>
+          <a:xfrm>
+            <a:off x="1143000" y="4105656"/>
+            <a:ext cx="3200400" cy="640080"/>
           </a:xfrm>
           <a:prstGeom prst="rect">
             <a:avLst/>
@@ -15884,33 +15285,68 @@
           <a:p>
             <a:pPr algn="l"/>
             <a:r>
-              <a:rPr sz="1600" b="0" i="0" dirty="0">
+              <a:rPr sz="1500" b="1" i="0">
+                <a:solidFill>
+                  <a:srgbClr val="1F3A5F"/>
+                </a:solidFill>
+                <a:latin typeface="Calibri"/>
+              </a:rPr>
+              <a:t>Feature redundancy cleanup</a:t>
+            </a:r>
+          </a:p>
+        </p:txBody>
+      </p:sp>
+      <p:sp>
+        <p:nvSpPr>
+          <p:cNvPr id="23" name="TextBox 22"/>
+          <p:cNvSpPr txBox="1"/>
+          <p:nvPr/>
+        </p:nvSpPr>
+        <p:spPr>
+          <a:xfrm>
+            <a:off x="4434840" y="4105656"/>
+            <a:ext cx="7223760" cy="640080"/>
+          </a:xfrm>
+          <a:prstGeom prst="rect">
+            <a:avLst/>
+          </a:prstGeom>
+          <a:noFill/>
+        </p:spPr>
+        <p:txBody>
+          <a:bodyPr wrap="square" anchor="ctr">
+            <a:spAutoFit/>
+          </a:bodyPr>
+          <a:lstStyle/>
+          <a:p>
+            <a:pPr algn="l"/>
+            <a:r>
+              <a:rPr sz="1200" b="0" i="0">
                 <a:solidFill>
                   <a:srgbClr val="1A1A1A"/>
                 </a:solidFill>
                 <a:latin typeface="Calibri"/>
               </a:rPr>
-              <a:t>High precision (0.70), low recall (0.36) — choose the algorithm that matches your cost structure.</a:t>
-            </a:r>
-          </a:p>
-        </p:txBody>
-      </p:sp>
-      <p:sp>
-        <p:nvSpPr>
-          <p:cNvPr id="19" name="Oval 18"/>
+              <a:t>Drop ExitRates (keep BounceRates) and ProductRelated_Duration (keep ProductRelated), or run PCA.</a:t>
+            </a:r>
+          </a:p>
+        </p:txBody>
+      </p:sp>
+      <p:sp>
+        <p:nvSpPr>
+          <p:cNvPr id="24" name="Oval 23"/>
           <p:cNvSpPr/>
           <p:nvPr/>
         </p:nvSpPr>
         <p:spPr>
           <a:xfrm>
-            <a:off x="640080" y="5394960"/>
-            <a:ext cx="548640" cy="548640"/>
+            <a:off x="457200" y="4910328"/>
+            <a:ext cx="502920" cy="502920"/>
           </a:xfrm>
           <a:prstGeom prst="ellipse">
             <a:avLst/>
           </a:prstGeom>
           <a:solidFill>
-            <a:srgbClr val="DD8452"/>
+            <a:srgbClr val="1F3A5F"/>
           </a:solidFill>
           <a:ln>
             <a:noFill/>
@@ -15941,14 +15377,14 @@
       </p:sp>
       <p:sp>
         <p:nvSpPr>
-          <p:cNvPr id="20" name="TextBox 19"/>
-          <p:cNvSpPr txBox="1"/>
-          <p:nvPr/>
-        </p:nvSpPr>
-        <p:spPr>
-          <a:xfrm>
-            <a:off x="640080" y="5394960"/>
-            <a:ext cx="548640" cy="548640"/>
+          <p:cNvPr id="25" name="TextBox 24"/>
+          <p:cNvSpPr txBox="1"/>
+          <p:nvPr/>
+        </p:nvSpPr>
+        <p:spPr>
+          <a:xfrm>
+            <a:off x="457200" y="4910328"/>
+            <a:ext cx="502920" cy="502920"/>
           </a:xfrm>
           <a:prstGeom prst="rect">
             <a:avLst/>
@@ -15963,7 +15399,7 @@
           <a:p>
             <a:pPr algn="ctr"/>
             <a:r>
-              <a:rPr sz="2000" b="1" i="0">
+              <a:rPr sz="1800" b="1" i="0">
                 <a:solidFill>
                   <a:srgbClr val="FFFFFF"/>
                 </a:solidFill>
@@ -15976,14 +15412,14 @@
       </p:sp>
       <p:sp>
         <p:nvSpPr>
-          <p:cNvPr id="21" name="TextBox 20"/>
-          <p:cNvSpPr txBox="1"/>
-          <p:nvPr/>
-        </p:nvSpPr>
-        <p:spPr>
-          <a:xfrm>
-            <a:off x="1417320" y="5303520"/>
-            <a:ext cx="10241280" cy="777240"/>
+          <p:cNvPr id="26" name="TextBox 25"/>
+          <p:cNvSpPr txBox="1"/>
+          <p:nvPr/>
+        </p:nvSpPr>
+        <p:spPr>
+          <a:xfrm>
+            <a:off x="1143000" y="4818888"/>
+            <a:ext cx="3200400" cy="640080"/>
           </a:xfrm>
           <a:prstGeom prst="rect">
             <a:avLst/>
@@ -15998,20 +15434,204 @@
           <a:p>
             <a:pPr algn="l"/>
             <a:r>
-              <a:rPr sz="1600" b="0" i="0" dirty="0">
+              <a:rPr sz="1500" b="1" i="0">
+                <a:solidFill>
+                  <a:srgbClr val="1F3A5F"/>
+                </a:solidFill>
+                <a:latin typeface="Calibri"/>
+              </a:rPr>
+              <a:t>Cleaner tuning protocol</a:t>
+            </a:r>
+          </a:p>
+        </p:txBody>
+      </p:sp>
+      <p:sp>
+        <p:nvSpPr>
+          <p:cNvPr id="27" name="TextBox 26"/>
+          <p:cNvSpPr txBox="1"/>
+          <p:nvPr/>
+        </p:nvSpPr>
+        <p:spPr>
+          <a:xfrm>
+            <a:off x="4434840" y="4818888"/>
+            <a:ext cx="7223760" cy="640080"/>
+          </a:xfrm>
+          <a:prstGeom prst="rect">
+            <a:avLst/>
+          </a:prstGeom>
+          <a:noFill/>
+        </p:spPr>
+        <p:txBody>
+          <a:bodyPr wrap="square" anchor="ctr">
+            <a:spAutoFit/>
+          </a:bodyPr>
+          <a:lstStyle/>
+          <a:p>
+            <a:pPr algn="l"/>
+            <a:r>
+              <a:rPr sz="1200" b="0" i="0">
                 <a:solidFill>
                   <a:srgbClr val="1A1A1A"/>
                 </a:solidFill>
                 <a:latin typeface="Calibri"/>
               </a:rPr>
-              <a:t>The biggest improvements aren’t in tuning more k values. They are in handling imbalance, removing redundant features, and using a clean validation protocol.</a:t>
-            </a:r>
-          </a:p>
-        </p:txBody>
-      </p:sp>
-      <p:sp>
-        <p:nvSpPr>
-          <p:cNvPr id="22" name="TextBox 21"/>
+              <a:t>Hold out a true validation split or use nested CV so the test set is touched exactly once.</a:t>
+            </a:r>
+          </a:p>
+        </p:txBody>
+      </p:sp>
+      <p:sp>
+        <p:nvSpPr>
+          <p:cNvPr id="28" name="Oval 27"/>
+          <p:cNvSpPr/>
+          <p:nvPr/>
+        </p:nvSpPr>
+        <p:spPr>
+          <a:xfrm>
+            <a:off x="457200" y="5623560"/>
+            <a:ext cx="502920" cy="502920"/>
+          </a:xfrm>
+          <a:prstGeom prst="ellipse">
+            <a:avLst/>
+          </a:prstGeom>
+          <a:solidFill>
+            <a:srgbClr val="1F3A5F"/>
+          </a:solidFill>
+          <a:ln>
+            <a:noFill/>
+          </a:ln>
+        </p:spPr>
+        <p:style>
+          <a:lnRef idx="1">
+            <a:schemeClr val="accent1"/>
+          </a:lnRef>
+          <a:fillRef idx="3">
+            <a:schemeClr val="accent1"/>
+          </a:fillRef>
+          <a:effectRef idx="2">
+            <a:schemeClr val="accent1"/>
+          </a:effectRef>
+          <a:fontRef idx="minor">
+            <a:schemeClr val="lt1"/>
+          </a:fontRef>
+        </p:style>
+        <p:txBody>
+          <a:bodyPr rtlCol="0" anchor="ctr"/>
+          <a:lstStyle/>
+          <a:p>
+            <a:pPr algn="ctr"/>
+            <a:endParaRPr/>
+          </a:p>
+        </p:txBody>
+      </p:sp>
+      <p:sp>
+        <p:nvSpPr>
+          <p:cNvPr id="29" name="TextBox 28"/>
+          <p:cNvSpPr txBox="1"/>
+          <p:nvPr/>
+        </p:nvSpPr>
+        <p:spPr>
+          <a:xfrm>
+            <a:off x="457200" y="5623560"/>
+            <a:ext cx="502920" cy="502920"/>
+          </a:xfrm>
+          <a:prstGeom prst="rect">
+            <a:avLst/>
+          </a:prstGeom>
+          <a:noFill/>
+        </p:spPr>
+        <p:txBody>
+          <a:bodyPr wrap="square" anchor="ctr">
+            <a:spAutoFit/>
+          </a:bodyPr>
+          <a:lstStyle/>
+          <a:p>
+            <a:pPr algn="ctr"/>
+            <a:r>
+              <a:rPr sz="1800" b="1" i="0">
+                <a:solidFill>
+                  <a:srgbClr val="FFFFFF"/>
+                </a:solidFill>
+                <a:latin typeface="Calibri"/>
+              </a:rPr>
+              <a:t>6</a:t>
+            </a:r>
+          </a:p>
+        </p:txBody>
+      </p:sp>
+      <p:sp>
+        <p:nvSpPr>
+          <p:cNvPr id="30" name="TextBox 29"/>
+          <p:cNvSpPr txBox="1"/>
+          <p:nvPr/>
+        </p:nvSpPr>
+        <p:spPr>
+          <a:xfrm>
+            <a:off x="1143000" y="5532120"/>
+            <a:ext cx="3200400" cy="640080"/>
+          </a:xfrm>
+          <a:prstGeom prst="rect">
+            <a:avLst/>
+          </a:prstGeom>
+          <a:noFill/>
+        </p:spPr>
+        <p:txBody>
+          <a:bodyPr wrap="square" anchor="ctr">
+            <a:spAutoFit/>
+          </a:bodyPr>
+          <a:lstStyle/>
+          <a:p>
+            <a:pPr algn="l"/>
+            <a:r>
+              <a:rPr sz="1500" b="1" i="0">
+                <a:solidFill>
+                  <a:srgbClr val="1F3A5F"/>
+                </a:solidFill>
+                <a:latin typeface="Calibri"/>
+              </a:rPr>
+              <a:t>Compare against tuned baselines</a:t>
+            </a:r>
+          </a:p>
+        </p:txBody>
+      </p:sp>
+      <p:sp>
+        <p:nvSpPr>
+          <p:cNvPr id="31" name="TextBox 30"/>
+          <p:cNvSpPr txBox="1"/>
+          <p:nvPr/>
+        </p:nvSpPr>
+        <p:spPr>
+          <a:xfrm>
+            <a:off x="4434840" y="5532120"/>
+            <a:ext cx="7223760" cy="640080"/>
+          </a:xfrm>
+          <a:prstGeom prst="rect">
+            <a:avLst/>
+          </a:prstGeom>
+          <a:noFill/>
+        </p:spPr>
+        <p:txBody>
+          <a:bodyPr wrap="square" anchor="ctr">
+            <a:spAutoFit/>
+          </a:bodyPr>
+          <a:lstStyle/>
+          <a:p>
+            <a:pPr algn="l"/>
+            <a:r>
+              <a:rPr sz="1200" b="0" i="0">
+                <a:solidFill>
+                  <a:srgbClr val="1A1A1A"/>
+                </a:solidFill>
+                <a:latin typeface="Calibri"/>
+              </a:rPr>
+              <a:t>Logistic regression, random forest, gradient boosting — to position kNN against the literature on this dataset.</a:t>
+            </a:r>
+          </a:p>
+        </p:txBody>
+      </p:sp>
+      <p:sp>
+        <p:nvSpPr>
+          <p:cNvPr id="32" name="TextBox 31"/>
           <p:cNvSpPr txBox="1"/>
           <p:nvPr/>
         </p:nvSpPr>
@@ -16061,7 +15681,7 @@
       </p:sp>
       <p:sp>
         <p:nvSpPr>
-          <p:cNvPr id="23" name="TextBox 22"/>
+          <p:cNvPr id="33" name="TextBox 32"/>
           <p:cNvSpPr txBox="1"/>
           <p:nvPr/>
         </p:nvSpPr>
@@ -16089,7 +15709,7 @@
                 </a:solidFill>
                 <a:latin typeface="Calibri"/>
               </a:rPr>
-              <a:t>Slide 20</a:t>
+              <a:t>Slide 19</a:t>
             </a:r>
           </a:p>
         </p:txBody>
@@ -16103,6 +15723,924 @@
 </file>
 
 <file path=ppt/slides/slide21.xml><?xml version="1.0" encoding="utf-8"?>
+<p:sld xmlns:a="http://schemas.openxmlformats.org/drawingml/2006/main" xmlns:r="http://schemas.openxmlformats.org/officeDocument/2006/relationships" xmlns:p="http://schemas.openxmlformats.org/presentationml/2006/main">
+  <p:cSld>
+    <p:spTree>
+      <p:nvGrpSpPr>
+        <p:cNvPr id="1" name=""/>
+        <p:cNvGrpSpPr/>
+        <p:nvPr/>
+      </p:nvGrpSpPr>
+      <p:grpSpPr>
+        <a:xfrm>
+          <a:off x="0" y="0"/>
+          <a:ext cx="0" cy="0"/>
+          <a:chOff x="0" y="0"/>
+          <a:chExt cx="0" cy="0"/>
+        </a:xfrm>
+      </p:grpSpPr>
+      <p:sp>
+        <p:nvSpPr>
+          <p:cNvPr id="2" name="Rectangle 1"/>
+          <p:cNvSpPr/>
+          <p:nvPr/>
+        </p:nvSpPr>
+        <p:spPr>
+          <a:xfrm>
+            <a:off x="0" y="0"/>
+            <a:ext cx="12191695" cy="6858000"/>
+          </a:xfrm>
+          <a:prstGeom prst="rect">
+            <a:avLst/>
+          </a:prstGeom>
+          <a:solidFill>
+            <a:srgbClr val="F5F7FA"/>
+          </a:solidFill>
+          <a:ln>
+            <a:noFill/>
+          </a:ln>
+          <a:effectLst/>
+        </p:spPr>
+        <p:style>
+          <a:lnRef idx="1">
+            <a:schemeClr val="accent1"/>
+          </a:lnRef>
+          <a:fillRef idx="3">
+            <a:schemeClr val="accent1"/>
+          </a:fillRef>
+          <a:effectRef idx="2">
+            <a:schemeClr val="accent1"/>
+          </a:effectRef>
+          <a:fontRef idx="minor">
+            <a:schemeClr val="lt1"/>
+          </a:fontRef>
+        </p:style>
+        <p:txBody>
+          <a:bodyPr rtlCol="0" anchor="ctr"/>
+          <a:lstStyle/>
+          <a:p>
+            <a:pPr algn="ctr"/>
+            <a:endParaRPr/>
+          </a:p>
+        </p:txBody>
+      </p:sp>
+      <p:sp>
+        <p:nvSpPr>
+          <p:cNvPr id="3" name="Rectangle 2"/>
+          <p:cNvSpPr/>
+          <p:nvPr/>
+        </p:nvSpPr>
+        <p:spPr>
+          <a:xfrm>
+            <a:off x="0" y="0"/>
+            <a:ext cx="12191695" cy="502920"/>
+          </a:xfrm>
+          <a:prstGeom prst="rect">
+            <a:avLst/>
+          </a:prstGeom>
+          <a:solidFill>
+            <a:srgbClr val="1F3A5F"/>
+          </a:solidFill>
+          <a:ln>
+            <a:noFill/>
+          </a:ln>
+        </p:spPr>
+        <p:style>
+          <a:lnRef idx="1">
+            <a:schemeClr val="accent1"/>
+          </a:lnRef>
+          <a:fillRef idx="3">
+            <a:schemeClr val="accent1"/>
+          </a:fillRef>
+          <a:effectRef idx="2">
+            <a:schemeClr val="accent1"/>
+          </a:effectRef>
+          <a:fontRef idx="minor">
+            <a:schemeClr val="lt1"/>
+          </a:fontRef>
+        </p:style>
+        <p:txBody>
+          <a:bodyPr rtlCol="0" anchor="ctr"/>
+          <a:lstStyle/>
+          <a:p>
+            <a:pPr algn="ctr"/>
+            <a:endParaRPr/>
+          </a:p>
+        </p:txBody>
+      </p:sp>
+      <p:sp>
+        <p:nvSpPr>
+          <p:cNvPr id="4" name="TextBox 3"/>
+          <p:cNvSpPr txBox="1"/>
+          <p:nvPr/>
+        </p:nvSpPr>
+        <p:spPr>
+          <a:xfrm>
+            <a:off x="274320" y="64008"/>
+            <a:ext cx="11612880" cy="365760"/>
+          </a:xfrm>
+          <a:prstGeom prst="rect">
+            <a:avLst/>
+          </a:prstGeom>
+          <a:noFill/>
+        </p:spPr>
+        <p:txBody>
+          <a:bodyPr wrap="none" tIns="0" bIns="0">
+            <a:spAutoFit/>
+          </a:bodyPr>
+          <a:lstStyle/>
+          <a:p>
+            <a:pPr algn="l"/>
+            <a:r>
+              <a:rPr sz="1400" b="1">
+                <a:solidFill>
+                  <a:srgbClr val="FFFFFF"/>
+                </a:solidFill>
+              </a:rPr>
+              <a:t>12  •  Takeaways</a:t>
+            </a:r>
+          </a:p>
+        </p:txBody>
+      </p:sp>
+      <p:sp>
+        <p:nvSpPr>
+          <p:cNvPr id="5" name="TextBox 4"/>
+          <p:cNvSpPr txBox="1"/>
+          <p:nvPr/>
+        </p:nvSpPr>
+        <p:spPr>
+          <a:xfrm>
+            <a:off x="457200" y="685800"/>
+            <a:ext cx="11247120" cy="640080"/>
+          </a:xfrm>
+          <a:prstGeom prst="rect">
+            <a:avLst/>
+          </a:prstGeom>
+          <a:noFill/>
+        </p:spPr>
+        <p:txBody>
+          <a:bodyPr wrap="square" anchor="t">
+            <a:spAutoFit/>
+          </a:bodyPr>
+          <a:lstStyle/>
+          <a:p>
+            <a:pPr algn="l"/>
+            <a:r>
+              <a:rPr sz="3000" b="1" i="0">
+                <a:solidFill>
+                  <a:srgbClr val="1F3A5F"/>
+                </a:solidFill>
+                <a:latin typeface="Calibri"/>
+              </a:rPr>
+              <a:t>Five Things to Take Away</a:t>
+            </a:r>
+          </a:p>
+        </p:txBody>
+      </p:sp>
+      <p:sp>
+        <p:nvSpPr>
+          <p:cNvPr id="6" name="Rectangle 5"/>
+          <p:cNvSpPr/>
+          <p:nvPr/>
+        </p:nvSpPr>
+        <p:spPr>
+          <a:xfrm>
+            <a:off x="457200" y="1691640"/>
+            <a:ext cx="1371600" cy="45720"/>
+          </a:xfrm>
+          <a:prstGeom prst="rect">
+            <a:avLst/>
+          </a:prstGeom>
+          <a:solidFill>
+            <a:srgbClr val="DD8452"/>
+          </a:solidFill>
+          <a:ln>
+            <a:noFill/>
+          </a:ln>
+        </p:spPr>
+        <p:style>
+          <a:lnRef idx="1">
+            <a:schemeClr val="accent1"/>
+          </a:lnRef>
+          <a:fillRef idx="3">
+            <a:schemeClr val="accent1"/>
+          </a:fillRef>
+          <a:effectRef idx="2">
+            <a:schemeClr val="accent1"/>
+          </a:effectRef>
+          <a:fontRef idx="minor">
+            <a:schemeClr val="lt1"/>
+          </a:fontRef>
+        </p:style>
+        <p:txBody>
+          <a:bodyPr rtlCol="0" anchor="ctr"/>
+          <a:lstStyle/>
+          <a:p>
+            <a:pPr algn="ctr"/>
+            <a:endParaRPr/>
+          </a:p>
+        </p:txBody>
+      </p:sp>
+      <p:sp>
+        <p:nvSpPr>
+          <p:cNvPr id="7" name="Oval 6"/>
+          <p:cNvSpPr/>
+          <p:nvPr/>
+        </p:nvSpPr>
+        <p:spPr>
+          <a:xfrm>
+            <a:off x="640080" y="2286000"/>
+            <a:ext cx="548640" cy="548640"/>
+          </a:xfrm>
+          <a:prstGeom prst="ellipse">
+            <a:avLst/>
+          </a:prstGeom>
+          <a:solidFill>
+            <a:srgbClr val="DD8452"/>
+          </a:solidFill>
+          <a:ln>
+            <a:noFill/>
+          </a:ln>
+        </p:spPr>
+        <p:style>
+          <a:lnRef idx="1">
+            <a:schemeClr val="accent1"/>
+          </a:lnRef>
+          <a:fillRef idx="3">
+            <a:schemeClr val="accent1"/>
+          </a:fillRef>
+          <a:effectRef idx="2">
+            <a:schemeClr val="accent1"/>
+          </a:effectRef>
+          <a:fontRef idx="minor">
+            <a:schemeClr val="lt1"/>
+          </a:fontRef>
+        </p:style>
+        <p:txBody>
+          <a:bodyPr rtlCol="0" anchor="ctr"/>
+          <a:lstStyle/>
+          <a:p>
+            <a:pPr algn="ctr"/>
+            <a:endParaRPr/>
+          </a:p>
+        </p:txBody>
+      </p:sp>
+      <p:sp>
+        <p:nvSpPr>
+          <p:cNvPr id="8" name="TextBox 7"/>
+          <p:cNvSpPr txBox="1"/>
+          <p:nvPr/>
+        </p:nvSpPr>
+        <p:spPr>
+          <a:xfrm>
+            <a:off x="640080" y="2286000"/>
+            <a:ext cx="548640" cy="548640"/>
+          </a:xfrm>
+          <a:prstGeom prst="rect">
+            <a:avLst/>
+          </a:prstGeom>
+          <a:noFill/>
+        </p:spPr>
+        <p:txBody>
+          <a:bodyPr wrap="square" anchor="ctr">
+            <a:spAutoFit/>
+          </a:bodyPr>
+          <a:lstStyle/>
+          <a:p>
+            <a:pPr algn="ctr"/>
+            <a:r>
+              <a:rPr sz="2000" b="1" i="0" dirty="0">
+                <a:solidFill>
+                  <a:srgbClr val="FFFFFF"/>
+                </a:solidFill>
+                <a:latin typeface="Calibri"/>
+              </a:rPr>
+              <a:t>1</a:t>
+            </a:r>
+          </a:p>
+        </p:txBody>
+      </p:sp>
+      <p:sp>
+        <p:nvSpPr>
+          <p:cNvPr id="9" name="TextBox 8"/>
+          <p:cNvSpPr txBox="1"/>
+          <p:nvPr/>
+        </p:nvSpPr>
+        <p:spPr>
+          <a:xfrm>
+            <a:off x="1417320" y="2413903"/>
+            <a:ext cx="10241280" cy="338554"/>
+          </a:xfrm>
+          <a:prstGeom prst="rect">
+            <a:avLst/>
+          </a:prstGeom>
+          <a:noFill/>
+        </p:spPr>
+        <p:txBody>
+          <a:bodyPr wrap="square" anchor="ctr">
+            <a:spAutoFit/>
+          </a:bodyPr>
+          <a:lstStyle/>
+          <a:p>
+            <a:pPr algn="l"/>
+            <a:r>
+              <a:rPr sz="1600" b="0" i="0" dirty="0">
+                <a:solidFill>
+                  <a:srgbClr val="1A1A1A"/>
+                </a:solidFill>
+                <a:latin typeface="Calibri"/>
+              </a:rPr>
+              <a:t>A </a:t>
+            </a:r>
+            <a:r>
+              <a:rPr sz="1600" b="0" i="0" dirty="0" err="1">
+                <a:solidFill>
+                  <a:srgbClr val="1A1A1A"/>
+                </a:solidFill>
+                <a:latin typeface="Calibri"/>
+              </a:rPr>
+              <a:t>kNN</a:t>
+            </a:r>
+            <a:r>
+              <a:rPr sz="1600" b="0" i="0" dirty="0">
+                <a:solidFill>
+                  <a:srgbClr val="1A1A1A"/>
+                </a:solidFill>
+                <a:latin typeface="Calibri"/>
+              </a:rPr>
+              <a:t> classifier</a:t>
+            </a:r>
+            <a:r>
+              <a:rPr lang="en-US" sz="1600" b="0" i="0" dirty="0">
+                <a:solidFill>
+                  <a:srgbClr val="1A1A1A"/>
+                </a:solidFill>
+                <a:latin typeface="Calibri"/>
+              </a:rPr>
+              <a:t> </a:t>
+            </a:r>
+            <a:r>
+              <a:rPr sz="1600" b="0" i="0" dirty="0">
+                <a:solidFill>
+                  <a:srgbClr val="1A1A1A"/>
+                </a:solidFill>
+                <a:latin typeface="Calibri"/>
+              </a:rPr>
+              <a:t>can learn real, transferable signal from web-session data.</a:t>
+            </a:r>
+          </a:p>
+        </p:txBody>
+      </p:sp>
+      <p:sp>
+        <p:nvSpPr>
+          <p:cNvPr id="10" name="Oval 9"/>
+          <p:cNvSpPr/>
+          <p:nvPr/>
+        </p:nvSpPr>
+        <p:spPr>
+          <a:xfrm>
+            <a:off x="640080" y="3063240"/>
+            <a:ext cx="548640" cy="548640"/>
+          </a:xfrm>
+          <a:prstGeom prst="ellipse">
+            <a:avLst/>
+          </a:prstGeom>
+          <a:solidFill>
+            <a:srgbClr val="DD8452"/>
+          </a:solidFill>
+          <a:ln>
+            <a:noFill/>
+          </a:ln>
+        </p:spPr>
+        <p:style>
+          <a:lnRef idx="1">
+            <a:schemeClr val="accent1"/>
+          </a:lnRef>
+          <a:fillRef idx="3">
+            <a:schemeClr val="accent1"/>
+          </a:fillRef>
+          <a:effectRef idx="2">
+            <a:schemeClr val="accent1"/>
+          </a:effectRef>
+          <a:fontRef idx="minor">
+            <a:schemeClr val="lt1"/>
+          </a:fontRef>
+        </p:style>
+        <p:txBody>
+          <a:bodyPr rtlCol="0" anchor="ctr"/>
+          <a:lstStyle/>
+          <a:p>
+            <a:pPr algn="ctr"/>
+            <a:endParaRPr/>
+          </a:p>
+        </p:txBody>
+      </p:sp>
+      <p:sp>
+        <p:nvSpPr>
+          <p:cNvPr id="11" name="TextBox 10"/>
+          <p:cNvSpPr txBox="1"/>
+          <p:nvPr/>
+        </p:nvSpPr>
+        <p:spPr>
+          <a:xfrm>
+            <a:off x="640080" y="3063240"/>
+            <a:ext cx="548640" cy="548640"/>
+          </a:xfrm>
+          <a:prstGeom prst="rect">
+            <a:avLst/>
+          </a:prstGeom>
+          <a:noFill/>
+        </p:spPr>
+        <p:txBody>
+          <a:bodyPr wrap="square" anchor="ctr">
+            <a:spAutoFit/>
+          </a:bodyPr>
+          <a:lstStyle/>
+          <a:p>
+            <a:pPr algn="ctr"/>
+            <a:r>
+              <a:rPr sz="2000" b="1" i="0">
+                <a:solidFill>
+                  <a:srgbClr val="FFFFFF"/>
+                </a:solidFill>
+                <a:latin typeface="Calibri"/>
+              </a:rPr>
+              <a:t>2</a:t>
+            </a:r>
+          </a:p>
+        </p:txBody>
+      </p:sp>
+      <p:sp>
+        <p:nvSpPr>
+          <p:cNvPr id="12" name="TextBox 11"/>
+          <p:cNvSpPr txBox="1"/>
+          <p:nvPr/>
+        </p:nvSpPr>
+        <p:spPr>
+          <a:xfrm>
+            <a:off x="1417320" y="2971800"/>
+            <a:ext cx="10241280" cy="777240"/>
+          </a:xfrm>
+          <a:prstGeom prst="rect">
+            <a:avLst/>
+          </a:prstGeom>
+          <a:noFill/>
+        </p:spPr>
+        <p:txBody>
+          <a:bodyPr wrap="square" anchor="ctr">
+            <a:spAutoFit/>
+          </a:bodyPr>
+          <a:lstStyle/>
+          <a:p>
+            <a:pPr algn="l"/>
+            <a:r>
+              <a:rPr sz="1600" b="0" i="0" dirty="0">
+                <a:solidFill>
+                  <a:srgbClr val="1A1A1A"/>
+                </a:solidFill>
+                <a:latin typeface="Calibri"/>
+              </a:rPr>
+              <a:t>On the UCI Online Shoppers data, k = 7 gave 87.67% accuracy and 0.47 F1 on a held-out test set.</a:t>
+            </a:r>
+          </a:p>
+        </p:txBody>
+      </p:sp>
+      <p:sp>
+        <p:nvSpPr>
+          <p:cNvPr id="13" name="Oval 12"/>
+          <p:cNvSpPr/>
+          <p:nvPr/>
+        </p:nvSpPr>
+        <p:spPr>
+          <a:xfrm>
+            <a:off x="640080" y="3840480"/>
+            <a:ext cx="548640" cy="548640"/>
+          </a:xfrm>
+          <a:prstGeom prst="ellipse">
+            <a:avLst/>
+          </a:prstGeom>
+          <a:solidFill>
+            <a:srgbClr val="DD8452"/>
+          </a:solidFill>
+          <a:ln>
+            <a:noFill/>
+          </a:ln>
+        </p:spPr>
+        <p:style>
+          <a:lnRef idx="1">
+            <a:schemeClr val="accent1"/>
+          </a:lnRef>
+          <a:fillRef idx="3">
+            <a:schemeClr val="accent1"/>
+          </a:fillRef>
+          <a:effectRef idx="2">
+            <a:schemeClr val="accent1"/>
+          </a:effectRef>
+          <a:fontRef idx="minor">
+            <a:schemeClr val="lt1"/>
+          </a:fontRef>
+        </p:style>
+        <p:txBody>
+          <a:bodyPr rtlCol="0" anchor="ctr"/>
+          <a:lstStyle/>
+          <a:p>
+            <a:pPr algn="ctr"/>
+            <a:endParaRPr/>
+          </a:p>
+        </p:txBody>
+      </p:sp>
+      <p:sp>
+        <p:nvSpPr>
+          <p:cNvPr id="14" name="TextBox 13"/>
+          <p:cNvSpPr txBox="1"/>
+          <p:nvPr/>
+        </p:nvSpPr>
+        <p:spPr>
+          <a:xfrm>
+            <a:off x="640080" y="3840480"/>
+            <a:ext cx="548640" cy="548640"/>
+          </a:xfrm>
+          <a:prstGeom prst="rect">
+            <a:avLst/>
+          </a:prstGeom>
+          <a:noFill/>
+        </p:spPr>
+        <p:txBody>
+          <a:bodyPr wrap="square" anchor="ctr">
+            <a:spAutoFit/>
+          </a:bodyPr>
+          <a:lstStyle/>
+          <a:p>
+            <a:pPr algn="ctr"/>
+            <a:r>
+              <a:rPr sz="2000" b="1" i="0">
+                <a:solidFill>
+                  <a:srgbClr val="FFFFFF"/>
+                </a:solidFill>
+                <a:latin typeface="Calibri"/>
+              </a:rPr>
+              <a:t>3</a:t>
+            </a:r>
+          </a:p>
+        </p:txBody>
+      </p:sp>
+      <p:sp>
+        <p:nvSpPr>
+          <p:cNvPr id="15" name="TextBox 14"/>
+          <p:cNvSpPr txBox="1"/>
+          <p:nvPr/>
+        </p:nvSpPr>
+        <p:spPr>
+          <a:xfrm>
+            <a:off x="1417320" y="3749040"/>
+            <a:ext cx="10241280" cy="777240"/>
+          </a:xfrm>
+          <a:prstGeom prst="rect">
+            <a:avLst/>
+          </a:prstGeom>
+          <a:noFill/>
+        </p:spPr>
+        <p:txBody>
+          <a:bodyPr wrap="square" anchor="ctr">
+            <a:spAutoFit/>
+          </a:bodyPr>
+          <a:lstStyle/>
+          <a:p>
+            <a:pPr algn="l"/>
+            <a:r>
+              <a:rPr sz="1600" b="0" i="0" dirty="0">
+                <a:solidFill>
+                  <a:srgbClr val="1A1A1A"/>
+                </a:solidFill>
+                <a:latin typeface="Calibri"/>
+              </a:rPr>
+              <a:t>Class imbalance is the single most important factor shaping these numbers.</a:t>
+            </a:r>
+          </a:p>
+        </p:txBody>
+      </p:sp>
+      <p:sp>
+        <p:nvSpPr>
+          <p:cNvPr id="16" name="Oval 15"/>
+          <p:cNvSpPr/>
+          <p:nvPr/>
+        </p:nvSpPr>
+        <p:spPr>
+          <a:xfrm>
+            <a:off x="640080" y="4617720"/>
+            <a:ext cx="548640" cy="548640"/>
+          </a:xfrm>
+          <a:prstGeom prst="ellipse">
+            <a:avLst/>
+          </a:prstGeom>
+          <a:solidFill>
+            <a:srgbClr val="DD8452"/>
+          </a:solidFill>
+          <a:ln>
+            <a:noFill/>
+          </a:ln>
+        </p:spPr>
+        <p:style>
+          <a:lnRef idx="1">
+            <a:schemeClr val="accent1"/>
+          </a:lnRef>
+          <a:fillRef idx="3">
+            <a:schemeClr val="accent1"/>
+          </a:fillRef>
+          <a:effectRef idx="2">
+            <a:schemeClr val="accent1"/>
+          </a:effectRef>
+          <a:fontRef idx="minor">
+            <a:schemeClr val="lt1"/>
+          </a:fontRef>
+        </p:style>
+        <p:txBody>
+          <a:bodyPr rtlCol="0" anchor="ctr"/>
+          <a:lstStyle/>
+          <a:p>
+            <a:pPr algn="ctr"/>
+            <a:endParaRPr/>
+          </a:p>
+        </p:txBody>
+      </p:sp>
+      <p:sp>
+        <p:nvSpPr>
+          <p:cNvPr id="17" name="TextBox 16"/>
+          <p:cNvSpPr txBox="1"/>
+          <p:nvPr/>
+        </p:nvSpPr>
+        <p:spPr>
+          <a:xfrm>
+            <a:off x="640080" y="4617720"/>
+            <a:ext cx="548640" cy="548640"/>
+          </a:xfrm>
+          <a:prstGeom prst="rect">
+            <a:avLst/>
+          </a:prstGeom>
+          <a:noFill/>
+        </p:spPr>
+        <p:txBody>
+          <a:bodyPr wrap="square" anchor="ctr">
+            <a:spAutoFit/>
+          </a:bodyPr>
+          <a:lstStyle/>
+          <a:p>
+            <a:pPr algn="ctr"/>
+            <a:r>
+              <a:rPr sz="2000" b="1" i="0">
+                <a:solidFill>
+                  <a:srgbClr val="FFFFFF"/>
+                </a:solidFill>
+                <a:latin typeface="Calibri"/>
+              </a:rPr>
+              <a:t>4</a:t>
+            </a:r>
+          </a:p>
+        </p:txBody>
+      </p:sp>
+      <p:sp>
+        <p:nvSpPr>
+          <p:cNvPr id="18" name="TextBox 17"/>
+          <p:cNvSpPr txBox="1"/>
+          <p:nvPr/>
+        </p:nvSpPr>
+        <p:spPr>
+          <a:xfrm>
+            <a:off x="1417320" y="4526280"/>
+            <a:ext cx="10241280" cy="777240"/>
+          </a:xfrm>
+          <a:prstGeom prst="rect">
+            <a:avLst/>
+          </a:prstGeom>
+          <a:noFill/>
+        </p:spPr>
+        <p:txBody>
+          <a:bodyPr wrap="square" anchor="ctr">
+            <a:spAutoFit/>
+          </a:bodyPr>
+          <a:lstStyle/>
+          <a:p>
+            <a:pPr algn="l"/>
+            <a:r>
+              <a:rPr sz="1600" b="0" i="0" dirty="0">
+                <a:solidFill>
+                  <a:srgbClr val="1A1A1A"/>
+                </a:solidFill>
+                <a:latin typeface="Calibri"/>
+              </a:rPr>
+              <a:t>High precision (0.70), low recall (0.36) — choose the algorithm that matches your cost structure.</a:t>
+            </a:r>
+          </a:p>
+        </p:txBody>
+      </p:sp>
+      <p:sp>
+        <p:nvSpPr>
+          <p:cNvPr id="19" name="Oval 18"/>
+          <p:cNvSpPr/>
+          <p:nvPr/>
+        </p:nvSpPr>
+        <p:spPr>
+          <a:xfrm>
+            <a:off x="640080" y="5394960"/>
+            <a:ext cx="548640" cy="548640"/>
+          </a:xfrm>
+          <a:prstGeom prst="ellipse">
+            <a:avLst/>
+          </a:prstGeom>
+          <a:solidFill>
+            <a:srgbClr val="DD8452"/>
+          </a:solidFill>
+          <a:ln>
+            <a:noFill/>
+          </a:ln>
+        </p:spPr>
+        <p:style>
+          <a:lnRef idx="1">
+            <a:schemeClr val="accent1"/>
+          </a:lnRef>
+          <a:fillRef idx="3">
+            <a:schemeClr val="accent1"/>
+          </a:fillRef>
+          <a:effectRef idx="2">
+            <a:schemeClr val="accent1"/>
+          </a:effectRef>
+          <a:fontRef idx="minor">
+            <a:schemeClr val="lt1"/>
+          </a:fontRef>
+        </p:style>
+        <p:txBody>
+          <a:bodyPr rtlCol="0" anchor="ctr"/>
+          <a:lstStyle/>
+          <a:p>
+            <a:pPr algn="ctr"/>
+            <a:endParaRPr/>
+          </a:p>
+        </p:txBody>
+      </p:sp>
+      <p:sp>
+        <p:nvSpPr>
+          <p:cNvPr id="20" name="TextBox 19"/>
+          <p:cNvSpPr txBox="1"/>
+          <p:nvPr/>
+        </p:nvSpPr>
+        <p:spPr>
+          <a:xfrm>
+            <a:off x="640080" y="5394960"/>
+            <a:ext cx="548640" cy="548640"/>
+          </a:xfrm>
+          <a:prstGeom prst="rect">
+            <a:avLst/>
+          </a:prstGeom>
+          <a:noFill/>
+        </p:spPr>
+        <p:txBody>
+          <a:bodyPr wrap="square" anchor="ctr">
+            <a:spAutoFit/>
+          </a:bodyPr>
+          <a:lstStyle/>
+          <a:p>
+            <a:pPr algn="ctr"/>
+            <a:r>
+              <a:rPr sz="2000" b="1" i="0">
+                <a:solidFill>
+                  <a:srgbClr val="FFFFFF"/>
+                </a:solidFill>
+                <a:latin typeface="Calibri"/>
+              </a:rPr>
+              <a:t>5</a:t>
+            </a:r>
+          </a:p>
+        </p:txBody>
+      </p:sp>
+      <p:sp>
+        <p:nvSpPr>
+          <p:cNvPr id="21" name="TextBox 20"/>
+          <p:cNvSpPr txBox="1"/>
+          <p:nvPr/>
+        </p:nvSpPr>
+        <p:spPr>
+          <a:xfrm>
+            <a:off x="1417320" y="5303520"/>
+            <a:ext cx="10241280" cy="777240"/>
+          </a:xfrm>
+          <a:prstGeom prst="rect">
+            <a:avLst/>
+          </a:prstGeom>
+          <a:noFill/>
+        </p:spPr>
+        <p:txBody>
+          <a:bodyPr wrap="square" anchor="ctr">
+            <a:spAutoFit/>
+          </a:bodyPr>
+          <a:lstStyle/>
+          <a:p>
+            <a:pPr algn="l"/>
+            <a:r>
+              <a:rPr sz="1600" b="0" i="0" dirty="0">
+                <a:solidFill>
+                  <a:srgbClr val="1A1A1A"/>
+                </a:solidFill>
+                <a:latin typeface="Calibri"/>
+              </a:rPr>
+              <a:t>The biggest improvements aren’t in tuning more k values. They are in handling imbalance, removing redundant features, and using a clean validation protocol.</a:t>
+            </a:r>
+          </a:p>
+        </p:txBody>
+      </p:sp>
+      <p:sp>
+        <p:nvSpPr>
+          <p:cNvPr id="22" name="TextBox 21"/>
+          <p:cNvSpPr txBox="1"/>
+          <p:nvPr/>
+        </p:nvSpPr>
+        <p:spPr>
+          <a:xfrm>
+            <a:off x="457200" y="6492240"/>
+            <a:ext cx="7315200" cy="246221"/>
+          </a:xfrm>
+          <a:prstGeom prst="rect">
+            <a:avLst/>
+          </a:prstGeom>
+          <a:noFill/>
+        </p:spPr>
+        <p:txBody>
+          <a:bodyPr wrap="square" anchor="t">
+            <a:spAutoFit/>
+          </a:bodyPr>
+          <a:lstStyle/>
+          <a:p>
+            <a:pPr algn="l"/>
+            <a:r>
+              <a:rPr sz="1000" b="0" i="0" dirty="0">
+                <a:solidFill>
+                  <a:srgbClr val="556070"/>
+                </a:solidFill>
+                <a:latin typeface="Calibri"/>
+              </a:rPr>
+              <a:t>Online Shoppers Purchase-Intention Capstone  |  </a:t>
+            </a:r>
+            <a:r>
+              <a:rPr sz="1000" b="0" i="0" dirty="0" err="1">
+                <a:solidFill>
+                  <a:srgbClr val="556070"/>
+                </a:solidFill>
+                <a:latin typeface="Calibri"/>
+              </a:rPr>
+              <a:t>kNN</a:t>
+            </a:r>
+            <a:endParaRPr sz="1000" b="0" i="0" dirty="0">
+              <a:solidFill>
+                <a:srgbClr val="556070"/>
+              </a:solidFill>
+              <a:latin typeface="Calibri"/>
+            </a:endParaRPr>
+          </a:p>
+        </p:txBody>
+      </p:sp>
+      <p:sp>
+        <p:nvSpPr>
+          <p:cNvPr id="23" name="TextBox 22"/>
+          <p:cNvSpPr txBox="1"/>
+          <p:nvPr/>
+        </p:nvSpPr>
+        <p:spPr>
+          <a:xfrm>
+            <a:off x="10515600" y="6492240"/>
+            <a:ext cx="1188720" cy="274320"/>
+          </a:xfrm>
+          <a:prstGeom prst="rect">
+            <a:avLst/>
+          </a:prstGeom>
+          <a:noFill/>
+        </p:spPr>
+        <p:txBody>
+          <a:bodyPr wrap="square" anchor="t">
+            <a:spAutoFit/>
+          </a:bodyPr>
+          <a:lstStyle/>
+          <a:p>
+            <a:pPr algn="r"/>
+            <a:r>
+              <a:rPr sz="1000" b="0" i="0">
+                <a:solidFill>
+                  <a:srgbClr val="556070"/>
+                </a:solidFill>
+                <a:latin typeface="Calibri"/>
+              </a:rPr>
+              <a:t>Slide 20</a:t>
+            </a:r>
+          </a:p>
+        </p:txBody>
+      </p:sp>
+    </p:spTree>
+  </p:cSld>
+  <p:clrMapOvr>
+    <a:masterClrMapping/>
+  </p:clrMapOvr>
+</p:sld>
+</file>
+
+<file path=ppt/slides/slide22.xml><?xml version="1.0" encoding="utf-8"?>
 <p:sld xmlns:a="http://schemas.openxmlformats.org/drawingml/2006/main" xmlns:r="http://schemas.openxmlformats.org/officeDocument/2006/relationships" xmlns:p="http://schemas.openxmlformats.org/presentationml/2006/main">
   <p:cSld>
     <p:spTree>
